--- a/GenAI/wk4-embedding-vectorDB-SemanticSearch/RAG-1-compare-with-FineTuning.pptx
+++ b/GenAI/wk4-embedding-vectorDB-SemanticSearch/RAG-1-compare-with-FineTuning.pptx
@@ -5,19 +5,20 @@
     <p:sldMasterId id="2147483648" r:id="rId1"/>
   </p:sldMasterIdLst>
   <p:notesMasterIdLst>
-    <p:notesMasterId r:id="rId9"/>
+    <p:notesMasterId r:id="rId10"/>
   </p:notesMasterIdLst>
   <p:handoutMasterIdLst>
-    <p:handoutMasterId r:id="rId10"/>
+    <p:handoutMasterId r:id="rId11"/>
   </p:handoutMasterIdLst>
   <p:sldIdLst>
     <p:sldId id="257" r:id="rId2"/>
     <p:sldId id="281" r:id="rId3"/>
-    <p:sldId id="282" r:id="rId4"/>
-    <p:sldId id="283" r:id="rId5"/>
-    <p:sldId id="284" r:id="rId6"/>
-    <p:sldId id="285" r:id="rId7"/>
-    <p:sldId id="275" r:id="rId8"/>
+    <p:sldId id="286" r:id="rId4"/>
+    <p:sldId id="282" r:id="rId5"/>
+    <p:sldId id="283" r:id="rId6"/>
+    <p:sldId id="284" r:id="rId7"/>
+    <p:sldId id="285" r:id="rId8"/>
+    <p:sldId id="275" r:id="rId9"/>
   </p:sldIdLst>
   <p:sldSz cx="12192000" cy="6858000"/>
   <p:notesSz cx="6858000" cy="9144000"/>
@@ -221,7 +222,7 @@
           <a:p>
             <a:fld id="{7BAEECA8-D063-486F-AE31-5020270C1449}" type="datetimeFigureOut">
               <a:rPr lang="en-US" smtClean="0"/>
-              <a:t>4/23/2026</a:t>
+              <a:t>5/21/2026</a:t>
             </a:fld>
             <a:endParaRPr lang="en-US"/>
           </a:p>
@@ -388,6 +389,762 @@
           <inkml:channelProperty channel="F" name="resolution" value="0" units="1/dev"/>
         </inkml:channelProperties>
       </inkml:inkSource>
+      <inkml:timestamp xml:id="ts0" timeString="2026-03-26T06:34:15.345"/>
+    </inkml:context>
+    <inkml:brush xml:id="br0">
+      <inkml:brushProperty name="width" value="0.1" units="cm"/>
+      <inkml:brushProperty name="height" value="0.1" units="cm"/>
+      <inkml:brushProperty name="color" value="#FFC114"/>
+    </inkml:brush>
+  </inkml:definitions>
+  <inkml:trace contextRef="#ctx0" brushRef="#br0">1 8 24575,'0'-8'0,"0"11"0,8 17 0,3-6 0,0 0 0,1 0 0,0-1 0,2-1 0,-1 0 0,1-1 0,19 11 0,-12-7 0,0 1 0,24 24 0,-44-39-34,0-1 0,0 1 0,-1 0 0,1-1 0,0 1-1,0 0 1,-1 0 0,1-1 0,0 1 0,-1 0 0,1 0 0,-1 0 0,1 0-1,-1 0 1,0 0 0,1 0 0,-1 0 0,0 0 0,0 0 0,1 0-1,-1 0 1,0 0 0,0 0 0,0 0 0,0 0 0,0 0 0,-1 0 0,1 0-1,0 0 1,0 0 0,-1 0 0,1-1 0,0 1 0,-1 0 0,1 0 0,-1 0-1,1 0 1,-1 0 0,-1 1 0</inkml:trace>
+</inkml:ink>
+</file>
+
+<file path=ppt/ink/ink101.xml><?xml version="1.0" encoding="utf-8"?>
+<inkml:ink xmlns:inkml="http://www.w3.org/2003/InkML">
+  <inkml:definitions>
+    <inkml:context xml:id="ctx0">
+      <inkml:inkSource xml:id="inkSrc0">
+        <inkml:traceFormat>
+          <inkml:channel name="X" type="integer" min="-2.14748E9" max="2.14748E9" units="cm"/>
+          <inkml:channel name="Y" type="integer" min="-2.14748E9" max="2.14748E9" units="cm"/>
+          <inkml:channel name="F" type="integer" max="32767" units="dev"/>
+        </inkml:traceFormat>
+        <inkml:channelProperties>
+          <inkml:channelProperty channel="X" name="resolution" value="1000" units="1/cm"/>
+          <inkml:channelProperty channel="Y" name="resolution" value="1000" units="1/cm"/>
+          <inkml:channelProperty channel="F" name="resolution" value="0" units="1/dev"/>
+        </inkml:channelProperties>
+      </inkml:inkSource>
+      <inkml:timestamp xml:id="ts0" timeString="2026-03-26T06:34:15.346"/>
+    </inkml:context>
+    <inkml:brush xml:id="br0">
+      <inkml:brushProperty name="width" value="0.1" units="cm"/>
+      <inkml:brushProperty name="height" value="0.1" units="cm"/>
+      <inkml:brushProperty name="color" value="#FFC114"/>
+    </inkml:brush>
+  </inkml:definitions>
+  <inkml:trace contextRef="#ctx0" brushRef="#br0">317 240 24575,'-8'-2'0,"1"0"0,-1-1 0,1 0 0,-1 0 0,1 0 0,0-1 0,0 0 0,1-1 0,-1 0 0,1 0 0,0 0 0,-6-7 0,-4-2 0,-66-47 0,-24-19 0,105 79-91,-1-1 0,1 1 0,-1-1 0,1 1 0,-1-1 0,1 0 0,0 0 0,0 0 0,0 1 0,0-1 0,0 0 0,1 0 0,-1 0 0,0-3 0</inkml:trace>
+</inkml:ink>
+</file>
+
+<file path=ppt/ink/ink102.xml><?xml version="1.0" encoding="utf-8"?>
+<inkml:ink xmlns:inkml="http://www.w3.org/2003/InkML">
+  <inkml:definitions>
+    <inkml:context xml:id="ctx0">
+      <inkml:inkSource xml:id="inkSrc0">
+        <inkml:traceFormat>
+          <inkml:channel name="X" type="integer" min="-2.14748E9" max="2.14748E9" units="cm"/>
+          <inkml:channel name="Y" type="integer" min="-2.14748E9" max="2.14748E9" units="cm"/>
+          <inkml:channel name="F" type="integer" max="32767" units="dev"/>
+        </inkml:traceFormat>
+        <inkml:channelProperties>
+          <inkml:channelProperty channel="X" name="resolution" value="1000" units="1/cm"/>
+          <inkml:channelProperty channel="Y" name="resolution" value="1000" units="1/cm"/>
+          <inkml:channelProperty channel="F" name="resolution" value="0" units="1/dev"/>
+        </inkml:channelProperties>
+      </inkml:inkSource>
+      <inkml:timestamp xml:id="ts0" timeString="2026-03-26T06:34:15.347"/>
+    </inkml:context>
+    <inkml:brush xml:id="br0">
+      <inkml:brushProperty name="width" value="0.1" units="cm"/>
+      <inkml:brushProperty name="height" value="0.1" units="cm"/>
+      <inkml:brushProperty name="color" value="#FFC114"/>
+    </inkml:brush>
+  </inkml:definitions>
+  <inkml:trace contextRef="#ctx0" brushRef="#br0">504 1 24575,'-12'1'0,"-1"0"0,0 1 0,1 0 0,0 1 0,-1 0 0,1 1 0,1 0 0,-20 11 0,-9 7 0,-40 31 0,23-15 0,-122 94-1365,160-120-5461</inkml:trace>
+</inkml:ink>
+</file>
+
+<file path=ppt/ink/ink103.xml><?xml version="1.0" encoding="utf-8"?>
+<inkml:ink xmlns:inkml="http://www.w3.org/2003/InkML">
+  <inkml:definitions>
+    <inkml:context xml:id="ctx0">
+      <inkml:inkSource xml:id="inkSrc0">
+        <inkml:traceFormat>
+          <inkml:channel name="X" type="integer" min="-2.14748E9" max="2.14748E9" units="cm"/>
+          <inkml:channel name="Y" type="integer" min="-2.14748E9" max="2.14748E9" units="cm"/>
+          <inkml:channel name="F" type="integer" max="32767" units="dev"/>
+        </inkml:traceFormat>
+        <inkml:channelProperties>
+          <inkml:channelProperty channel="X" name="resolution" value="1000" units="1/cm"/>
+          <inkml:channelProperty channel="Y" name="resolution" value="1000" units="1/cm"/>
+          <inkml:channelProperty channel="F" name="resolution" value="0" units="1/dev"/>
+        </inkml:channelProperties>
+      </inkml:inkSource>
+      <inkml:timestamp xml:id="ts0" timeString="2026-03-26T06:34:15.348"/>
+    </inkml:context>
+    <inkml:brush xml:id="br0">
+      <inkml:brushProperty name="width" value="0.1" units="cm"/>
+      <inkml:brushProperty name="height" value="0.1" units="cm"/>
+      <inkml:brushProperty name="color" value="#FFC114"/>
+    </inkml:brush>
+  </inkml:definitions>
+  <inkml:trace contextRef="#ctx0" brushRef="#br0">244 64 24575,'-7'-7'0,"0"0"0,-1 0 0,0 1 0,0 0 0,0 0 0,-1 1 0,1 0 0,-15-5 0,19 9 0,0 0 0,0 0 0,0 0 0,0 1 0,0-1 0,0 1 0,0 0 0,0 0 0,0 1 0,0-1 0,1 1 0,-1 0 0,0 0 0,0 0 0,0 0 0,1 1 0,-1 0 0,1 0 0,-1 0 0,1 0 0,0 0 0,-1 0 0,1 1 0,-3 3 0,0 0 0,1-1 0,0 1 0,0 0 0,0 1 0,1-1 0,0 1 0,0-1 0,1 1 0,-1 1 0,2-1 0,-1 0 0,-2 13 0,5-17 0,-1 0 0,1 0 0,0 0 0,0 0 0,0 0 0,1 0 0,-1 1 0,1-1 0,0 0 0,-1 0 0,1 0 0,1-1 0,-1 1 0,0 0 0,1 0 0,-1-1 0,1 1 0,0 0 0,0-1 0,0 0 0,0 1 0,0-1 0,1 0 0,-1 0 0,1 0 0,-1-1 0,1 1 0,0-1 0,-1 1 0,1-1 0,0 0 0,0 0 0,4 1 0,1 0 0,1 0 0,-1 0 0,0-1 0,1 0 0,-1-1 0,1 0 0,-1 0 0,1 0 0,-1-1 0,0-1 0,1 0 0,-1 0 0,9-3 0,-12 3 0,-1 0 0,1 0 0,-1 0 0,1 0 0,-1-1 0,0 0 0,0 0 0,0 0 0,0 0 0,-1-1 0,1 1 0,-1-1 0,0 0 0,0 0 0,0 0 0,-1-1 0,1 1 0,-1-1 0,0 1 0,0-1 0,-1 0 0,0 1 0,2-9 0,-3 9 0,0 1 0,1 0 0,-2-1 0,1 1 0,0 0 0,-1-1 0,0 1 0,1 0 0,-1-1 0,0 1 0,-1 0 0,1 0 0,-1 0 0,1 0 0,-1 0 0,0 0 0,0 1 0,0-1 0,0 1 0,-1-1 0,1 1 0,-1 0 0,0 0 0,1 0 0,-1 0 0,0 0 0,0 1 0,0-1 0,0 1 0,0 0 0,-6-2 0,2 1 0,0 0 0,0 1 0,0-1 0,-1 1 0,1 1 0,0 0 0,0 0 0,0 0 0,-1 1 0,1 0 0,0 0 0,0 1 0,0-1 0,-7 5 0,4-1 0,0 1 0,0 0 0,1 1 0,0 0 0,-9 10 0,15-14 0,0 0 0,0 0 0,0 1 0,1-1 0,-1 1 0,1 0 0,-3 6 0,4-8 0,1-1 0,0 1 0,-1-1 0,1 0 0,0 1 0,0-1 0,0 1 0,0-1 0,0 0 0,0 1 0,0-1 0,0 1 0,0-1 0,1 0 0,-1 1 0,1-1 0,-1 0 0,1 1 0,-1-1 0,1 0 0,0 0 0,1 3 0,0-3 0,0 1 0,0-1 0,0 0 0,0 0 0,1 0 0,-1 0 0,0 0 0,0-1 0,1 1 0,-1-1 0,0 1 0,1-1 0,-1 0 0,1 0 0,-1 0 0,0 0 0,1 0 0,-1-1 0,0 1 0,1-1 0,-1 1 0,0-1 0,0 0 0,1 0 0,-1 0 0,0 0 0,2-2 0,3 0 0,0-1 0,0 0 0,-1 0 0,1-1 0,-1 1 0,0-1 0,7-8 0,-13 12 0,1 1 0,-1 0 0,1-1 0,-1 1 0,1-1 0,-1 1 0,1-1 0,-1 0 0,0 1 0,1-1 0,-1 1 0,0-1 0,1 0 0,-1 1 0,0-1 0,0 0 0,0 1 0,0-1 0,0 0 0,1 1 0,-1-1 0,0 0 0,0 1 0,-1-1 0,1 0 0,0 1 0,0-1 0,0 0 0,-1 0 0,-16-2 0,-26 16 0,29 0-1365</inkml:trace>
+</inkml:ink>
+</file>
+
+<file path=ppt/ink/ink104.xml><?xml version="1.0" encoding="utf-8"?>
+<inkml:ink xmlns:inkml="http://www.w3.org/2003/InkML">
+  <inkml:definitions>
+    <inkml:context xml:id="ctx0">
+      <inkml:inkSource xml:id="inkSrc0">
+        <inkml:traceFormat>
+          <inkml:channel name="X" type="integer" min="-2.14748E9" max="2.14748E9" units="cm"/>
+          <inkml:channel name="Y" type="integer" min="-2.14748E9" max="2.14748E9" units="cm"/>
+          <inkml:channel name="F" type="integer" max="32767" units="dev"/>
+        </inkml:traceFormat>
+        <inkml:channelProperties>
+          <inkml:channelProperty channel="X" name="resolution" value="1000" units="1/cm"/>
+          <inkml:channelProperty channel="Y" name="resolution" value="1000" units="1/cm"/>
+          <inkml:channelProperty channel="F" name="resolution" value="0" units="1/dev"/>
+        </inkml:channelProperties>
+      </inkml:inkSource>
+      <inkml:timestamp xml:id="ts0" timeString="2026-03-26T06:34:15.349"/>
+    </inkml:context>
+    <inkml:brush xml:id="br0">
+      <inkml:brushProperty name="width" value="0.1" units="cm"/>
+      <inkml:brushProperty name="height" value="0.1" units="cm"/>
+      <inkml:brushProperty name="color" value="#FFC114"/>
+    </inkml:brush>
+  </inkml:definitions>
+  <inkml:trace contextRef="#ctx0" brushRef="#br0">248 25 24575,'-3'-3'0,"-1"1"0,0-1 0,1 1 0,-1 0 0,0 0 0,0 0 0,-1 0 0,1 1 0,0-1 0,-1 1 0,1 0 0,0 0 0,-1 1 0,1 0 0,-1-1 0,1 2 0,-1-1 0,1 0 0,-1 1 0,1 0 0,-6 1 0,1 0 0,1 1 0,0 0 0,0 0 0,0 1 0,0 0 0,0 0 0,1 1 0,0 0 0,0 0 0,-6 7 0,7-6 0,0 1 0,0-1 0,1 2 0,0-1 0,1 0 0,-1 1 0,1 0 0,1 0 0,0 0 0,0 0 0,0 0 0,-1 13 0,3-18 0,1 0 0,0 1 0,0-1 0,0 0 0,0 1 0,1-1 0,-1 0 0,1 0 0,0 1 0,0-1 0,0 0 0,0 0 0,1 0 0,-1 0 0,1 0 0,0 0 0,0 0 0,0-1 0,0 1 0,0-1 0,0 1 0,1-1 0,-1 0 0,1 0 0,0 0 0,-1 0 0,1-1 0,0 1 0,0-1 0,0 1 0,0-1 0,1 0 0,-1 0 0,0-1 0,5 2 0,2 0 0,1-1 0,-1 1 0,0-2 0,0 0 0,1 0 0,-1 0 0,0-1 0,0-1 0,0 0 0,0 0 0,17-7 0,-23 8 0,-1-1 0,1 0 0,0 0 0,-1 0 0,1 0 0,-1-1 0,0 1 0,1-1 0,-1 0 0,0 0 0,-1 0 0,1 0 0,-1 0 0,1-1 0,-1 1 0,0-1 0,0 0 0,0 1 0,-1-1 0,1 0 0,-1 0 0,0 0 0,0 0 0,-1 0 0,1-1 0,-1 1 0,0 0 0,0 0 0,0 0 0,0 0 0,-2-7 0,1 9 0,1 0 0,-1-1 0,1 1 0,-1-1 0,0 1 0,0 0 0,0-1 0,0 1 0,-1 0 0,1 0 0,0 0 0,-1 0 0,0 0 0,1 0 0,-1 0 0,0 1 0,0-1 0,0 0 0,0 1 0,0 0 0,0-1 0,-1 1 0,-4-2 0,3 2 0,0 0 0,0 1 0,-1-1 0,1 1 0,0 0 0,-1 0 0,1 0 0,-1 0 0,1 1 0,0 0 0,0 0 0,-1 0 0,-4 2 0,4-1 0,1 0 0,-1 0 0,1 1 0,-1-1 0,1 1 0,0 0 0,0 0 0,0 0 0,0 1 0,1 0 0,-6 6 0,7-7 0,1-1 0,-1 0 0,1 1 0,0 0 0,0-1 0,0 1 0,0 0 0,0-1 0,1 1 0,-1 0 0,1 0 0,0 0 0,-1 0 0,1 0 0,1-1 0,-1 1 0,0 0 0,1 0 0,-1 0 0,1-1 0,1 5 0,-1-6 0,-1 1 0,1-1 0,-1 0 0,1 0 0,0 1 0,-1-1 0,1 0 0,0 0 0,0 0 0,0 0 0,0 0 0,0 0 0,0 0 0,0 0 0,0 0 0,0-1 0,0 1 0,0 0 0,1-1 0,-1 1 0,0-1 0,1 1 0,-1-1 0,0 0 0,2 1 0,0-1 0,-1 0 0,1-1 0,-1 1 0,1-1 0,-1 1 0,1-1 0,-1 0 0,0 0 0,1 0 0,-1 0 0,0 0 0,0 0 0,2-2 0,0 0 0,0 0 0,0 0 0,-1 0 0,1 0 0,-1-1 0,0 1 0,0-1 0,0 0 0,-1 0 0,1 0 0,-1 0 0,0-1 0,0 1 0,2-8 0,-4 12 0,0-1 0,0 0 0,0 0 0,0 1 0,0-1 0,0 0 0,0 0 0,0 1 0,0-1 0,0 0 0,-1 0 0,1 1 0,0-1 0,0 0 0,-1 1 0,1-1 0,-1 0 0,1 1 0,-1-1 0,1 0 0,-1 1 0,1-1 0,-1 1 0,1-1 0,-1 1 0,0-1 0,1 1 0,-1 0 0,0-1 0,1 1 0,-1 0 0,0-1 0,1 1 0,-1 0 0,0 0 0,0 0 0,-2-1 0,0 1 0,0 0 0,1 0 0,-1 0 0,0 1 0,1-1 0,-1 1 0,0-1 0,1 1 0,-6 2 0,6-2 0,1-1 0,-1 1 0,0 0 0,0 0 0,1 0 0,-1 0 0,0 1 0,1-1 0,0 0 0,-1 1 0,1-1 0,0 1 0,-1-1 0,0 3 0,2-3 0,-1 0 0,1 0 0,0 0 0,0-1 0,0 1 0,0 0 0,0 0 0,0 0 0,0-1 0,0 1 0,1 0 0,-1 0 0,0 0 0,0-1 0,1 1 0,-1 0 0,0 0 0,1-1 0,-1 1 0,1 0 0,-1-1 0,1 1 0,-1 0 0,1-1 0,0 1 0,-1-1 0,1 1 0,-1-1 0,1 1 0,0-1 0,0 1 0,-1-1 0,1 0 0,0 1 0,1-1 0,0 1 0,1 0 0,-1 0 0,0 0 0,1 0 0,-1-1 0,1 1 0,-1-1 0,1 1 0,-1-1 0,1 0 0,-1 0 0,1 0 0,-1-1 0,1 1 0,-1-1 0,1 1 0,-1-1 0,5-1 0,-7 1-25,0 1-1,0 0 0,0 0 1,0-1-1,1 1 0,-1 0 1,0 0-1,0-1 0,0 1 1,0 0-1,0-1 0,0 1 0,0 0 1,0 0-1,0-1 0,0 1 1,0 0-1,-1 0 0,1-1 1,0 1-1,0 0 0,0 0 1,0-1-1,0 1 0,0 0 1,0 0-1,-1-1 0,1 1 1,0 0-1,0 0 0,0 0 1,-1-1-1,1 1 0,0 0 1,0 0-1,-1 0 0,1 0 1,0 0-1,0-1 0,-1 1 1,1 0-1,0 0 0,0 0 1,-1 0-1,1 0 0,0 0 1,-1 0-1,1 0 0,0 0 1,0 0-1,-1 0 0</inkml:trace>
+</inkml:ink>
+</file>
+
+<file path=ppt/ink/ink105.xml><?xml version="1.0" encoding="utf-8"?>
+<inkml:ink xmlns:inkml="http://www.w3.org/2003/InkML">
+  <inkml:definitions>
+    <inkml:context xml:id="ctx0">
+      <inkml:inkSource xml:id="inkSrc0">
+        <inkml:traceFormat>
+          <inkml:channel name="X" type="integer" min="-2.14748E9" max="2.14748E9" units="cm"/>
+          <inkml:channel name="Y" type="integer" min="-2.14748E9" max="2.14748E9" units="cm"/>
+          <inkml:channel name="F" type="integer" max="32767" units="dev"/>
+        </inkml:traceFormat>
+        <inkml:channelProperties>
+          <inkml:channelProperty channel="X" name="resolution" value="1000" units="1/cm"/>
+          <inkml:channelProperty channel="Y" name="resolution" value="1000" units="1/cm"/>
+          <inkml:channelProperty channel="F" name="resolution" value="0" units="1/dev"/>
+        </inkml:channelProperties>
+      </inkml:inkSource>
+      <inkml:timestamp xml:id="ts0" timeString="2026-05-21T16:24:42.932"/>
+    </inkml:context>
+    <inkml:brush xml:id="br0">
+      <inkml:brushProperty name="width" value="0.1" units="cm"/>
+      <inkml:brushProperty name="height" value="0.1" units="cm"/>
+      <inkml:brushProperty name="color" value="#FFC114"/>
+    </inkml:brush>
+  </inkml:definitions>
+  <inkml:trace contextRef="#ctx0" brushRef="#br0">1 71 24575,'7'0'0,"1"-1"0,0 0 0,0-1 0,15-5 0,24-4 0,642-37 0,-201 69 0,-448-13-34,10 3 155,-48-11-212,1 0 1,-1 1-1,1-1 0,-1 0 0,0-1 1,1 1-1,-1 0 0,1-1 0,-1 0 1,0 1-1,1-1 0,-1 0 0,0 0 0,0 0 1,4-3-1</inkml:trace>
+</inkml:ink>
+</file>
+
+<file path=ppt/ink/ink106.xml><?xml version="1.0" encoding="utf-8"?>
+<inkml:ink xmlns:inkml="http://www.w3.org/2003/InkML">
+  <inkml:definitions>
+    <inkml:context xml:id="ctx0">
+      <inkml:inkSource xml:id="inkSrc0">
+        <inkml:traceFormat>
+          <inkml:channel name="X" type="integer" min="-2.14748E9" max="2.14748E9" units="cm"/>
+          <inkml:channel name="Y" type="integer" min="-2.14748E9" max="2.14748E9" units="cm"/>
+          <inkml:channel name="F" type="integer" max="32767" units="dev"/>
+        </inkml:traceFormat>
+        <inkml:channelProperties>
+          <inkml:channelProperty channel="X" name="resolution" value="1000" units="1/cm"/>
+          <inkml:channelProperty channel="Y" name="resolution" value="1000" units="1/cm"/>
+          <inkml:channelProperty channel="F" name="resolution" value="0" units="1/dev"/>
+        </inkml:channelProperties>
+      </inkml:inkSource>
+      <inkml:timestamp xml:id="ts0" timeString="2026-05-21T16:24:42.933"/>
+    </inkml:context>
+    <inkml:brush xml:id="br0">
+      <inkml:brushProperty name="width" value="0.1" units="cm"/>
+      <inkml:brushProperty name="height" value="0.1" units="cm"/>
+      <inkml:brushProperty name="color" value="#FFC114"/>
+    </inkml:brush>
+  </inkml:definitions>
+  <inkml:trace contextRef="#ctx0" brushRef="#br0">54 2 24575,'-11'-1'0,"15"1"0,26 2 0,83 26 0,-47-13 0,-1 3 0,79 32 0,-142-50 0,0 1 0,-1 0 0,1-1 0,0 1 0,-1 0 0,1 0 0,-1 0 0,1 0 0,-1 0 0,0 0 0,1 1 0,-1-1 0,0 0 0,0 1 0,0-1 0,0 1 0,0-1 0,0 1 0,0-1 0,1 4 0,-2-4 0,0 1 0,-1-1 0,1 0 0,0 1 0,0-1 0,-1 1 0,1-1 0,-1 0 0,1 1 0,-1-1 0,0 0 0,1 1 0,-1-1 0,0 0 0,0 0 0,0 0 0,0 1 0,0-1 0,-1 1 0,-7 5 0,-1 0 0,1-1 0,-1 0 0,-20 9 0,-245 83 7,160-62-1379,93-28-5454</inkml:trace>
+</inkml:ink>
+</file>
+
+<file path=ppt/ink/ink107.xml><?xml version="1.0" encoding="utf-8"?>
+<inkml:ink xmlns:inkml="http://www.w3.org/2003/InkML">
+  <inkml:definitions>
+    <inkml:context xml:id="ctx0">
+      <inkml:inkSource xml:id="inkSrc0">
+        <inkml:traceFormat>
+          <inkml:channel name="X" type="integer" min="-2.14748E9" max="2.14748E9" units="cm"/>
+          <inkml:channel name="Y" type="integer" min="-2.14748E9" max="2.14748E9" units="cm"/>
+          <inkml:channel name="F" type="integer" max="32767" units="dev"/>
+        </inkml:traceFormat>
+        <inkml:channelProperties>
+          <inkml:channelProperty channel="X" name="resolution" value="1000" units="1/cm"/>
+          <inkml:channelProperty channel="Y" name="resolution" value="1000" units="1/cm"/>
+          <inkml:channelProperty channel="F" name="resolution" value="0" units="1/dev"/>
+        </inkml:channelProperties>
+      </inkml:inkSource>
+      <inkml:timestamp xml:id="ts0" timeString="2026-03-26T06:34:29.130"/>
+    </inkml:context>
+    <inkml:brush xml:id="br0">
+      <inkml:brushProperty name="width" value="0.1" units="cm"/>
+      <inkml:brushProperty name="height" value="0.1" units="cm"/>
+      <inkml:brushProperty name="color" value="#FFC114"/>
+    </inkml:brush>
+  </inkml:definitions>
+  <inkml:trace contextRef="#ctx0" brushRef="#br0">252 0 24575,'-5'1'0,"1"0"0,-1 0 0,1 0 0,0 0 0,-1 1 0,1 0 0,0-1 0,0 2 0,0-1 0,0 0 0,0 1 0,1 0 0,-1-1 0,1 2 0,0-1 0,0 0 0,-4 6 0,-6 8 0,0 1 0,-12 23 0,21-34 0,-8 18 0,1 1 0,1 0 0,1 1 0,2 0 0,-8 49 0,-6 24 0,9-48 0,-5 68 0,10-64 0,6-34 0,0 0 0,2 1 0,0-1 0,8 37 0,-3-28 0,0 44 0,-6-44 0,0 14 0,2-1 0,11 65 0,-4-61 0,2-1 0,3 0 0,1 0 0,3-2 0,1 0 0,2-1 0,43 65 0,2-3 0,72 162 0,-46-84 0,-75-152 0,5 11 0,2-1 0,36 50 0,-36-70-1365</inkml:trace>
+</inkml:ink>
+</file>
+
+<file path=ppt/ink/ink108.xml><?xml version="1.0" encoding="utf-8"?>
+<inkml:ink xmlns:inkml="http://www.w3.org/2003/InkML">
+  <inkml:definitions>
+    <inkml:context xml:id="ctx0">
+      <inkml:inkSource xml:id="inkSrc0">
+        <inkml:traceFormat>
+          <inkml:channel name="X" type="integer" min="-2.14748E9" max="2.14748E9" units="cm"/>
+          <inkml:channel name="Y" type="integer" min="-2.14748E9" max="2.14748E9" units="cm"/>
+          <inkml:channel name="F" type="integer" max="32767" units="dev"/>
+        </inkml:traceFormat>
+        <inkml:channelProperties>
+          <inkml:channelProperty channel="X" name="resolution" value="1000" units="1/cm"/>
+          <inkml:channelProperty channel="Y" name="resolution" value="1000" units="1/cm"/>
+          <inkml:channelProperty channel="F" name="resolution" value="0" units="1/dev"/>
+        </inkml:channelProperties>
+      </inkml:inkSource>
+      <inkml:timestamp xml:id="ts0" timeString="2026-03-26T06:34:29.131"/>
+    </inkml:context>
+    <inkml:brush xml:id="br0">
+      <inkml:brushProperty name="width" value="0.1" units="cm"/>
+      <inkml:brushProperty name="height" value="0.1" units="cm"/>
+      <inkml:brushProperty name="color" value="#FFC114"/>
+    </inkml:brush>
+  </inkml:definitions>
+  <inkml:trace contextRef="#ctx0" brushRef="#br0">9 263 24575,'-5'-20'0,"1"-4"0,8 21 0,9 10 0,91 89 0,-74-65 0,58 45 0,-74-66 0,4 4 0,1-1 0,0 0 0,0-2 0,35 15 0,-50-24 0,1 0 0,0-1 0,0 0 0,-1 0 0,1 0 0,0 0 0,0-1 0,0 1 0,0-1 0,0-1 0,0 1 0,0-1 0,0 0 0,0 0 0,-1 0 0,1 0 0,0-1 0,-1 0 0,1 0 0,-1 0 0,1-1 0,-1 0 0,0 1 0,0-2 0,0 1 0,6-7 0,17-23 0,-2-2 0,-1-1 0,36-73 0,-2 3 0,-48 91-195,-1-2 0,0 1 0,-1-1 0,-1 0 0,-1-1 0,5-22 0,-7 16-6631</inkml:trace>
+</inkml:ink>
+</file>
+
+<file path=ppt/ink/ink109.xml><?xml version="1.0" encoding="utf-8"?>
+<inkml:ink xmlns:inkml="http://www.w3.org/2003/InkML">
+  <inkml:definitions>
+    <inkml:context xml:id="ctx0">
+      <inkml:inkSource xml:id="inkSrc0">
+        <inkml:traceFormat>
+          <inkml:channel name="X" type="integer" min="-2.14748E9" max="2.14748E9" units="cm"/>
+          <inkml:channel name="Y" type="integer" min="-2.14748E9" max="2.14748E9" units="cm"/>
+          <inkml:channel name="F" type="integer" max="32767" units="dev"/>
+        </inkml:traceFormat>
+        <inkml:channelProperties>
+          <inkml:channelProperty channel="X" name="resolution" value="1000" units="1/cm"/>
+          <inkml:channelProperty channel="Y" name="resolution" value="1000" units="1/cm"/>
+          <inkml:channelProperty channel="F" name="resolution" value="0" units="1/dev"/>
+        </inkml:channelProperties>
+      </inkml:inkSource>
+      <inkml:timestamp xml:id="ts0" timeString="2026-03-26T06:34:29.132"/>
+    </inkml:context>
+    <inkml:brush xml:id="br0">
+      <inkml:brushProperty name="width" value="0.1" units="cm"/>
+      <inkml:brushProperty name="height" value="0.1" units="cm"/>
+      <inkml:brushProperty name="color" value="#FFC114"/>
+    </inkml:brush>
+  </inkml:definitions>
+  <inkml:trace contextRef="#ctx0" brushRef="#br0">2 32 24575,'-1'-14'0,"1"-4"0,6 28 0,1 17 0,-1 1 0,-2 0 0,0 1 0,-1 33 0,-1-22 0,8 49 0,0-16 0,-5-64-1365</inkml:trace>
+</inkml:ink>
+</file>
+
+<file path=ppt/ink/ink11.xml><?xml version="1.0" encoding="utf-8"?>
+<inkml:ink xmlns:inkml="http://www.w3.org/2003/InkML">
+  <inkml:definitions>
+    <inkml:context xml:id="ctx0">
+      <inkml:inkSource xml:id="inkSrc0">
+        <inkml:traceFormat>
+          <inkml:channel name="X" type="integer" min="-2.14748E9" max="2.14748E9" units="cm"/>
+          <inkml:channel name="Y" type="integer" min="-2.14748E9" max="2.14748E9" units="cm"/>
+          <inkml:channel name="F" type="integer" max="32767" units="dev"/>
+        </inkml:traceFormat>
+        <inkml:channelProperties>
+          <inkml:channelProperty channel="X" name="resolution" value="1000" units="1/cm"/>
+          <inkml:channelProperty channel="Y" name="resolution" value="1000" units="1/cm"/>
+          <inkml:channelProperty channel="F" name="resolution" value="0" units="1/dev"/>
+        </inkml:channelProperties>
+      </inkml:inkSource>
+      <inkml:timestamp xml:id="ts0" timeString="2026-03-26T06:31:45.302"/>
+    </inkml:context>
+    <inkml:brush xml:id="br0">
+      <inkml:brushProperty name="width" value="0.1" units="cm"/>
+      <inkml:brushProperty name="height" value="0.1" units="cm"/>
+      <inkml:brushProperty name="color" value="#FFC114"/>
+    </inkml:brush>
+  </inkml:definitions>
+  <inkml:trace contextRef="#ctx0" brushRef="#br0">26 2346 24575,'-1'0'0,"0"0"0,1 0 0,-1 1 0,0-1 0,0 0 0,0 0 0,0 0 0,0-1 0,0 1 0,0 0 0,0 0 0,1 0 0,-1-1 0,0 1 0,0 0 0,0-1 0,1 1 0,-1-1 0,0 1 0,0-1 0,1 1 0,-1-1 0,0 0 0,1 1 0,-1-1 0,0 0 0,1 1 0,-1-1 0,1 0 0,0 0 0,-1 0 0,1 1 0,0-1 0,-1 0 0,1 0 0,0 0 0,0 0 0,-1 0 0,1 0 0,0 1 0,0-1 0,0 0 0,0 0 0,1 0 0,-1 0 0,0 0 0,0 0 0,0 0 0,1 1 0,-1-1 0,0 0 0,1 0 0,-1 0 0,1 1 0,-1-1 0,1 0 0,-1 0 0,2 0 0,2-6 0,0 0 0,0 1 0,1 0 0,0 0 0,9-8 0,15-11 0,-1-1 0,-1-1 0,-2-1 0,0-2 0,-2 0 0,-1-1 0,28-56 0,-22 25 0,-2-1 0,26-106 0,2-12 0,-47 149 0,-1 6 0,-1-2 0,0 1 0,-1-36 0,-2 31 0,11-60 0,-4 37 0,11-64 0,-8 52 0,-2 0 0,0-86 0,-9 19 0,-4-113 0,-21 95 0,22 138 0,-1 0 0,0 0 0,-1 0 0,0 1 0,-13-26 0,16 37 0,0 0 0,0 0 0,0 0 0,0 0 0,-1 0 0,1 0 0,-1 0 0,1 1 0,-1-1 0,0 1 0,0-1 0,0 1 0,0-1 0,0 1 0,0 0 0,0 0 0,0 0 0,0 0 0,-1 0 0,1 1 0,0-1 0,0 1 0,-1-1 0,1 1 0,-1 0 0,1 0 0,0 0 0,-1 0 0,1 0 0,0 1 0,-1-1 0,1 1 0,0 0 0,0-1 0,-1 1 0,1 0 0,0 0 0,0 0 0,0 1 0,0-1 0,0 0 0,-3 4 0,-31 23 0,0 2 0,-41 46 0,38-37 0,-45 36 0,82-75 0,5-7 0,12-19 0,23-32 0,-22 35 0,0 1 0,2 1 0,1 0 0,0 1 0,2 1 0,0 1 0,1 1 0,1 1 0,0 1 0,41-19 0,-58 31 0,0 0 0,0 1 0,1 0 0,-1 0 0,1 0 0,-1 1 0,1 0 0,0 0 0,0 1 0,-1 0 0,1 0 0,0 0 0,-1 1 0,1 0 0,0 1 0,-1-1 0,1 1 0,-1 0 0,0 1 0,0 0 0,12 6 0,210 94 0,-202-90 120,-26-13-143,1 1 1,-1-1-1,0 0 1,1 0-1,-1 0 1,0 1-1,1-1 1,-1 0-1,0 0 1,0 1-1,1-1 1,-1 0-1,0 0 1,0 1-1,1-1 1,-1 0-1,0 1 1,0-1-1,0 0 1,0 1-1,1-1 1,-1 1-1,0-1 1,0 0-1,0 1 1,0-1-1,0 0 1,0 1-1,0-1 1,0 1-1,0-1 1,0 0-1,0 1 1,0-1-1,-1 1 1,1-1-1,0 0 1,0 1-1,0-1 1,0 0-1,-1 1 1,1-1-1,0 0 1,0 1-1,0-1 1,-1 0-1,1 0 1,0 1-1,-1-1 1,1 0-1,0 0 1,-1 0-1,1 1 1,0-1-1,-1 0 1,1 0-1,0 0 1,-1 0-1,1 0 1,0 1-1,-1-1 1,1 0-1,-1 0 1,1 0-1,-1 0 1</inkml:trace>
+</inkml:ink>
+</file>
+
+<file path=ppt/ink/ink110.xml><?xml version="1.0" encoding="utf-8"?>
+<inkml:ink xmlns:inkml="http://www.w3.org/2003/InkML">
+  <inkml:definitions>
+    <inkml:context xml:id="ctx0">
+      <inkml:inkSource xml:id="inkSrc0">
+        <inkml:traceFormat>
+          <inkml:channel name="X" type="integer" min="-2.14748E9" max="2.14748E9" units="cm"/>
+          <inkml:channel name="Y" type="integer" min="-2.14748E9" max="2.14748E9" units="cm"/>
+          <inkml:channel name="F" type="integer" max="32767" units="dev"/>
+        </inkml:traceFormat>
+        <inkml:channelProperties>
+          <inkml:channelProperty channel="X" name="resolution" value="1000" units="1/cm"/>
+          <inkml:channelProperty channel="Y" name="resolution" value="1000" units="1/cm"/>
+          <inkml:channelProperty channel="F" name="resolution" value="0" units="1/dev"/>
+        </inkml:channelProperties>
+      </inkml:inkSource>
+      <inkml:timestamp xml:id="ts0" timeString="2026-03-26T06:34:29.133"/>
+    </inkml:context>
+    <inkml:brush xml:id="br0">
+      <inkml:brushProperty name="width" value="0.1" units="cm"/>
+      <inkml:brushProperty name="height" value="0.1" units="cm"/>
+      <inkml:brushProperty name="color" value="#FFC114"/>
+    </inkml:brush>
+  </inkml:definitions>
+  <inkml:trace contextRef="#ctx0" brushRef="#br0">611 51 24575,'-6'-5'0,"1"0"0,-1 0 0,-1 1 0,1-1 0,0 1 0,-1 1 0,0-1 0,0 1 0,0 1 0,0-1 0,-1 1 0,1 0 0,-1 1 0,1-1 0,-11 1 0,6 1 0,-1 1 0,1 0 0,-1 1 0,1 1 0,0 0 0,0 0 0,0 1 0,-19 9 0,2 3 0,1 0 0,1 2 0,0 1 0,1 2 0,1 0 0,-29 33 0,38-37 0,0 2 0,1 0 0,1 1 0,1 0 0,1 1 0,1 0 0,0 1 0,-11 36 0,18-41 0,0 0 0,1 0 0,0 0 0,2 0 0,0 0 0,1 0 0,0 1 0,2-1 0,0 0 0,1 0 0,0 0 0,11 29 0,-8-30 0,0 0 0,1 0 0,1 0 0,1-1 0,0-1 0,1 1 0,0-1 0,1-1 0,1 0 0,0 0 0,0-1 0,2-1 0,-1 0 0,1-1 0,1-1 0,0 0 0,0-1 0,1 0 0,0-1 0,0-1 0,19 5 0,-2-1 0,0-1 0,0-2 0,1-1 0,-1-1 0,56 0 0,-74-6 0,0 0 0,0 0 0,-1-2 0,1 1 0,-1-2 0,1 0 0,-1-1 0,-1 0 0,1-1 0,16-10 0,-10 2 0,0 0 0,0-2 0,-2 0 0,0-1 0,22-26 0,-29 29 0,0 0 0,-1 0 0,0 0 0,-1-2 0,-1 1 0,0-1 0,-1 0 0,-1-1 0,0 1 0,4-24 0,-4 13 0,-4 18 0,0 0 0,0 0 0,0 0 0,-1 0 0,-1 0 0,0-1 0,0 1 0,-1 0 0,-3-17 0,0 8 0,0-4 0,0 1 0,-2 0 0,-1 0 0,0 0 0,-1 1 0,-2 1 0,-20-35 0,16 36 0,-2 0 0,1 1 0,-2 0 0,0 2 0,-30-22 0,3 8 0,-63-32 0,38 36-204,51 20-957,-2-1-5665</inkml:trace>
+</inkml:ink>
+</file>
+
+<file path=ppt/ink/ink111.xml><?xml version="1.0" encoding="utf-8"?>
+<inkml:ink xmlns:inkml="http://www.w3.org/2003/InkML">
+  <inkml:definitions>
+    <inkml:context xml:id="ctx0">
+      <inkml:inkSource xml:id="inkSrc0">
+        <inkml:traceFormat>
+          <inkml:channel name="X" type="integer" min="-2.14748E9" max="2.14748E9" units="cm"/>
+          <inkml:channel name="Y" type="integer" min="-2.14748E9" max="2.14748E9" units="cm"/>
+          <inkml:channel name="F" type="integer" max="32767" units="dev"/>
+        </inkml:traceFormat>
+        <inkml:channelProperties>
+          <inkml:channelProperty channel="X" name="resolution" value="1000" units="1/cm"/>
+          <inkml:channelProperty channel="Y" name="resolution" value="1000" units="1/cm"/>
+          <inkml:channelProperty channel="F" name="resolution" value="0" units="1/dev"/>
+        </inkml:channelProperties>
+      </inkml:inkSource>
+      <inkml:timestamp xml:id="ts0" timeString="2026-03-26T06:34:29.134"/>
+    </inkml:context>
+    <inkml:brush xml:id="br0">
+      <inkml:brushProperty name="width" value="0.1" units="cm"/>
+      <inkml:brushProperty name="height" value="0.1" units="cm"/>
+      <inkml:brushProperty name="color" value="#FFC114"/>
+    </inkml:brush>
+  </inkml:definitions>
+  <inkml:trace contextRef="#ctx0" brushRef="#br0">56 325 24575,'0'-1'0,"0"0"0,0 1 0,0-1 0,0 0 0,0 0 0,0 0 0,0 1 0,0-1 0,0 0 0,0 0 0,0 1 0,-1-1 0,1 0 0,0 0 0,-1 1 0,1-1 0,0 0 0,-1 1 0,1-1 0,-1 0 0,1 1 0,-1-1 0,1 1 0,-1-1 0,1 1 0,-1-1 0,0 1 0,1-1 0,-1 1 0,0 0 0,1-1 0,-1 1 0,0 0 0,1-1 0,-1 1 0,0 0 0,0 0 0,1 0 0,-1 0 0,0 0 0,0 0 0,-1 0 0,1 0 0,-1 1 0,1-1 0,0 1 0,-1-1 0,1 1 0,0-1 0,-1 1 0,1 0 0,0 0 0,0 0 0,0 0 0,0 0 0,0 0 0,0 0 0,0 0 0,0 0 0,0 0 0,0 1 0,1-1 0,-1 0 0,0 1 0,1-1 0,-1 2 0,-2 10 0,0 0 0,1 1 0,1-1 0,0 1 0,1-1 0,2 22 0,18 81 0,-15-94 0,7 31 0,-10-46 0,-8-36 0,0 4 0,1 0 0,2 0 0,0-1 0,2 1 0,3-48 0,28-143 0,-28 205 0,0-7 0,1 0 0,1 0 0,1 0 0,8-23 0,-11 36 0,1 1 0,-1-1 0,0 1 0,1 0 0,0 0 0,0 0 0,1 0 0,-1 0 0,1 1 0,-1 0 0,1-1 0,0 1 0,0 0 0,1 1 0,-1-1 0,0 1 0,1 0 0,0 0 0,-1 0 0,1 1 0,5-1 0,-6 1 0,1 1 0,-1-1 0,0 1 0,0 1 0,0-1 0,1 0 0,-1 1 0,0 0 0,0 0 0,0 0 0,0 1 0,0-1 0,0 1 0,-1 0 0,1 0 0,0 0 0,-1 0 0,0 1 0,1 0 0,-1-1 0,0 1 0,0 0 0,-1 1 0,1-1 0,3 5 0,4 9 0,1 0 0,-2 1 0,14 36 0,-20-45 0,18 50 0,14 71 0,-32-113 0,-1-1 0,0 33 0,4 20 0,1-55-1365</inkml:trace>
+</inkml:ink>
+</file>
+
+<file path=ppt/ink/ink112.xml><?xml version="1.0" encoding="utf-8"?>
+<inkml:ink xmlns:inkml="http://www.w3.org/2003/InkML">
+  <inkml:definitions>
+    <inkml:context xml:id="ctx0">
+      <inkml:inkSource xml:id="inkSrc0">
+        <inkml:traceFormat>
+          <inkml:channel name="X" type="integer" min="-2.14748E9" max="2.14748E9" units="cm"/>
+          <inkml:channel name="Y" type="integer" min="-2.14748E9" max="2.14748E9" units="cm"/>
+          <inkml:channel name="F" type="integer" max="32767" units="dev"/>
+        </inkml:traceFormat>
+        <inkml:channelProperties>
+          <inkml:channelProperty channel="X" name="resolution" value="1000" units="1/cm"/>
+          <inkml:channelProperty channel="Y" name="resolution" value="1000" units="1/cm"/>
+          <inkml:channelProperty channel="F" name="resolution" value="0" units="1/dev"/>
+        </inkml:channelProperties>
+      </inkml:inkSource>
+      <inkml:timestamp xml:id="ts0" timeString="2026-03-26T06:34:29.135"/>
+    </inkml:context>
+    <inkml:brush xml:id="br0">
+      <inkml:brushProperty name="width" value="0.1" units="cm"/>
+      <inkml:brushProperty name="height" value="0.1" units="cm"/>
+      <inkml:brushProperty name="color" value="#FFC114"/>
+    </inkml:brush>
+  </inkml:definitions>
+  <inkml:trace contextRef="#ctx0" brushRef="#br0">22 73 24575,'-5'0'0,"-5"0"0,3-5 0,7 0 0,8-5 0,7 0 0,5 1 0,4 3 0,1 1 0,2-1 0,0-1 0,0 1 0,-5 2-8191</inkml:trace>
+</inkml:ink>
+</file>
+
+<file path=ppt/ink/ink113.xml><?xml version="1.0" encoding="utf-8"?>
+<inkml:ink xmlns:inkml="http://www.w3.org/2003/InkML">
+  <inkml:definitions>
+    <inkml:context xml:id="ctx0">
+      <inkml:inkSource xml:id="inkSrc0">
+        <inkml:traceFormat>
+          <inkml:channel name="X" type="integer" min="-2.14748E9" max="2.14748E9" units="cm"/>
+          <inkml:channel name="Y" type="integer" min="-2.14748E9" max="2.14748E9" units="cm"/>
+          <inkml:channel name="F" type="integer" max="32767" units="dev"/>
+        </inkml:traceFormat>
+        <inkml:channelProperties>
+          <inkml:channelProperty channel="X" name="resolution" value="1000" units="1/cm"/>
+          <inkml:channelProperty channel="Y" name="resolution" value="1000" units="1/cm"/>
+          <inkml:channelProperty channel="F" name="resolution" value="0" units="1/dev"/>
+        </inkml:channelProperties>
+      </inkml:inkSource>
+      <inkml:timestamp xml:id="ts0" timeString="2026-03-26T06:34:29.136"/>
+    </inkml:context>
+    <inkml:brush xml:id="br0">
+      <inkml:brushProperty name="width" value="0.1" units="cm"/>
+      <inkml:brushProperty name="height" value="0.1" units="cm"/>
+      <inkml:brushProperty name="color" value="#FFC114"/>
+    </inkml:brush>
+  </inkml:definitions>
+  <inkml:trace contextRef="#ctx0" brushRef="#br0">272 1 24575,'-34'0'0,"3"-1"0,-51 6 0,73-4 0,0 1 0,0 0 0,0 0 0,0 1 0,0 0 0,1 0 0,0 1 0,0 0 0,0 1 0,-9 6 0,16-10 0,-1 0 0,1 0 0,-1 0 0,1 0 0,-1 0 0,1 1 0,0-1 0,0 0 0,-1 1 0,1-1 0,0 1 0,0 0 0,1-1 0,-1 1 0,0-1 0,0 1 0,1 0 0,-1 0 0,1-1 0,0 1 0,-1 0 0,1 0 0,0 0 0,0 0 0,0 1 0,1 0 0,0-1 0,1 1 0,-1-1 0,0 0 0,1 0 0,-1 0 0,1 1 0,0-2 0,0 1 0,0 0 0,0 0 0,0 0 0,0-1 0,0 1 0,3 0 0,10 6 0,1 0 0,0-2 0,32 9 0,11 0 0,50 14 0,-99-25 0,1 0 0,0 1 0,-1 0 0,0 0 0,0 1 0,0 1 0,10 9 0,-19-16 0,0 1 0,0 0 0,0 0 0,0 0 0,0 0 0,0 0 0,0 0 0,0 0 0,0 1 0,-1-1 0,1 0 0,0 0 0,-1 1 0,1-1 0,-1 0 0,1 1 0,-1-1 0,0 0 0,0 1 0,0-1 0,1 1 0,-1-1 0,0 1 0,-1-1 0,1 0 0,0 1 0,0-1 0,-1 2 0,-1 0 0,1-1 0,-1 1 0,0-1 0,0 1 0,0-1 0,0 0 0,-1 0 0,1 0 0,0 0 0,-1 0 0,0 0 0,-3 1 0,-8 4 0,0-1 0,0-1 0,-1 0 0,-17 4 0,-4-4 0,1-1 0,0-2 0,-1-2 0,-56-5 0,90 5-52,0 0-1,0 0 1,0 0-1,0-1 1,0 1-1,1 0 1,-1-1-1,0 1 1,0-1-1,1 0 1,-1 0-1,0 0 1,1 1-1,-1-1 1,0-1-1,1 1 1,0 0-1,-1 0 1,1-1-1,0 1 0,-1 0 1,1-1-1,0 0 1,0 1-1,-1-3 1</inkml:trace>
+</inkml:ink>
+</file>
+
+<file path=ppt/ink/ink114.xml><?xml version="1.0" encoding="utf-8"?>
+<inkml:ink xmlns:inkml="http://www.w3.org/2003/InkML">
+  <inkml:definitions>
+    <inkml:context xml:id="ctx0">
+      <inkml:inkSource xml:id="inkSrc0">
+        <inkml:traceFormat>
+          <inkml:channel name="X" type="integer" min="-2.14748E9" max="2.14748E9" units="cm"/>
+          <inkml:channel name="Y" type="integer" min="-2.14748E9" max="2.14748E9" units="cm"/>
+          <inkml:channel name="F" type="integer" max="32767" units="dev"/>
+        </inkml:traceFormat>
+        <inkml:channelProperties>
+          <inkml:channelProperty channel="X" name="resolution" value="1000" units="1/cm"/>
+          <inkml:channelProperty channel="Y" name="resolution" value="1000" units="1/cm"/>
+          <inkml:channelProperty channel="F" name="resolution" value="0" units="1/dev"/>
+        </inkml:channelProperties>
+      </inkml:inkSource>
+      <inkml:timestamp xml:id="ts0" timeString="2026-03-26T06:34:29.137"/>
+    </inkml:context>
+    <inkml:brush xml:id="br0">
+      <inkml:brushProperty name="width" value="0.1" units="cm"/>
+      <inkml:brushProperty name="height" value="0.1" units="cm"/>
+      <inkml:brushProperty name="color" value="#FFC114"/>
+    </inkml:brush>
+  </inkml:definitions>
+  <inkml:trace contextRef="#ctx0" brushRef="#br0">5 369 24575,'-4'-3'0,"13"-5"0,13-5 0,-4 5 0,0-1 0,-1 0 0,-1-1 0,1-1 0,-1-1 0,21-19 0,-34 27 0,1 0 0,-1 0 0,1 0 0,-1-1 0,0 1 0,-1-1 0,1 1 0,-1-1 0,0 0 0,0 0 0,-1 0 0,1 0 0,-1-1 0,0 1 0,0 0 0,-1 0 0,0-1 0,0 1 0,0 0 0,-1-1 0,1 1 0,-1 0 0,0 0 0,-1-1 0,1 1 0,-1 0 0,0 0 0,-5-8 0,2 3 0,-1-1 0,0 1 0,-1 0 0,0 1 0,-1-1 0,0 2 0,0-1 0,-16-12 0,24 21 0,-1-1 0,0 1 0,0-1 0,0 0 0,1 1 0,-1 0 0,0-1 0,0 1 0,0-1 0,0 1 0,0 0 0,0 0 0,0 0 0,0-1 0,0 1 0,0 0 0,0 0 0,0 0 0,0 1 0,0-1 0,0 0 0,0 0 0,0 0 0,0 1 0,0-1 0,0 1 0,-1 0 0,1 0 0,-1 0 0,1 1 0,0-1 0,0 1 0,0-1 0,0 1 0,0 0 0,0-1 0,0 1 0,0 0 0,1 0 0,-1-1 0,0 4 0,0 3 0,-1 0 0,1 0 0,1 0 0,0 1 0,1 12 0,32 234 0,-28-168 0,-5-65 0,1 0 0,1 0 0,6 26 0,-8-46-96,0-1 62,0-1 1,0 1 0,0-1-1,0 1 1,0 0 0,0-1-1,0 1 1,0-1-1,1 1 1,-1-1 0,0 1-1,0 0 1,0-1-1,1 1 1,-1-1 0,0 1-1,1-1 1,-1 1-1,0-1 1,1 0 0,-1 1-1,1-1 1,-1 1-1,0-1 1,1 0 0,-1 1-1,1-1 1,-1 0-1,1 1 1,-1-1 0,1 0-1,0 0 1,-1 0 0,1 0-1,-1 1 1,1-1-1,1 0 1</inkml:trace>
+</inkml:ink>
+</file>
+
+<file path=ppt/ink/ink115.xml><?xml version="1.0" encoding="utf-8"?>
+<inkml:ink xmlns:inkml="http://www.w3.org/2003/InkML">
+  <inkml:definitions>
+    <inkml:context xml:id="ctx0">
+      <inkml:inkSource xml:id="inkSrc0">
+        <inkml:traceFormat>
+          <inkml:channel name="X" type="integer" min="-2.14748E9" max="2.14748E9" units="cm"/>
+          <inkml:channel name="Y" type="integer" min="-2.14748E9" max="2.14748E9" units="cm"/>
+          <inkml:channel name="F" type="integer" max="32767" units="dev"/>
+        </inkml:traceFormat>
+        <inkml:channelProperties>
+          <inkml:channelProperty channel="X" name="resolution" value="1000" units="1/cm"/>
+          <inkml:channelProperty channel="Y" name="resolution" value="1000" units="1/cm"/>
+          <inkml:channelProperty channel="F" name="resolution" value="0" units="1/dev"/>
+        </inkml:channelProperties>
+      </inkml:inkSource>
+      <inkml:timestamp xml:id="ts0" timeString="2026-03-26T06:34:29.138"/>
+    </inkml:context>
+    <inkml:brush xml:id="br0">
+      <inkml:brushProperty name="width" value="0.1" units="cm"/>
+      <inkml:brushProperty name="height" value="0.1" units="cm"/>
+      <inkml:brushProperty name="color" value="#FFC114"/>
+    </inkml:brush>
+  </inkml:definitions>
+  <inkml:trace contextRef="#ctx0" brushRef="#br0">5 58 24575,'0'0'0,"-1"-1"0,1 0 0,-1 1 0,1-1 0,0 0 0,-1 1 0,1-1 0,0 0 0,0 0 0,-1 1 0,1-1 0,0 0 0,0 0 0,0 1 0,0-1 0,0 0 0,0 0 0,0 1 0,0-1 0,0 0 0,0 0 0,1 1 0,-1-1 0,0 0 0,0 0 0,1 1 0,-1-1 0,1 0 0,-1 1 0,0-1 0,1 0 0,-1 1 0,1-1 0,-1 1 0,1-1 0,0 1 0,-1-1 0,1 1 0,0-1 0,-1 1 0,1 0 0,0-1 0,-1 1 0,1 0 0,0-1 0,1 1 0,35-15 0,-14 10 0,0 1 0,43 0 0,-54 3 0,0 2 0,0-1 0,0 1 0,0 1 0,0 1 0,-1-1 0,16 7 0,-25-8 0,0-1 0,0 1 0,0 0 0,0-1 0,0 1 0,-1 0 0,1 1 0,0-1 0,-1 0 0,1 0 0,-1 1 0,1-1 0,-1 1 0,0-1 0,1 1 0,-1-1 0,0 1 0,0 0 0,0 0 0,0 0 0,-1-1 0,1 1 0,0 0 0,-1 0 0,1 0 0,-1 0 0,0 0 0,0 0 0,0 0 0,0 0 0,0 0 0,0 0 0,0 0 0,0 0 0,-1 0 0,1 0 0,-1 0 0,0 0 0,0 0 0,1 0 0,-3 2 0,0 2 0,-1-2 0,1 1 0,-1 0 0,0-1 0,0 0 0,-1 1 0,1-2 0,-1 1 0,0 0 0,0-1 0,0 0 0,0 0 0,-6 2 0,-22 5 0,-1-1 0,0-1 0,0-2 0,-49 2 0,121 7 0,30 1 0,-1 3 0,94 40 0,-156-57-124,-1 0 0,1 0 0,0-1 0,0 0 0,0 1 0,0-2-1,0 1 1,0 0 0,0-1 0,9-1 0,5-2-6702</inkml:trace>
+</inkml:ink>
+</file>
+
+<file path=ppt/ink/ink116.xml><?xml version="1.0" encoding="utf-8"?>
+<inkml:ink xmlns:inkml="http://www.w3.org/2003/InkML">
+  <inkml:definitions>
+    <inkml:context xml:id="ctx0">
+      <inkml:inkSource xml:id="inkSrc0">
+        <inkml:traceFormat>
+          <inkml:channel name="X" type="integer" min="-2.14748E9" max="2.14748E9" units="cm"/>
+          <inkml:channel name="Y" type="integer" min="-2.14748E9" max="2.14748E9" units="cm"/>
+          <inkml:channel name="F" type="integer" max="32767" units="dev"/>
+        </inkml:traceFormat>
+        <inkml:channelProperties>
+          <inkml:channelProperty channel="X" name="resolution" value="1000" units="1/cm"/>
+          <inkml:channelProperty channel="Y" name="resolution" value="1000" units="1/cm"/>
+          <inkml:channelProperty channel="F" name="resolution" value="0" units="1/dev"/>
+        </inkml:channelProperties>
+      </inkml:inkSource>
+      <inkml:timestamp xml:id="ts0" timeString="2026-03-26T06:34:29.139"/>
+    </inkml:context>
+    <inkml:brush xml:id="br0">
+      <inkml:brushProperty name="width" value="0.1" units="cm"/>
+      <inkml:brushProperty name="height" value="0.1" units="cm"/>
+      <inkml:brushProperty name="color" value="#FFC114"/>
+    </inkml:brush>
+  </inkml:definitions>
+  <inkml:trace contextRef="#ctx0" brushRef="#br0">239 26 24575,'-1'-1'0,"1"0"0,-1 0 0,1 0 0,-1 0 0,1 0 0,-1 0 0,0 0 0,1 0 0,-1 0 0,0 0 0,0 0 0,0 0 0,0 1 0,0-1 0,0 0 0,0 1 0,0-1 0,0 0 0,0 1 0,0 0 0,0-1 0,0 1 0,-1-1 0,1 1 0,0 0 0,0 0 0,-2 0 0,-39-5 0,37 5 0,-4-1 0,-75 1 0,80 0 0,0 0 0,0 0 0,0 1 0,0 0 0,1 0 0,-1 0 0,0 0 0,0 1 0,0-1 0,1 1 0,-1 0 0,1 0 0,-1 0 0,1 1 0,0-1 0,0 1 0,-3 3 0,5-4 0,0-1 0,1 0 0,0 1 0,-1-1 0,1 0 0,0 1 0,0-1 0,0 0 0,0 1 0,0-1 0,0 0 0,0 1 0,0-1 0,1 1 0,-1-1 0,0 0 0,1 0 0,-1 1 0,1-1 0,-1 0 0,1 0 0,0 1 0,0-1 0,-1 0 0,1 0 0,0 0 0,0 0 0,0 0 0,0 0 0,0-1 0,0 1 0,1 0 0,-1 0 0,0-1 0,0 1 0,1-1 0,0 1 0,56 27 0,-52-26 0,114 56 0,-52-23 0,-67-35 0,1 1 0,-1-1 0,1 1 0,-1 0 0,1 0 0,-1 0 0,1 0 0,-1 0 0,0 0 0,1 0 0,-1 0 0,0 0 0,0 0 0,0 1 0,0-1 0,0 1 0,0-1 0,0 1 0,-1-1 0,1 1 0,-1-1 0,1 1 0,-1-1 0,1 4 0,-1-3 0,-1-1 0,1 0 0,-1 1 0,0-1 0,0 0 0,1 1 0,-1-1 0,0 0 0,0 0 0,0 0 0,0 0 0,0 0 0,-1 0 0,1 0 0,0 0 0,0 0 0,-1-1 0,1 1 0,0 0 0,-1-1 0,1 1 0,-1-1 0,1 1 0,-1-1 0,1 0 0,-1 0 0,-2 0 0,-33 4 0,0-1 0,-1-3 0,-58-6 0,71 2-1365,3-1-5461</inkml:trace>
+</inkml:ink>
+</file>
+
+<file path=ppt/ink/ink117.xml><?xml version="1.0" encoding="utf-8"?>
+<inkml:ink xmlns:inkml="http://www.w3.org/2003/InkML">
+  <inkml:definitions>
+    <inkml:context xml:id="ctx0">
+      <inkml:inkSource xml:id="inkSrc0">
+        <inkml:traceFormat>
+          <inkml:channel name="X" type="integer" min="-2.14748E9" max="2.14748E9" units="cm"/>
+          <inkml:channel name="Y" type="integer" min="-2.14748E9" max="2.14748E9" units="cm"/>
+          <inkml:channel name="F" type="integer" max="32767" units="dev"/>
+        </inkml:traceFormat>
+        <inkml:channelProperties>
+          <inkml:channelProperty channel="X" name="resolution" value="1000" units="1/cm"/>
+          <inkml:channelProperty channel="Y" name="resolution" value="1000" units="1/cm"/>
+          <inkml:channelProperty channel="F" name="resolution" value="0" units="1/dev"/>
+        </inkml:channelProperties>
+      </inkml:inkSource>
+      <inkml:timestamp xml:id="ts0" timeString="2026-03-26T06:34:29.140"/>
+    </inkml:context>
+    <inkml:brush xml:id="br0">
+      <inkml:brushProperty name="width" value="0.1" units="cm"/>
+      <inkml:brushProperty name="height" value="0.1" units="cm"/>
+      <inkml:brushProperty name="color" value="#FFC114"/>
+    </inkml:brush>
+  </inkml:definitions>
+  <inkml:trace contextRef="#ctx0" brushRef="#br0">1 71 24575,'7'0'0,"1"-1"0,0 0 0,0-1 0,15-5 0,24-4 0,642-37 0,-201 69 0,-448-13-34,10 3 155,-48-11-212,1 0 1,-1 1-1,1-1 0,-1 0 0,0-1 1,1 1-1,-1 0 0,1-1 0,-1 0 1,0 1-1,1-1 0,-1 0 0,0 0 0,0 0 1,4-3-1</inkml:trace>
+</inkml:ink>
+</file>
+
+<file path=ppt/ink/ink118.xml><?xml version="1.0" encoding="utf-8"?>
+<inkml:ink xmlns:inkml="http://www.w3.org/2003/InkML">
+  <inkml:definitions>
+    <inkml:context xml:id="ctx0">
+      <inkml:inkSource xml:id="inkSrc0">
+        <inkml:traceFormat>
+          <inkml:channel name="X" type="integer" min="-2.14748E9" max="2.14748E9" units="cm"/>
+          <inkml:channel name="Y" type="integer" min="-2.14748E9" max="2.14748E9" units="cm"/>
+          <inkml:channel name="F" type="integer" max="32767" units="dev"/>
+        </inkml:traceFormat>
+        <inkml:channelProperties>
+          <inkml:channelProperty channel="X" name="resolution" value="1000" units="1/cm"/>
+          <inkml:channelProperty channel="Y" name="resolution" value="1000" units="1/cm"/>
+          <inkml:channelProperty channel="F" name="resolution" value="0" units="1/dev"/>
+        </inkml:channelProperties>
+      </inkml:inkSource>
+      <inkml:timestamp xml:id="ts0" timeString="2026-03-26T06:34:29.141"/>
+    </inkml:context>
+    <inkml:brush xml:id="br0">
+      <inkml:brushProperty name="width" value="0.1" units="cm"/>
+      <inkml:brushProperty name="height" value="0.1" units="cm"/>
+      <inkml:brushProperty name="color" value="#FFC114"/>
+    </inkml:brush>
+  </inkml:definitions>
+  <inkml:trace contextRef="#ctx0" brushRef="#br0">54 2 24575,'-11'-1'0,"15"1"0,26 2 0,83 26 0,-47-13 0,-1 3 0,79 32 0,-142-50 0,0 1 0,-1 0 0,1-1 0,0 1 0,-1 0 0,1 0 0,-1 0 0,1 0 0,-1 0 0,0 0 0,1 1 0,-1-1 0,0 0 0,0 1 0,0-1 0,0 1 0,0-1 0,0 1 0,0-1 0,1 4 0,-2-4 0,0 1 0,-1-1 0,1 0 0,0 1 0,0-1 0,-1 1 0,1-1 0,-1 0 0,1 1 0,-1-1 0,0 0 0,1 1 0,-1-1 0,0 0 0,0 0 0,0 0 0,0 1 0,0-1 0,-1 1 0,-7 5 0,-1 0 0,1-1 0,-1 0 0,-20 9 0,-245 83 7,160-62-1379,93-28-5454</inkml:trace>
+</inkml:ink>
+</file>
+
+<file path=ppt/ink/ink119.xml><?xml version="1.0" encoding="utf-8"?>
+<inkml:ink xmlns:inkml="http://www.w3.org/2003/InkML">
+  <inkml:definitions>
+    <inkml:context xml:id="ctx0">
+      <inkml:inkSource xml:id="inkSrc0">
+        <inkml:traceFormat>
+          <inkml:channel name="X" type="integer" min="-2.14748E9" max="2.14748E9" units="cm"/>
+          <inkml:channel name="Y" type="integer" min="-2.14748E9" max="2.14748E9" units="cm"/>
+          <inkml:channel name="F" type="integer" max="32767" units="dev"/>
+        </inkml:traceFormat>
+        <inkml:channelProperties>
+          <inkml:channelProperty channel="X" name="resolution" value="1000" units="1/cm"/>
+          <inkml:channelProperty channel="Y" name="resolution" value="1000" units="1/cm"/>
+          <inkml:channelProperty channel="F" name="resolution" value="0" units="1/dev"/>
+        </inkml:channelProperties>
+      </inkml:inkSource>
+      <inkml:timestamp xml:id="ts0" timeString="2026-03-26T06:34:29.142"/>
+    </inkml:context>
+    <inkml:brush xml:id="br0">
+      <inkml:brushProperty name="width" value="0.1" units="cm"/>
+      <inkml:brushProperty name="height" value="0.1" units="cm"/>
+      <inkml:brushProperty name="color" value="#FFC114"/>
+    </inkml:brush>
+  </inkml:definitions>
+  <inkml:trace contextRef="#ctx0" brushRef="#br0">26 2346 24575,'-1'0'0,"0"0"0,1 0 0,-1 1 0,0-1 0,0 0 0,0 0 0,0 0 0,0-1 0,0 1 0,0 0 0,0 0 0,1 0 0,-1-1 0,0 1 0,0 0 0,0-1 0,1 1 0,-1-1 0,0 1 0,0-1 0,1 1 0,-1-1 0,0 0 0,1 1 0,-1-1 0,0 0 0,1 1 0,-1-1 0,1 0 0,0 0 0,-1 0 0,1 1 0,0-1 0,-1 0 0,1 0 0,0 0 0,0 0 0,-1 0 0,1 0 0,0 1 0,0-1 0,0 0 0,0 0 0,1 0 0,-1 0 0,0 0 0,0 0 0,0 0 0,1 1 0,-1-1 0,0 0 0,1 0 0,-1 0 0,1 1 0,-1-1 0,1 0 0,-1 0 0,2 0 0,2-6 0,0 0 0,0 1 0,1 0 0,0 0 0,9-8 0,15-11 0,-1-1 0,-1-1 0,-2-1 0,0-2 0,-2 0 0,-1-1 0,28-56 0,-22 25 0,-2-1 0,26-106 0,2-12 0,-47 149 0,-1 6 0,-1-2 0,0 1 0,-1-36 0,-2 31 0,11-60 0,-4 37 0,11-64 0,-8 52 0,-2 0 0,0-86 0,-9 19 0,-4-113 0,-21 95 0,22 138 0,-1 0 0,0 0 0,-1 0 0,0 1 0,-13-26 0,16 37 0,0 0 0,0 0 0,0 0 0,0 0 0,-1 0 0,1 0 0,-1 0 0,1 1 0,-1-1 0,0 1 0,0-1 0,0 1 0,0-1 0,0 1 0,0 0 0,0 0 0,0 0 0,0 0 0,-1 0 0,1 1 0,0-1 0,0 1 0,-1-1 0,1 1 0,-1 0 0,1 0 0,0 0 0,-1 0 0,1 0 0,0 1 0,-1-1 0,1 1 0,0 0 0,0-1 0,-1 1 0,1 0 0,0 0 0,0 0 0,0 1 0,0-1 0,0 0 0,-3 4 0,-31 23 0,0 2 0,-41 46 0,38-37 0,-45 36 0,82-75 0,5-7 0,12-19 0,23-32 0,-22 35 0,0 1 0,2 1 0,1 0 0,0 1 0,2 1 0,0 1 0,1 1 0,1 1 0,0 1 0,41-19 0,-58 31 0,0 0 0,0 1 0,1 0 0,-1 0 0,1 0 0,-1 1 0,1 0 0,0 0 0,0 1 0,-1 0 0,1 0 0,0 0 0,-1 1 0,1 0 0,0 1 0,-1-1 0,1 1 0,-1 0 0,0 1 0,0 0 0,12 6 0,210 94 0,-202-90 120,-26-13-143,1 1 1,-1-1-1,0 0 1,1 0-1,-1 0 1,0 1-1,1-1 1,-1 0-1,0 0 1,0 1-1,1-1 1,-1 0-1,0 0 1,0 1-1,1-1 1,-1 0-1,0 1 1,0-1-1,0 0 1,0 1-1,1-1 1,-1 1-1,0-1 1,0 0-1,0 1 1,0-1-1,0 0 1,0 1-1,0-1 1,0 1-1,0-1 1,0 0-1,0 1 1,0-1-1,-1 1 1,1-1-1,0 0 1,0 1-1,0-1 1,0 0-1,-1 1 1,1-1-1,0 0 1,0 1-1,0-1 1,-1 0-1,1 0 1,0 1-1,-1-1 1,1 0-1,0 0 1,-1 0-1,1 1 1,0-1-1,-1 0 1,1 0-1,0 0 1,-1 0-1,1 0 1,0 1-1,-1-1 1,1 0-1,-1 0 1,1 0-1,-1 0 1</inkml:trace>
+</inkml:ink>
+</file>
+
+<file path=ppt/ink/ink12.xml><?xml version="1.0" encoding="utf-8"?>
+<inkml:ink xmlns:inkml="http://www.w3.org/2003/InkML">
+  <inkml:definitions>
+    <inkml:context xml:id="ctx0">
+      <inkml:inkSource xml:id="inkSrc0">
+        <inkml:traceFormat>
+          <inkml:channel name="X" type="integer" min="-2.14748E9" max="2.14748E9" units="cm"/>
+          <inkml:channel name="Y" type="integer" min="-2.14748E9" max="2.14748E9" units="cm"/>
+          <inkml:channel name="F" type="integer" max="32767" units="dev"/>
+        </inkml:traceFormat>
+        <inkml:channelProperties>
+          <inkml:channelProperty channel="X" name="resolution" value="1000" units="1/cm"/>
+          <inkml:channelProperty channel="Y" name="resolution" value="1000" units="1/cm"/>
+          <inkml:channelProperty channel="F" name="resolution" value="0" units="1/dev"/>
+        </inkml:channelProperties>
+      </inkml:inkSource>
+      <inkml:timestamp xml:id="ts0" timeString="2026-03-26T06:32:43.956"/>
+    </inkml:context>
+    <inkml:brush xml:id="br0">
+      <inkml:brushProperty name="width" value="0.1" units="cm"/>
+      <inkml:brushProperty name="height" value="0.1" units="cm"/>
+      <inkml:brushProperty name="color" value="#FFC114"/>
+    </inkml:brush>
+  </inkml:definitions>
+  <inkml:trace contextRef="#ctx0" brushRef="#br0">122 34 24575,'0'-1'0,"0"0"0,0-1 0,0 1 0,-1-1 0,1 1 0,0 0 0,-1-1 0,1 1 0,-1 0 0,1-1 0,-1 1 0,1 0 0,-1 0 0,0-1 0,0 1 0,0 0 0,0 0 0,0 0 0,0 0 0,0 0 0,0 0 0,0 1 0,0-1 0,0 0 0,-1 0 0,1 1 0,0-1 0,-1 1 0,1-1 0,0 1 0,-1 0 0,1-1 0,0 1 0,-1 0 0,1 0 0,-1 0 0,-1 0 0,-1 0 0,0 0 0,1 1 0,-1-1 0,1 1 0,-1-1 0,0 1 0,1 0 0,-1 1 0,1-1 0,0 1 0,0-1 0,-1 1 0,-3 3 0,4-2 0,0 0 0,0 1 0,0-1 0,1 1 0,-1 0 0,1 0 0,0 0 0,0 0 0,0 0 0,0 0 0,1 1 0,0-1 0,0 0 0,0 1 0,0-1 0,1 6 0,0-8 0,0 0 0,0 0 0,0-1 0,0 1 0,0 0 0,1-1 0,-1 1 0,1 0 0,0-1 0,-1 1 0,1-1 0,0 1 0,0-1 0,0 1 0,0-1 0,0 0 0,0 1 0,0-1 0,0 0 0,1 0 0,-1 0 0,0 0 0,1 0 0,-1 0 0,1 0 0,-1 0 0,1-1 0,-1 1 0,1-1 0,0 1 0,-1-1 0,1 1 0,0-1 0,-1 0 0,1 0 0,0 0 0,0 0 0,-1 0 0,1 0 0,0 0 0,-1-1 0,1 1 0,0-1 0,2 0 0,8-2 0,1 0 0,0-1 0,16-8 0,-27 12 0,1-1 0,0 0 0,-1 0 0,1-1 0,-1 1 0,0-1 0,1 1 0,-1-1 0,0 0 0,0 0 0,0 1 0,0-2 0,0 1 0,0 0 0,-1 0 0,1 0 0,-1-1 0,1 1 0,-1-1 0,0 1 0,1-6 0,-2 7 0,0 1 0,0-1 0,0 0 0,0 1 0,0-1 0,0 0 0,0 1 0,0-1 0,0 0 0,-1 1 0,1-1 0,0 1 0,-1-1 0,1 0 0,0 1 0,-1-1 0,1 1 0,0-1 0,-1 1 0,1-1 0,-1 1 0,1-1 0,-1 1 0,0 0 0,1-1 0,-1 1 0,1 0 0,-1-1 0,0 1 0,0-1 0,-27 2 0,24 0 0,-1 1 0,1-1 0,-1 1 0,1-1 0,-1 1 0,1 1 0,0-1 0,0 1 0,-5 3 0,-16 19-1365</inkml:trace>
+</inkml:ink>
+</file>
+
+<file path=ppt/ink/ink120.xml><?xml version="1.0" encoding="utf-8"?>
+<inkml:ink xmlns:inkml="http://www.w3.org/2003/InkML">
+  <inkml:definitions>
+    <inkml:context xml:id="ctx0">
+      <inkml:inkSource xml:id="inkSrc0">
+        <inkml:traceFormat>
+          <inkml:channel name="X" type="integer" min="-2.14748E9" max="2.14748E9" units="cm"/>
+          <inkml:channel name="Y" type="integer" min="-2.14748E9" max="2.14748E9" units="cm"/>
+          <inkml:channel name="F" type="integer" max="32767" units="dev"/>
+        </inkml:traceFormat>
+        <inkml:channelProperties>
+          <inkml:channelProperty channel="X" name="resolution" value="1000" units="1/cm"/>
+          <inkml:channelProperty channel="Y" name="resolution" value="1000" units="1/cm"/>
+          <inkml:channelProperty channel="F" name="resolution" value="0" units="1/dev"/>
+        </inkml:channelProperties>
+      </inkml:inkSource>
+      <inkml:timestamp xml:id="ts0" timeString="2026-03-26T06:34:29.143"/>
+    </inkml:context>
+    <inkml:brush xml:id="br0">
+      <inkml:brushProperty name="width" value="0.1" units="cm"/>
+      <inkml:brushProperty name="height" value="0.1" units="cm"/>
+      <inkml:brushProperty name="color" value="#FFC114"/>
+    </inkml:brush>
+  </inkml:definitions>
+  <inkml:trace contextRef="#ctx0" brushRef="#br0">35 96 24575,'-2'0'0,"0"0"0,0 0 0,0-1 0,0 1 0,0 0 0,0-1 0,0 1 0,0-1 0,0 1 0,0-1 0,0 0 0,-2-1 0,4 2 0,-1-1 0,1 1 0,-1-1 0,1 1 0,-1-1 0,1 1 0,-1-1 0,1 0 0,0 1 0,-1-1 0,1 1 0,0-1 0,-1 0 0,1 1 0,0-1 0,0 0 0,0 1 0,0-1 0,0 0 0,0 0 0,-1 1 0,2-1 0,-1-1 0,0 0 0,1 0 0,0 0 0,0 0 0,0 0 0,0 0 0,0 0 0,1 0 0,-1 0 0,1 0 0,-1 0 0,1 1 0,0-1 0,-1 1 0,1-1 0,0 1 0,0 0 0,0-1 0,0 1 0,3-1 0,14-5 0,2 1 0,-1 0 0,1 1 0,23-2 0,-15 2 0,-22 4 0,1 1 0,-1-1 0,1 1 0,-1 0 0,0 1 0,1 0 0,-1 0 0,0 0 0,1 1 0,-1 0 0,0 1 0,0 0 0,0 0 0,-1 0 0,9 6 0,-12-7 0,-1 0 0,1 0 0,-1 0 0,1 1 0,-1-1 0,0 1 0,0-1 0,0 1 0,0 0 0,-1 0 0,1 0 0,-1 0 0,0 0 0,1 0 0,-1 0 0,-1 0 0,1 0 0,0 0 0,-1 1 0,0-1 0,0 0 0,0 1 0,0-1 0,0 0 0,-1 0 0,1 1 0,-1-1 0,0 0 0,0 0 0,0 0 0,0 0 0,-1 0 0,1 0 0,-1 0 0,0 0 0,-2 3 0,-4 4 0,1-1 0,-1 0 0,0-1 0,-1 0 0,0 0 0,-20 13 0,-13 10 0,42-30 0,-1-1 0,1 0 0,-1 1 0,1-1 0,-1 0 0,1 1 0,-1-1 0,1 0 0,-1 1 0,1-1 0,0 1 0,-1-1 0,1 1 0,0-1 0,-1 1 0,1-1 0,0 1 0,-1 0 0,1-1 0,0 1 0,0-1 0,0 1 0,0 0 0,0-1 0,0 1 0,0-1 0,0 1 0,0 0 0,0-1 0,0 1 0,0-1 0,0 1 0,0 0 0,1 0 0,21 9 0,36-6 0,-56-4 0,25 0 0,1 1 0,0 1 0,35 7 0,-55-7-195,-1 0 0,1-1 0,0 0 0,0-1 0,-1 0 0,14-1 0,-1-3-6631</inkml:trace>
+</inkml:ink>
+</file>
+
+<file path=ppt/ink/ink121.xml><?xml version="1.0" encoding="utf-8"?>
+<inkml:ink xmlns:inkml="http://www.w3.org/2003/InkML">
+  <inkml:definitions>
+    <inkml:context xml:id="ctx0">
+      <inkml:inkSource xml:id="inkSrc0">
+        <inkml:traceFormat>
+          <inkml:channel name="X" type="integer" min="-2.14748E9" max="2.14748E9" units="cm"/>
+          <inkml:channel name="Y" type="integer" min="-2.14748E9" max="2.14748E9" units="cm"/>
+          <inkml:channel name="F" type="integer" max="32767" units="dev"/>
+        </inkml:traceFormat>
+        <inkml:channelProperties>
+          <inkml:channelProperty channel="X" name="resolution" value="1000" units="1/cm"/>
+          <inkml:channelProperty channel="Y" name="resolution" value="1000" units="1/cm"/>
+          <inkml:channelProperty channel="F" name="resolution" value="0" units="1/dev"/>
+        </inkml:channelProperties>
+      </inkml:inkSource>
+      <inkml:timestamp xml:id="ts0" timeString="2026-03-26T06:34:29.144"/>
+    </inkml:context>
+    <inkml:brush xml:id="br0">
+      <inkml:brushProperty name="width" value="0.1" units="cm"/>
+      <inkml:brushProperty name="height" value="0.1" units="cm"/>
+      <inkml:brushProperty name="color" value="#FFC114"/>
+    </inkml:brush>
+  </inkml:definitions>
+  <inkml:trace contextRef="#ctx0" brushRef="#br0">765 83 24575,'-1'-2'0,"0"-1"0,0 1 0,0-1 0,0 1 0,0 0 0,0-1 0,-1 1 0,1 0 0,-1 0 0,1 0 0,-1 0 0,0 0 0,0 0 0,0 0 0,0 1 0,0-1 0,0 1 0,-1 0 0,1-1 0,0 1 0,-4-1 0,-52-20 0,34 16 0,-1 2 0,1 0 0,0 2 0,-1 1 0,0 1 0,1 1 0,-26 4 0,2 3 0,0 1 0,-72 25 0,107-30 0,0 1 0,0 0 0,0 1 0,1 0 0,0 1 0,0 0 0,1 1 0,0 1 0,0 0 0,1 0 0,0 0 0,1 2 0,0-1 0,1 1 0,0 0 0,0 1 0,1 0 0,1 0 0,0 1 0,0-1 0,2 1 0,-1 0 0,2 1 0,0-1 0,0 1 0,1-1 0,0 25 0,3-21 0,1 0 0,0 0 0,1 0 0,1 0 0,0-1 0,2 0 0,0 0 0,0 0 0,2 0 0,0-1 0,0 0 0,2-1 0,0 0 0,0 0 0,1-1 0,1-1 0,0 0 0,1 0 0,21 14 0,-8-5 0,-6-5 0,0 0 0,1-2 0,0 0 0,32 14 0,-34-20 0,0-1 0,0-1 0,1-1 0,-1-1 0,40 4 0,-32-5 0,-1-1 0,1-1 0,-1-2 0,1 0 0,0-2 0,-1-1 0,0-1 0,0-1 0,-1-1 0,1-2 0,41-20 0,-43 18 0,-2-2 0,30-21 0,-44 27 0,0 0 0,0 0 0,-1 0 0,0-1 0,-1 0 0,0 0 0,0-1 0,9-18 0,-8 10 0,0 0 0,-2-1 0,0 0 0,-1 0 0,0 0 0,0-26 0,-2 1 0,-7-71 0,4 103 0,-1 1 0,1 0 0,-1-1 0,-1 1 0,0 0 0,-1 0 0,0 1 0,0-1 0,-1 1 0,0-1 0,-1 2 0,-7-11 0,4 10 0,0 0 0,0 0 0,0 1 0,-1 1 0,-1 0 0,1 0 0,-1 1 0,0 0 0,-23-8 0,3 2-195,0 1 0,-1 1 0,0 2 0,0 1 0,-1 1 0,-33 0 0,45 6-6631</inkml:trace>
+</inkml:ink>
+</file>
+
+<file path=ppt/ink/ink122.xml><?xml version="1.0" encoding="utf-8"?>
+<inkml:ink xmlns:inkml="http://www.w3.org/2003/InkML">
+  <inkml:definitions>
+    <inkml:context xml:id="ctx0">
+      <inkml:inkSource xml:id="inkSrc0">
+        <inkml:traceFormat>
+          <inkml:channel name="X" type="integer" min="-2.14748E9" max="2.14748E9" units="cm"/>
+          <inkml:channel name="Y" type="integer" min="-2.14748E9" max="2.14748E9" units="cm"/>
+          <inkml:channel name="F" type="integer" max="32767" units="dev"/>
+        </inkml:traceFormat>
+        <inkml:channelProperties>
+          <inkml:channelProperty channel="X" name="resolution" value="1000" units="1/cm"/>
+          <inkml:channelProperty channel="Y" name="resolution" value="1000" units="1/cm"/>
+          <inkml:channelProperty channel="F" name="resolution" value="0" units="1/dev"/>
+        </inkml:channelProperties>
+      </inkml:inkSource>
+      <inkml:timestamp xml:id="ts0" timeString="2026-03-26T06:34:29.145"/>
+    </inkml:context>
+    <inkml:brush xml:id="br0">
+      <inkml:brushProperty name="width" value="0.1" units="cm"/>
+      <inkml:brushProperty name="height" value="0.1" units="cm"/>
+      <inkml:brushProperty name="color" value="#FFC114"/>
+    </inkml:brush>
+  </inkml:definitions>
+  <inkml:trace contextRef="#ctx0" brushRef="#br0">4 56 24575,'0'0'0,"0"0"0,-1 0 0,1 0 0,0 0 0,0 0 0,0 0 0,0 0 0,0 0 0,0 0 0,-1 0 0,1 0 0,0 0 0,0 0 0,0-1 0,0 1 0,0 0 0,0 0 0,0 0 0,-1 0 0,1 0 0,0 0 0,0 0 0,0 0 0,0 0 0,0 0 0,0-1 0,0 1 0,0 0 0,0 0 0,0 0 0,0 0 0,0 0 0,0 0 0,0-1 0,0 1 0,0 0 0,-1 0 0,1 0 0,0 0 0,1 0 0,-1 0 0,0-1 0,0 1 0,0 0 0,0 0 0,0 0 0,0 0 0,0 0 0,0 0 0,0-1 0,0 1 0,0 0 0,0 0 0,0 0 0,0 0 0,0 0 0,0 0 0,1 0 0,-1 0 0,0-1 0,10-11 0,15-8 0,-10 15 0,1 1 0,-1 1 0,1 0 0,0 2 0,-1-1 0,1 2 0,0 0 0,0 1 0,-1 1 0,1 0 0,0 1 0,-1 1 0,0 0 0,0 1 0,27 13 0,-40-17 0,0-1 0,0 1 0,-1 0 0,1 0 0,0 0 0,-1 0 0,1 0 0,-1 0 0,1 0 0,-1 0 0,0 1 0,1-1 0,-1 1 0,0-1 0,0 1 0,0-1 0,0 1 0,0-1 0,-1 1 0,1 0 0,0 0 0,-1-1 0,1 4 0,-1-2 0,0-1 0,-1 0 0,1 0 0,-1 1 0,0-1 0,0 0 0,0 0 0,0 0 0,0 0 0,0 0 0,0 0 0,-1-1 0,1 1 0,-1 0 0,1-1 0,-4 3 0,-5 4 0,0 0 0,-1-1 0,0 0 0,-1-1 0,-18 8 0,26-13 0,-1 1 0,1 0 0,0 0 0,-1 0 0,1 0 0,0 1 0,0 0 0,-4 4 0,7-7 0,1 0 0,0 1 0,0-1 0,-1 1 0,1-1 0,0 1 0,0-1 0,0 0 0,-1 1 0,1-1 0,0 1 0,0-1 0,0 1 0,0-1 0,0 1 0,0-1 0,0 1 0,0-1 0,0 0 0,0 1 0,0-1 0,1 1 0,-1-1 0,0 1 0,0-1 0,0 1 0,1-1 0,-1 0 0,0 1 0,1 0 0,24 15 0,0-7 0,45 11 0,-54-17 0,0 1 0,-1 0 0,1 1 0,-1 1 0,0 0 0,0 1 0,-1 1 0,19 13 0,-31-20 0,-1 0 0,0 0 0,1 0 0,-1 0 0,0 0 0,1 0 0,-1 1 0,0-1 0,0 0 0,0 1 0,0-1 0,0 1 0,0-1 0,-1 1 0,1-1 0,0 1 0,-1 0 0,1-1 0,-1 1 0,0 0 0,0-1 0,1 1 0,-1 0 0,0-1 0,0 1 0,-1 0 0,1 0 0,0-1 0,0 1 0,-1 0 0,1-1 0,-1 1 0,0-1 0,1 1 0,-1 0 0,0-1 0,0 0 0,0 1 0,0-1 0,0 1 0,0-1 0,0 0 0,-1 0 0,1 0 0,0 0 0,-1 0 0,-1 1 0,-4 3 0,-1 0 0,1-1 0,-1 0 0,0 0 0,0-1 0,0 0 0,0-1 0,-11 3 0,-41 6 0,38-5 0,0-2 0,0 0 0,-1-2 0,1 0 0,0-1 0,-1-1 0,-42-7 0,62 7-57,1 0 0,0-1 1,0 1-1,0-1 0,0 1 0,0-1 0,0 0 0,0 0 0,1 0 0,-1 0 0,0 0 1,0 0-1,1-1 0,-1 1 0,1-1 0,-1 1 0,1-1 0,-1 1 0,1-1 1,0 0-1,0 0 0,0 1 0,-1-4 0</inkml:trace>
+</inkml:ink>
+</file>
+
+<file path=ppt/ink/ink123.xml><?xml version="1.0" encoding="utf-8"?>
+<inkml:ink xmlns:inkml="http://www.w3.org/2003/InkML">
+  <inkml:definitions>
+    <inkml:context xml:id="ctx0">
+      <inkml:inkSource xml:id="inkSrc0">
+        <inkml:traceFormat>
+          <inkml:channel name="X" type="integer" min="-2.14748E9" max="2.14748E9" units="cm"/>
+          <inkml:channel name="Y" type="integer" min="-2.14748E9" max="2.14748E9" units="cm"/>
+          <inkml:channel name="F" type="integer" max="32767" units="dev"/>
+        </inkml:traceFormat>
+        <inkml:channelProperties>
+          <inkml:channelProperty channel="X" name="resolution" value="1000" units="1/cm"/>
+          <inkml:channelProperty channel="Y" name="resolution" value="1000" units="1/cm"/>
+          <inkml:channelProperty channel="F" name="resolution" value="0" units="1/dev"/>
+        </inkml:channelProperties>
+      </inkml:inkSource>
+      <inkml:timestamp xml:id="ts0" timeString="2026-03-26T06:34:29.146"/>
+    </inkml:context>
+    <inkml:brush xml:id="br0">
+      <inkml:brushProperty name="width" value="0.1" units="cm"/>
+      <inkml:brushProperty name="height" value="0.1" units="cm"/>
+      <inkml:brushProperty name="color" value="#FFC114"/>
+    </inkml:brush>
+  </inkml:definitions>
+  <inkml:trace contextRef="#ctx0" brushRef="#br0">689 99 24575,'-1'-1'0,"1"-1"0,-1 0 0,0 1 0,0-1 0,0 1 0,0-1 0,0 1 0,0-1 0,0 1 0,-1 0 0,1 0 0,0 0 0,-1 0 0,1-1 0,-1 2 0,1-1 0,-4-1 0,-29-14 0,8 8 0,0 0 0,0 2 0,0 2 0,0 0 0,-1 1 0,0 2 0,0 1 0,1 1 0,-1 1 0,-34 8 0,40-6 0,1 1 0,-1 0 0,1 2 0,-32 15 0,42-16 0,1 0 0,0 1 0,0-1 0,0 2 0,1-1 0,0 1 0,0 0 0,1 1 0,0 0 0,-9 16 0,5-9 0,2 1 0,0 1 0,1 0 0,1 0 0,1 0 0,0 1 0,2 0 0,0 0 0,1 0 0,1 1 0,0-1 0,2 0 0,0 1 0,1-1 0,1 1 0,1-1 0,1 0 0,1 0 0,9 27 0,0-13 0,2 0 0,31 50 0,-38-71 0,1 1 0,0-1 0,1-1 0,0 0 0,1 0 0,0-1 0,1-1 0,22 14 0,-11-11 0,0-1 0,0-1 0,1-2 0,1 0 0,-1-2 0,51 7 0,-28-9 0,0-2 0,91-7 0,-125 3 0,0-1 0,0-1 0,0 0 0,0-1 0,-1 0 0,0-1 0,0 0 0,-1-1 0,1-1 0,-1 0 0,-1 0 0,0-1 0,0-1 0,-1 0 0,10-11 0,2-6 0,-1-1 0,-1 0 0,-1-2 0,-2 0 0,14-33 0,-25 44 0,-1 0 0,-1 0 0,-1 0 0,-1 0 0,-1-1 0,0 1 0,-1-1 0,-6-37 0,4 45 0,-1-1 0,-1 1 0,0 0 0,-1 0 0,0 1 0,-1-1 0,0 1 0,0 0 0,-1 1 0,-1-1 0,0 1 0,0 1 0,-15-13 0,-1 0 0,-1 0 0,-2 2 0,-56-33 0,44 33-341,-1 1 0,-1 2-1,-52-15 1,76 28-6485</inkml:trace>
+</inkml:ink>
+</file>
+
+<file path=ppt/ink/ink124.xml><?xml version="1.0" encoding="utf-8"?>
+<inkml:ink xmlns:inkml="http://www.w3.org/2003/InkML">
+  <inkml:definitions>
+    <inkml:context xml:id="ctx0">
+      <inkml:inkSource xml:id="inkSrc0">
+        <inkml:traceFormat>
+          <inkml:channel name="X" type="integer" min="-2.14748E9" max="2.14748E9" units="cm"/>
+          <inkml:channel name="Y" type="integer" min="-2.14748E9" max="2.14748E9" units="cm"/>
+          <inkml:channel name="F" type="integer" max="32767" units="dev"/>
+        </inkml:traceFormat>
+        <inkml:channelProperties>
+          <inkml:channelProperty channel="X" name="resolution" value="1000" units="1/cm"/>
+          <inkml:channelProperty channel="Y" name="resolution" value="1000" units="1/cm"/>
+          <inkml:channelProperty channel="F" name="resolution" value="0" units="1/dev"/>
+        </inkml:channelProperties>
+      </inkml:inkSource>
+      <inkml:timestamp xml:id="ts0" timeString="2026-03-26T06:34:29.147"/>
+    </inkml:context>
+    <inkml:brush xml:id="br0">
+      <inkml:brushProperty name="width" value="0.1" units="cm"/>
+      <inkml:brushProperty name="height" value="0.1" units="cm"/>
+      <inkml:brushProperty name="color" value="#FFC114"/>
+    </inkml:brush>
+  </inkml:definitions>
+  <inkml:trace contextRef="#ctx0" brushRef="#br0">51 108 24575,'-2'-3'0,"1"1"0,-1 0 0,1-1 0,0 1 0,-1-1 0,1 1 0,1-1 0,-1 0 0,0 1 0,1-1 0,-1 0 0,1 1 0,0-1 0,0 0 0,0 0 0,0 1 0,0-1 0,1 0 0,-1 0 0,1 1 0,0-4 0,0 4 0,0 0 0,-1-1 0,1 1 0,-1-1 0,1 1 0,-1 0 0,0-1 0,0 1 0,-1-1 0,1 1 0,0-1 0,-1 1 0,1 0 0,-1-1 0,0 1 0,0 0 0,-2-4 0,3 6 0,-1 0 0,1 0 0,-1 0 0,0 0 0,1 0 0,-1 0 0,0 0 0,1 1 0,-1-1 0,1 0 0,-1 0 0,0 1 0,1-1 0,-1 0 0,1 1 0,-1-1 0,1 1 0,-1-1 0,1 1 0,0-1 0,-1 1 0,1-1 0,-1 1 0,1-1 0,0 1 0,0-1 0,-1 1 0,1 0 0,0-1 0,0 1 0,-1 0 0,-10 21 0,9-16 0,0 0 0,0 0 0,1 1 0,0-1 0,0 0 0,0 1 0,1-1 0,0 1 0,0-1 0,0 0 0,1 1 0,0-1 0,0 1 0,1-1 0,0 0 0,0 0 0,0 0 0,1 0 0,0 0 0,0-1 0,0 1 0,1-1 0,0 0 0,8 9 0,-4-7 0,1 0 0,0 0 0,0-1 0,0 0 0,1-1 0,0 0 0,0-1 0,0 0 0,0 0 0,1-1 0,-1 0 0,1-1 0,0 0 0,11 0 0,-8-1 0,0-1 0,1 0 0,-1 0 0,0-1 0,0-1 0,14-4 0,-23 5 0,0-1 0,1 0 0,-1 0 0,0-1 0,-1 1 0,1-1 0,0 0 0,-1 0 0,1-1 0,-1 1 0,0-1 0,0 0 0,-1 0 0,1 0 0,-1-1 0,0 1 0,0-1 0,3-6 0,21-60 0,-25 66 0,-1 0 0,1-1 0,-1 1 0,-1 0 0,1 0 0,-1-1 0,0 1 0,0 0 0,0-1 0,-1 1 0,-2-10 0,3 15 0,0 0 0,0 0 0,0 0 0,0-1 0,0 1 0,0 0 0,0 0 0,0 0 0,0-1 0,-1 1 0,1 0 0,0 0 0,0 0 0,0 0 0,0-1 0,0 1 0,0 0 0,-1 0 0,1 0 0,0 0 0,0 0 0,0-1 0,-1 1 0,1 0 0,0 0 0,0 0 0,0 0 0,0 0 0,-1 0 0,1 0 0,0 0 0,0 0 0,-1 0 0,1 0 0,0 0 0,0 0 0,0 0 0,-1 0 0,1 0 0,0 0 0,0 0 0,0 0 0,-1 0 0,1 0 0,0 1 0,-9 9 0,-4 17 0,9-12 0,1 0 0,1 0 0,0 0 0,1 0 0,0 1 0,2-1 0,-1 0 0,2 0 0,5 23 0,2 51 0,-9-64 0,-1-20 0,0 1 0,1-1 0,0 1 0,0-1 0,0 1 0,1-1 0,0 1 0,0-1 0,0 1 0,3 5 0,5-5-1365</inkml:trace>
+</inkml:ink>
+</file>
+
+<file path=ppt/ink/ink125.xml><?xml version="1.0" encoding="utf-8"?>
+<inkml:ink xmlns:inkml="http://www.w3.org/2003/InkML">
+  <inkml:definitions>
+    <inkml:context xml:id="ctx0">
+      <inkml:inkSource xml:id="inkSrc0">
+        <inkml:traceFormat>
+          <inkml:channel name="X" type="integer" min="-2.14748E9" max="2.14748E9" units="cm"/>
+          <inkml:channel name="Y" type="integer" min="-2.14748E9" max="2.14748E9" units="cm"/>
+          <inkml:channel name="F" type="integer" max="32767" units="dev"/>
+        </inkml:traceFormat>
+        <inkml:channelProperties>
+          <inkml:channelProperty channel="X" name="resolution" value="1000" units="1/cm"/>
+          <inkml:channelProperty channel="Y" name="resolution" value="1000" units="1/cm"/>
+          <inkml:channelProperty channel="F" name="resolution" value="0" units="1/dev"/>
+        </inkml:channelProperties>
+      </inkml:inkSource>
       <inkml:timestamp xml:id="ts0" timeString="2026-03-26T06:34:29.148"/>
     </inkml:context>
     <inkml:brush xml:id="br0">
@@ -400,7 +1157,7 @@
 </inkml:ink>
 </file>
 
-<file path=ppt/ink/ink101.xml><?xml version="1.0" encoding="utf-8"?>
+<file path=ppt/ink/ink126.xml><?xml version="1.0" encoding="utf-8"?>
 <inkml:ink xmlns:inkml="http://www.w3.org/2003/InkML">
   <inkml:definitions>
     <inkml:context xml:id="ctx0">
@@ -428,7 +1185,7 @@
 </inkml:ink>
 </file>
 
-<file path=ppt/ink/ink102.xml><?xml version="1.0" encoding="utf-8"?>
+<file path=ppt/ink/ink127.xml><?xml version="1.0" encoding="utf-8"?>
 <inkml:ink xmlns:inkml="http://www.w3.org/2003/InkML">
   <inkml:definitions>
     <inkml:context xml:id="ctx0">
@@ -456,7 +1213,7 @@
 </inkml:ink>
 </file>
 
-<file path=ppt/ink/ink103.xml><?xml version="1.0" encoding="utf-8"?>
+<file path=ppt/ink/ink128.xml><?xml version="1.0" encoding="utf-8"?>
 <inkml:ink xmlns:inkml="http://www.w3.org/2003/InkML">
   <inkml:definitions>
     <inkml:context xml:id="ctx0">
@@ -484,7 +1241,7 @@
 </inkml:ink>
 </file>
 
-<file path=ppt/ink/ink104.xml><?xml version="1.0" encoding="utf-8"?>
+<file path=ppt/ink/ink129.xml><?xml version="1.0" encoding="utf-8"?>
 <inkml:ink xmlns:inkml="http://www.w3.org/2003/InkML">
   <inkml:definitions>
     <inkml:context xml:id="ctx0">
@@ -512,7 +1269,35 @@
 </inkml:ink>
 </file>
 
-<file path=ppt/ink/ink105.xml><?xml version="1.0" encoding="utf-8"?>
+<file path=ppt/ink/ink13.xml><?xml version="1.0" encoding="utf-8"?>
+<inkml:ink xmlns:inkml="http://www.w3.org/2003/InkML">
+  <inkml:definitions>
+    <inkml:context xml:id="ctx0">
+      <inkml:inkSource xml:id="inkSrc0">
+        <inkml:traceFormat>
+          <inkml:channel name="X" type="integer" min="-2.14748E9" max="2.14748E9" units="cm"/>
+          <inkml:channel name="Y" type="integer" min="-2.14748E9" max="2.14748E9" units="cm"/>
+          <inkml:channel name="F" type="integer" max="32767" units="dev"/>
+        </inkml:traceFormat>
+        <inkml:channelProperties>
+          <inkml:channelProperty channel="X" name="resolution" value="1000" units="1/cm"/>
+          <inkml:channelProperty channel="Y" name="resolution" value="1000" units="1/cm"/>
+          <inkml:channelProperty channel="F" name="resolution" value="0" units="1/dev"/>
+        </inkml:channelProperties>
+      </inkml:inkSource>
+      <inkml:timestamp xml:id="ts0" timeString="2026-03-26T06:32:45.108"/>
+    </inkml:context>
+    <inkml:brush xml:id="br0">
+      <inkml:brushProperty name="width" value="0.1" units="cm"/>
+      <inkml:brushProperty name="height" value="0.1" units="cm"/>
+      <inkml:brushProperty name="color" value="#FFC114"/>
+    </inkml:brush>
+  </inkml:definitions>
+  <inkml:trace contextRef="#ctx0" brushRef="#br0">182 20 24575,'0'-1'0,"0"0"0,-1 0 0,1 0 0,-1 0 0,1 0 0,-1 0 0,1 0 0,-1 0 0,0 0 0,1 0 0,-1 1 0,0-1 0,0 0 0,0 0 0,0 1 0,0-1 0,1 0 0,-1 1 0,0-1 0,0 1 0,0-1 0,-1 1 0,1 0 0,0-1 0,0 1 0,0 0 0,0 0 0,0 0 0,0 0 0,0 0 0,0 0 0,-1 0 0,1 0 0,-1 0 0,-40 5 0,35-3 0,0 1 0,1-1 0,-1 1 0,1 1 0,-8 4 0,12-7 0,1 0 0,-1 0 0,0 0 0,1 0 0,-1 1 0,1-1 0,-1 1 0,1-1 0,0 1 0,0-1 0,-1 1 0,1 0 0,0 0 0,0 0 0,1-1 0,-1 1 0,0 0 0,1 0 0,-1 0 0,1 0 0,0 0 0,-1 3 0,1-4 0,0 0 0,1-1 0,-1 1 0,0 0 0,0-1 0,0 1 0,1 0 0,-1-1 0,0 1 0,1-1 0,-1 1 0,0 0 0,1-1 0,-1 1 0,1-1 0,-1 1 0,1-1 0,-1 1 0,1-1 0,-1 0 0,1 1 0,-1-1 0,1 1 0,0-1 0,-1 0 0,1 0 0,0 1 0,-1-1 0,1 0 0,1 0 0,27-3 0,-26 2 0,1 0 0,-1 0 0,0 0 0,0 0 0,0-1 0,0 1 0,0-1 0,0 0 0,-1 0 0,1 0 0,-1 0 0,1 0 0,-1 0 0,4-5 0,-6 7 0,0 0 0,0 0 0,0 0 0,0-1 0,0 1 0,0 0 0,0 0 0,0 0 0,0 0 0,0 0 0,0-1 0,0 1 0,0 0 0,0 0 0,0 0 0,0 0 0,0 0 0,0-1 0,0 1 0,0 0 0,0 0 0,-1 0 0,1 0 0,0 0 0,0 0 0,0 0 0,0-1 0,0 1 0,0 0 0,0 0 0,0 0 0,-1 0 0,1 0 0,0 0 0,0 0 0,0 0 0,0 0 0,0 0 0,-1 0 0,1 0 0,0 0 0,0 0 0,0-1 0,0 1 0,0 0 0,-1 0 0,1 1 0,0-1 0,0 0 0,0 0 0,0 0 0,-1 0 0,-12 3 0,-10 9 0,13 1 0,13-5 0,-1-7 0,0-1 0,0 1 0,0-1 0,0 1 0,0-1 0,0 0 0,0 0 0,0 0 0,0 0 0,0 0 0,0-1 0,2 0 0,-3 1 0,1 0 0,-1 0 0,0-1 0,1 1 0,-1 0 0,0-1 0,0 1 0,1-1 0,-1 0 0,0 1 0,0-1 0,0 0 0,0 0 0,0 1 0,0-1 0,0 0 0,1-2 0,-6-6 0,-16-1 0,14 8-114,0 1 1,0 0-1,-1 0 0,1 0 0,0 1 1,0 0-1,0 0 0,-1 0 0,1 1 1,0 0-1,-12 4 0,0 0-6712</inkml:trace>
+</inkml:ink>
+</file>
+
+<file path=ppt/ink/ink130.xml><?xml version="1.0" encoding="utf-8"?>
 <inkml:ink xmlns:inkml="http://www.w3.org/2003/InkML">
   <inkml:definitions>
     <inkml:context xml:id="ctx0">
@@ -540,7 +1325,7 @@
 </inkml:ink>
 </file>
 
-<file path=ppt/ink/ink106.xml><?xml version="1.0" encoding="utf-8"?>
+<file path=ppt/ink/ink131.xml><?xml version="1.0" encoding="utf-8"?>
 <inkml:ink xmlns:inkml="http://www.w3.org/2003/InkML">
   <inkml:definitions>
     <inkml:context xml:id="ctx0">
@@ -568,7 +1353,7 @@
 </inkml:ink>
 </file>
 
-<file path=ppt/ink/ink107.xml><?xml version="1.0" encoding="utf-8"?>
+<file path=ppt/ink/ink132.xml><?xml version="1.0" encoding="utf-8"?>
 <inkml:ink xmlns:inkml="http://www.w3.org/2003/InkML">
   <inkml:definitions>
     <inkml:context xml:id="ctx0">
@@ -596,7 +1381,7 @@
 </inkml:ink>
 </file>
 
-<file path=ppt/ink/ink108.xml><?xml version="1.0" encoding="utf-8"?>
+<file path=ppt/ink/ink133.xml><?xml version="1.0" encoding="utf-8"?>
 <inkml:ink xmlns:inkml="http://www.w3.org/2003/InkML">
   <inkml:definitions>
     <inkml:context xml:id="ctx0">
@@ -624,7 +1409,7 @@
 </inkml:ink>
 </file>
 
-<file path=ppt/ink/ink11.xml><?xml version="1.0" encoding="utf-8"?>
+<file path=ppt/ink/ink134.xml><?xml version="1.0" encoding="utf-8"?>
 <inkml:ink xmlns:inkml="http://www.w3.org/2003/InkML">
   <inkml:definitions>
     <inkml:context xml:id="ctx0">
@@ -640,7 +1425,7 @@
           <inkml:channelProperty channel="F" name="resolution" value="0" units="1/dev"/>
         </inkml:channelProperties>
       </inkml:inkSource>
-      <inkml:timestamp xml:id="ts0" timeString="2026-03-26T06:31:28.589"/>
+      <inkml:timestamp xml:id="ts0" timeString="2026-05-21T16:25:47.089"/>
     </inkml:context>
     <inkml:brush xml:id="br0">
       <inkml:brushProperty name="width" value="0.1" units="cm"/>
@@ -652,7 +1437,7 @@
 </inkml:ink>
 </file>
 
-<file path=ppt/ink/ink12.xml><?xml version="1.0" encoding="utf-8"?>
+<file path=ppt/ink/ink135.xml><?xml version="1.0" encoding="utf-8"?>
 <inkml:ink xmlns:inkml="http://www.w3.org/2003/InkML">
   <inkml:definitions>
     <inkml:context xml:id="ctx0">
@@ -668,7 +1453,7 @@
           <inkml:channelProperty channel="F" name="resolution" value="0" units="1/dev"/>
         </inkml:channelProperties>
       </inkml:inkSource>
-      <inkml:timestamp xml:id="ts0" timeString="2026-03-26T06:31:29.257"/>
+      <inkml:timestamp xml:id="ts0" timeString="2026-05-21T16:25:47.090"/>
     </inkml:context>
     <inkml:brush xml:id="br0">
       <inkml:brushProperty name="width" value="0.1" units="cm"/>
@@ -677,34 +1462,6 @@
     </inkml:brush>
   </inkml:definitions>
   <inkml:trace contextRef="#ctx0" brushRef="#br0">54 2 24575,'-11'-1'0,"15"1"0,26 2 0,83 26 0,-47-13 0,-1 3 0,79 32 0,-142-50 0,0 1 0,-1 0 0,1-1 0,0 1 0,-1 0 0,1 0 0,-1 0 0,1 0 0,-1 0 0,0 0 0,1 1 0,-1-1 0,0 0 0,0 1 0,0-1 0,0 1 0,0-1 0,0 1 0,0-1 0,1 4 0,-2-4 0,0 1 0,-1-1 0,1 0 0,0 1 0,0-1 0,-1 1 0,1-1 0,-1 0 0,1 1 0,-1-1 0,0 0 0,1 1 0,-1-1 0,0 0 0,0 0 0,0 0 0,0 1 0,0-1 0,-1 1 0,-7 5 0,-1 0 0,1-1 0,-1 0 0,-20 9 0,-245 83 7,160-62-1379,93-28-5454</inkml:trace>
-</inkml:ink>
-</file>
-
-<file path=ppt/ink/ink13.xml><?xml version="1.0" encoding="utf-8"?>
-<inkml:ink xmlns:inkml="http://www.w3.org/2003/InkML">
-  <inkml:definitions>
-    <inkml:context xml:id="ctx0">
-      <inkml:inkSource xml:id="inkSrc0">
-        <inkml:traceFormat>
-          <inkml:channel name="X" type="integer" min="-2.14748E9" max="2.14748E9" units="cm"/>
-          <inkml:channel name="Y" type="integer" min="-2.14748E9" max="2.14748E9" units="cm"/>
-          <inkml:channel name="F" type="integer" max="32767" units="dev"/>
-        </inkml:traceFormat>
-        <inkml:channelProperties>
-          <inkml:channelProperty channel="X" name="resolution" value="1000" units="1/cm"/>
-          <inkml:channelProperty channel="Y" name="resolution" value="1000" units="1/cm"/>
-          <inkml:channelProperty channel="F" name="resolution" value="0" units="1/dev"/>
-        </inkml:channelProperties>
-      </inkml:inkSource>
-      <inkml:timestamp xml:id="ts0" timeString="2026-03-26T06:31:45.302"/>
-    </inkml:context>
-    <inkml:brush xml:id="br0">
-      <inkml:brushProperty name="width" value="0.1" units="cm"/>
-      <inkml:brushProperty name="height" value="0.1" units="cm"/>
-      <inkml:brushProperty name="color" value="#FFC114"/>
-    </inkml:brush>
-  </inkml:definitions>
-  <inkml:trace contextRef="#ctx0" brushRef="#br0">26 2346 24575,'-1'0'0,"0"0"0,1 0 0,-1 1 0,0-1 0,0 0 0,0 0 0,0 0 0,0-1 0,0 1 0,0 0 0,0 0 0,1 0 0,-1-1 0,0 1 0,0 0 0,0-1 0,1 1 0,-1-1 0,0 1 0,0-1 0,1 1 0,-1-1 0,0 0 0,1 1 0,-1-1 0,0 0 0,1 1 0,-1-1 0,1 0 0,0 0 0,-1 0 0,1 1 0,0-1 0,-1 0 0,1 0 0,0 0 0,0 0 0,-1 0 0,1 0 0,0 1 0,0-1 0,0 0 0,0 0 0,1 0 0,-1 0 0,0 0 0,0 0 0,0 0 0,1 1 0,-1-1 0,0 0 0,1 0 0,-1 0 0,1 1 0,-1-1 0,1 0 0,-1 0 0,2 0 0,2-6 0,0 0 0,0 1 0,1 0 0,0 0 0,9-8 0,15-11 0,-1-1 0,-1-1 0,-2-1 0,0-2 0,-2 0 0,-1-1 0,28-56 0,-22 25 0,-2-1 0,26-106 0,2-12 0,-47 149 0,-1 6 0,-1-2 0,0 1 0,-1-36 0,-2 31 0,11-60 0,-4 37 0,11-64 0,-8 52 0,-2 0 0,0-86 0,-9 19 0,-4-113 0,-21 95 0,22 138 0,-1 0 0,0 0 0,-1 0 0,0 1 0,-13-26 0,16 37 0,0 0 0,0 0 0,0 0 0,0 0 0,-1 0 0,1 0 0,-1 0 0,1 1 0,-1-1 0,0 1 0,0-1 0,0 1 0,0-1 0,0 1 0,0 0 0,0 0 0,0 0 0,0 0 0,-1 0 0,1 1 0,0-1 0,0 1 0,-1-1 0,1 1 0,-1 0 0,1 0 0,0 0 0,-1 0 0,1 0 0,0 1 0,-1-1 0,1 1 0,0 0 0,0-1 0,-1 1 0,1 0 0,0 0 0,0 0 0,0 1 0,0-1 0,0 0 0,-3 4 0,-31 23 0,0 2 0,-41 46 0,38-37 0,-45 36 0,82-75 0,5-7 0,12-19 0,23-32 0,-22 35 0,0 1 0,2 1 0,1 0 0,0 1 0,2 1 0,0 1 0,1 1 0,1 1 0,0 1 0,41-19 0,-58 31 0,0 0 0,0 1 0,1 0 0,-1 0 0,1 0 0,-1 1 0,1 0 0,0 0 0,0 1 0,-1 0 0,1 0 0,0 0 0,-1 1 0,1 0 0,0 1 0,-1-1 0,1 1 0,-1 0 0,0 1 0,0 0 0,12 6 0,210 94 0,-202-90 120,-26-13-143,1 1 1,-1-1-1,0 0 1,1 0-1,-1 0 1,0 1-1,1-1 1,-1 0-1,0 0 1,0 1-1,1-1 1,-1 0-1,0 0 1,0 1-1,1-1 1,-1 0-1,0 1 1,0-1-1,0 0 1,0 1-1,1-1 1,-1 1-1,0-1 1,0 0-1,0 1 1,0-1-1,0 0 1,0 1-1,0-1 1,0 1-1,0-1 1,0 0-1,0 1 1,0-1-1,-1 1 1,1-1-1,0 0 1,0 1-1,0-1 1,0 0-1,-1 1 1,1-1-1,0 0 1,0 1-1,0-1 1,-1 0-1,1 0 1,0 1-1,-1-1 1,1 0-1,0 0 1,-1 0-1,1 1 1,0-1-1,-1 0 1,1 0-1,0 0 1,-1 0-1,1 0 1,0 1-1,-1-1 1,1 0-1,-1 0 1,1 0-1,-1 0 1</inkml:trace>
 </inkml:ink>
 </file>
 
@@ -724,7 +1481,7 @@
           <inkml:channelProperty channel="F" name="resolution" value="0" units="1/dev"/>
         </inkml:channelProperties>
       </inkml:inkSource>
-      <inkml:timestamp xml:id="ts0" timeString="2026-03-26T06:32:08.014"/>
+      <inkml:timestamp xml:id="ts0" timeString="2026-03-26T06:32:58.213"/>
     </inkml:context>
     <inkml:brush xml:id="br0">
       <inkml:brushProperty name="width" value="0.1" units="cm"/>
@@ -732,7 +1489,7 @@
       <inkml:brushProperty name="color" value="#FFC114"/>
     </inkml:brush>
   </inkml:definitions>
-  <inkml:trace contextRef="#ctx0" brushRef="#br0">35 96 24575,'-2'0'0,"0"0"0,0 0 0,0-1 0,0 1 0,0 0 0,0-1 0,0 1 0,0-1 0,0 1 0,0-1 0,0 0 0,-2-1 0,4 2 0,-1-1 0,1 1 0,-1-1 0,1 1 0,-1-1 0,1 1 0,-1-1 0,1 0 0,0 1 0,-1-1 0,1 1 0,0-1 0,-1 0 0,1 1 0,0-1 0,0 0 0,0 1 0,0-1 0,0 0 0,0 0 0,-1 1 0,2-1 0,-1-1 0,0 0 0,1 0 0,0 0 0,0 0 0,0 0 0,0 0 0,0 0 0,1 0 0,-1 0 0,1 0 0,-1 0 0,1 1 0,0-1 0,-1 1 0,1-1 0,0 1 0,0 0 0,0-1 0,0 1 0,3-1 0,14-5 0,2 1 0,-1 0 0,1 1 0,23-2 0,-15 2 0,-22 4 0,1 1 0,-1-1 0,1 1 0,-1 0 0,0 1 0,1 0 0,-1 0 0,0 0 0,1 1 0,-1 0 0,0 1 0,0 0 0,0 0 0,-1 0 0,9 6 0,-12-7 0,-1 0 0,1 0 0,-1 0 0,1 1 0,-1-1 0,0 1 0,0-1 0,0 1 0,0 0 0,-1 0 0,1 0 0,-1 0 0,0 0 0,1 0 0,-1 0 0,-1 0 0,1 0 0,0 0 0,-1 1 0,0-1 0,0 0 0,0 1 0,0-1 0,0 0 0,-1 0 0,1 1 0,-1-1 0,0 0 0,0 0 0,0 0 0,0 0 0,-1 0 0,1 0 0,-1 0 0,0 0 0,-2 3 0,-4 4 0,1-1 0,-1 0 0,0-1 0,-1 0 0,0 0 0,-20 13 0,-13 10 0,42-30 0,-1-1 0,1 0 0,-1 1 0,1-1 0,-1 0 0,1 1 0,-1-1 0,1 0 0,-1 1 0,1-1 0,0 1 0,-1-1 0,1 1 0,0-1 0,-1 1 0,1-1 0,0 1 0,-1 0 0,1-1 0,0 1 0,0-1 0,0 1 0,0 0 0,0-1 0,0 1 0,0-1 0,0 1 0,0 0 0,0-1 0,0 1 0,0-1 0,0 1 0,0 0 0,1 0 0,21 9 0,36-6 0,-56-4 0,25 0 0,1 1 0,0 1 0,35 7 0,-55-7-195,-1 0 0,1-1 0,0 0 0,0-1 0,-1 0 0,14-1 0,-1-3-6631</inkml:trace>
+  <inkml:trace contextRef="#ctx0" brushRef="#br0">8 62 24575,'0'0'0,"0"0"0,0 0 0,-1 1 0,1-1 0,0 0 0,0 0 0,0 0 0,0 0 0,-1 0 0,1 0 0,0 0 0,0 0 0,0 0 0,0 0 0,-1 0 0,1 0 0,0 0 0,0 0 0,0 0 0,-1 0 0,1 0 0,0 0 0,0 0 0,0-1 0,0 1 0,-1 0 0,1 0 0,0 0 0,0 0 0,0 0 0,0 0 0,0 0 0,0-1 0,-1 1 0,1 0 0,0 0 0,0 0 0,0 0 0,0 0 0,0-1 0,0 1 0,0 0 0,0 0 0,0 0 0,0-1 0,0 1 0,0 0 0,0 0 0,0 0 0,0 0 0,0-1 0,0 1 0,0 0 0,0 0 0,-1 1 0,1 0 0,0 0 0,0 0 0,-1 0 0,1 1 0,0-1 0,0 0 0,0 0 0,0 0 0,0 0 0,1 1 0,-1-1 0,0 0 0,1 0 0,-1 0 0,0 0 0,1 0 0,-1 0 0,1 1 0,1 0 0,13 16 0,0 0 0,2-1 0,0-1 0,1-1 0,0 0 0,31 18 0,-20-13 0,3 2 0,0-2 0,1-1 0,1-1 0,1-2 0,40 12 0,-15-11 0,0-3 0,2-2 0,77 4 0,-101-14 0,-1-2 0,1-2 0,0-1 0,-1-2 0,1-2 0,41-12 0,25-17 0,-2-4 0,176-98 0,-199 100 0,-56 29 0,-1-1 0,0-1 0,-1-1 0,0-1 0,-1-1 0,36-32 0,-46 30-1365</inkml:trace>
 </inkml:ink>
 </file>
 
@@ -752,7 +1509,7 @@
           <inkml:channelProperty channel="F" name="resolution" value="0" units="1/dev"/>
         </inkml:channelProperties>
       </inkml:inkSource>
-      <inkml:timestamp xml:id="ts0" timeString="2026-03-26T06:32:09.896"/>
+      <inkml:timestamp xml:id="ts0" timeString="2026-03-26T06:32:59.041"/>
     </inkml:context>
     <inkml:brush xml:id="br0">
       <inkml:brushProperty name="width" value="0.1" units="cm"/>
@@ -760,7 +1517,7 @@
       <inkml:brushProperty name="color" value="#FFC114"/>
     </inkml:brush>
   </inkml:definitions>
-  <inkml:trace contextRef="#ctx0" brushRef="#br0">765 83 24575,'-1'-2'0,"0"-1"0,0 1 0,0-1 0,0 1 0,0 0 0,0-1 0,-1 1 0,1 0 0,-1 0 0,1 0 0,-1 0 0,0 0 0,0 0 0,0 0 0,0 1 0,0-1 0,0 1 0,-1 0 0,1-1 0,0 1 0,-4-1 0,-52-20 0,34 16 0,-1 2 0,1 0 0,0 2 0,-1 1 0,0 1 0,1 1 0,-26 4 0,2 3 0,0 1 0,-72 25 0,107-30 0,0 1 0,0 0 0,0 1 0,1 0 0,0 1 0,0 0 0,1 1 0,0 1 0,0 0 0,1 0 0,0 0 0,1 2 0,0-1 0,1 1 0,0 0 0,0 1 0,1 0 0,1 0 0,0 1 0,0-1 0,2 1 0,-1 0 0,2 1 0,0-1 0,0 1 0,1-1 0,0 25 0,3-21 0,1 0 0,0 0 0,1 0 0,1 0 0,0-1 0,2 0 0,0 0 0,0 0 0,2 0 0,0-1 0,0 0 0,2-1 0,0 0 0,0 0 0,1-1 0,1-1 0,0 0 0,1 0 0,21 14 0,-8-5 0,-6-5 0,0 0 0,1-2 0,0 0 0,32 14 0,-34-20 0,0-1 0,0-1 0,1-1 0,-1-1 0,40 4 0,-32-5 0,-1-1 0,1-1 0,-1-2 0,1 0 0,0-2 0,-1-1 0,0-1 0,0-1 0,-1-1 0,1-2 0,41-20 0,-43 18 0,-2-2 0,30-21 0,-44 27 0,0 0 0,0 0 0,-1 0 0,0-1 0,-1 0 0,0 0 0,0-1 0,9-18 0,-8 10 0,0 0 0,-2-1 0,0 0 0,-1 0 0,0 0 0,0-26 0,-2 1 0,-7-71 0,4 103 0,-1 1 0,1 0 0,-1-1 0,-1 1 0,0 0 0,-1 0 0,0 1 0,0-1 0,-1 1 0,0-1 0,-1 2 0,-7-11 0,4 10 0,0 0 0,0 0 0,0 1 0,-1 1 0,-1 0 0,1 0 0,-1 1 0,0 0 0,-23-8 0,3 2-195,0 1 0,-1 1 0,0 2 0,0 1 0,-1 1 0,-33 0 0,45 6-6631</inkml:trace>
+  <inkml:trace contextRef="#ctx0" brushRef="#br0">1 8 24575,'0'-8'0,"0"11"0,8 17 0,3-6 0,0 0 0,1 0 0,0-1 0,2-1 0,-1 0 0,1-1 0,19 11 0,-12-7 0,0 1 0,24 24 0,-44-39-34,0-1 0,0 1 0,-1 0 0,1-1 0,0 1-1,0 0 1,-1 0 0,1-1 0,0 1 0,-1 0 0,1 0 0,-1 0 0,1 0-1,-1 0 1,0 0 0,1 0 0,-1 0 0,0 0 0,0 0 0,1 0-1,-1 0 1,0 0 0,0 0 0,0 0 0,0 0 0,0 0 0,-1 0 0,1 0-1,0 0 1,0 0 0,-1 0 0,1-1 0,0 1 0,-1 0 0,1 0 0,-1 0-1,1 0 1,-1 0 0,-1 1 0</inkml:trace>
 </inkml:ink>
 </file>
 
@@ -780,7 +1537,7 @@
           <inkml:channelProperty channel="F" name="resolution" value="0" units="1/dev"/>
         </inkml:channelProperties>
       </inkml:inkSource>
-      <inkml:timestamp xml:id="ts0" timeString="2026-03-26T06:32:11.211"/>
+      <inkml:timestamp xml:id="ts0" timeString="2026-03-26T06:33:00.608"/>
     </inkml:context>
     <inkml:brush xml:id="br0">
       <inkml:brushProperty name="width" value="0.1" units="cm"/>
@@ -788,7 +1545,7 @@
       <inkml:brushProperty name="color" value="#FFC114"/>
     </inkml:brush>
   </inkml:definitions>
-  <inkml:trace contextRef="#ctx0" brushRef="#br0">4 56 24575,'0'0'0,"0"0"0,-1 0 0,1 0 0,0 0 0,0 0 0,0 0 0,0 0 0,0 0 0,0 0 0,-1 0 0,1 0 0,0 0 0,0 0 0,0-1 0,0 1 0,0 0 0,0 0 0,0 0 0,-1 0 0,1 0 0,0 0 0,0 0 0,0 0 0,0 0 0,0 0 0,0-1 0,0 1 0,0 0 0,0 0 0,0 0 0,0 0 0,0 0 0,0 0 0,0-1 0,0 1 0,0 0 0,-1 0 0,1 0 0,0 0 0,1 0 0,-1 0 0,0-1 0,0 1 0,0 0 0,0 0 0,0 0 0,0 0 0,0 0 0,0 0 0,0-1 0,0 1 0,0 0 0,0 0 0,0 0 0,0 0 0,0 0 0,0 0 0,1 0 0,-1 0 0,0-1 0,10-11 0,15-8 0,-10 15 0,1 1 0,-1 1 0,1 0 0,0 2 0,-1-1 0,1 2 0,0 0 0,0 1 0,-1 1 0,1 0 0,0 1 0,-1 1 0,0 0 0,0 1 0,27 13 0,-40-17 0,0-1 0,0 1 0,-1 0 0,1 0 0,0 0 0,-1 0 0,1 0 0,-1 0 0,1 0 0,-1 0 0,0 1 0,1-1 0,-1 1 0,0-1 0,0 1 0,0-1 0,0 1 0,0-1 0,-1 1 0,1 0 0,0 0 0,-1-1 0,1 4 0,-1-2 0,0-1 0,-1 0 0,1 0 0,-1 1 0,0-1 0,0 0 0,0 0 0,0 0 0,0 0 0,0 0 0,0 0 0,-1-1 0,1 1 0,-1 0 0,1-1 0,-4 3 0,-5 4 0,0 0 0,-1-1 0,0 0 0,-1-1 0,-18 8 0,26-13 0,-1 1 0,1 0 0,0 0 0,-1 0 0,1 0 0,0 1 0,0 0 0,-4 4 0,7-7 0,1 0 0,0 1 0,0-1 0,-1 1 0,1-1 0,0 1 0,0-1 0,0 0 0,-1 1 0,1-1 0,0 1 0,0-1 0,0 1 0,0-1 0,0 1 0,0-1 0,0 1 0,0-1 0,0 0 0,0 1 0,0-1 0,1 1 0,-1-1 0,0 1 0,0-1 0,0 1 0,1-1 0,-1 0 0,0 1 0,1 0 0,24 15 0,0-7 0,45 11 0,-54-17 0,0 1 0,-1 0 0,1 1 0,-1 1 0,0 0 0,0 1 0,-1 1 0,19 13 0,-31-20 0,-1 0 0,0 0 0,1 0 0,-1 0 0,0 0 0,1 0 0,-1 1 0,0-1 0,0 0 0,0 1 0,0-1 0,0 1 0,0-1 0,-1 1 0,1-1 0,0 1 0,-1 0 0,1-1 0,-1 1 0,0 0 0,0-1 0,1 1 0,-1 0 0,0-1 0,0 1 0,-1 0 0,1 0 0,0-1 0,0 1 0,-1 0 0,1-1 0,-1 1 0,0-1 0,1 1 0,-1 0 0,0-1 0,0 0 0,0 1 0,0-1 0,0 1 0,0-1 0,0 0 0,-1 0 0,1 0 0,0 0 0,-1 0 0,-1 1 0,-4 3 0,-1 0 0,1-1 0,-1 0 0,0 0 0,0-1 0,0 0 0,0-1 0,-11 3 0,-41 6 0,38-5 0,0-2 0,0 0 0,-1-2 0,1 0 0,0-1 0,-1-1 0,-42-7 0,62 7-57,1 0 0,0-1 1,0 1-1,0-1 0,0 1 0,0-1 0,0 0 0,0 0 0,1 0 0,-1 0 0,0 0 1,0 0-1,1-1 0,-1 1 0,1-1 0,-1 1 0,1-1 0,-1 1 0,1-1 1,0 0-1,0 0 0,0 1 0,-1-4 0</inkml:trace>
+  <inkml:trace contextRef="#ctx0" brushRef="#br0">317 240 24575,'-8'-2'0,"1"0"0,-1-1 0,1 0 0,-1 0 0,1 0 0,0-1 0,0 0 0,1-1 0,-1 0 0,1 0 0,0 0 0,-6-7 0,-4-2 0,-66-47 0,-24-19 0,105 79-91,-1-1 0,1 1 0,-1-1 0,1 1 0,-1-1 0,1 0 0,0 0 0,0 0 0,0 1 0,0-1 0,0 0 0,1 0 0,-1 0 0,0-3 0</inkml:trace>
 </inkml:ink>
 </file>
 
@@ -808,7 +1565,7 @@
           <inkml:channelProperty channel="F" name="resolution" value="0" units="1/dev"/>
         </inkml:channelProperties>
       </inkml:inkSource>
-      <inkml:timestamp xml:id="ts0" timeString="2026-03-26T06:32:12.971"/>
+      <inkml:timestamp xml:id="ts0" timeString="2026-03-26T06:33:01.148"/>
     </inkml:context>
     <inkml:brush xml:id="br0">
       <inkml:brushProperty name="width" value="0.1" units="cm"/>
@@ -816,7 +1573,7 @@
       <inkml:brushProperty name="color" value="#FFC114"/>
     </inkml:brush>
   </inkml:definitions>
-  <inkml:trace contextRef="#ctx0" brushRef="#br0">689 99 24575,'-1'-1'0,"1"-1"0,-1 0 0,0 1 0,0-1 0,0 1 0,0-1 0,0 1 0,0-1 0,0 1 0,-1 0 0,1 0 0,0 0 0,-1 0 0,1-1 0,-1 2 0,1-1 0,-4-1 0,-29-14 0,8 8 0,0 0 0,0 2 0,0 2 0,0 0 0,-1 1 0,0 2 0,0 1 0,1 1 0,-1 1 0,-34 8 0,40-6 0,1 1 0,-1 0 0,1 2 0,-32 15 0,42-16 0,1 0 0,0 1 0,0-1 0,0 2 0,1-1 0,0 1 0,0 0 0,1 1 0,0 0 0,-9 16 0,5-9 0,2 1 0,0 1 0,1 0 0,1 0 0,1 0 0,0 1 0,2 0 0,0 0 0,1 0 0,1 1 0,0-1 0,2 0 0,0 1 0,1-1 0,1 1 0,1-1 0,1 0 0,1 0 0,9 27 0,0-13 0,2 0 0,31 50 0,-38-71 0,1 1 0,0-1 0,1-1 0,0 0 0,1 0 0,0-1 0,1-1 0,22 14 0,-11-11 0,0-1 0,0-1 0,1-2 0,1 0 0,-1-2 0,51 7 0,-28-9 0,0-2 0,91-7 0,-125 3 0,0-1 0,0-1 0,0 0 0,0-1 0,-1 0 0,0-1 0,0 0 0,-1-1 0,1-1 0,-1 0 0,-1 0 0,0-1 0,0-1 0,-1 0 0,10-11 0,2-6 0,-1-1 0,-1 0 0,-1-2 0,-2 0 0,14-33 0,-25 44 0,-1 0 0,-1 0 0,-1 0 0,-1 0 0,-1-1 0,0 1 0,-1-1 0,-6-37 0,4 45 0,-1-1 0,-1 1 0,0 0 0,-1 0 0,0 1 0,-1-1 0,0 1 0,0 0 0,-1 1 0,-1-1 0,0 1 0,0 1 0,-15-13 0,-1 0 0,-1 0 0,-2 2 0,-56-33 0,44 33-341,-1 1 0,-1 2-1,-52-15 1,76 28-6485</inkml:trace>
+  <inkml:trace contextRef="#ctx0" brushRef="#br0">504 1 24575,'-12'1'0,"-1"0"0,0 1 0,1 0 0,0 1 0,-1 0 0,1 1 0,1 0 0,-20 11 0,-9 7 0,-40 31 0,23-15 0,-122 94-1365,160-120-5461</inkml:trace>
 </inkml:ink>
 </file>
 
@@ -836,7 +1593,7 @@
           <inkml:channelProperty channel="F" name="resolution" value="0" units="1/dev"/>
         </inkml:channelProperties>
       </inkml:inkSource>
-      <inkml:timestamp xml:id="ts0" timeString="2026-03-26T06:32:15.318"/>
+      <inkml:timestamp xml:id="ts0" timeString="2026-03-26T06:33:03.021"/>
     </inkml:context>
     <inkml:brush xml:id="br0">
       <inkml:brushProperty name="width" value="0.1" units="cm"/>
@@ -844,7 +1601,7 @@
       <inkml:brushProperty name="color" value="#FFC114"/>
     </inkml:brush>
   </inkml:definitions>
-  <inkml:trace contextRef="#ctx0" brushRef="#br0">51 108 24575,'-2'-3'0,"1"1"0,-1 0 0,1-1 0,0 1 0,-1-1 0,1 1 0,1-1 0,-1 0 0,0 1 0,1-1 0,-1 0 0,1 1 0,0-1 0,0 0 0,0 0 0,0 1 0,0-1 0,1 0 0,-1 0 0,1 1 0,0-4 0,0 4 0,0 0 0,-1-1 0,1 1 0,-1-1 0,1 1 0,-1 0 0,0-1 0,0 1 0,-1-1 0,1 1 0,0-1 0,-1 1 0,1 0 0,-1-1 0,0 1 0,0 0 0,-2-4 0,3 6 0,-1 0 0,1 0 0,-1 0 0,0 0 0,1 0 0,-1 0 0,0 0 0,1 1 0,-1-1 0,1 0 0,-1 0 0,0 1 0,1-1 0,-1 0 0,1 1 0,-1-1 0,1 1 0,-1-1 0,1 1 0,0-1 0,-1 1 0,1-1 0,-1 1 0,1-1 0,0 1 0,0-1 0,-1 1 0,1 0 0,0-1 0,0 1 0,-1 0 0,-10 21 0,9-16 0,0 0 0,0 0 0,1 1 0,0-1 0,0 0 0,0 1 0,1-1 0,0 1 0,0-1 0,0 0 0,1 1 0,0-1 0,0 1 0,1-1 0,0 0 0,0 0 0,0 0 0,1 0 0,0 0 0,0-1 0,0 1 0,1-1 0,0 0 0,8 9 0,-4-7 0,1 0 0,0 0 0,0-1 0,0 0 0,1-1 0,0 0 0,0-1 0,0 0 0,0 0 0,1-1 0,-1 0 0,1-1 0,0 0 0,11 0 0,-8-1 0,0-1 0,1 0 0,-1 0 0,0-1 0,0-1 0,14-4 0,-23 5 0,0-1 0,1 0 0,-1 0 0,0-1 0,-1 1 0,1-1 0,0 0 0,-1 0 0,1-1 0,-1 1 0,0-1 0,0 0 0,-1 0 0,1 0 0,-1-1 0,0 1 0,0-1 0,3-6 0,21-60 0,-25 66 0,-1 0 0,1-1 0,-1 1 0,-1 0 0,1 0 0,-1-1 0,0 1 0,0 0 0,0-1 0,-1 1 0,-2-10 0,3 15 0,0 0 0,0 0 0,0 0 0,0-1 0,0 1 0,0 0 0,0 0 0,0 0 0,0-1 0,-1 1 0,1 0 0,0 0 0,0 0 0,0 0 0,0-1 0,0 1 0,0 0 0,-1 0 0,1 0 0,0 0 0,0 0 0,0-1 0,-1 1 0,1 0 0,0 0 0,0 0 0,0 0 0,0 0 0,-1 0 0,1 0 0,0 0 0,0 0 0,-1 0 0,1 0 0,0 0 0,0 0 0,0 0 0,-1 0 0,1 0 0,0 0 0,0 0 0,0 0 0,-1 0 0,1 0 0,0 1 0,-9 9 0,-4 17 0,9-12 0,1 0 0,1 0 0,0 0 0,1 0 0,0 1 0,2-1 0,-1 0 0,2 0 0,5 23 0,2 51 0,-9-64 0,-1-20 0,0 1 0,1-1 0,0 1 0,0-1 0,0 1 0,1-1 0,0 1 0,0-1 0,0 1 0,3 5 0,5-5-1365</inkml:trace>
+  <inkml:trace contextRef="#ctx0" brushRef="#br0">244 64 24575,'-7'-7'0,"0"0"0,-1 0 0,0 1 0,0 0 0,0 0 0,-1 1 0,1 0 0,-15-5 0,19 9 0,0 0 0,0 0 0,0 0 0,0 1 0,0-1 0,0 1 0,0 0 0,0 0 0,0 1 0,0-1 0,1 1 0,-1 0 0,0 0 0,0 0 0,0 0 0,1 1 0,-1 0 0,1 0 0,-1 0 0,1 0 0,0 0 0,-1 0 0,1 1 0,-3 3 0,0 0 0,1-1 0,0 1 0,0 0 0,0 1 0,1-1 0,0 1 0,0-1 0,1 1 0,-1 1 0,2-1 0,-1 0 0,-2 13 0,5-17 0,-1 0 0,1 0 0,0 0 0,0 0 0,0 0 0,1 0 0,-1 1 0,1-1 0,0 0 0,-1 0 0,1 0 0,1-1 0,-1 1 0,0 0 0,1 0 0,-1-1 0,1 1 0,0 0 0,0-1 0,0 0 0,0 1 0,0-1 0,1 0 0,-1 0 0,1 0 0,-1-1 0,1 1 0,0-1 0,-1 1 0,1-1 0,0 0 0,0 0 0,4 1 0,1 0 0,1 0 0,-1 0 0,0-1 0,1 0 0,-1-1 0,1 0 0,-1 0 0,1 0 0,-1-1 0,0-1 0,1 0 0,-1 0 0,9-3 0,-12 3 0,-1 0 0,1 0 0,-1 0 0,1 0 0,-1-1 0,0 0 0,0 0 0,0 0 0,0 0 0,-1-1 0,1 1 0,-1-1 0,0 0 0,0 0 0,0 0 0,-1-1 0,1 1 0,-1-1 0,0 1 0,0-1 0,-1 0 0,0 1 0,2-9 0,-3 9 0,0 1 0,1 0 0,-2-1 0,1 1 0,0 0 0,-1-1 0,0 1 0,1 0 0,-1-1 0,0 1 0,-1 0 0,1 0 0,-1 0 0,1 0 0,-1 0 0,0 0 0,0 1 0,0-1 0,0 1 0,-1-1 0,1 1 0,-1 0 0,0 0 0,1 0 0,-1 0 0,0 0 0,0 1 0,0-1 0,0 1 0,0 0 0,-6-2 0,2 1 0,0 0 0,0 1 0,0-1 0,-1 1 0,1 1 0,0 0 0,0 0 0,0 0 0,-1 1 0,1 0 0,0 0 0,0 1 0,0-1 0,-7 5 0,4-1 0,0 1 0,0 0 0,1 1 0,0 0 0,-9 10 0,15-14 0,0 0 0,0 0 0,0 1 0,1-1 0,-1 1 0,1 0 0,-3 6 0,4-8 0,1-1 0,0 1 0,-1-1 0,1 0 0,0 1 0,0-1 0,0 1 0,0-1 0,0 0 0,0 1 0,0-1 0,0 1 0,0-1 0,1 0 0,-1 1 0,1-1 0,-1 0 0,1 1 0,-1-1 0,1 0 0,0 0 0,1 3 0,0-3 0,0 1 0,0-1 0,0 0 0,0 0 0,1 0 0,-1 0 0,0 0 0,0-1 0,1 1 0,-1-1 0,0 1 0,1-1 0,-1 0 0,1 0 0,-1 0 0,0 0 0,1 0 0,-1-1 0,0 1 0,1-1 0,-1 1 0,0-1 0,0 0 0,1 0 0,-1 0 0,0 0 0,2-2 0,3 0 0,0-1 0,0 0 0,-1 0 0,1-1 0,-1 1 0,0-1 0,7-8 0,-13 12 0,1 1 0,-1 0 0,1-1 0,-1 1 0,1-1 0,-1 1 0,1-1 0,-1 0 0,0 1 0,1-1 0,-1 1 0,0-1 0,1 0 0,-1 1 0,0-1 0,0 0 0,0 1 0,0-1 0,0 0 0,1 1 0,-1-1 0,0 0 0,0 1 0,-1-1 0,1 0 0,0 1 0,0-1 0,0 0 0,-1 0 0,-16-2 0,-26 16 0,29 0-1365</inkml:trace>
 </inkml:ink>
 </file>
 
@@ -864,7 +1621,7 @@
           <inkml:channelProperty channel="F" name="resolution" value="0" units="1/dev"/>
         </inkml:channelProperties>
       </inkml:inkSource>
-      <inkml:timestamp xml:id="ts0" timeString="2026-03-26T06:32:16.887"/>
+      <inkml:timestamp xml:id="ts0" timeString="2026-03-26T06:33:04.474"/>
     </inkml:context>
     <inkml:brush xml:id="br0">
       <inkml:brushProperty name="width" value="0.1" units="cm"/>
@@ -872,7 +1629,7 @@
       <inkml:brushProperty name="color" value="#FFC114"/>
     </inkml:brush>
   </inkml:definitions>
-  <inkml:trace contextRef="#ctx0" brushRef="#br0">710 100 24575,'-1'-2'0,"1"-1"0,-1 1 0,0 0 0,0-1 0,0 1 0,0 0 0,0-1 0,0 1 0,-1 0 0,1 0 0,-1 0 0,1 0 0,-1 0 0,0 1 0,0-1 0,0 0 0,0 1 0,0-1 0,-3-1 0,-49-25 0,44 23 0,-3 0 0,0 0 0,0 2 0,0-1 0,-1 2 0,1-1 0,-1 2 0,1 0 0,-1 1 0,0 0 0,1 1 0,-1 0 0,-23 6 0,7 0 0,-1 2 0,2 1 0,-1 2 0,-40 21 0,53-23 0,1 1 0,0 0 0,1 1 0,0 1 0,1 0 0,0 1 0,1 1 0,1 0 0,0 1 0,1 0 0,1 0 0,0 1 0,2 1 0,0 0 0,0 0 0,2 0 0,0 1 0,1 0 0,2 0 0,-3 24 0,5-31 0,1-1 0,0 1 0,1 0 0,0-1 0,1 1 0,0-1 0,1 1 0,0-1 0,1 0 0,0 0 0,0 0 0,2-1 0,10 18 0,-3-8 0,2-1 0,0 0 0,1-1 0,0-1 0,33 26 0,-30-29 0,2 0 0,0-2 0,0 0 0,1-2 0,0 0 0,38 10 0,5-3 0,76 10 0,-107-22 0,-1-2 0,1-1 0,0-2 0,-1-2 0,1 0 0,48-11 0,-61 8 0,0-1 0,0 0 0,-1-1 0,0-2 0,0 0 0,-1-1 0,0-1 0,-1 0 0,0-2 0,-1 0 0,19-19 0,-27 24 0,-1-1 0,0 0 0,-1 0 0,0-1 0,0 0 0,-1 0 0,-1-1 0,1 0 0,-2 0 0,1 0 0,-2 0 0,1-1 0,-2 1 0,0-1 0,0 0 0,-1 0 0,0 0 0,-1 0 0,0 1 0,-1-1 0,0 0 0,-1 0 0,-1 0 0,0 1 0,0-1 0,-1 1 0,0 0 0,-11-18 0,3 8 0,-1 1 0,-2 0 0,1 1 0,-2 1 0,-1 1 0,0 0 0,-1 1 0,0 1 0,-29-18 0,17 15 0,-1 1 0,-1 1 0,0 2 0,-1 2 0,-61-16 0,-58-6-1365,130 28-5461</inkml:trace>
+  <inkml:trace contextRef="#ctx0" brushRef="#br0">248 25 24575,'-3'-3'0,"-1"1"0,0-1 0,1 1 0,-1 0 0,0 0 0,0 0 0,-1 0 0,1 1 0,0-1 0,-1 1 0,1 0 0,0 0 0,-1 1 0,1 0 0,-1-1 0,1 2 0,-1-1 0,1 0 0,-1 1 0,1 0 0,-6 1 0,1 0 0,1 1 0,0 0 0,0 0 0,0 1 0,0 0 0,0 0 0,1 1 0,0 0 0,0 0 0,-6 7 0,7-6 0,0 1 0,0-1 0,1 2 0,0-1 0,1 0 0,-1 1 0,1 0 0,1 0 0,0 0 0,0 0 0,0 0 0,-1 13 0,3-18 0,1 0 0,0 1 0,0-1 0,0 0 0,0 1 0,1-1 0,-1 0 0,1 0 0,0 1 0,0-1 0,0 0 0,0 0 0,1 0 0,-1 0 0,1 0 0,0 0 0,0 0 0,0-1 0,0 1 0,0-1 0,0 1 0,1-1 0,-1 0 0,1 0 0,0 0 0,-1 0 0,1-1 0,0 1 0,0-1 0,0 1 0,0-1 0,1 0 0,-1 0 0,0-1 0,5 2 0,2 0 0,1-1 0,-1 1 0,0-2 0,0 0 0,1 0 0,-1 0 0,0-1 0,0-1 0,0 0 0,0 0 0,17-7 0,-23 8 0,-1-1 0,1 0 0,0 0 0,-1 0 0,1 0 0,-1-1 0,0 1 0,1-1 0,-1 0 0,0 0 0,-1 0 0,1 0 0,-1 0 0,1-1 0,-1 1 0,0-1 0,0 0 0,0 1 0,-1-1 0,1 0 0,-1 0 0,0 0 0,0 0 0,-1 0 0,1-1 0,-1 1 0,0 0 0,0 0 0,0 0 0,0 0 0,-2-7 0,1 9 0,1 0 0,-1-1 0,1 1 0,-1-1 0,0 1 0,0 0 0,0-1 0,0 1 0,-1 0 0,1 0 0,0 0 0,-1 0 0,0 0 0,1 0 0,-1 0 0,0 1 0,0-1 0,0 0 0,0 1 0,0 0 0,0-1 0,-1 1 0,-4-2 0,3 2 0,0 0 0,0 1 0,-1-1 0,1 1 0,0 0 0,-1 0 0,1 0 0,-1 0 0,1 1 0,0 0 0,0 0 0,-1 0 0,-4 2 0,4-1 0,1 0 0,-1 0 0,1 1 0,-1-1 0,1 1 0,0 0 0,0 0 0,0 0 0,0 1 0,1 0 0,-6 6 0,7-7 0,1-1 0,-1 0 0,1 1 0,0 0 0,0-1 0,0 1 0,0 0 0,0-1 0,1 1 0,-1 0 0,1 0 0,0 0 0,-1 0 0,1 0 0,1-1 0,-1 1 0,0 0 0,1 0 0,-1 0 0,1-1 0,1 5 0,-1-6 0,-1 1 0,1-1 0,-1 0 0,1 0 0,0 1 0,-1-1 0,1 0 0,0 0 0,0 0 0,0 0 0,0 0 0,0 0 0,0 0 0,0 0 0,0 0 0,0-1 0,0 1 0,0 0 0,1-1 0,-1 1 0,0-1 0,1 1 0,-1-1 0,0 0 0,2 1 0,0-1 0,-1 0 0,1-1 0,-1 1 0,1-1 0,-1 1 0,1-1 0,-1 0 0,0 0 0,1 0 0,-1 0 0,0 0 0,0 0 0,2-2 0,0 0 0,0 0 0,0 0 0,-1 0 0,1 0 0,-1-1 0,0 1 0,0-1 0,0 0 0,-1 0 0,1 0 0,-1 0 0,0-1 0,0 1 0,2-8 0,-4 12 0,0-1 0,0 0 0,0 0 0,0 1 0,0-1 0,0 0 0,0 0 0,0 1 0,0-1 0,0 0 0,-1 0 0,1 1 0,0-1 0,0 0 0,-1 1 0,1-1 0,-1 0 0,1 1 0,-1-1 0,1 0 0,-1 1 0,1-1 0,-1 1 0,1-1 0,-1 1 0,0-1 0,1 1 0,-1 0 0,0-1 0,1 1 0,-1 0 0,0-1 0,1 1 0,-1 0 0,0 0 0,0 0 0,-2-1 0,0 1 0,0 0 0,1 0 0,-1 0 0,0 1 0,1-1 0,-1 1 0,0-1 0,1 1 0,-6 2 0,6-2 0,1-1 0,-1 1 0,0 0 0,0 0 0,1 0 0,-1 0 0,0 1 0,1-1 0,0 0 0,-1 1 0,1-1 0,0 1 0,-1-1 0,0 3 0,2-3 0,-1 0 0,1 0 0,0 0 0,0-1 0,0 1 0,0 0 0,0 0 0,0 0 0,0-1 0,0 1 0,1 0 0,-1 0 0,0 0 0,0-1 0,1 1 0,-1 0 0,0 0 0,1-1 0,-1 1 0,1 0 0,-1-1 0,1 1 0,-1 0 0,1-1 0,0 1 0,-1-1 0,1 1 0,-1-1 0,1 1 0,0-1 0,0 1 0,-1-1 0,1 0 0,0 1 0,1-1 0,0 1 0,1 0 0,-1 0 0,0 0 0,1 0 0,-1-1 0,1 1 0,-1-1 0,1 1 0,-1-1 0,1 0 0,-1 0 0,1 0 0,-1-1 0,1 1 0,-1-1 0,1 1 0,-1-1 0,5-1 0,-7 1-25,0 1-1,0 0 0,0 0 1,0-1-1,1 1 0,-1 0 1,0 0-1,0-1 0,0 1 1,0 0-1,0-1 0,0 1 0,0 0 1,0 0-1,0-1 0,0 1 1,0 0-1,-1 0 0,1-1 1,0 1-1,0 0 0,0 0 1,0-1-1,0 1 0,0 0 1,0 0-1,-1-1 0,1 1 1,0 0-1,0 0 0,0 0 1,-1-1-1,1 1 0,0 0 1,0 0-1,-1 0 0,1 0 1,0 0-1,0-1 0,-1 1 1,1 0-1,0 0 0,0 0 1,-1 0-1,1 0 0,0 0 1,-1 0-1,1 0 0,0 0 1,0 0-1,-1 0 0</inkml:trace>
 </inkml:ink>
 </file>
 
@@ -920,7 +1677,7 @@
           <inkml:channelProperty channel="F" name="resolution" value="0" units="1/dev"/>
         </inkml:channelProperties>
       </inkml:inkSource>
-      <inkml:timestamp xml:id="ts0" timeString="2026-03-26T06:32:43.956"/>
+      <inkml:timestamp xml:id="ts0" timeString="2026-03-26T06:31:14.575"/>
     </inkml:context>
     <inkml:brush xml:id="br0">
       <inkml:brushProperty name="width" value="0.1" units="cm"/>
@@ -928,7 +1685,7 @@
       <inkml:brushProperty name="color" value="#FFC114"/>
     </inkml:brush>
   </inkml:definitions>
-  <inkml:trace contextRef="#ctx0" brushRef="#br0">122 34 24575,'0'-1'0,"0"0"0,0-1 0,0 1 0,-1-1 0,1 1 0,0 0 0,-1-1 0,1 1 0,-1 0 0,1-1 0,-1 1 0,1 0 0,-1 0 0,0-1 0,0 1 0,0 0 0,0 0 0,0 0 0,0 0 0,0 0 0,0 0 0,0 1 0,0-1 0,0 0 0,-1 0 0,1 1 0,0-1 0,-1 1 0,1-1 0,0 1 0,-1 0 0,1-1 0,0 1 0,-1 0 0,1 0 0,-1 0 0,-1 0 0,-1 0 0,0 0 0,1 1 0,-1-1 0,1 1 0,-1-1 0,0 1 0,1 0 0,-1 1 0,1-1 0,0 1 0,0-1 0,-1 1 0,-3 3 0,4-2 0,0 0 0,0 1 0,0-1 0,1 1 0,-1 0 0,1 0 0,0 0 0,0 0 0,0 0 0,0 0 0,1 1 0,0-1 0,0 0 0,0 1 0,0-1 0,1 6 0,0-8 0,0 0 0,0 0 0,0-1 0,0 1 0,0 0 0,1-1 0,-1 1 0,1 0 0,0-1 0,-1 1 0,1-1 0,0 1 0,0-1 0,0 1 0,0-1 0,0 0 0,0 1 0,0-1 0,0 0 0,1 0 0,-1 0 0,0 0 0,1 0 0,-1 0 0,1 0 0,-1 0 0,1-1 0,-1 1 0,1-1 0,0 1 0,-1-1 0,1 1 0,0-1 0,-1 0 0,1 0 0,0 0 0,0 0 0,-1 0 0,1 0 0,0 0 0,-1-1 0,1 1 0,0-1 0,2 0 0,8-2 0,1 0 0,0-1 0,16-8 0,-27 12 0,1-1 0,0 0 0,-1 0 0,1-1 0,-1 1 0,0-1 0,1 1 0,-1-1 0,0 0 0,0 0 0,0 1 0,0-2 0,0 1 0,0 0 0,-1 0 0,1 0 0,-1-1 0,1 1 0,-1-1 0,0 1 0,1-6 0,-2 7 0,0 1 0,0-1 0,0 0 0,0 1 0,0-1 0,0 0 0,0 1 0,0-1 0,0 0 0,-1 1 0,1-1 0,0 1 0,-1-1 0,1 0 0,0 1 0,-1-1 0,1 1 0,0-1 0,-1 1 0,1-1 0,-1 1 0,1-1 0,-1 1 0,0 0 0,1-1 0,-1 1 0,1 0 0,-1-1 0,0 1 0,0-1 0,-27 2 0,24 0 0,-1 1 0,1-1 0,-1 1 0,1-1 0,-1 1 0,1 1 0,0-1 0,0 1 0,-5 3 0,-16 19-1365</inkml:trace>
+  <inkml:trace contextRef="#ctx0" brushRef="#br0">252 0 24575,'-5'1'0,"1"0"0,-1 0 0,1 0 0,0 0 0,-1 1 0,1 0 0,0-1 0,0 2 0,0-1 0,0 0 0,0 1 0,1 0 0,-1-1 0,1 2 0,0-1 0,0 0 0,-4 6 0,-6 8 0,0 1 0,-12 23 0,21-34 0,-8 18 0,1 1 0,1 0 0,1 1 0,2 0 0,-8 49 0,-6 24 0,9-48 0,-5 68 0,10-64 0,6-34 0,0 0 0,2 1 0,0-1 0,8 37 0,-3-28 0,0 44 0,-6-44 0,0 14 0,2-1 0,11 65 0,-4-61 0,2-1 0,3 0 0,1 0 0,3-2 0,1 0 0,2-1 0,43 65 0,2-3 0,72 162 0,-46-84 0,-75-152 0,5 11 0,2-1 0,36 50 0,-36-70-1365</inkml:trace>
 </inkml:ink>
 </file>
 
@@ -948,7 +1705,7 @@
           <inkml:channelProperty channel="F" name="resolution" value="0" units="1/dev"/>
         </inkml:channelProperties>
       </inkml:inkSource>
-      <inkml:timestamp xml:id="ts0" timeString="2026-03-26T06:32:45.108"/>
+      <inkml:timestamp xml:id="ts0" timeString="2026-03-26T06:31:15.497"/>
     </inkml:context>
     <inkml:brush xml:id="br0">
       <inkml:brushProperty name="width" value="0.1" units="cm"/>
@@ -956,7 +1713,7 @@
       <inkml:brushProperty name="color" value="#FFC114"/>
     </inkml:brush>
   </inkml:definitions>
-  <inkml:trace contextRef="#ctx0" brushRef="#br0">182 20 24575,'0'-1'0,"0"0"0,-1 0 0,1 0 0,-1 0 0,1 0 0,-1 0 0,1 0 0,-1 0 0,0 0 0,1 0 0,-1 1 0,0-1 0,0 0 0,0 0 0,0 1 0,0-1 0,1 0 0,-1 1 0,0-1 0,0 1 0,0-1 0,-1 1 0,1 0 0,0-1 0,0 1 0,0 0 0,0 0 0,0 0 0,0 0 0,0 0 0,0 0 0,-1 0 0,1 0 0,-1 0 0,-40 5 0,35-3 0,0 1 0,1-1 0,-1 1 0,1 1 0,-8 4 0,12-7 0,1 0 0,-1 0 0,0 0 0,1 0 0,-1 1 0,1-1 0,-1 1 0,1-1 0,0 1 0,0-1 0,-1 1 0,1 0 0,0 0 0,0 0 0,1-1 0,-1 1 0,0 0 0,1 0 0,-1 0 0,1 0 0,0 0 0,-1 3 0,1-4 0,0 0 0,1-1 0,-1 1 0,0 0 0,0-1 0,0 1 0,1 0 0,-1-1 0,0 1 0,1-1 0,-1 1 0,0 0 0,1-1 0,-1 1 0,1-1 0,-1 1 0,1-1 0,-1 1 0,1-1 0,-1 0 0,1 1 0,-1-1 0,1 1 0,0-1 0,-1 0 0,1 0 0,0 1 0,-1-1 0,1 0 0,1 0 0,27-3 0,-26 2 0,1 0 0,-1 0 0,0 0 0,0 0 0,0-1 0,0 1 0,0-1 0,0 0 0,-1 0 0,1 0 0,-1 0 0,1 0 0,-1 0 0,4-5 0,-6 7 0,0 0 0,0 0 0,0 0 0,0-1 0,0 1 0,0 0 0,0 0 0,0 0 0,0 0 0,0 0 0,0-1 0,0 1 0,0 0 0,0 0 0,0 0 0,0 0 0,0 0 0,0-1 0,0 1 0,0 0 0,0 0 0,-1 0 0,1 0 0,0 0 0,0 0 0,0 0 0,0-1 0,0 1 0,0 0 0,0 0 0,0 0 0,-1 0 0,1 0 0,0 0 0,0 0 0,0 0 0,0 0 0,0 0 0,-1 0 0,1 0 0,0 0 0,0 0 0,0-1 0,0 1 0,0 0 0,-1 0 0,1 1 0,0-1 0,0 0 0,0 0 0,0 0 0,-1 0 0,-12 3 0,-10 9 0,13 1 0,13-5 0,-1-7 0,0-1 0,0 1 0,0-1 0,0 1 0,0-1 0,0 0 0,0 0 0,0 0 0,0 0 0,0 0 0,0-1 0,2 0 0,-3 1 0,1 0 0,-1 0 0,0-1 0,1 1 0,-1 0 0,0-1 0,0 1 0,1-1 0,-1 0 0,0 1 0,0-1 0,0 0 0,0 0 0,0 1 0,0-1 0,0 0 0,1-2 0,-6-6 0,-16-1 0,14 8-114,0 1 1,0 0-1,-1 0 0,1 0 0,0 1 1,0 0-1,0 0 0,-1 0 0,1 1 1,0 0-1,-12 4 0,0 0-6712</inkml:trace>
+  <inkml:trace contextRef="#ctx0" brushRef="#br0">9 263 24575,'-5'-20'0,"1"-4"0,8 21 0,9 10 0,91 89 0,-74-65 0,58 45 0,-74-66 0,4 4 0,1-1 0,0 0 0,0-2 0,35 15 0,-50-24 0,1 0 0,0-1 0,0 0 0,-1 0 0,1 0 0,0 0 0,0-1 0,0 1 0,0-1 0,0-1 0,0 1 0,0-1 0,0 0 0,0 0 0,-1 0 0,1 0 0,0-1 0,-1 0 0,1 0 0,-1 0 0,1-1 0,-1 0 0,0 1 0,0-2 0,0 1 0,6-7 0,17-23 0,-2-2 0,-1-1 0,36-73 0,-2 3 0,-48 91-195,-1-2 0,0 1 0,-1-1 0,-1 0 0,-1-1 0,5-22 0,-7 16-6631</inkml:trace>
 </inkml:ink>
 </file>
 
@@ -976,7 +1733,7 @@
           <inkml:channelProperty channel="F" name="resolution" value="0" units="1/dev"/>
         </inkml:channelProperties>
       </inkml:inkSource>
-      <inkml:timestamp xml:id="ts0" timeString="2026-03-26T06:32:58.213"/>
+      <inkml:timestamp xml:id="ts0" timeString="2026-03-26T06:31:16.683"/>
     </inkml:context>
     <inkml:brush xml:id="br0">
       <inkml:brushProperty name="width" value="0.1" units="cm"/>
@@ -984,7 +1741,7 @@
       <inkml:brushProperty name="color" value="#FFC114"/>
     </inkml:brush>
   </inkml:definitions>
-  <inkml:trace contextRef="#ctx0" brushRef="#br0">8 62 24575,'0'0'0,"0"0"0,0 0 0,-1 1 0,1-1 0,0 0 0,0 0 0,0 0 0,0 0 0,-1 0 0,1 0 0,0 0 0,0 0 0,0 0 0,0 0 0,-1 0 0,1 0 0,0 0 0,0 0 0,0 0 0,-1 0 0,1 0 0,0 0 0,0 0 0,0-1 0,0 1 0,-1 0 0,1 0 0,0 0 0,0 0 0,0 0 0,0 0 0,0 0 0,0-1 0,-1 1 0,1 0 0,0 0 0,0 0 0,0 0 0,0 0 0,0-1 0,0 1 0,0 0 0,0 0 0,0 0 0,0-1 0,0 1 0,0 0 0,0 0 0,0 0 0,0 0 0,0-1 0,0 1 0,0 0 0,0 0 0,-1 1 0,1 0 0,0 0 0,0 0 0,-1 0 0,1 1 0,0-1 0,0 0 0,0 0 0,0 0 0,0 0 0,1 1 0,-1-1 0,0 0 0,1 0 0,-1 0 0,0 0 0,1 0 0,-1 0 0,1 1 0,1 0 0,13 16 0,0 0 0,2-1 0,0-1 0,1-1 0,0 0 0,31 18 0,-20-13 0,3 2 0,0-2 0,1-1 0,1-1 0,1-2 0,40 12 0,-15-11 0,0-3 0,2-2 0,77 4 0,-101-14 0,-1-2 0,1-2 0,0-1 0,-1-2 0,1-2 0,41-12 0,25-17 0,-2-4 0,176-98 0,-199 100 0,-56 29 0,-1-1 0,0-1 0,-1-1 0,0-1 0,-1-1 0,36-32 0,-46 30-1365</inkml:trace>
+  <inkml:trace contextRef="#ctx0" brushRef="#br0">2 32 24575,'-1'-14'0,"1"-4"0,6 28 0,1 17 0,-1 1 0,-2 0 0,0 1 0,-1 33 0,-1-22 0,8 49 0,0-16 0,-5-64-1365</inkml:trace>
 </inkml:ink>
 </file>
 
@@ -1004,7 +1761,7 @@
           <inkml:channelProperty channel="F" name="resolution" value="0" units="1/dev"/>
         </inkml:channelProperties>
       </inkml:inkSource>
-      <inkml:timestamp xml:id="ts0" timeString="2026-03-26T06:32:59.041"/>
+      <inkml:timestamp xml:id="ts0" timeString="2026-03-26T06:31:17.997"/>
     </inkml:context>
     <inkml:brush xml:id="br0">
       <inkml:brushProperty name="width" value="0.1" units="cm"/>
@@ -1012,7 +1769,7 @@
       <inkml:brushProperty name="color" value="#FFC114"/>
     </inkml:brush>
   </inkml:definitions>
-  <inkml:trace contextRef="#ctx0" brushRef="#br0">1 8 24575,'0'-8'0,"0"11"0,8 17 0,3-6 0,0 0 0,1 0 0,0-1 0,2-1 0,-1 0 0,1-1 0,19 11 0,-12-7 0,0 1 0,24 24 0,-44-39-34,0-1 0,0 1 0,-1 0 0,1-1 0,0 1-1,0 0 1,-1 0 0,1-1 0,0 1 0,-1 0 0,1 0 0,-1 0 0,1 0-1,-1 0 1,0 0 0,1 0 0,-1 0 0,0 0 0,0 0 0,1 0-1,-1 0 1,0 0 0,0 0 0,0 0 0,0 0 0,0 0 0,-1 0 0,1 0-1,0 0 1,0 0 0,-1 0 0,1-1 0,0 1 0,-1 0 0,1 0 0,-1 0-1,1 0 1,-1 0 0,-1 1 0</inkml:trace>
+  <inkml:trace contextRef="#ctx0" brushRef="#br0">611 51 24575,'-6'-5'0,"1"0"0,-1 0 0,-1 1 0,1-1 0,0 1 0,-1 1 0,0-1 0,0 1 0,0 1 0,0-1 0,-1 1 0,1 0 0,-1 1 0,1-1 0,-11 1 0,6 1 0,-1 1 0,1 0 0,-1 1 0,1 1 0,0 0 0,0 0 0,0 1 0,-19 9 0,2 3 0,1 0 0,1 2 0,0 1 0,1 2 0,1 0 0,-29 33 0,38-37 0,0 2 0,1 0 0,1 1 0,1 0 0,1 1 0,1 0 0,0 1 0,-11 36 0,18-41 0,0 0 0,1 0 0,0 0 0,2 0 0,0 0 0,1 0 0,0 1 0,2-1 0,0 0 0,1 0 0,0 0 0,11 29 0,-8-30 0,0 0 0,1 0 0,1 0 0,1-1 0,0-1 0,1 1 0,0-1 0,1-1 0,1 0 0,0 0 0,0-1 0,2-1 0,-1 0 0,1-1 0,1-1 0,0 0 0,0-1 0,1 0 0,0-1 0,0-1 0,19 5 0,-2-1 0,0-1 0,0-2 0,1-1 0,-1-1 0,56 0 0,-74-6 0,0 0 0,0 0 0,-1-2 0,1 1 0,-1-2 0,1 0 0,-1-1 0,-1 0 0,1-1 0,16-10 0,-10 2 0,0 0 0,0-2 0,-2 0 0,0-1 0,22-26 0,-29 29 0,0 0 0,-1 0 0,0 0 0,-1-2 0,-1 1 0,0-1 0,-1 0 0,-1-1 0,0 1 0,4-24 0,-4 13 0,-4 18 0,0 0 0,0 0 0,0 0 0,-1 0 0,-1 0 0,0-1 0,0 1 0,-1 0 0,-3-17 0,0 8 0,0-4 0,0 1 0,-2 0 0,-1 0 0,0 0 0,-1 1 0,-2 1 0,-20-35 0,16 36 0,-2 0 0,1 1 0,-2 0 0,0 2 0,-30-22 0,3 8 0,-63-32 0,38 36-204,51 20-957,-2-1-5665</inkml:trace>
 </inkml:ink>
 </file>
 
@@ -1032,7 +1789,7 @@
           <inkml:channelProperty channel="F" name="resolution" value="0" units="1/dev"/>
         </inkml:channelProperties>
       </inkml:inkSource>
-      <inkml:timestamp xml:id="ts0" timeString="2026-03-26T06:33:00.608"/>
+      <inkml:timestamp xml:id="ts0" timeString="2026-03-26T06:31:21.555"/>
     </inkml:context>
     <inkml:brush xml:id="br0">
       <inkml:brushProperty name="width" value="0.1" units="cm"/>
@@ -1040,7 +1797,7 @@
       <inkml:brushProperty name="color" value="#FFC114"/>
     </inkml:brush>
   </inkml:definitions>
-  <inkml:trace contextRef="#ctx0" brushRef="#br0">317 240 24575,'-8'-2'0,"1"0"0,-1-1 0,1 0 0,-1 0 0,1 0 0,0-1 0,0 0 0,1-1 0,-1 0 0,1 0 0,0 0 0,-6-7 0,-4-2 0,-66-47 0,-24-19 0,105 79-91,-1-1 0,1 1 0,-1-1 0,1 1 0,-1-1 0,1 0 0,0 0 0,0 0 0,0 1 0,0-1 0,0 0 0,1 0 0,-1 0 0,0-3 0</inkml:trace>
+  <inkml:trace contextRef="#ctx0" brushRef="#br0">56 325 24575,'0'-1'0,"0"0"0,0 1 0,0-1 0,0 0 0,0 0 0,0 0 0,0 1 0,0-1 0,0 0 0,0 0 0,0 1 0,-1-1 0,1 0 0,0 0 0,-1 1 0,1-1 0,0 0 0,-1 1 0,1-1 0,-1 0 0,1 1 0,-1-1 0,1 1 0,-1-1 0,1 1 0,-1-1 0,0 1 0,1-1 0,-1 1 0,0 0 0,1-1 0,-1 1 0,0 0 0,1-1 0,-1 1 0,0 0 0,0 0 0,1 0 0,-1 0 0,0 0 0,0 0 0,-1 0 0,1 0 0,-1 1 0,1-1 0,0 1 0,-1-1 0,1 1 0,0-1 0,-1 1 0,1 0 0,0 0 0,0 0 0,0 0 0,0 0 0,0 0 0,0 0 0,0 0 0,0 0 0,0 0 0,0 1 0,1-1 0,-1 0 0,0 1 0,1-1 0,-1 2 0,-2 10 0,0 0 0,1 1 0,1-1 0,0 1 0,1-1 0,2 22 0,18 81 0,-15-94 0,7 31 0,-10-46 0,-8-36 0,0 4 0,1 0 0,2 0 0,0-1 0,2 1 0,3-48 0,28-143 0,-28 205 0,0-7 0,1 0 0,1 0 0,1 0 0,8-23 0,-11 36 0,1 1 0,-1-1 0,0 1 0,1 0 0,0 0 0,0 0 0,1 0 0,-1 0 0,1 1 0,-1 0 0,1-1 0,0 1 0,0 0 0,1 1 0,-1-1 0,0 1 0,1 0 0,0 0 0,-1 0 0,1 1 0,5-1 0,-6 1 0,1 1 0,-1-1 0,0 1 0,0 1 0,0-1 0,1 0 0,-1 1 0,0 0 0,0 0 0,0 0 0,0 1 0,0-1 0,0 1 0,-1 0 0,1 0 0,0 0 0,-1 0 0,0 1 0,1 0 0,-1-1 0,0 1 0,0 0 0,-1 1 0,1-1 0,3 5 0,4 9 0,1 0 0,-2 1 0,14 36 0,-20-45 0,18 50 0,14 71 0,-32-113 0,-1-1 0,0 33 0,4 20 0,1-55-1365</inkml:trace>
 </inkml:ink>
 </file>
 
@@ -1060,7 +1817,7 @@
           <inkml:channelProperty channel="F" name="resolution" value="0" units="1/dev"/>
         </inkml:channelProperties>
       </inkml:inkSource>
-      <inkml:timestamp xml:id="ts0" timeString="2026-03-26T06:33:01.148"/>
+      <inkml:timestamp xml:id="ts0" timeString="2026-03-26T06:31:22"/>
     </inkml:context>
     <inkml:brush xml:id="br0">
       <inkml:brushProperty name="width" value="0.1" units="cm"/>
@@ -1068,7 +1825,7 @@
       <inkml:brushProperty name="color" value="#FFC114"/>
     </inkml:brush>
   </inkml:definitions>
-  <inkml:trace contextRef="#ctx0" brushRef="#br0">504 1 24575,'-12'1'0,"-1"0"0,0 1 0,1 0 0,0 1 0,-1 0 0,1 1 0,1 0 0,-20 11 0,-9 7 0,-40 31 0,23-15 0,-122 94-1365,160-120-5461</inkml:trace>
+  <inkml:trace contextRef="#ctx0" brushRef="#br0">22 73 24575,'-5'0'0,"-5"0"0,3-5 0,7 0 0,8-5 0,7 0 0,5 1 0,4 3 0,1 1 0,2-1 0,0-1 0,0 1 0,-5 2-8191</inkml:trace>
 </inkml:ink>
 </file>
 
@@ -1088,7 +1845,7 @@
           <inkml:channelProperty channel="F" name="resolution" value="0" units="1/dev"/>
         </inkml:channelProperties>
       </inkml:inkSource>
-      <inkml:timestamp xml:id="ts0" timeString="2026-03-26T06:33:03.021"/>
+      <inkml:timestamp xml:id="ts0" timeString="2026-03-26T06:31:22.733"/>
     </inkml:context>
     <inkml:brush xml:id="br0">
       <inkml:brushProperty name="width" value="0.1" units="cm"/>
@@ -1096,7 +1853,7 @@
       <inkml:brushProperty name="color" value="#FFC114"/>
     </inkml:brush>
   </inkml:definitions>
-  <inkml:trace contextRef="#ctx0" brushRef="#br0">244 64 24575,'-7'-7'0,"0"0"0,-1 0 0,0 1 0,0 0 0,0 0 0,-1 1 0,1 0 0,-15-5 0,19 9 0,0 0 0,0 0 0,0 0 0,0 1 0,0-1 0,0 1 0,0 0 0,0 0 0,0 1 0,0-1 0,1 1 0,-1 0 0,0 0 0,0 0 0,0 0 0,1 1 0,-1 0 0,1 0 0,-1 0 0,1 0 0,0 0 0,-1 0 0,1 1 0,-3 3 0,0 0 0,1-1 0,0 1 0,0 0 0,0 1 0,1-1 0,0 1 0,0-1 0,1 1 0,-1 1 0,2-1 0,-1 0 0,-2 13 0,5-17 0,-1 0 0,1 0 0,0 0 0,0 0 0,0 0 0,1 0 0,-1 1 0,1-1 0,0 0 0,-1 0 0,1 0 0,1-1 0,-1 1 0,0 0 0,1 0 0,-1-1 0,1 1 0,0 0 0,0-1 0,0 0 0,0 1 0,0-1 0,1 0 0,-1 0 0,1 0 0,-1-1 0,1 1 0,0-1 0,-1 1 0,1-1 0,0 0 0,0 0 0,4 1 0,1 0 0,1 0 0,-1 0 0,0-1 0,1 0 0,-1-1 0,1 0 0,-1 0 0,1 0 0,-1-1 0,0-1 0,1 0 0,-1 0 0,9-3 0,-12 3 0,-1 0 0,1 0 0,-1 0 0,1 0 0,-1-1 0,0 0 0,0 0 0,0 0 0,0 0 0,-1-1 0,1 1 0,-1-1 0,0 0 0,0 0 0,0 0 0,-1-1 0,1 1 0,-1-1 0,0 1 0,0-1 0,-1 0 0,0 1 0,2-9 0,-3 9 0,0 1 0,1 0 0,-2-1 0,1 1 0,0 0 0,-1-1 0,0 1 0,1 0 0,-1-1 0,0 1 0,-1 0 0,1 0 0,-1 0 0,1 0 0,-1 0 0,0 0 0,0 1 0,0-1 0,0 1 0,-1-1 0,1 1 0,-1 0 0,0 0 0,1 0 0,-1 0 0,0 0 0,0 1 0,0-1 0,0 1 0,0 0 0,-6-2 0,2 1 0,0 0 0,0 1 0,0-1 0,-1 1 0,1 1 0,0 0 0,0 0 0,0 0 0,-1 1 0,1 0 0,0 0 0,0 1 0,0-1 0,-7 5 0,4-1 0,0 1 0,0 0 0,1 1 0,0 0 0,-9 10 0,15-14 0,0 0 0,0 0 0,0 1 0,1-1 0,-1 1 0,1 0 0,-3 6 0,4-8 0,1-1 0,0 1 0,-1-1 0,1 0 0,0 1 0,0-1 0,0 1 0,0-1 0,0 0 0,0 1 0,0-1 0,0 1 0,0-1 0,1 0 0,-1 1 0,1-1 0,-1 0 0,1 1 0,-1-1 0,1 0 0,0 0 0,1 3 0,0-3 0,0 1 0,0-1 0,0 0 0,0 0 0,1 0 0,-1 0 0,0 0 0,0-1 0,1 1 0,-1-1 0,0 1 0,1-1 0,-1 0 0,1 0 0,-1 0 0,0 0 0,1 0 0,-1-1 0,0 1 0,1-1 0,-1 1 0,0-1 0,0 0 0,1 0 0,-1 0 0,0 0 0,2-2 0,3 0 0,0-1 0,0 0 0,-1 0 0,1-1 0,-1 1 0,0-1 0,7-8 0,-13 12 0,1 1 0,-1 0 0,1-1 0,-1 1 0,1-1 0,-1 1 0,1-1 0,-1 0 0,0 1 0,1-1 0,-1 1 0,0-1 0,1 0 0,-1 1 0,0-1 0,0 0 0,0 1 0,0-1 0,0 0 0,1 1 0,-1-1 0,0 0 0,0 1 0,-1-1 0,1 0 0,0 1 0,0-1 0,0 0 0,-1 0 0,-16-2 0,-26 16 0,29 0-1365</inkml:trace>
+  <inkml:trace contextRef="#ctx0" brushRef="#br0">272 1 24575,'-34'0'0,"3"-1"0,-51 6 0,73-4 0,0 1 0,0 0 0,0 0 0,0 1 0,0 0 0,1 0 0,0 1 0,0 0 0,0 1 0,-9 6 0,16-10 0,-1 0 0,1 0 0,-1 0 0,1 0 0,-1 0 0,1 1 0,0-1 0,0 0 0,-1 1 0,1-1 0,0 1 0,0 0 0,1-1 0,-1 1 0,0-1 0,0 1 0,1 0 0,-1 0 0,1-1 0,0 1 0,-1 0 0,1 0 0,0 0 0,0 0 0,0 1 0,1 0 0,0-1 0,1 1 0,-1-1 0,0 0 0,1 0 0,-1 0 0,1 1 0,0-2 0,0 1 0,0 0 0,0 0 0,0 0 0,0-1 0,0 1 0,3 0 0,10 6 0,1 0 0,0-2 0,32 9 0,11 0 0,50 14 0,-99-25 0,1 0 0,0 1 0,-1 0 0,0 0 0,0 1 0,0 1 0,10 9 0,-19-16 0,0 1 0,0 0 0,0 0 0,0 0 0,0 0 0,0 0 0,0 0 0,0 0 0,0 1 0,-1-1 0,1 0 0,0 0 0,-1 1 0,1-1 0,-1 0 0,1 1 0,-1-1 0,0 0 0,0 1 0,0-1 0,1 1 0,-1-1 0,0 1 0,-1-1 0,1 0 0,0 1 0,0-1 0,-1 2 0,-1 0 0,1-1 0,-1 1 0,0-1 0,0 1 0,0-1 0,0 0 0,-1 0 0,1 0 0,0 0 0,-1 0 0,0 0 0,-3 1 0,-8 4 0,0-1 0,0-1 0,-1 0 0,-17 4 0,-4-4 0,1-1 0,0-2 0,-1-2 0,-56-5 0,90 5-52,0 0-1,0 0 1,0 0-1,0-1 1,0 1-1,1 0 1,-1-1-1,0 1 1,0-1-1,1 0 1,-1 0-1,0 0 1,1 1-1,-1-1 1,0-1-1,1 1 1,0 0-1,-1 0 1,1-1-1,0 1 0,-1 0 1,1-1-1,0 0 1,0 1-1,-1-3 1</inkml:trace>
 </inkml:ink>
 </file>
 
@@ -1116,7 +1873,7 @@
           <inkml:channelProperty channel="F" name="resolution" value="0" units="1/dev"/>
         </inkml:channelProperties>
       </inkml:inkSource>
-      <inkml:timestamp xml:id="ts0" timeString="2026-03-26T06:33:04.474"/>
+      <inkml:timestamp xml:id="ts0" timeString="2026-03-26T06:31:23.490"/>
     </inkml:context>
     <inkml:brush xml:id="br0">
       <inkml:brushProperty name="width" value="0.1" units="cm"/>
@@ -1124,7 +1881,7 @@
       <inkml:brushProperty name="color" value="#FFC114"/>
     </inkml:brush>
   </inkml:definitions>
-  <inkml:trace contextRef="#ctx0" brushRef="#br0">248 25 24575,'-3'-3'0,"-1"1"0,0-1 0,1 1 0,-1 0 0,0 0 0,0 0 0,-1 0 0,1 1 0,0-1 0,-1 1 0,1 0 0,0 0 0,-1 1 0,1 0 0,-1-1 0,1 2 0,-1-1 0,1 0 0,-1 1 0,1 0 0,-6 1 0,1 0 0,1 1 0,0 0 0,0 0 0,0 1 0,0 0 0,0 0 0,1 1 0,0 0 0,0 0 0,-6 7 0,7-6 0,0 1 0,0-1 0,1 2 0,0-1 0,1 0 0,-1 1 0,1 0 0,1 0 0,0 0 0,0 0 0,0 0 0,-1 13 0,3-18 0,1 0 0,0 1 0,0-1 0,0 0 0,0 1 0,1-1 0,-1 0 0,1 0 0,0 1 0,0-1 0,0 0 0,0 0 0,1 0 0,-1 0 0,1 0 0,0 0 0,0 0 0,0-1 0,0 1 0,0-1 0,0 1 0,1-1 0,-1 0 0,1 0 0,0 0 0,-1 0 0,1-1 0,0 1 0,0-1 0,0 1 0,0-1 0,1 0 0,-1 0 0,0-1 0,5 2 0,2 0 0,1-1 0,-1 1 0,0-2 0,0 0 0,1 0 0,-1 0 0,0-1 0,0-1 0,0 0 0,0 0 0,17-7 0,-23 8 0,-1-1 0,1 0 0,0 0 0,-1 0 0,1 0 0,-1-1 0,0 1 0,1-1 0,-1 0 0,0 0 0,-1 0 0,1 0 0,-1 0 0,1-1 0,-1 1 0,0-1 0,0 0 0,0 1 0,-1-1 0,1 0 0,-1 0 0,0 0 0,0 0 0,-1 0 0,1-1 0,-1 1 0,0 0 0,0 0 0,0 0 0,0 0 0,-2-7 0,1 9 0,1 0 0,-1-1 0,1 1 0,-1-1 0,0 1 0,0 0 0,0-1 0,0 1 0,-1 0 0,1 0 0,0 0 0,-1 0 0,0 0 0,1 0 0,-1 0 0,0 1 0,0-1 0,0 0 0,0 1 0,0 0 0,0-1 0,-1 1 0,-4-2 0,3 2 0,0 0 0,0 1 0,-1-1 0,1 1 0,0 0 0,-1 0 0,1 0 0,-1 0 0,1 1 0,0 0 0,0 0 0,-1 0 0,-4 2 0,4-1 0,1 0 0,-1 0 0,1 1 0,-1-1 0,1 1 0,0 0 0,0 0 0,0 0 0,0 1 0,1 0 0,-6 6 0,7-7 0,1-1 0,-1 0 0,1 1 0,0 0 0,0-1 0,0 1 0,0 0 0,0-1 0,1 1 0,-1 0 0,1 0 0,0 0 0,-1 0 0,1 0 0,1-1 0,-1 1 0,0 0 0,1 0 0,-1 0 0,1-1 0,1 5 0,-1-6 0,-1 1 0,1-1 0,-1 0 0,1 0 0,0 1 0,-1-1 0,1 0 0,0 0 0,0 0 0,0 0 0,0 0 0,0 0 0,0 0 0,0 0 0,0 0 0,0-1 0,0 1 0,0 0 0,1-1 0,-1 1 0,0-1 0,1 1 0,-1-1 0,0 0 0,2 1 0,0-1 0,-1 0 0,1-1 0,-1 1 0,1-1 0,-1 1 0,1-1 0,-1 0 0,0 0 0,1 0 0,-1 0 0,0 0 0,0 0 0,2-2 0,0 0 0,0 0 0,0 0 0,-1 0 0,1 0 0,-1-1 0,0 1 0,0-1 0,0 0 0,-1 0 0,1 0 0,-1 0 0,0-1 0,0 1 0,2-8 0,-4 12 0,0-1 0,0 0 0,0 0 0,0 1 0,0-1 0,0 0 0,0 0 0,0 1 0,0-1 0,0 0 0,-1 0 0,1 1 0,0-1 0,0 0 0,-1 1 0,1-1 0,-1 0 0,1 1 0,-1-1 0,1 0 0,-1 1 0,1-1 0,-1 1 0,1-1 0,-1 1 0,0-1 0,1 1 0,-1 0 0,0-1 0,1 1 0,-1 0 0,0-1 0,1 1 0,-1 0 0,0 0 0,0 0 0,-2-1 0,0 1 0,0 0 0,1 0 0,-1 0 0,0 1 0,1-1 0,-1 1 0,0-1 0,1 1 0,-6 2 0,6-2 0,1-1 0,-1 1 0,0 0 0,0 0 0,1 0 0,-1 0 0,0 1 0,1-1 0,0 0 0,-1 1 0,1-1 0,0 1 0,-1-1 0,0 3 0,2-3 0,-1 0 0,1 0 0,0 0 0,0-1 0,0 1 0,0 0 0,0 0 0,0 0 0,0-1 0,0 1 0,1 0 0,-1 0 0,0 0 0,0-1 0,1 1 0,-1 0 0,0 0 0,1-1 0,-1 1 0,1 0 0,-1-1 0,1 1 0,-1 0 0,1-1 0,0 1 0,-1-1 0,1 1 0,-1-1 0,1 1 0,0-1 0,0 1 0,-1-1 0,1 0 0,0 1 0,1-1 0,0 1 0,1 0 0,-1 0 0,0 0 0,1 0 0,-1-1 0,1 1 0,-1-1 0,1 1 0,-1-1 0,1 0 0,-1 0 0,1 0 0,-1-1 0,1 1 0,-1-1 0,1 1 0,-1-1 0,5-1 0,-7 1-25,0 1-1,0 0 0,0 0 1,0-1-1,1 1 0,-1 0 1,0 0-1,0-1 0,0 1 1,0 0-1,0-1 0,0 1 0,0 0 1,0 0-1,0-1 0,0 1 1,0 0-1,-1 0 0,1-1 1,0 1-1,0 0 0,0 0 1,0-1-1,0 1 0,0 0 1,0 0-1,-1-1 0,1 1 1,0 0-1,0 0 0,0 0 1,-1-1-1,1 1 0,0 0 1,0 0-1,-1 0 0,1 0 1,0 0-1,0-1 0,-1 1 1,1 0-1,0 0 0,0 0 1,-1 0-1,1 0 0,0 0 1,-1 0-1,1 0 0,0 0 1,0 0-1,-1 0 0</inkml:trace>
+  <inkml:trace contextRef="#ctx0" brushRef="#br0">5 369 24575,'-4'-3'0,"13"-5"0,13-5 0,-4 5 0,0-1 0,-1 0 0,-1-1 0,1-1 0,-1-1 0,21-19 0,-34 27 0,1 0 0,-1 0 0,1 0 0,-1-1 0,0 1 0,-1-1 0,1 1 0,-1-1 0,0 0 0,0 0 0,-1 0 0,1 0 0,-1-1 0,0 1 0,0 0 0,-1 0 0,0-1 0,0 1 0,0 0 0,-1-1 0,1 1 0,-1 0 0,0 0 0,-1-1 0,1 1 0,-1 0 0,0 0 0,-5-8 0,2 3 0,-1-1 0,0 1 0,-1 0 0,0 1 0,-1-1 0,0 2 0,0-1 0,-16-12 0,24 21 0,-1-1 0,0 1 0,0-1 0,0 0 0,1 1 0,-1 0 0,0-1 0,0 1 0,0-1 0,0 1 0,0 0 0,0 0 0,0 0 0,0-1 0,0 1 0,0 0 0,0 0 0,0 0 0,0 1 0,0-1 0,0 0 0,0 0 0,0 0 0,0 1 0,0-1 0,0 1 0,-1 0 0,1 0 0,-1 0 0,1 1 0,0-1 0,0 1 0,0-1 0,0 1 0,0 0 0,0-1 0,0 1 0,0 0 0,1 0 0,-1-1 0,0 4 0,0 3 0,-1 0 0,1 0 0,1 0 0,0 1 0,1 12 0,32 234 0,-28-168 0,-5-65 0,1 0 0,1 0 0,6 26 0,-8-46-96,0-1 62,0-1 1,0 1 0,0-1-1,0 1 1,0 0 0,0-1-1,0 1 1,0-1-1,1 1 1,-1-1 0,0 1-1,0 0 1,0-1-1,1 1 1,-1-1 0,0 1-1,1-1 1,-1 1-1,0-1 1,1 0 0,-1 1-1,1-1 1,-1 1-1,0-1 1,1 0 0,-1 1-1,1-1 1,-1 0-1,1 1 1,-1-1 0,1 0-1,0 0 1,-1 0 0,1 0-1,-1 1 1,1-1-1,1 0 1</inkml:trace>
 </inkml:ink>
 </file>
 
@@ -1144,7 +1901,7 @@
           <inkml:channelProperty channel="F" name="resolution" value="0" units="1/dev"/>
         </inkml:channelProperties>
       </inkml:inkSource>
-      <inkml:timestamp xml:id="ts0" timeString="2026-03-26T06:33:33.531"/>
+      <inkml:timestamp xml:id="ts0" timeString="2026-03-26T06:31:24.346"/>
     </inkml:context>
     <inkml:brush xml:id="br0">
       <inkml:brushProperty name="width" value="0.1" units="cm"/>
@@ -1152,7 +1909,7 @@
       <inkml:brushProperty name="color" value="#FFC114"/>
     </inkml:brush>
   </inkml:definitions>
-  <inkml:trace contextRef="#ctx0" brushRef="#br0">252 0 24575,'-5'1'0,"1"0"0,-1 0 0,1 0 0,0 0 0,-1 1 0,1 0 0,0-1 0,0 2 0,0-1 0,0 0 0,0 1 0,1 0 0,-1-1 0,1 2 0,0-1 0,0 0 0,-4 6 0,-6 8 0,0 1 0,-12 23 0,21-34 0,-8 18 0,1 1 0,1 0 0,1 1 0,2 0 0,-8 49 0,-6 24 0,9-48 0,-5 68 0,10-64 0,6-34 0,0 0 0,2 1 0,0-1 0,8 37 0,-3-28 0,0 44 0,-6-44 0,0 14 0,2-1 0,11 65 0,-4-61 0,2-1 0,3 0 0,1 0 0,3-2 0,1 0 0,2-1 0,43 65 0,2-3 0,72 162 0,-46-84 0,-75-152 0,5 11 0,2-1 0,36 50 0,-36-70-1365</inkml:trace>
+  <inkml:trace contextRef="#ctx0" brushRef="#br0">5 58 24575,'0'0'0,"-1"-1"0,1 0 0,-1 1 0,1-1 0,0 0 0,-1 1 0,1-1 0,0 0 0,0 0 0,-1 1 0,1-1 0,0 0 0,0 0 0,0 1 0,0-1 0,0 0 0,0 0 0,0 1 0,0-1 0,0 0 0,0 0 0,1 1 0,-1-1 0,0 0 0,0 0 0,1 1 0,-1-1 0,1 0 0,-1 1 0,0-1 0,1 0 0,-1 1 0,1-1 0,-1 1 0,1-1 0,0 1 0,-1-1 0,1 1 0,0-1 0,-1 1 0,1 0 0,0-1 0,-1 1 0,1 0 0,0-1 0,1 1 0,35-15 0,-14 10 0,0 1 0,43 0 0,-54 3 0,0 2 0,0-1 0,0 1 0,0 1 0,0 1 0,-1-1 0,16 7 0,-25-8 0,0-1 0,0 1 0,0 0 0,0-1 0,0 1 0,-1 0 0,1 1 0,0-1 0,-1 0 0,1 0 0,-1 1 0,1-1 0,-1 1 0,0-1 0,1 1 0,-1-1 0,0 1 0,0 0 0,0 0 0,0 0 0,-1-1 0,1 1 0,0 0 0,-1 0 0,1 0 0,-1 0 0,0 0 0,0 0 0,0 0 0,0 0 0,0 0 0,0 0 0,0 0 0,0 0 0,-1 0 0,1 0 0,-1 0 0,0 0 0,0 0 0,1 0 0,-3 2 0,0 2 0,-1-2 0,1 1 0,-1 0 0,0-1 0,0 0 0,-1 1 0,1-2 0,-1 1 0,0 0 0,0-1 0,0 0 0,0 0 0,-6 2 0,-22 5 0,-1-1 0,0-1 0,0-2 0,-49 2 0,121 7 0,30 1 0,-1 3 0,94 40 0,-156-57-124,-1 0 0,1 0 0,0-1 0,0 0 0,0 1 0,0-2-1,0 1 1,0 0 0,0-1 0,9-1 0,5-2-6702</inkml:trace>
 </inkml:ink>
 </file>
 
@@ -1172,7 +1929,7 @@
           <inkml:channelProperty channel="F" name="resolution" value="0" units="1/dev"/>
         </inkml:channelProperties>
       </inkml:inkSource>
-      <inkml:timestamp xml:id="ts0" timeString="2026-03-26T06:33:33.532"/>
+      <inkml:timestamp xml:id="ts0" timeString="2026-03-26T06:31:25.153"/>
     </inkml:context>
     <inkml:brush xml:id="br0">
       <inkml:brushProperty name="width" value="0.1" units="cm"/>
@@ -1180,7 +1937,7 @@
       <inkml:brushProperty name="color" value="#FFC114"/>
     </inkml:brush>
   </inkml:definitions>
-  <inkml:trace contextRef="#ctx0" brushRef="#br0">9 263 24575,'-5'-20'0,"1"-4"0,8 21 0,9 10 0,91 89 0,-74-65 0,58 45 0,-74-66 0,4 4 0,1-1 0,0 0 0,0-2 0,35 15 0,-50-24 0,1 0 0,0-1 0,0 0 0,-1 0 0,1 0 0,0 0 0,0-1 0,0 1 0,0-1 0,0-1 0,0 1 0,0-1 0,0 0 0,0 0 0,-1 0 0,1 0 0,0-1 0,-1 0 0,1 0 0,-1 0 0,1-1 0,-1 0 0,0 1 0,0-2 0,0 1 0,6-7 0,17-23 0,-2-2 0,-1-1 0,36-73 0,-2 3 0,-48 91-195,-1-2 0,0 1 0,-1-1 0,-1 0 0,-1-1 0,5-22 0,-7 16-6631</inkml:trace>
+  <inkml:trace contextRef="#ctx0" brushRef="#br0">239 26 24575,'-1'-1'0,"1"0"0,-1 0 0,1 0 0,-1 0 0,1 0 0,-1 0 0,0 0 0,1 0 0,-1 0 0,0 0 0,0 0 0,0 0 0,0 1 0,0-1 0,0 0 0,0 1 0,0-1 0,0 0 0,0 1 0,0 0 0,0-1 0,0 1 0,-1-1 0,1 1 0,0 0 0,0 0 0,-2 0 0,-39-5 0,37 5 0,-4-1 0,-75 1 0,80 0 0,0 0 0,0 0 0,0 1 0,0 0 0,1 0 0,-1 0 0,0 0 0,0 1 0,0-1 0,1 1 0,-1 0 0,1 0 0,-1 0 0,1 1 0,0-1 0,0 1 0,-3 3 0,5-4 0,0-1 0,1 0 0,0 1 0,-1-1 0,1 0 0,0 1 0,0-1 0,0 0 0,0 1 0,0-1 0,0 0 0,0 1 0,0-1 0,1 1 0,-1-1 0,0 0 0,1 0 0,-1 1 0,1-1 0,-1 0 0,1 0 0,0 1 0,0-1 0,-1 0 0,1 0 0,0 0 0,0 0 0,0 0 0,0 0 0,0-1 0,0 1 0,1 0 0,-1 0 0,0-1 0,0 1 0,1-1 0,0 1 0,56 27 0,-52-26 0,114 56 0,-52-23 0,-67-35 0,1 1 0,-1-1 0,1 1 0,-1 0 0,1 0 0,-1 0 0,1 0 0,-1 0 0,0 0 0,1 0 0,-1 0 0,0 0 0,0 0 0,0 1 0,0-1 0,0 1 0,0-1 0,0 1 0,-1-1 0,1 1 0,-1-1 0,1 1 0,-1-1 0,1 4 0,-1-3 0,-1-1 0,1 0 0,-1 1 0,0-1 0,0 0 0,1 1 0,-1-1 0,0 0 0,0 0 0,0 0 0,0 0 0,0 0 0,-1 0 0,1 0 0,0 0 0,0 0 0,-1-1 0,1 1 0,0 0 0,-1-1 0,1 1 0,-1-1 0,1 1 0,-1-1 0,1 0 0,-1 0 0,-2 0 0,-33 4 0,0-1 0,-1-3 0,-58-6 0,71 2-1365,3-1-5461</inkml:trace>
 </inkml:ink>
 </file>
 
@@ -1228,7 +1985,7 @@
           <inkml:channelProperty channel="F" name="resolution" value="0" units="1/dev"/>
         </inkml:channelProperties>
       </inkml:inkSource>
-      <inkml:timestamp xml:id="ts0" timeString="2026-03-26T06:33:33.533"/>
+      <inkml:timestamp xml:id="ts0" timeString="2026-03-26T06:31:28.589"/>
     </inkml:context>
     <inkml:brush xml:id="br0">
       <inkml:brushProperty name="width" value="0.1" units="cm"/>
@@ -1236,7 +1993,7 @@
       <inkml:brushProperty name="color" value="#FFC114"/>
     </inkml:brush>
   </inkml:definitions>
-  <inkml:trace contextRef="#ctx0" brushRef="#br0">2 32 24575,'-1'-14'0,"1"-4"0,6 28 0,1 17 0,-1 1 0,-2 0 0,0 1 0,-1 33 0,-1-22 0,8 49 0,0-16 0,-5-64-1365</inkml:trace>
+  <inkml:trace contextRef="#ctx0" brushRef="#br0">1 71 24575,'7'0'0,"1"-1"0,0 0 0,0-1 0,15-5 0,24-4 0,642-37 0,-201 69 0,-448-13-34,10 3 155,-48-11-212,1 0 1,-1 1-1,1-1 0,-1 0 0,0-1 1,1 1-1,-1 0 0,1-1 0,-1 0 1,0 1-1,1-1 0,-1 0 0,0 0 0,0 0 1,4-3-1</inkml:trace>
 </inkml:ink>
 </file>
 
@@ -1256,7 +2013,7 @@
           <inkml:channelProperty channel="F" name="resolution" value="0" units="1/dev"/>
         </inkml:channelProperties>
       </inkml:inkSource>
-      <inkml:timestamp xml:id="ts0" timeString="2026-03-26T06:33:33.534"/>
+      <inkml:timestamp xml:id="ts0" timeString="2026-03-26T06:31:29.257"/>
     </inkml:context>
     <inkml:brush xml:id="br0">
       <inkml:brushProperty name="width" value="0.1" units="cm"/>
@@ -1264,7 +2021,7 @@
       <inkml:brushProperty name="color" value="#FFC114"/>
     </inkml:brush>
   </inkml:definitions>
-  <inkml:trace contextRef="#ctx0" brushRef="#br0">611 51 24575,'-6'-5'0,"1"0"0,-1 0 0,-1 1 0,1-1 0,0 1 0,-1 1 0,0-1 0,0 1 0,0 1 0,0-1 0,-1 1 0,1 0 0,-1 1 0,1-1 0,-11 1 0,6 1 0,-1 1 0,1 0 0,-1 1 0,1 1 0,0 0 0,0 0 0,0 1 0,-19 9 0,2 3 0,1 0 0,1 2 0,0 1 0,1 2 0,1 0 0,-29 33 0,38-37 0,0 2 0,1 0 0,1 1 0,1 0 0,1 1 0,1 0 0,0 1 0,-11 36 0,18-41 0,0 0 0,1 0 0,0 0 0,2 0 0,0 0 0,1 0 0,0 1 0,2-1 0,0 0 0,1 0 0,0 0 0,11 29 0,-8-30 0,0 0 0,1 0 0,1 0 0,1-1 0,0-1 0,1 1 0,0-1 0,1-1 0,1 0 0,0 0 0,0-1 0,2-1 0,-1 0 0,1-1 0,1-1 0,0 0 0,0-1 0,1 0 0,0-1 0,0-1 0,19 5 0,-2-1 0,0-1 0,0-2 0,1-1 0,-1-1 0,56 0 0,-74-6 0,0 0 0,0 0 0,-1-2 0,1 1 0,-1-2 0,1 0 0,-1-1 0,-1 0 0,1-1 0,16-10 0,-10 2 0,0 0 0,0-2 0,-2 0 0,0-1 0,22-26 0,-29 29 0,0 0 0,-1 0 0,0 0 0,-1-2 0,-1 1 0,0-1 0,-1 0 0,-1-1 0,0 1 0,4-24 0,-4 13 0,-4 18 0,0 0 0,0 0 0,0 0 0,-1 0 0,-1 0 0,0-1 0,0 1 0,-1 0 0,-3-17 0,0 8 0,0-4 0,0 1 0,-2 0 0,-1 0 0,0 0 0,-1 1 0,-2 1 0,-20-35 0,16 36 0,-2 0 0,1 1 0,-2 0 0,0 2 0,-30-22 0,3 8 0,-63-32 0,38 36-204,51 20-957,-2-1-5665</inkml:trace>
+  <inkml:trace contextRef="#ctx0" brushRef="#br0">54 2 24575,'-11'-1'0,"15"1"0,26 2 0,83 26 0,-47-13 0,-1 3 0,79 32 0,-142-50 0,0 1 0,-1 0 0,1-1 0,0 1 0,-1 0 0,1 0 0,-1 0 0,1 0 0,-1 0 0,0 0 0,1 1 0,-1-1 0,0 0 0,0 1 0,0-1 0,0 1 0,0-1 0,0 1 0,0-1 0,1 4 0,-2-4 0,0 1 0,-1-1 0,1 0 0,0 1 0,0-1 0,-1 1 0,1-1 0,-1 0 0,1 1 0,-1-1 0,0 0 0,1 1 0,-1-1 0,0 0 0,0 0 0,0 0 0,0 1 0,0-1 0,-1 1 0,-7 5 0,-1 0 0,1-1 0,-1 0 0,-20 9 0,-245 83 7,160-62-1379,93-28-5454</inkml:trace>
 </inkml:ink>
 </file>
 
@@ -1284,7 +2041,7 @@
           <inkml:channelProperty channel="F" name="resolution" value="0" units="1/dev"/>
         </inkml:channelProperties>
       </inkml:inkSource>
-      <inkml:timestamp xml:id="ts0" timeString="2026-03-26T06:33:33.535"/>
+      <inkml:timestamp xml:id="ts0" timeString="2026-03-26T06:31:45.302"/>
     </inkml:context>
     <inkml:brush xml:id="br0">
       <inkml:brushProperty name="width" value="0.1" units="cm"/>
@@ -1292,7 +2049,7 @@
       <inkml:brushProperty name="color" value="#FFC114"/>
     </inkml:brush>
   </inkml:definitions>
-  <inkml:trace contextRef="#ctx0" brushRef="#br0">56 325 24575,'0'-1'0,"0"0"0,0 1 0,0-1 0,0 0 0,0 0 0,0 0 0,0 1 0,0-1 0,0 0 0,0 0 0,0 1 0,-1-1 0,1 0 0,0 0 0,-1 1 0,1-1 0,0 0 0,-1 1 0,1-1 0,-1 0 0,1 1 0,-1-1 0,1 1 0,-1-1 0,1 1 0,-1-1 0,0 1 0,1-1 0,-1 1 0,0 0 0,1-1 0,-1 1 0,0 0 0,1-1 0,-1 1 0,0 0 0,0 0 0,1 0 0,-1 0 0,0 0 0,0 0 0,-1 0 0,1 0 0,-1 1 0,1-1 0,0 1 0,-1-1 0,1 1 0,0-1 0,-1 1 0,1 0 0,0 0 0,0 0 0,0 0 0,0 0 0,0 0 0,0 0 0,0 0 0,0 0 0,0 0 0,0 1 0,1-1 0,-1 0 0,0 1 0,1-1 0,-1 2 0,-2 10 0,0 0 0,1 1 0,1-1 0,0 1 0,1-1 0,2 22 0,18 81 0,-15-94 0,7 31 0,-10-46 0,-8-36 0,0 4 0,1 0 0,2 0 0,0-1 0,2 1 0,3-48 0,28-143 0,-28 205 0,0-7 0,1 0 0,1 0 0,1 0 0,8-23 0,-11 36 0,1 1 0,-1-1 0,0 1 0,1 0 0,0 0 0,0 0 0,1 0 0,-1 0 0,1 1 0,-1 0 0,1-1 0,0 1 0,0 0 0,1 1 0,-1-1 0,0 1 0,1 0 0,0 0 0,-1 0 0,1 1 0,5-1 0,-6 1 0,1 1 0,-1-1 0,0 1 0,0 1 0,0-1 0,1 0 0,-1 1 0,0 0 0,0 0 0,0 0 0,0 1 0,0-1 0,0 1 0,-1 0 0,1 0 0,0 0 0,-1 0 0,0 1 0,1 0 0,-1-1 0,0 1 0,0 0 0,-1 1 0,1-1 0,3 5 0,4 9 0,1 0 0,-2 1 0,14 36 0,-20-45 0,18 50 0,14 71 0,-32-113 0,-1-1 0,0 33 0,4 20 0,1-55-1365</inkml:trace>
+  <inkml:trace contextRef="#ctx0" brushRef="#br0">26 2346 24575,'-1'0'0,"0"0"0,1 0 0,-1 1 0,0-1 0,0 0 0,0 0 0,0 0 0,0-1 0,0 1 0,0 0 0,0 0 0,1 0 0,-1-1 0,0 1 0,0 0 0,0-1 0,1 1 0,-1-1 0,0 1 0,0-1 0,1 1 0,-1-1 0,0 0 0,1 1 0,-1-1 0,0 0 0,1 1 0,-1-1 0,1 0 0,0 0 0,-1 0 0,1 1 0,0-1 0,-1 0 0,1 0 0,0 0 0,0 0 0,-1 0 0,1 0 0,0 1 0,0-1 0,0 0 0,0 0 0,1 0 0,-1 0 0,0 0 0,0 0 0,0 0 0,1 1 0,-1-1 0,0 0 0,1 0 0,-1 0 0,1 1 0,-1-1 0,1 0 0,-1 0 0,2 0 0,2-6 0,0 0 0,0 1 0,1 0 0,0 0 0,9-8 0,15-11 0,-1-1 0,-1-1 0,-2-1 0,0-2 0,-2 0 0,-1-1 0,28-56 0,-22 25 0,-2-1 0,26-106 0,2-12 0,-47 149 0,-1 6 0,-1-2 0,0 1 0,-1-36 0,-2 31 0,11-60 0,-4 37 0,11-64 0,-8 52 0,-2 0 0,0-86 0,-9 19 0,-4-113 0,-21 95 0,22 138 0,-1 0 0,0 0 0,-1 0 0,0 1 0,-13-26 0,16 37 0,0 0 0,0 0 0,0 0 0,0 0 0,-1 0 0,1 0 0,-1 0 0,1 1 0,-1-1 0,0 1 0,0-1 0,0 1 0,0-1 0,0 1 0,0 0 0,0 0 0,0 0 0,0 0 0,-1 0 0,1 1 0,0-1 0,0 1 0,-1-1 0,1 1 0,-1 0 0,1 0 0,0 0 0,-1 0 0,1 0 0,0 1 0,-1-1 0,1 1 0,0 0 0,0-1 0,-1 1 0,1 0 0,0 0 0,0 0 0,0 1 0,0-1 0,0 0 0,-3 4 0,-31 23 0,0 2 0,-41 46 0,38-37 0,-45 36 0,82-75 0,5-7 0,12-19 0,23-32 0,-22 35 0,0 1 0,2 1 0,1 0 0,0 1 0,2 1 0,0 1 0,1 1 0,1 1 0,0 1 0,41-19 0,-58 31 0,0 0 0,0 1 0,1 0 0,-1 0 0,1 0 0,-1 1 0,1 0 0,0 0 0,0 1 0,-1 0 0,1 0 0,0 0 0,-1 1 0,1 0 0,0 1 0,-1-1 0,1 1 0,-1 0 0,0 1 0,0 0 0,12 6 0,210 94 0,-202-90 120,-26-13-143,1 1 1,-1-1-1,0 0 1,1 0-1,-1 0 1,0 1-1,1-1 1,-1 0-1,0 0 1,0 1-1,1-1 1,-1 0-1,0 0 1,0 1-1,1-1 1,-1 0-1,0 1 1,0-1-1,0 0 1,0 1-1,1-1 1,-1 1-1,0-1 1,0 0-1,0 1 1,0-1-1,0 0 1,0 1-1,0-1 1,0 1-1,0-1 1,0 0-1,0 1 1,0-1-1,-1 1 1,1-1-1,0 0 1,0 1-1,0-1 1,0 0-1,-1 1 1,1-1-1,0 0 1,0 1-1,0-1 1,-1 0-1,1 0 1,0 1-1,-1-1 1,1 0-1,0 0 1,-1 0-1,1 1 1,0-1-1,-1 0 1,1 0-1,0 0 1,-1 0-1,1 0 1,0 1-1,-1-1 1,1 0-1,-1 0 1,1 0-1,-1 0 1</inkml:trace>
 </inkml:ink>
 </file>
 
@@ -1312,7 +2069,7 @@
           <inkml:channelProperty channel="F" name="resolution" value="0" units="1/dev"/>
         </inkml:channelProperties>
       </inkml:inkSource>
-      <inkml:timestamp xml:id="ts0" timeString="2026-03-26T06:33:33.536"/>
+      <inkml:timestamp xml:id="ts0" timeString="2026-03-26T06:32:08.014"/>
     </inkml:context>
     <inkml:brush xml:id="br0">
       <inkml:brushProperty name="width" value="0.1" units="cm"/>
@@ -1320,7 +2077,7 @@
       <inkml:brushProperty name="color" value="#FFC114"/>
     </inkml:brush>
   </inkml:definitions>
-  <inkml:trace contextRef="#ctx0" brushRef="#br0">22 73 24575,'-5'0'0,"-5"0"0,3-5 0,7 0 0,8-5 0,7 0 0,5 1 0,4 3 0,1 1 0,2-1 0,0-1 0,0 1 0,-5 2-8191</inkml:trace>
+  <inkml:trace contextRef="#ctx0" brushRef="#br0">35 96 24575,'-2'0'0,"0"0"0,0 0 0,0-1 0,0 1 0,0 0 0,0-1 0,0 1 0,0-1 0,0 1 0,0-1 0,0 0 0,-2-1 0,4 2 0,-1-1 0,1 1 0,-1-1 0,1 1 0,-1-1 0,1 1 0,-1-1 0,1 0 0,0 1 0,-1-1 0,1 1 0,0-1 0,-1 0 0,1 1 0,0-1 0,0 0 0,0 1 0,0-1 0,0 0 0,0 0 0,-1 1 0,2-1 0,-1-1 0,0 0 0,1 0 0,0 0 0,0 0 0,0 0 0,0 0 0,0 0 0,1 0 0,-1 0 0,1 0 0,-1 0 0,1 1 0,0-1 0,-1 1 0,1-1 0,0 1 0,0 0 0,0-1 0,0 1 0,3-1 0,14-5 0,2 1 0,-1 0 0,1 1 0,23-2 0,-15 2 0,-22 4 0,1 1 0,-1-1 0,1 1 0,-1 0 0,0 1 0,1 0 0,-1 0 0,0 0 0,1 1 0,-1 0 0,0 1 0,0 0 0,0 0 0,-1 0 0,9 6 0,-12-7 0,-1 0 0,1 0 0,-1 0 0,1 1 0,-1-1 0,0 1 0,0-1 0,0 1 0,0 0 0,-1 0 0,1 0 0,-1 0 0,0 0 0,1 0 0,-1 0 0,-1 0 0,1 0 0,0 0 0,-1 1 0,0-1 0,0 0 0,0 1 0,0-1 0,0 0 0,-1 0 0,1 1 0,-1-1 0,0 0 0,0 0 0,0 0 0,0 0 0,-1 0 0,1 0 0,-1 0 0,0 0 0,-2 3 0,-4 4 0,1-1 0,-1 0 0,0-1 0,-1 0 0,0 0 0,-20 13 0,-13 10 0,42-30 0,-1-1 0,1 0 0,-1 1 0,1-1 0,-1 0 0,1 1 0,-1-1 0,1 0 0,-1 1 0,1-1 0,0 1 0,-1-1 0,1 1 0,0-1 0,-1 1 0,1-1 0,0 1 0,-1 0 0,1-1 0,0 1 0,0-1 0,0 1 0,0 0 0,0-1 0,0 1 0,0-1 0,0 1 0,0 0 0,0-1 0,0 1 0,0-1 0,0 1 0,0 0 0,1 0 0,21 9 0,36-6 0,-56-4 0,25 0 0,1 1 0,0 1 0,35 7 0,-55-7-195,-1 0 0,1-1 0,0 0 0,0-1 0,-1 0 0,14-1 0,-1-3-6631</inkml:trace>
 </inkml:ink>
 </file>
 
@@ -1340,7 +2097,7 @@
           <inkml:channelProperty channel="F" name="resolution" value="0" units="1/dev"/>
         </inkml:channelProperties>
       </inkml:inkSource>
-      <inkml:timestamp xml:id="ts0" timeString="2026-03-26T06:33:33.537"/>
+      <inkml:timestamp xml:id="ts0" timeString="2026-03-26T06:32:09.896"/>
     </inkml:context>
     <inkml:brush xml:id="br0">
       <inkml:brushProperty name="width" value="0.1" units="cm"/>
@@ -1348,7 +2105,7 @@
       <inkml:brushProperty name="color" value="#FFC114"/>
     </inkml:brush>
   </inkml:definitions>
-  <inkml:trace contextRef="#ctx0" brushRef="#br0">272 1 24575,'-34'0'0,"3"-1"0,-51 6 0,73-4 0,0 1 0,0 0 0,0 0 0,0 1 0,0 0 0,1 0 0,0 1 0,0 0 0,0 1 0,-9 6 0,16-10 0,-1 0 0,1 0 0,-1 0 0,1 0 0,-1 0 0,1 1 0,0-1 0,0 0 0,-1 1 0,1-1 0,0 1 0,0 0 0,1-1 0,-1 1 0,0-1 0,0 1 0,1 0 0,-1 0 0,1-1 0,0 1 0,-1 0 0,1 0 0,0 0 0,0 0 0,0 1 0,1 0 0,0-1 0,1 1 0,-1-1 0,0 0 0,1 0 0,-1 0 0,1 1 0,0-2 0,0 1 0,0 0 0,0 0 0,0 0 0,0-1 0,0 1 0,3 0 0,10 6 0,1 0 0,0-2 0,32 9 0,11 0 0,50 14 0,-99-25 0,1 0 0,0 1 0,-1 0 0,0 0 0,0 1 0,0 1 0,10 9 0,-19-16 0,0 1 0,0 0 0,0 0 0,0 0 0,0 0 0,0 0 0,0 0 0,0 0 0,0 1 0,-1-1 0,1 0 0,0 0 0,-1 1 0,1-1 0,-1 0 0,1 1 0,-1-1 0,0 0 0,0 1 0,0-1 0,1 1 0,-1-1 0,0 1 0,-1-1 0,1 0 0,0 1 0,0-1 0,-1 2 0,-1 0 0,1-1 0,-1 1 0,0-1 0,0 1 0,0-1 0,0 0 0,-1 0 0,1 0 0,0 0 0,-1 0 0,0 0 0,-3 1 0,-8 4 0,0-1 0,0-1 0,-1 0 0,-17 4 0,-4-4 0,1-1 0,0-2 0,-1-2 0,-56-5 0,90 5-52,0 0-1,0 0 1,0 0-1,0-1 1,0 1-1,1 0 1,-1-1-1,0 1 1,0-1-1,1 0 1,-1 0-1,0 0 1,1 1-1,-1-1 1,0-1-1,1 1 1,0 0-1,-1 0 1,1-1-1,0 1 0,-1 0 1,1-1-1,0 0 1,0 1-1,-1-3 1</inkml:trace>
+  <inkml:trace contextRef="#ctx0" brushRef="#br0">765 83 24575,'-1'-2'0,"0"-1"0,0 1 0,0-1 0,0 1 0,0 0 0,0-1 0,-1 1 0,1 0 0,-1 0 0,1 0 0,-1 0 0,0 0 0,0 0 0,0 0 0,0 1 0,0-1 0,0 1 0,-1 0 0,1-1 0,0 1 0,-4-1 0,-52-20 0,34 16 0,-1 2 0,1 0 0,0 2 0,-1 1 0,0 1 0,1 1 0,-26 4 0,2 3 0,0 1 0,-72 25 0,107-30 0,0 1 0,0 0 0,0 1 0,1 0 0,0 1 0,0 0 0,1 1 0,0 1 0,0 0 0,1 0 0,0 0 0,1 2 0,0-1 0,1 1 0,0 0 0,0 1 0,1 0 0,1 0 0,0 1 0,0-1 0,2 1 0,-1 0 0,2 1 0,0-1 0,0 1 0,1-1 0,0 25 0,3-21 0,1 0 0,0 0 0,1 0 0,1 0 0,0-1 0,2 0 0,0 0 0,0 0 0,2 0 0,0-1 0,0 0 0,2-1 0,0 0 0,0 0 0,1-1 0,1-1 0,0 0 0,1 0 0,21 14 0,-8-5 0,-6-5 0,0 0 0,1-2 0,0 0 0,32 14 0,-34-20 0,0-1 0,0-1 0,1-1 0,-1-1 0,40 4 0,-32-5 0,-1-1 0,1-1 0,-1-2 0,1 0 0,0-2 0,-1-1 0,0-1 0,0-1 0,-1-1 0,1-2 0,41-20 0,-43 18 0,-2-2 0,30-21 0,-44 27 0,0 0 0,0 0 0,-1 0 0,0-1 0,-1 0 0,0 0 0,0-1 0,9-18 0,-8 10 0,0 0 0,-2-1 0,0 0 0,-1 0 0,0 0 0,0-26 0,-2 1 0,-7-71 0,4 103 0,-1 1 0,1 0 0,-1-1 0,-1 1 0,0 0 0,-1 0 0,0 1 0,0-1 0,-1 1 0,0-1 0,-1 2 0,-7-11 0,4 10 0,0 0 0,0 0 0,0 1 0,-1 1 0,-1 0 0,1 0 0,-1 1 0,0 0 0,-23-8 0,3 2-195,0 1 0,-1 1 0,0 2 0,0 1 0,-1 1 0,-33 0 0,45 6-6631</inkml:trace>
 </inkml:ink>
 </file>
 
@@ -1368,7 +2125,7 @@
           <inkml:channelProperty channel="F" name="resolution" value="0" units="1/dev"/>
         </inkml:channelProperties>
       </inkml:inkSource>
-      <inkml:timestamp xml:id="ts0" timeString="2026-03-26T06:33:33.538"/>
+      <inkml:timestamp xml:id="ts0" timeString="2026-03-26T06:32:11.211"/>
     </inkml:context>
     <inkml:brush xml:id="br0">
       <inkml:brushProperty name="width" value="0.1" units="cm"/>
@@ -1376,7 +2133,7 @@
       <inkml:brushProperty name="color" value="#FFC114"/>
     </inkml:brush>
   </inkml:definitions>
-  <inkml:trace contextRef="#ctx0" brushRef="#br0">5 369 24575,'-4'-3'0,"13"-5"0,13-5 0,-4 5 0,0-1 0,-1 0 0,-1-1 0,1-1 0,-1-1 0,21-19 0,-34 27 0,1 0 0,-1 0 0,1 0 0,-1-1 0,0 1 0,-1-1 0,1 1 0,-1-1 0,0 0 0,0 0 0,-1 0 0,1 0 0,-1-1 0,0 1 0,0 0 0,-1 0 0,0-1 0,0 1 0,0 0 0,-1-1 0,1 1 0,-1 0 0,0 0 0,-1-1 0,1 1 0,-1 0 0,0 0 0,-5-8 0,2 3 0,-1-1 0,0 1 0,-1 0 0,0 1 0,-1-1 0,0 2 0,0-1 0,-16-12 0,24 21 0,-1-1 0,0 1 0,0-1 0,0 0 0,1 1 0,-1 0 0,0-1 0,0 1 0,0-1 0,0 1 0,0 0 0,0 0 0,0 0 0,0-1 0,0 1 0,0 0 0,0 0 0,0 0 0,0 1 0,0-1 0,0 0 0,0 0 0,0 0 0,0 1 0,0-1 0,0 1 0,-1 0 0,1 0 0,-1 0 0,1 1 0,0-1 0,0 1 0,0-1 0,0 1 0,0 0 0,0-1 0,0 1 0,0 0 0,1 0 0,-1-1 0,0 4 0,0 3 0,-1 0 0,1 0 0,1 0 0,0 1 0,1 12 0,32 234 0,-28-168 0,-5-65 0,1 0 0,1 0 0,6 26 0,-8-46-96,0-1 62,0-1 1,0 1 0,0-1-1,0 1 1,0 0 0,0-1-1,0 1 1,0-1-1,1 1 1,-1-1 0,0 1-1,0 0 1,0-1-1,1 1 1,-1-1 0,0 1-1,1-1 1,-1 1-1,0-1 1,1 0 0,-1 1-1,1-1 1,-1 1-1,0-1 1,1 0 0,-1 1-1,1-1 1,-1 0-1,1 1 1,-1-1 0,1 0-1,0 0 1,-1 0 0,1 0-1,-1 1 1,1-1-1,1 0 1</inkml:trace>
+  <inkml:trace contextRef="#ctx0" brushRef="#br0">4 56 24575,'0'0'0,"0"0"0,-1 0 0,1 0 0,0 0 0,0 0 0,0 0 0,0 0 0,0 0 0,0 0 0,-1 0 0,1 0 0,0 0 0,0 0 0,0-1 0,0 1 0,0 0 0,0 0 0,0 0 0,-1 0 0,1 0 0,0 0 0,0 0 0,0 0 0,0 0 0,0 0 0,0-1 0,0 1 0,0 0 0,0 0 0,0 0 0,0 0 0,0 0 0,0 0 0,0-1 0,0 1 0,0 0 0,-1 0 0,1 0 0,0 0 0,1 0 0,-1 0 0,0-1 0,0 1 0,0 0 0,0 0 0,0 0 0,0 0 0,0 0 0,0 0 0,0-1 0,0 1 0,0 0 0,0 0 0,0 0 0,0 0 0,0 0 0,0 0 0,1 0 0,-1 0 0,0-1 0,10-11 0,15-8 0,-10 15 0,1 1 0,-1 1 0,1 0 0,0 2 0,-1-1 0,1 2 0,0 0 0,0 1 0,-1 1 0,1 0 0,0 1 0,-1 1 0,0 0 0,0 1 0,27 13 0,-40-17 0,0-1 0,0 1 0,-1 0 0,1 0 0,0 0 0,-1 0 0,1 0 0,-1 0 0,1 0 0,-1 0 0,0 1 0,1-1 0,-1 1 0,0-1 0,0 1 0,0-1 0,0 1 0,0-1 0,-1 1 0,1 0 0,0 0 0,-1-1 0,1 4 0,-1-2 0,0-1 0,-1 0 0,1 0 0,-1 1 0,0-1 0,0 0 0,0 0 0,0 0 0,0 0 0,0 0 0,0 0 0,-1-1 0,1 1 0,-1 0 0,1-1 0,-4 3 0,-5 4 0,0 0 0,-1-1 0,0 0 0,-1-1 0,-18 8 0,26-13 0,-1 1 0,1 0 0,0 0 0,-1 0 0,1 0 0,0 1 0,0 0 0,-4 4 0,7-7 0,1 0 0,0 1 0,0-1 0,-1 1 0,1-1 0,0 1 0,0-1 0,0 0 0,-1 1 0,1-1 0,0 1 0,0-1 0,0 1 0,0-1 0,0 1 0,0-1 0,0 1 0,0-1 0,0 0 0,0 1 0,0-1 0,1 1 0,-1-1 0,0 1 0,0-1 0,0 1 0,1-1 0,-1 0 0,0 1 0,1 0 0,24 15 0,0-7 0,45 11 0,-54-17 0,0 1 0,-1 0 0,1 1 0,-1 1 0,0 0 0,0 1 0,-1 1 0,19 13 0,-31-20 0,-1 0 0,0 0 0,1 0 0,-1 0 0,0 0 0,1 0 0,-1 1 0,0-1 0,0 0 0,0 1 0,0-1 0,0 1 0,0-1 0,-1 1 0,1-1 0,0 1 0,-1 0 0,1-1 0,-1 1 0,0 0 0,0-1 0,1 1 0,-1 0 0,0-1 0,0 1 0,-1 0 0,1 0 0,0-1 0,0 1 0,-1 0 0,1-1 0,-1 1 0,0-1 0,1 1 0,-1 0 0,0-1 0,0 0 0,0 1 0,0-1 0,0 1 0,0-1 0,0 0 0,-1 0 0,1 0 0,0 0 0,-1 0 0,-1 1 0,-4 3 0,-1 0 0,1-1 0,-1 0 0,0 0 0,0-1 0,0 0 0,0-1 0,-11 3 0,-41 6 0,38-5 0,0-2 0,0 0 0,-1-2 0,1 0 0,0-1 0,-1-1 0,-42-7 0,62 7-57,1 0 0,0-1 1,0 1-1,0-1 0,0 1 0,0-1 0,0 0 0,0 0 0,1 0 0,-1 0 0,0 0 1,0 0-1,1-1 0,-1 1 0,1-1 0,-1 1 0,1-1 0,-1 1 0,1-1 1,0 0-1,0 0 0,0 1 0,-1-4 0</inkml:trace>
 </inkml:ink>
 </file>
 
@@ -1396,7 +2153,7 @@
           <inkml:channelProperty channel="F" name="resolution" value="0" units="1/dev"/>
         </inkml:channelProperties>
       </inkml:inkSource>
-      <inkml:timestamp xml:id="ts0" timeString="2026-03-26T06:33:33.539"/>
+      <inkml:timestamp xml:id="ts0" timeString="2026-03-26T06:32:12.971"/>
     </inkml:context>
     <inkml:brush xml:id="br0">
       <inkml:brushProperty name="width" value="0.1" units="cm"/>
@@ -1404,7 +2161,7 @@
       <inkml:brushProperty name="color" value="#FFC114"/>
     </inkml:brush>
   </inkml:definitions>
-  <inkml:trace contextRef="#ctx0" brushRef="#br0">5 58 24575,'0'0'0,"-1"-1"0,1 0 0,-1 1 0,1-1 0,0 0 0,-1 1 0,1-1 0,0 0 0,0 0 0,-1 1 0,1-1 0,0 0 0,0 0 0,0 1 0,0-1 0,0 0 0,0 0 0,0 1 0,0-1 0,0 0 0,0 0 0,1 1 0,-1-1 0,0 0 0,0 0 0,1 1 0,-1-1 0,1 0 0,-1 1 0,0-1 0,1 0 0,-1 1 0,1-1 0,-1 1 0,1-1 0,0 1 0,-1-1 0,1 1 0,0-1 0,-1 1 0,1 0 0,0-1 0,-1 1 0,1 0 0,0-1 0,1 1 0,35-15 0,-14 10 0,0 1 0,43 0 0,-54 3 0,0 2 0,0-1 0,0 1 0,0 1 0,0 1 0,-1-1 0,16 7 0,-25-8 0,0-1 0,0 1 0,0 0 0,0-1 0,0 1 0,-1 0 0,1 1 0,0-1 0,-1 0 0,1 0 0,-1 1 0,1-1 0,-1 1 0,0-1 0,1 1 0,-1-1 0,0 1 0,0 0 0,0 0 0,0 0 0,-1-1 0,1 1 0,0 0 0,-1 0 0,1 0 0,-1 0 0,0 0 0,0 0 0,0 0 0,0 0 0,0 0 0,0 0 0,0 0 0,0 0 0,-1 0 0,1 0 0,-1 0 0,0 0 0,0 0 0,1 0 0,-3 2 0,0 2 0,-1-2 0,1 1 0,-1 0 0,0-1 0,0 0 0,-1 1 0,1-2 0,-1 1 0,0 0 0,0-1 0,0 0 0,0 0 0,-6 2 0,-22 5 0,-1-1 0,0-1 0,0-2 0,-49 2 0,121 7 0,30 1 0,-1 3 0,94 40 0,-156-57-124,-1 0 0,1 0 0,0-1 0,0 0 0,0 1 0,0-2-1,0 1 1,0 0 0,0-1 0,9-1 0,5-2-6702</inkml:trace>
+  <inkml:trace contextRef="#ctx0" brushRef="#br0">689 99 24575,'-1'-1'0,"1"-1"0,-1 0 0,0 1 0,0-1 0,0 1 0,0-1 0,0 1 0,0-1 0,0 1 0,-1 0 0,1 0 0,0 0 0,-1 0 0,1-1 0,-1 2 0,1-1 0,-4-1 0,-29-14 0,8 8 0,0 0 0,0 2 0,0 2 0,0 0 0,-1 1 0,0 2 0,0 1 0,1 1 0,-1 1 0,-34 8 0,40-6 0,1 1 0,-1 0 0,1 2 0,-32 15 0,42-16 0,1 0 0,0 1 0,0-1 0,0 2 0,1-1 0,0 1 0,0 0 0,1 1 0,0 0 0,-9 16 0,5-9 0,2 1 0,0 1 0,1 0 0,1 0 0,1 0 0,0 1 0,2 0 0,0 0 0,1 0 0,1 1 0,0-1 0,2 0 0,0 1 0,1-1 0,1 1 0,1-1 0,1 0 0,1 0 0,9 27 0,0-13 0,2 0 0,31 50 0,-38-71 0,1 1 0,0-1 0,1-1 0,0 0 0,1 0 0,0-1 0,1-1 0,22 14 0,-11-11 0,0-1 0,0-1 0,1-2 0,1 0 0,-1-2 0,51 7 0,-28-9 0,0-2 0,91-7 0,-125 3 0,0-1 0,0-1 0,0 0 0,0-1 0,-1 0 0,0-1 0,0 0 0,-1-1 0,1-1 0,-1 0 0,-1 0 0,0-1 0,0-1 0,-1 0 0,10-11 0,2-6 0,-1-1 0,-1 0 0,-1-2 0,-2 0 0,14-33 0,-25 44 0,-1 0 0,-1 0 0,-1 0 0,-1 0 0,-1-1 0,0 1 0,-1-1 0,-6-37 0,4 45 0,-1-1 0,-1 1 0,0 0 0,-1 0 0,0 1 0,-1-1 0,0 1 0,0 0 0,-1 1 0,-1-1 0,0 1 0,0 1 0,-15-13 0,-1 0 0,-1 0 0,-2 2 0,-56-33 0,44 33-341,-1 1 0,-1 2-1,-52-15 1,76 28-6485</inkml:trace>
 </inkml:ink>
 </file>
 
@@ -1424,7 +2181,7 @@
           <inkml:channelProperty channel="F" name="resolution" value="0" units="1/dev"/>
         </inkml:channelProperties>
       </inkml:inkSource>
-      <inkml:timestamp xml:id="ts0" timeString="2026-03-26T06:33:33.540"/>
+      <inkml:timestamp xml:id="ts0" timeString="2026-03-26T06:32:15.318"/>
     </inkml:context>
     <inkml:brush xml:id="br0">
       <inkml:brushProperty name="width" value="0.1" units="cm"/>
@@ -1432,7 +2189,7 @@
       <inkml:brushProperty name="color" value="#FFC114"/>
     </inkml:brush>
   </inkml:definitions>
-  <inkml:trace contextRef="#ctx0" brushRef="#br0">239 26 24575,'-1'-1'0,"1"0"0,-1 0 0,1 0 0,-1 0 0,1 0 0,-1 0 0,0 0 0,1 0 0,-1 0 0,0 0 0,0 0 0,0 0 0,0 1 0,0-1 0,0 0 0,0 1 0,0-1 0,0 0 0,0 1 0,0 0 0,0-1 0,0 1 0,-1-1 0,1 1 0,0 0 0,0 0 0,-2 0 0,-39-5 0,37 5 0,-4-1 0,-75 1 0,80 0 0,0 0 0,0 0 0,0 1 0,0 0 0,1 0 0,-1 0 0,0 0 0,0 1 0,0-1 0,1 1 0,-1 0 0,1 0 0,-1 0 0,1 1 0,0-1 0,0 1 0,-3 3 0,5-4 0,0-1 0,1 0 0,0 1 0,-1-1 0,1 0 0,0 1 0,0-1 0,0 0 0,0 1 0,0-1 0,0 0 0,0 1 0,0-1 0,1 1 0,-1-1 0,0 0 0,1 0 0,-1 1 0,1-1 0,-1 0 0,1 0 0,0 1 0,0-1 0,-1 0 0,1 0 0,0 0 0,0 0 0,0 0 0,0 0 0,0-1 0,0 1 0,1 0 0,-1 0 0,0-1 0,0 1 0,1-1 0,0 1 0,56 27 0,-52-26 0,114 56 0,-52-23 0,-67-35 0,1 1 0,-1-1 0,1 1 0,-1 0 0,1 0 0,-1 0 0,1 0 0,-1 0 0,0 0 0,1 0 0,-1 0 0,0 0 0,0 0 0,0 1 0,0-1 0,0 1 0,0-1 0,0 1 0,-1-1 0,1 1 0,-1-1 0,1 1 0,-1-1 0,1 4 0,-1-3 0,-1-1 0,1 0 0,-1 1 0,0-1 0,0 0 0,1 1 0,-1-1 0,0 0 0,0 0 0,0 0 0,0 0 0,0 0 0,-1 0 0,1 0 0,0 0 0,0 0 0,-1-1 0,1 1 0,0 0 0,-1-1 0,1 1 0,-1-1 0,1 1 0,-1-1 0,1 0 0,-1 0 0,-2 0 0,-33 4 0,0-1 0,-1-3 0,-58-6 0,71 2-1365,3-1-5461</inkml:trace>
+  <inkml:trace contextRef="#ctx0" brushRef="#br0">51 108 24575,'-2'-3'0,"1"1"0,-1 0 0,1-1 0,0 1 0,-1-1 0,1 1 0,1-1 0,-1 0 0,0 1 0,1-1 0,-1 0 0,1 1 0,0-1 0,0 0 0,0 0 0,0 1 0,0-1 0,1 0 0,-1 0 0,1 1 0,0-4 0,0 4 0,0 0 0,-1-1 0,1 1 0,-1-1 0,1 1 0,-1 0 0,0-1 0,0 1 0,-1-1 0,1 1 0,0-1 0,-1 1 0,1 0 0,-1-1 0,0 1 0,0 0 0,-2-4 0,3 6 0,-1 0 0,1 0 0,-1 0 0,0 0 0,1 0 0,-1 0 0,0 0 0,1 1 0,-1-1 0,1 0 0,-1 0 0,0 1 0,1-1 0,-1 0 0,1 1 0,-1-1 0,1 1 0,-1-1 0,1 1 0,0-1 0,-1 1 0,1-1 0,-1 1 0,1-1 0,0 1 0,0-1 0,-1 1 0,1 0 0,0-1 0,0 1 0,-1 0 0,-10 21 0,9-16 0,0 0 0,0 0 0,1 1 0,0-1 0,0 0 0,0 1 0,1-1 0,0 1 0,0-1 0,0 0 0,1 1 0,0-1 0,0 1 0,1-1 0,0 0 0,0 0 0,0 0 0,1 0 0,0 0 0,0-1 0,0 1 0,1-1 0,0 0 0,8 9 0,-4-7 0,1 0 0,0 0 0,0-1 0,0 0 0,1-1 0,0 0 0,0-1 0,0 0 0,0 0 0,1-1 0,-1 0 0,1-1 0,0 0 0,11 0 0,-8-1 0,0-1 0,1 0 0,-1 0 0,0-1 0,0-1 0,14-4 0,-23 5 0,0-1 0,1 0 0,-1 0 0,0-1 0,-1 1 0,1-1 0,0 0 0,-1 0 0,1-1 0,-1 1 0,0-1 0,0 0 0,-1 0 0,1 0 0,-1-1 0,0 1 0,0-1 0,3-6 0,21-60 0,-25 66 0,-1 0 0,1-1 0,-1 1 0,-1 0 0,1 0 0,-1-1 0,0 1 0,0 0 0,0-1 0,-1 1 0,-2-10 0,3 15 0,0 0 0,0 0 0,0 0 0,0-1 0,0 1 0,0 0 0,0 0 0,0 0 0,0-1 0,-1 1 0,1 0 0,0 0 0,0 0 0,0 0 0,0-1 0,0 1 0,0 0 0,-1 0 0,1 0 0,0 0 0,0 0 0,0-1 0,-1 1 0,1 0 0,0 0 0,0 0 0,0 0 0,0 0 0,-1 0 0,1 0 0,0 0 0,0 0 0,-1 0 0,1 0 0,0 0 0,0 0 0,0 0 0,-1 0 0,1 0 0,0 0 0,0 0 0,0 0 0,-1 0 0,1 0 0,0 1 0,-9 9 0,-4 17 0,9-12 0,1 0 0,1 0 0,0 0 0,1 0 0,0 1 0,2-1 0,-1 0 0,2 0 0,5 23 0,2 51 0,-9-64 0,-1-20 0,0 1 0,1-1 0,0 1 0,0-1 0,0 1 0,1-1 0,0 1 0,0-1 0,0 1 0,3 5 0,5-5-1365</inkml:trace>
 </inkml:ink>
 </file>
 
@@ -1452,7 +2209,7 @@
           <inkml:channelProperty channel="F" name="resolution" value="0" units="1/dev"/>
         </inkml:channelProperties>
       </inkml:inkSource>
-      <inkml:timestamp xml:id="ts0" timeString="2026-03-26T06:33:33.541"/>
+      <inkml:timestamp xml:id="ts0" timeString="2026-03-26T06:32:16.887"/>
     </inkml:context>
     <inkml:brush xml:id="br0">
       <inkml:brushProperty name="width" value="0.1" units="cm"/>
@@ -1460,7 +2217,7 @@
       <inkml:brushProperty name="color" value="#FFC114"/>
     </inkml:brush>
   </inkml:definitions>
-  <inkml:trace contextRef="#ctx0" brushRef="#br0">1 71 24575,'7'0'0,"1"-1"0,0 0 0,0-1 0,15-5 0,24-4 0,642-37 0,-201 69 0,-448-13-34,10 3 155,-48-11-212,1 0 1,-1 1-1,1-1 0,-1 0 0,0-1 1,1 1-1,-1 0 0,1-1 0,-1 0 1,0 1-1,1-1 0,-1 0 0,0 0 0,0 0 1,4-3-1</inkml:trace>
+  <inkml:trace contextRef="#ctx0" brushRef="#br0">710 100 24575,'-1'-2'0,"1"-1"0,-1 1 0,0 0 0,0-1 0,0 1 0,0 0 0,0-1 0,0 1 0,-1 0 0,1 0 0,-1 0 0,1 0 0,-1 0 0,0 1 0,0-1 0,0 0 0,0 1 0,0-1 0,-3-1 0,-49-25 0,44 23 0,-3 0 0,0 0 0,0 2 0,0-1 0,-1 2 0,1-1 0,-1 2 0,1 0 0,-1 1 0,0 0 0,1 1 0,-1 0 0,-23 6 0,7 0 0,-1 2 0,2 1 0,-1 2 0,-40 21 0,53-23 0,1 1 0,0 0 0,1 1 0,0 1 0,1 0 0,0 1 0,1 1 0,1 0 0,0 1 0,1 0 0,1 0 0,0 1 0,2 1 0,0 0 0,0 0 0,2 0 0,0 1 0,1 0 0,2 0 0,-3 24 0,5-31 0,1-1 0,0 1 0,1 0 0,0-1 0,1 1 0,0-1 0,1 1 0,0-1 0,1 0 0,0 0 0,0 0 0,2-1 0,10 18 0,-3-8 0,2-1 0,0 0 0,1-1 0,0-1 0,33 26 0,-30-29 0,2 0 0,0-2 0,0 0 0,1-2 0,0 0 0,38 10 0,5-3 0,76 10 0,-107-22 0,-1-2 0,1-1 0,0-2 0,-1-2 0,1 0 0,48-11 0,-61 8 0,0-1 0,0 0 0,-1-1 0,0-2 0,0 0 0,-1-1 0,0-1 0,-1 0 0,0-2 0,-1 0 0,19-19 0,-27 24 0,-1-1 0,0 0 0,-1 0 0,0-1 0,0 0 0,-1 0 0,-1-1 0,1 0 0,-2 0 0,1 0 0,-2 0 0,1-1 0,-2 1 0,0-1 0,0 0 0,-1 0 0,0 0 0,-1 0 0,0 1 0,-1-1 0,0 0 0,-1 0 0,-1 0 0,0 1 0,0-1 0,-1 1 0,0 0 0,-11-18 0,3 8 0,-1 1 0,-2 0 0,1 1 0,-2 1 0,-1 1 0,0 0 0,-1 1 0,0 1 0,-29-18 0,17 15 0,-1 1 0,-1 1 0,0 2 0,-1 2 0,-61-16 0,-58-6-1365,130 28-5461</inkml:trace>
 </inkml:ink>
 </file>
 
@@ -1480,7 +2237,7 @@
           <inkml:channelProperty channel="F" name="resolution" value="0" units="1/dev"/>
         </inkml:channelProperties>
       </inkml:inkSource>
-      <inkml:timestamp xml:id="ts0" timeString="2026-03-26T06:33:33.542"/>
+      <inkml:timestamp xml:id="ts0" timeString="2026-03-26T06:32:43.956"/>
     </inkml:context>
     <inkml:brush xml:id="br0">
       <inkml:brushProperty name="width" value="0.1" units="cm"/>
@@ -1488,7 +2245,7 @@
       <inkml:brushProperty name="color" value="#FFC114"/>
     </inkml:brush>
   </inkml:definitions>
-  <inkml:trace contextRef="#ctx0" brushRef="#br0">54 2 24575,'-11'-1'0,"15"1"0,26 2 0,83 26 0,-47-13 0,-1 3 0,79 32 0,-142-50 0,0 1 0,-1 0 0,1-1 0,0 1 0,-1 0 0,1 0 0,-1 0 0,1 0 0,-1 0 0,0 0 0,1 1 0,-1-1 0,0 0 0,0 1 0,0-1 0,0 1 0,0-1 0,0 1 0,0-1 0,1 4 0,-2-4 0,0 1 0,-1-1 0,1 0 0,0 1 0,0-1 0,-1 1 0,1-1 0,-1 0 0,1 1 0,-1-1 0,0 0 0,1 1 0,-1-1 0,0 0 0,0 0 0,0 0 0,0 1 0,0-1 0,-1 1 0,-7 5 0,-1 0 0,1-1 0,-1 0 0,-20 9 0,-245 83 7,160-62-1379,93-28-5454</inkml:trace>
+  <inkml:trace contextRef="#ctx0" brushRef="#br0">122 34 24575,'0'-1'0,"0"0"0,0-1 0,0 1 0,-1-1 0,1 1 0,0 0 0,-1-1 0,1 1 0,-1 0 0,1-1 0,-1 1 0,1 0 0,-1 0 0,0-1 0,0 1 0,0 0 0,0 0 0,0 0 0,0 0 0,0 0 0,0 0 0,0 1 0,0-1 0,0 0 0,-1 0 0,1 1 0,0-1 0,-1 1 0,1-1 0,0 1 0,-1 0 0,1-1 0,0 1 0,-1 0 0,1 0 0,-1 0 0,-1 0 0,-1 0 0,0 0 0,1 1 0,-1-1 0,1 1 0,-1-1 0,0 1 0,1 0 0,-1 1 0,1-1 0,0 1 0,0-1 0,-1 1 0,-3 3 0,4-2 0,0 0 0,0 1 0,0-1 0,1 1 0,-1 0 0,1 0 0,0 0 0,0 0 0,0 0 0,0 0 0,1 1 0,0-1 0,0 0 0,0 1 0,0-1 0,1 6 0,0-8 0,0 0 0,0 0 0,0-1 0,0 1 0,0 0 0,1-1 0,-1 1 0,1 0 0,0-1 0,-1 1 0,1-1 0,0 1 0,0-1 0,0 1 0,0-1 0,0 0 0,0 1 0,0-1 0,0 0 0,1 0 0,-1 0 0,0 0 0,1 0 0,-1 0 0,1 0 0,-1 0 0,1-1 0,-1 1 0,1-1 0,0 1 0,-1-1 0,1 1 0,0-1 0,-1 0 0,1 0 0,0 0 0,0 0 0,-1 0 0,1 0 0,0 0 0,-1-1 0,1 1 0,0-1 0,2 0 0,8-2 0,1 0 0,0-1 0,16-8 0,-27 12 0,1-1 0,0 0 0,-1 0 0,1-1 0,-1 1 0,0-1 0,1 1 0,-1-1 0,0 0 0,0 0 0,0 1 0,0-2 0,0 1 0,0 0 0,-1 0 0,1 0 0,-1-1 0,1 1 0,-1-1 0,0 1 0,1-6 0,-2 7 0,0 1 0,0-1 0,0 0 0,0 1 0,0-1 0,0 0 0,0 1 0,0-1 0,0 0 0,-1 1 0,1-1 0,0 1 0,-1-1 0,1 0 0,0 1 0,-1-1 0,1 1 0,0-1 0,-1 1 0,1-1 0,-1 1 0,1-1 0,-1 1 0,0 0 0,1-1 0,-1 1 0,1 0 0,-1-1 0,0 1 0,0-1 0,-27 2 0,24 0 0,-1 1 0,1-1 0,-1 1 0,1-1 0,-1 1 0,1 1 0,0-1 0,0 1 0,-5 3 0,-16 19-1365</inkml:trace>
 </inkml:ink>
 </file>
 
@@ -1536,7 +2293,7 @@
           <inkml:channelProperty channel="F" name="resolution" value="0" units="1/dev"/>
         </inkml:channelProperties>
       </inkml:inkSource>
-      <inkml:timestamp xml:id="ts0" timeString="2026-03-26T06:33:33.543"/>
+      <inkml:timestamp xml:id="ts0" timeString="2026-03-26T06:32:45.108"/>
     </inkml:context>
     <inkml:brush xml:id="br0">
       <inkml:brushProperty name="width" value="0.1" units="cm"/>
@@ -1544,7 +2301,7 @@
       <inkml:brushProperty name="color" value="#FFC114"/>
     </inkml:brush>
   </inkml:definitions>
-  <inkml:trace contextRef="#ctx0" brushRef="#br0">26 2346 24575,'-1'0'0,"0"0"0,1 0 0,-1 1 0,0-1 0,0 0 0,0 0 0,0 0 0,0-1 0,0 1 0,0 0 0,0 0 0,1 0 0,-1-1 0,0 1 0,0 0 0,0-1 0,1 1 0,-1-1 0,0 1 0,0-1 0,1 1 0,-1-1 0,0 0 0,1 1 0,-1-1 0,0 0 0,1 1 0,-1-1 0,1 0 0,0 0 0,-1 0 0,1 1 0,0-1 0,-1 0 0,1 0 0,0 0 0,0 0 0,-1 0 0,1 0 0,0 1 0,0-1 0,0 0 0,0 0 0,1 0 0,-1 0 0,0 0 0,0 0 0,0 0 0,1 1 0,-1-1 0,0 0 0,1 0 0,-1 0 0,1 1 0,-1-1 0,1 0 0,-1 0 0,2 0 0,2-6 0,0 0 0,0 1 0,1 0 0,0 0 0,9-8 0,15-11 0,-1-1 0,-1-1 0,-2-1 0,0-2 0,-2 0 0,-1-1 0,28-56 0,-22 25 0,-2-1 0,26-106 0,2-12 0,-47 149 0,-1 6 0,-1-2 0,0 1 0,-1-36 0,-2 31 0,11-60 0,-4 37 0,11-64 0,-8 52 0,-2 0 0,0-86 0,-9 19 0,-4-113 0,-21 95 0,22 138 0,-1 0 0,0 0 0,-1 0 0,0 1 0,-13-26 0,16 37 0,0 0 0,0 0 0,0 0 0,0 0 0,-1 0 0,1 0 0,-1 0 0,1 1 0,-1-1 0,0 1 0,0-1 0,0 1 0,0-1 0,0 1 0,0 0 0,0 0 0,0 0 0,0 0 0,-1 0 0,1 1 0,0-1 0,0 1 0,-1-1 0,1 1 0,-1 0 0,1 0 0,0 0 0,-1 0 0,1 0 0,0 1 0,-1-1 0,1 1 0,0 0 0,0-1 0,-1 1 0,1 0 0,0 0 0,0 0 0,0 1 0,0-1 0,0 0 0,-3 4 0,-31 23 0,0 2 0,-41 46 0,38-37 0,-45 36 0,82-75 0,5-7 0,12-19 0,23-32 0,-22 35 0,0 1 0,2 1 0,1 0 0,0 1 0,2 1 0,0 1 0,1 1 0,1 1 0,0 1 0,41-19 0,-58 31 0,0 0 0,0 1 0,1 0 0,-1 0 0,1 0 0,-1 1 0,1 0 0,0 0 0,0 1 0,-1 0 0,1 0 0,0 0 0,-1 1 0,1 0 0,0 1 0,-1-1 0,1 1 0,-1 0 0,0 1 0,0 0 0,12 6 0,210 94 0,-202-90 120,-26-13-143,1 1 1,-1-1-1,0 0 1,1 0-1,-1 0 1,0 1-1,1-1 1,-1 0-1,0 0 1,0 1-1,1-1 1,-1 0-1,0 0 1,0 1-1,1-1 1,-1 0-1,0 1 1,0-1-1,0 0 1,0 1-1,1-1 1,-1 1-1,0-1 1,0 0-1,0 1 1,0-1-1,0 0 1,0 1-1,0-1 1,0 1-1,0-1 1,0 0-1,0 1 1,0-1-1,-1 1 1,1-1-1,0 0 1,0 1-1,0-1 1,0 0-1,-1 1 1,1-1-1,0 0 1,0 1-1,0-1 1,-1 0-1,1 0 1,0 1-1,-1-1 1,1 0-1,0 0 1,-1 0-1,1 1 1,0-1-1,-1 0 1,1 0-1,0 0 1,-1 0-1,1 0 1,0 1-1,-1-1 1,1 0-1,-1 0 1,1 0-1,-1 0 1</inkml:trace>
+  <inkml:trace contextRef="#ctx0" brushRef="#br0">182 20 24575,'0'-1'0,"0"0"0,-1 0 0,1 0 0,-1 0 0,1 0 0,-1 0 0,1 0 0,-1 0 0,0 0 0,1 0 0,-1 1 0,0-1 0,0 0 0,0 0 0,0 1 0,0-1 0,1 0 0,-1 1 0,0-1 0,0 1 0,0-1 0,-1 1 0,1 0 0,0-1 0,0 1 0,0 0 0,0 0 0,0 0 0,0 0 0,0 0 0,0 0 0,-1 0 0,1 0 0,-1 0 0,-40 5 0,35-3 0,0 1 0,1-1 0,-1 1 0,1 1 0,-8 4 0,12-7 0,1 0 0,-1 0 0,0 0 0,1 0 0,-1 1 0,1-1 0,-1 1 0,1-1 0,0 1 0,0-1 0,-1 1 0,1 0 0,0 0 0,0 0 0,1-1 0,-1 1 0,0 0 0,1 0 0,-1 0 0,1 0 0,0 0 0,-1 3 0,1-4 0,0 0 0,1-1 0,-1 1 0,0 0 0,0-1 0,0 1 0,1 0 0,-1-1 0,0 1 0,1-1 0,-1 1 0,0 0 0,1-1 0,-1 1 0,1-1 0,-1 1 0,1-1 0,-1 1 0,1-1 0,-1 0 0,1 1 0,-1-1 0,1 1 0,0-1 0,-1 0 0,1 0 0,0 1 0,-1-1 0,1 0 0,1 0 0,27-3 0,-26 2 0,1 0 0,-1 0 0,0 0 0,0 0 0,0-1 0,0 1 0,0-1 0,0 0 0,-1 0 0,1 0 0,-1 0 0,1 0 0,-1 0 0,4-5 0,-6 7 0,0 0 0,0 0 0,0 0 0,0-1 0,0 1 0,0 0 0,0 0 0,0 0 0,0 0 0,0 0 0,0-1 0,0 1 0,0 0 0,0 0 0,0 0 0,0 0 0,0 0 0,0-1 0,0 1 0,0 0 0,0 0 0,-1 0 0,1 0 0,0 0 0,0 0 0,0 0 0,0-1 0,0 1 0,0 0 0,0 0 0,0 0 0,-1 0 0,1 0 0,0 0 0,0 0 0,0 0 0,0 0 0,0 0 0,-1 0 0,1 0 0,0 0 0,0 0 0,0-1 0,0 1 0,0 0 0,-1 0 0,1 1 0,0-1 0,0 0 0,0 0 0,0 0 0,-1 0 0,-12 3 0,-10 9 0,13 1 0,13-5 0,-1-7 0,0-1 0,0 1 0,0-1 0,0 1 0,0-1 0,0 0 0,0 0 0,0 0 0,0 0 0,0 0 0,0-1 0,2 0 0,-3 1 0,1 0 0,-1 0 0,0-1 0,1 1 0,-1 0 0,0-1 0,0 1 0,1-1 0,-1 0 0,0 1 0,0-1 0,0 0 0,0 0 0,0 1 0,0-1 0,0 0 0,1-2 0,-6-6 0,-16-1 0,14 8-114,0 1 1,0 0-1,-1 0 0,1 0 0,0 1 1,0 0-1,0 0 0,-1 0 0,1 1 1,0 0-1,-12 4 0,0 0-6712</inkml:trace>
 </inkml:ink>
 </file>
 
@@ -1564,7 +2321,7 @@
           <inkml:channelProperty channel="F" name="resolution" value="0" units="1/dev"/>
         </inkml:channelProperties>
       </inkml:inkSource>
-      <inkml:timestamp xml:id="ts0" timeString="2026-03-26T06:33:33.544"/>
+      <inkml:timestamp xml:id="ts0" timeString="2026-03-26T06:32:58.213"/>
     </inkml:context>
     <inkml:brush xml:id="br0">
       <inkml:brushProperty name="width" value="0.1" units="cm"/>
@@ -1572,7 +2329,7 @@
       <inkml:brushProperty name="color" value="#FFC114"/>
     </inkml:brush>
   </inkml:definitions>
-  <inkml:trace contextRef="#ctx0" brushRef="#br0">35 96 24575,'-2'0'0,"0"0"0,0 0 0,0-1 0,0 1 0,0 0 0,0-1 0,0 1 0,0-1 0,0 1 0,0-1 0,0 0 0,-2-1 0,4 2 0,-1-1 0,1 1 0,-1-1 0,1 1 0,-1-1 0,1 1 0,-1-1 0,1 0 0,0 1 0,-1-1 0,1 1 0,0-1 0,-1 0 0,1 1 0,0-1 0,0 0 0,0 1 0,0-1 0,0 0 0,0 0 0,-1 1 0,2-1 0,-1-1 0,0 0 0,1 0 0,0 0 0,0 0 0,0 0 0,0 0 0,0 0 0,1 0 0,-1 0 0,1 0 0,-1 0 0,1 1 0,0-1 0,-1 1 0,1-1 0,0 1 0,0 0 0,0-1 0,0 1 0,3-1 0,14-5 0,2 1 0,-1 0 0,1 1 0,23-2 0,-15 2 0,-22 4 0,1 1 0,-1-1 0,1 1 0,-1 0 0,0 1 0,1 0 0,-1 0 0,0 0 0,1 1 0,-1 0 0,0 1 0,0 0 0,0 0 0,-1 0 0,9 6 0,-12-7 0,-1 0 0,1 0 0,-1 0 0,1 1 0,-1-1 0,0 1 0,0-1 0,0 1 0,0 0 0,-1 0 0,1 0 0,-1 0 0,0 0 0,1 0 0,-1 0 0,-1 0 0,1 0 0,0 0 0,-1 1 0,0-1 0,0 0 0,0 1 0,0-1 0,0 0 0,-1 0 0,1 1 0,-1-1 0,0 0 0,0 0 0,0 0 0,0 0 0,-1 0 0,1 0 0,-1 0 0,0 0 0,-2 3 0,-4 4 0,1-1 0,-1 0 0,0-1 0,-1 0 0,0 0 0,-20 13 0,-13 10 0,42-30 0,-1-1 0,1 0 0,-1 1 0,1-1 0,-1 0 0,1 1 0,-1-1 0,1 0 0,-1 1 0,1-1 0,0 1 0,-1-1 0,1 1 0,0-1 0,-1 1 0,1-1 0,0 1 0,-1 0 0,1-1 0,0 1 0,0-1 0,0 1 0,0 0 0,0-1 0,0 1 0,0-1 0,0 1 0,0 0 0,0-1 0,0 1 0,0-1 0,0 1 0,0 0 0,1 0 0,21 9 0,36-6 0,-56-4 0,25 0 0,1 1 0,0 1 0,35 7 0,-55-7-195,-1 0 0,1-1 0,0 0 0,0-1 0,-1 0 0,14-1 0,-1-3-6631</inkml:trace>
+  <inkml:trace contextRef="#ctx0" brushRef="#br0">8 62 24575,'0'0'0,"0"0"0,0 0 0,-1 1 0,1-1 0,0 0 0,0 0 0,0 0 0,0 0 0,-1 0 0,1 0 0,0 0 0,0 0 0,0 0 0,0 0 0,-1 0 0,1 0 0,0 0 0,0 0 0,0 0 0,-1 0 0,1 0 0,0 0 0,0 0 0,0-1 0,0 1 0,-1 0 0,1 0 0,0 0 0,0 0 0,0 0 0,0 0 0,0 0 0,0-1 0,-1 1 0,1 0 0,0 0 0,0 0 0,0 0 0,0 0 0,0-1 0,0 1 0,0 0 0,0 0 0,0 0 0,0-1 0,0 1 0,0 0 0,0 0 0,0 0 0,0 0 0,0-1 0,0 1 0,0 0 0,0 0 0,-1 1 0,1 0 0,0 0 0,0 0 0,-1 0 0,1 1 0,0-1 0,0 0 0,0 0 0,0 0 0,0 0 0,1 1 0,-1-1 0,0 0 0,1 0 0,-1 0 0,0 0 0,1 0 0,-1 0 0,1 1 0,1 0 0,13 16 0,0 0 0,2-1 0,0-1 0,1-1 0,0 0 0,31 18 0,-20-13 0,3 2 0,0-2 0,1-1 0,1-1 0,1-2 0,40 12 0,-15-11 0,0-3 0,2-2 0,77 4 0,-101-14 0,-1-2 0,1-2 0,0-1 0,-1-2 0,1-2 0,41-12 0,25-17 0,-2-4 0,176-98 0,-199 100 0,-56 29 0,-1-1 0,0-1 0,-1-1 0,0-1 0,-1-1 0,36-32 0,-46 30-1365</inkml:trace>
 </inkml:ink>
 </file>
 
@@ -1592,7 +2349,7 @@
           <inkml:channelProperty channel="F" name="resolution" value="0" units="1/dev"/>
         </inkml:channelProperties>
       </inkml:inkSource>
-      <inkml:timestamp xml:id="ts0" timeString="2026-03-26T06:33:33.545"/>
+      <inkml:timestamp xml:id="ts0" timeString="2026-03-26T06:32:59.041"/>
     </inkml:context>
     <inkml:brush xml:id="br0">
       <inkml:brushProperty name="width" value="0.1" units="cm"/>
@@ -1600,7 +2357,7 @@
       <inkml:brushProperty name="color" value="#FFC114"/>
     </inkml:brush>
   </inkml:definitions>
-  <inkml:trace contextRef="#ctx0" brushRef="#br0">765 83 24575,'-1'-2'0,"0"-1"0,0 1 0,0-1 0,0 1 0,0 0 0,0-1 0,-1 1 0,1 0 0,-1 0 0,1 0 0,-1 0 0,0 0 0,0 0 0,0 0 0,0 1 0,0-1 0,0 1 0,-1 0 0,1-1 0,0 1 0,-4-1 0,-52-20 0,34 16 0,-1 2 0,1 0 0,0 2 0,-1 1 0,0 1 0,1 1 0,-26 4 0,2 3 0,0 1 0,-72 25 0,107-30 0,0 1 0,0 0 0,0 1 0,1 0 0,0 1 0,0 0 0,1 1 0,0 1 0,0 0 0,1 0 0,0 0 0,1 2 0,0-1 0,1 1 0,0 0 0,0 1 0,1 0 0,1 0 0,0 1 0,0-1 0,2 1 0,-1 0 0,2 1 0,0-1 0,0 1 0,1-1 0,0 25 0,3-21 0,1 0 0,0 0 0,1 0 0,1 0 0,0-1 0,2 0 0,0 0 0,0 0 0,2 0 0,0-1 0,0 0 0,2-1 0,0 0 0,0 0 0,1-1 0,1-1 0,0 0 0,1 0 0,21 14 0,-8-5 0,-6-5 0,0 0 0,1-2 0,0 0 0,32 14 0,-34-20 0,0-1 0,0-1 0,1-1 0,-1-1 0,40 4 0,-32-5 0,-1-1 0,1-1 0,-1-2 0,1 0 0,0-2 0,-1-1 0,0-1 0,0-1 0,-1-1 0,1-2 0,41-20 0,-43 18 0,-2-2 0,30-21 0,-44 27 0,0 0 0,0 0 0,-1 0 0,0-1 0,-1 0 0,0 0 0,0-1 0,9-18 0,-8 10 0,0 0 0,-2-1 0,0 0 0,-1 0 0,0 0 0,0-26 0,-2 1 0,-7-71 0,4 103 0,-1 1 0,1 0 0,-1-1 0,-1 1 0,0 0 0,-1 0 0,0 1 0,0-1 0,-1 1 0,0-1 0,-1 2 0,-7-11 0,4 10 0,0 0 0,0 0 0,0 1 0,-1 1 0,-1 0 0,1 0 0,-1 1 0,0 0 0,-23-8 0,3 2-195,0 1 0,-1 1 0,0 2 0,0 1 0,-1 1 0,-33 0 0,45 6-6631</inkml:trace>
+  <inkml:trace contextRef="#ctx0" brushRef="#br0">1 8 24575,'0'-8'0,"0"11"0,8 17 0,3-6 0,0 0 0,1 0 0,0-1 0,2-1 0,-1 0 0,1-1 0,19 11 0,-12-7 0,0 1 0,24 24 0,-44-39-34,0-1 0,0 1 0,-1 0 0,1-1 0,0 1-1,0 0 1,-1 0 0,1-1 0,0 1 0,-1 0 0,1 0 0,-1 0 0,1 0-1,-1 0 1,0 0 0,1 0 0,-1 0 0,0 0 0,0 0 0,1 0-1,-1 0 1,0 0 0,0 0 0,0 0 0,0 0 0,0 0 0,-1 0 0,1 0-1,0 0 1,0 0 0,-1 0 0,1-1 0,0 1 0,-1 0 0,1 0 0,-1 0-1,1 0 1,-1 0 0,-1 1 0</inkml:trace>
 </inkml:ink>
 </file>
 
@@ -1620,7 +2377,7 @@
           <inkml:channelProperty channel="F" name="resolution" value="0" units="1/dev"/>
         </inkml:channelProperties>
       </inkml:inkSource>
-      <inkml:timestamp xml:id="ts0" timeString="2026-03-26T06:33:33.546"/>
+      <inkml:timestamp xml:id="ts0" timeString="2026-03-26T06:33:00.608"/>
     </inkml:context>
     <inkml:brush xml:id="br0">
       <inkml:brushProperty name="width" value="0.1" units="cm"/>
@@ -1628,7 +2385,7 @@
       <inkml:brushProperty name="color" value="#FFC114"/>
     </inkml:brush>
   </inkml:definitions>
-  <inkml:trace contextRef="#ctx0" brushRef="#br0">4 56 24575,'0'0'0,"0"0"0,-1 0 0,1 0 0,0 0 0,0 0 0,0 0 0,0 0 0,0 0 0,0 0 0,-1 0 0,1 0 0,0 0 0,0 0 0,0-1 0,0 1 0,0 0 0,0 0 0,0 0 0,-1 0 0,1 0 0,0 0 0,0 0 0,0 0 0,0 0 0,0 0 0,0-1 0,0 1 0,0 0 0,0 0 0,0 0 0,0 0 0,0 0 0,0 0 0,0-1 0,0 1 0,0 0 0,-1 0 0,1 0 0,0 0 0,1 0 0,-1 0 0,0-1 0,0 1 0,0 0 0,0 0 0,0 0 0,0 0 0,0 0 0,0 0 0,0-1 0,0 1 0,0 0 0,0 0 0,0 0 0,0 0 0,0 0 0,0 0 0,1 0 0,-1 0 0,0-1 0,10-11 0,15-8 0,-10 15 0,1 1 0,-1 1 0,1 0 0,0 2 0,-1-1 0,1 2 0,0 0 0,0 1 0,-1 1 0,1 0 0,0 1 0,-1 1 0,0 0 0,0 1 0,27 13 0,-40-17 0,0-1 0,0 1 0,-1 0 0,1 0 0,0 0 0,-1 0 0,1 0 0,-1 0 0,1 0 0,-1 0 0,0 1 0,1-1 0,-1 1 0,0-1 0,0 1 0,0-1 0,0 1 0,0-1 0,-1 1 0,1 0 0,0 0 0,-1-1 0,1 4 0,-1-2 0,0-1 0,-1 0 0,1 0 0,-1 1 0,0-1 0,0 0 0,0 0 0,0 0 0,0 0 0,0 0 0,0 0 0,-1-1 0,1 1 0,-1 0 0,1-1 0,-4 3 0,-5 4 0,0 0 0,-1-1 0,0 0 0,-1-1 0,-18 8 0,26-13 0,-1 1 0,1 0 0,0 0 0,-1 0 0,1 0 0,0 1 0,0 0 0,-4 4 0,7-7 0,1 0 0,0 1 0,0-1 0,-1 1 0,1-1 0,0 1 0,0-1 0,0 0 0,-1 1 0,1-1 0,0 1 0,0-1 0,0 1 0,0-1 0,0 1 0,0-1 0,0 1 0,0-1 0,0 0 0,0 1 0,0-1 0,1 1 0,-1-1 0,0 1 0,0-1 0,0 1 0,1-1 0,-1 0 0,0 1 0,1 0 0,24 15 0,0-7 0,45 11 0,-54-17 0,0 1 0,-1 0 0,1 1 0,-1 1 0,0 0 0,0 1 0,-1 1 0,19 13 0,-31-20 0,-1 0 0,0 0 0,1 0 0,-1 0 0,0 0 0,1 0 0,-1 1 0,0-1 0,0 0 0,0 1 0,0-1 0,0 1 0,0-1 0,-1 1 0,1-1 0,0 1 0,-1 0 0,1-1 0,-1 1 0,0 0 0,0-1 0,1 1 0,-1 0 0,0-1 0,0 1 0,-1 0 0,1 0 0,0-1 0,0 1 0,-1 0 0,1-1 0,-1 1 0,0-1 0,1 1 0,-1 0 0,0-1 0,0 0 0,0 1 0,0-1 0,0 1 0,0-1 0,0 0 0,-1 0 0,1 0 0,0 0 0,-1 0 0,-1 1 0,-4 3 0,-1 0 0,1-1 0,-1 0 0,0 0 0,0-1 0,0 0 0,0-1 0,-11 3 0,-41 6 0,38-5 0,0-2 0,0 0 0,-1-2 0,1 0 0,0-1 0,-1-1 0,-42-7 0,62 7-57,1 0 0,0-1 1,0 1-1,0-1 0,0 1 0,0-1 0,0 0 0,0 0 0,1 0 0,-1 0 0,0 0 1,0 0-1,1-1 0,-1 1 0,1-1 0,-1 1 0,1-1 0,-1 1 0,1-1 1,0 0-1,0 0 0,0 1 0,-1-4 0</inkml:trace>
+  <inkml:trace contextRef="#ctx0" brushRef="#br0">317 240 24575,'-8'-2'0,"1"0"0,-1-1 0,1 0 0,-1 0 0,1 0 0,0-1 0,0 0 0,1-1 0,-1 0 0,1 0 0,0 0 0,-6-7 0,-4-2 0,-66-47 0,-24-19 0,105 79-91,-1-1 0,1 1 0,-1-1 0,1 1 0,-1-1 0,1 0 0,0 0 0,0 0 0,0 1 0,0-1 0,0 0 0,1 0 0,-1 0 0,0-3 0</inkml:trace>
 </inkml:ink>
 </file>
 
@@ -1648,7 +2405,7 @@
           <inkml:channelProperty channel="F" name="resolution" value="0" units="1/dev"/>
         </inkml:channelProperties>
       </inkml:inkSource>
-      <inkml:timestamp xml:id="ts0" timeString="2026-03-26T06:33:33.547"/>
+      <inkml:timestamp xml:id="ts0" timeString="2026-03-26T06:33:01.148"/>
     </inkml:context>
     <inkml:brush xml:id="br0">
       <inkml:brushProperty name="width" value="0.1" units="cm"/>
@@ -1656,7 +2413,7 @@
       <inkml:brushProperty name="color" value="#FFC114"/>
     </inkml:brush>
   </inkml:definitions>
-  <inkml:trace contextRef="#ctx0" brushRef="#br0">689 99 24575,'-1'-1'0,"1"-1"0,-1 0 0,0 1 0,0-1 0,0 1 0,0-1 0,0 1 0,0-1 0,0 1 0,-1 0 0,1 0 0,0 0 0,-1 0 0,1-1 0,-1 2 0,1-1 0,-4-1 0,-29-14 0,8 8 0,0 0 0,0 2 0,0 2 0,0 0 0,-1 1 0,0 2 0,0 1 0,1 1 0,-1 1 0,-34 8 0,40-6 0,1 1 0,-1 0 0,1 2 0,-32 15 0,42-16 0,1 0 0,0 1 0,0-1 0,0 2 0,1-1 0,0 1 0,0 0 0,1 1 0,0 0 0,-9 16 0,5-9 0,2 1 0,0 1 0,1 0 0,1 0 0,1 0 0,0 1 0,2 0 0,0 0 0,1 0 0,1 1 0,0-1 0,2 0 0,0 1 0,1-1 0,1 1 0,1-1 0,1 0 0,1 0 0,9 27 0,0-13 0,2 0 0,31 50 0,-38-71 0,1 1 0,0-1 0,1-1 0,0 0 0,1 0 0,0-1 0,1-1 0,22 14 0,-11-11 0,0-1 0,0-1 0,1-2 0,1 0 0,-1-2 0,51 7 0,-28-9 0,0-2 0,91-7 0,-125 3 0,0-1 0,0-1 0,0 0 0,0-1 0,-1 0 0,0-1 0,0 0 0,-1-1 0,1-1 0,-1 0 0,-1 0 0,0-1 0,0-1 0,-1 0 0,10-11 0,2-6 0,-1-1 0,-1 0 0,-1-2 0,-2 0 0,14-33 0,-25 44 0,-1 0 0,-1 0 0,-1 0 0,-1 0 0,-1-1 0,0 1 0,-1-1 0,-6-37 0,4 45 0,-1-1 0,-1 1 0,0 0 0,-1 0 0,0 1 0,-1-1 0,0 1 0,0 0 0,-1 1 0,-1-1 0,0 1 0,0 1 0,-15-13 0,-1 0 0,-1 0 0,-2 2 0,-56-33 0,44 33-341,-1 1 0,-1 2-1,-52-15 1,76 28-6485</inkml:trace>
+  <inkml:trace contextRef="#ctx0" brushRef="#br0">504 1 24575,'-12'1'0,"-1"0"0,0 1 0,1 0 0,0 1 0,-1 0 0,1 1 0,1 0 0,-20 11 0,-9 7 0,-40 31 0,23-15 0,-122 94-1365,160-120-5461</inkml:trace>
 </inkml:ink>
 </file>
 
@@ -1676,7 +2433,7 @@
           <inkml:channelProperty channel="F" name="resolution" value="0" units="1/dev"/>
         </inkml:channelProperties>
       </inkml:inkSource>
-      <inkml:timestamp xml:id="ts0" timeString="2026-03-26T06:33:33.548"/>
+      <inkml:timestamp xml:id="ts0" timeString="2026-03-26T06:33:03.021"/>
     </inkml:context>
     <inkml:brush xml:id="br0">
       <inkml:brushProperty name="width" value="0.1" units="cm"/>
@@ -1684,7 +2441,7 @@
       <inkml:brushProperty name="color" value="#FFC114"/>
     </inkml:brush>
   </inkml:definitions>
-  <inkml:trace contextRef="#ctx0" brushRef="#br0">51 108 24575,'-2'-3'0,"1"1"0,-1 0 0,1-1 0,0 1 0,-1-1 0,1 1 0,1-1 0,-1 0 0,0 1 0,1-1 0,-1 0 0,1 1 0,0-1 0,0 0 0,0 0 0,0 1 0,0-1 0,1 0 0,-1 0 0,1 1 0,0-4 0,0 4 0,0 0 0,-1-1 0,1 1 0,-1-1 0,1 1 0,-1 0 0,0-1 0,0 1 0,-1-1 0,1 1 0,0-1 0,-1 1 0,1 0 0,-1-1 0,0 1 0,0 0 0,-2-4 0,3 6 0,-1 0 0,1 0 0,-1 0 0,0 0 0,1 0 0,-1 0 0,0 0 0,1 1 0,-1-1 0,1 0 0,-1 0 0,0 1 0,1-1 0,-1 0 0,1 1 0,-1-1 0,1 1 0,-1-1 0,1 1 0,0-1 0,-1 1 0,1-1 0,-1 1 0,1-1 0,0 1 0,0-1 0,-1 1 0,1 0 0,0-1 0,0 1 0,-1 0 0,-10 21 0,9-16 0,0 0 0,0 0 0,1 1 0,0-1 0,0 0 0,0 1 0,1-1 0,0 1 0,0-1 0,0 0 0,1 1 0,0-1 0,0 1 0,1-1 0,0 0 0,0 0 0,0 0 0,1 0 0,0 0 0,0-1 0,0 1 0,1-1 0,0 0 0,8 9 0,-4-7 0,1 0 0,0 0 0,0-1 0,0 0 0,1-1 0,0 0 0,0-1 0,0 0 0,0 0 0,1-1 0,-1 0 0,1-1 0,0 0 0,11 0 0,-8-1 0,0-1 0,1 0 0,-1 0 0,0-1 0,0-1 0,14-4 0,-23 5 0,0-1 0,1 0 0,-1 0 0,0-1 0,-1 1 0,1-1 0,0 0 0,-1 0 0,1-1 0,-1 1 0,0-1 0,0 0 0,-1 0 0,1 0 0,-1-1 0,0 1 0,0-1 0,3-6 0,21-60 0,-25 66 0,-1 0 0,1-1 0,-1 1 0,-1 0 0,1 0 0,-1-1 0,0 1 0,0 0 0,0-1 0,-1 1 0,-2-10 0,3 15 0,0 0 0,0 0 0,0 0 0,0-1 0,0 1 0,0 0 0,0 0 0,0 0 0,0-1 0,-1 1 0,1 0 0,0 0 0,0 0 0,0 0 0,0-1 0,0 1 0,0 0 0,-1 0 0,1 0 0,0 0 0,0 0 0,0-1 0,-1 1 0,1 0 0,0 0 0,0 0 0,0 0 0,0 0 0,-1 0 0,1 0 0,0 0 0,0 0 0,-1 0 0,1 0 0,0 0 0,0 0 0,0 0 0,-1 0 0,1 0 0,0 0 0,0 0 0,0 0 0,-1 0 0,1 0 0,0 1 0,-9 9 0,-4 17 0,9-12 0,1 0 0,1 0 0,0 0 0,1 0 0,0 1 0,2-1 0,-1 0 0,2 0 0,5 23 0,2 51 0,-9-64 0,-1-20 0,0 1 0,1-1 0,0 1 0,0-1 0,0 1 0,1-1 0,0 1 0,0-1 0,0 1 0,3 5 0,5-5-1365</inkml:trace>
+  <inkml:trace contextRef="#ctx0" brushRef="#br0">244 64 24575,'-7'-7'0,"0"0"0,-1 0 0,0 1 0,0 0 0,0 0 0,-1 1 0,1 0 0,-15-5 0,19 9 0,0 0 0,0 0 0,0 0 0,0 1 0,0-1 0,0 1 0,0 0 0,0 0 0,0 1 0,0-1 0,1 1 0,-1 0 0,0 0 0,0 0 0,0 0 0,1 1 0,-1 0 0,1 0 0,-1 0 0,1 0 0,0 0 0,-1 0 0,1 1 0,-3 3 0,0 0 0,1-1 0,0 1 0,0 0 0,0 1 0,1-1 0,0 1 0,0-1 0,1 1 0,-1 1 0,2-1 0,-1 0 0,-2 13 0,5-17 0,-1 0 0,1 0 0,0 0 0,0 0 0,0 0 0,1 0 0,-1 1 0,1-1 0,0 0 0,-1 0 0,1 0 0,1-1 0,-1 1 0,0 0 0,1 0 0,-1-1 0,1 1 0,0 0 0,0-1 0,0 0 0,0 1 0,0-1 0,1 0 0,-1 0 0,1 0 0,-1-1 0,1 1 0,0-1 0,-1 1 0,1-1 0,0 0 0,0 0 0,4 1 0,1 0 0,1 0 0,-1 0 0,0-1 0,1 0 0,-1-1 0,1 0 0,-1 0 0,1 0 0,-1-1 0,0-1 0,1 0 0,-1 0 0,9-3 0,-12 3 0,-1 0 0,1 0 0,-1 0 0,1 0 0,-1-1 0,0 0 0,0 0 0,0 0 0,0 0 0,-1-1 0,1 1 0,-1-1 0,0 0 0,0 0 0,0 0 0,-1-1 0,1 1 0,-1-1 0,0 1 0,0-1 0,-1 0 0,0 1 0,2-9 0,-3 9 0,0 1 0,1 0 0,-2-1 0,1 1 0,0 0 0,-1-1 0,0 1 0,1 0 0,-1-1 0,0 1 0,-1 0 0,1 0 0,-1 0 0,1 0 0,-1 0 0,0 0 0,0 1 0,0-1 0,0 1 0,-1-1 0,1 1 0,-1 0 0,0 0 0,1 0 0,-1 0 0,0 0 0,0 1 0,0-1 0,0 1 0,0 0 0,-6-2 0,2 1 0,0 0 0,0 1 0,0-1 0,-1 1 0,1 1 0,0 0 0,0 0 0,0 0 0,-1 1 0,1 0 0,0 0 0,0 1 0,0-1 0,-7 5 0,4-1 0,0 1 0,0 0 0,1 1 0,0 0 0,-9 10 0,15-14 0,0 0 0,0 0 0,0 1 0,1-1 0,-1 1 0,1 0 0,-3 6 0,4-8 0,1-1 0,0 1 0,-1-1 0,1 0 0,0 1 0,0-1 0,0 1 0,0-1 0,0 0 0,0 1 0,0-1 0,0 1 0,0-1 0,1 0 0,-1 1 0,1-1 0,-1 0 0,1 1 0,-1-1 0,1 0 0,0 0 0,1 3 0,0-3 0,0 1 0,0-1 0,0 0 0,0 0 0,1 0 0,-1 0 0,0 0 0,0-1 0,1 1 0,-1-1 0,0 1 0,1-1 0,-1 0 0,1 0 0,-1 0 0,0 0 0,1 0 0,-1-1 0,0 1 0,1-1 0,-1 1 0,0-1 0,0 0 0,1 0 0,-1 0 0,0 0 0,2-2 0,3 0 0,0-1 0,0 0 0,-1 0 0,1-1 0,-1 1 0,0-1 0,7-8 0,-13 12 0,1 1 0,-1 0 0,1-1 0,-1 1 0,1-1 0,-1 1 0,1-1 0,-1 0 0,0 1 0,1-1 0,-1 1 0,0-1 0,1 0 0,-1 1 0,0-1 0,0 0 0,0 1 0,0-1 0,0 0 0,1 1 0,-1-1 0,0 0 0,0 1 0,-1-1 0,1 0 0,0 1 0,0-1 0,0 0 0,-1 0 0,-16-2 0,-26 16 0,29 0-1365</inkml:trace>
 </inkml:ink>
 </file>
 
@@ -1704,7 +2461,7 @@
           <inkml:channelProperty channel="F" name="resolution" value="0" units="1/dev"/>
         </inkml:channelProperties>
       </inkml:inkSource>
-      <inkml:timestamp xml:id="ts0" timeString="2026-03-26T06:33:33.549"/>
+      <inkml:timestamp xml:id="ts0" timeString="2026-03-26T06:33:04.474"/>
     </inkml:context>
     <inkml:brush xml:id="br0">
       <inkml:brushProperty name="width" value="0.1" units="cm"/>
@@ -1712,7 +2469,7 @@
       <inkml:brushProperty name="color" value="#FFC114"/>
     </inkml:brush>
   </inkml:definitions>
-  <inkml:trace contextRef="#ctx0" brushRef="#br0">710 100 24575,'-1'-2'0,"1"-1"0,-1 1 0,0 0 0,0-1 0,0 1 0,0 0 0,0-1 0,0 1 0,-1 0 0,1 0 0,-1 0 0,1 0 0,-1 0 0,0 1 0,0-1 0,0 0 0,0 1 0,0-1 0,-3-1 0,-49-25 0,44 23 0,-3 0 0,0 0 0,0 2 0,0-1 0,-1 2 0,1-1 0,-1 2 0,1 0 0,-1 1 0,0 0 0,1 1 0,-1 0 0,-23 6 0,7 0 0,-1 2 0,2 1 0,-1 2 0,-40 21 0,53-23 0,1 1 0,0 0 0,1 1 0,0 1 0,1 0 0,0 1 0,1 1 0,1 0 0,0 1 0,1 0 0,1 0 0,0 1 0,2 1 0,0 0 0,0 0 0,2 0 0,0 1 0,1 0 0,2 0 0,-3 24 0,5-31 0,1-1 0,0 1 0,1 0 0,0-1 0,1 1 0,0-1 0,1 1 0,0-1 0,1 0 0,0 0 0,0 0 0,2-1 0,10 18 0,-3-8 0,2-1 0,0 0 0,1-1 0,0-1 0,33 26 0,-30-29 0,2 0 0,0-2 0,0 0 0,1-2 0,0 0 0,38 10 0,5-3 0,76 10 0,-107-22 0,-1-2 0,1-1 0,0-2 0,-1-2 0,1 0 0,48-11 0,-61 8 0,0-1 0,0 0 0,-1-1 0,0-2 0,0 0 0,-1-1 0,0-1 0,-1 0 0,0-2 0,-1 0 0,19-19 0,-27 24 0,-1-1 0,0 0 0,-1 0 0,0-1 0,0 0 0,-1 0 0,-1-1 0,1 0 0,-2 0 0,1 0 0,-2 0 0,1-1 0,-2 1 0,0-1 0,0 0 0,-1 0 0,0 0 0,-1 0 0,0 1 0,-1-1 0,0 0 0,-1 0 0,-1 0 0,0 1 0,0-1 0,-1 1 0,0 0 0,-11-18 0,3 8 0,-1 1 0,-2 0 0,1 1 0,-2 1 0,-1 1 0,0 0 0,-1 1 0,0 1 0,-29-18 0,17 15 0,-1 1 0,-1 1 0,0 2 0,-1 2 0,-61-16 0,-58-6-1365,130 28-5461</inkml:trace>
+  <inkml:trace contextRef="#ctx0" brushRef="#br0">248 25 24575,'-3'-3'0,"-1"1"0,0-1 0,1 1 0,-1 0 0,0 0 0,0 0 0,-1 0 0,1 1 0,0-1 0,-1 1 0,1 0 0,0 0 0,-1 1 0,1 0 0,-1-1 0,1 2 0,-1-1 0,1 0 0,-1 1 0,1 0 0,-6 1 0,1 0 0,1 1 0,0 0 0,0 0 0,0 1 0,0 0 0,0 0 0,1 1 0,0 0 0,0 0 0,-6 7 0,7-6 0,0 1 0,0-1 0,1 2 0,0-1 0,1 0 0,-1 1 0,1 0 0,1 0 0,0 0 0,0 0 0,0 0 0,-1 13 0,3-18 0,1 0 0,0 1 0,0-1 0,0 0 0,0 1 0,1-1 0,-1 0 0,1 0 0,0 1 0,0-1 0,0 0 0,0 0 0,1 0 0,-1 0 0,1 0 0,0 0 0,0 0 0,0-1 0,0 1 0,0-1 0,0 1 0,1-1 0,-1 0 0,1 0 0,0 0 0,-1 0 0,1-1 0,0 1 0,0-1 0,0 1 0,0-1 0,1 0 0,-1 0 0,0-1 0,5 2 0,2 0 0,1-1 0,-1 1 0,0-2 0,0 0 0,1 0 0,-1 0 0,0-1 0,0-1 0,0 0 0,0 0 0,17-7 0,-23 8 0,-1-1 0,1 0 0,0 0 0,-1 0 0,1 0 0,-1-1 0,0 1 0,1-1 0,-1 0 0,0 0 0,-1 0 0,1 0 0,-1 0 0,1-1 0,-1 1 0,0-1 0,0 0 0,0 1 0,-1-1 0,1 0 0,-1 0 0,0 0 0,0 0 0,-1 0 0,1-1 0,-1 1 0,0 0 0,0 0 0,0 0 0,0 0 0,-2-7 0,1 9 0,1 0 0,-1-1 0,1 1 0,-1-1 0,0 1 0,0 0 0,0-1 0,0 1 0,-1 0 0,1 0 0,0 0 0,-1 0 0,0 0 0,1 0 0,-1 0 0,0 1 0,0-1 0,0 0 0,0 1 0,0 0 0,0-1 0,-1 1 0,-4-2 0,3 2 0,0 0 0,0 1 0,-1-1 0,1 1 0,0 0 0,-1 0 0,1 0 0,-1 0 0,1 1 0,0 0 0,0 0 0,-1 0 0,-4 2 0,4-1 0,1 0 0,-1 0 0,1 1 0,-1-1 0,1 1 0,0 0 0,0 0 0,0 0 0,0 1 0,1 0 0,-6 6 0,7-7 0,1-1 0,-1 0 0,1 1 0,0 0 0,0-1 0,0 1 0,0 0 0,0-1 0,1 1 0,-1 0 0,1 0 0,0 0 0,-1 0 0,1 0 0,1-1 0,-1 1 0,0 0 0,1 0 0,-1 0 0,1-1 0,1 5 0,-1-6 0,-1 1 0,1-1 0,-1 0 0,1 0 0,0 1 0,-1-1 0,1 0 0,0 0 0,0 0 0,0 0 0,0 0 0,0 0 0,0 0 0,0 0 0,0 0 0,0-1 0,0 1 0,0 0 0,1-1 0,-1 1 0,0-1 0,1 1 0,-1-1 0,0 0 0,2 1 0,0-1 0,-1 0 0,1-1 0,-1 1 0,1-1 0,-1 1 0,1-1 0,-1 0 0,0 0 0,1 0 0,-1 0 0,0 0 0,0 0 0,2-2 0,0 0 0,0 0 0,0 0 0,-1 0 0,1 0 0,-1-1 0,0 1 0,0-1 0,0 0 0,-1 0 0,1 0 0,-1 0 0,0-1 0,0 1 0,2-8 0,-4 12 0,0-1 0,0 0 0,0 0 0,0 1 0,0-1 0,0 0 0,0 0 0,0 1 0,0-1 0,0 0 0,-1 0 0,1 1 0,0-1 0,0 0 0,-1 1 0,1-1 0,-1 0 0,1 1 0,-1-1 0,1 0 0,-1 1 0,1-1 0,-1 1 0,1-1 0,-1 1 0,0-1 0,1 1 0,-1 0 0,0-1 0,1 1 0,-1 0 0,0-1 0,1 1 0,-1 0 0,0 0 0,0 0 0,-2-1 0,0 1 0,0 0 0,1 0 0,-1 0 0,0 1 0,1-1 0,-1 1 0,0-1 0,1 1 0,-6 2 0,6-2 0,1-1 0,-1 1 0,0 0 0,0 0 0,1 0 0,-1 0 0,0 1 0,1-1 0,0 0 0,-1 1 0,1-1 0,0 1 0,-1-1 0,0 3 0,2-3 0,-1 0 0,1 0 0,0 0 0,0-1 0,0 1 0,0 0 0,0 0 0,0 0 0,0-1 0,0 1 0,1 0 0,-1 0 0,0 0 0,0-1 0,1 1 0,-1 0 0,0 0 0,1-1 0,-1 1 0,1 0 0,-1-1 0,1 1 0,-1 0 0,1-1 0,0 1 0,-1-1 0,1 1 0,-1-1 0,1 1 0,0-1 0,0 1 0,-1-1 0,1 0 0,0 1 0,1-1 0,0 1 0,1 0 0,-1 0 0,0 0 0,1 0 0,-1-1 0,1 1 0,-1-1 0,1 1 0,-1-1 0,1 0 0,-1 0 0,1 0 0,-1-1 0,1 1 0,-1-1 0,1 1 0,-1-1 0,5-1 0,-7 1-25,0 1-1,0 0 0,0 0 1,0-1-1,1 1 0,-1 0 1,0 0-1,0-1 0,0 1 1,0 0-1,0-1 0,0 1 0,0 0 1,0 0-1,0-1 0,0 1 1,0 0-1,-1 0 0,1-1 1,0 1-1,0 0 0,0 0 1,0-1-1,0 1 0,0 0 1,0 0-1,-1-1 0,1 1 1,0 0-1,0 0 0,0 0 1,-1-1-1,1 1 0,0 0 1,0 0-1,-1 0 0,1 0 1,0 0-1,0-1 0,-1 1 1,1 0-1,0 0 0,0 0 1,-1 0-1,1 0 0,0 0 1,-1 0-1,1 0 0,0 0 1,0 0-1,-1 0 0</inkml:trace>
 </inkml:ink>
 </file>
 
@@ -1732,7 +2489,7 @@
           <inkml:channelProperty channel="F" name="resolution" value="0" units="1/dev"/>
         </inkml:channelProperties>
       </inkml:inkSource>
-      <inkml:timestamp xml:id="ts0" timeString="2026-03-26T06:33:33.550"/>
+      <inkml:timestamp xml:id="ts0" timeString="2026-05-21T16:22:16.174"/>
     </inkml:context>
     <inkml:brush xml:id="br0">
       <inkml:brushProperty name="width" value="0.1" units="cm"/>
@@ -1740,7 +2497,7 @@
       <inkml:brushProperty name="color" value="#FFC114"/>
     </inkml:brush>
   </inkml:definitions>
-  <inkml:trace contextRef="#ctx0" brushRef="#br0">122 34 24575,'0'-1'0,"0"0"0,0-1 0,0 1 0,-1-1 0,1 1 0,0 0 0,-1-1 0,1 1 0,-1 0 0,1-1 0,-1 1 0,1 0 0,-1 0 0,0-1 0,0 1 0,0 0 0,0 0 0,0 0 0,0 0 0,0 0 0,0 0 0,0 1 0,0-1 0,0 0 0,-1 0 0,1 1 0,0-1 0,-1 1 0,1-1 0,0 1 0,-1 0 0,1-1 0,0 1 0,-1 0 0,1 0 0,-1 0 0,-1 0 0,-1 0 0,0 0 0,1 1 0,-1-1 0,1 1 0,-1-1 0,0 1 0,1 0 0,-1 1 0,1-1 0,0 1 0,0-1 0,-1 1 0,-3 3 0,4-2 0,0 0 0,0 1 0,0-1 0,1 1 0,-1 0 0,1 0 0,0 0 0,0 0 0,0 0 0,0 0 0,1 1 0,0-1 0,0 0 0,0 1 0,0-1 0,1 6 0,0-8 0,0 0 0,0 0 0,0-1 0,0 1 0,0 0 0,1-1 0,-1 1 0,1 0 0,0-1 0,-1 1 0,1-1 0,0 1 0,0-1 0,0 1 0,0-1 0,0 0 0,0 1 0,0-1 0,0 0 0,1 0 0,-1 0 0,0 0 0,1 0 0,-1 0 0,1 0 0,-1 0 0,1-1 0,-1 1 0,1-1 0,0 1 0,-1-1 0,1 1 0,0-1 0,-1 0 0,1 0 0,0 0 0,0 0 0,-1 0 0,1 0 0,0 0 0,-1-1 0,1 1 0,0-1 0,2 0 0,8-2 0,1 0 0,0-1 0,16-8 0,-27 12 0,1-1 0,0 0 0,-1 0 0,1-1 0,-1 1 0,0-1 0,1 1 0,-1-1 0,0 0 0,0 0 0,0 1 0,0-2 0,0 1 0,0 0 0,-1 0 0,1 0 0,-1-1 0,1 1 0,-1-1 0,0 1 0,1-6 0,-2 7 0,0 1 0,0-1 0,0 0 0,0 1 0,0-1 0,0 0 0,0 1 0,0-1 0,0 0 0,-1 1 0,1-1 0,0 1 0,-1-1 0,1 0 0,0 1 0,-1-1 0,1 1 0,0-1 0,-1 1 0,1-1 0,-1 1 0,1-1 0,-1 1 0,0 0 0,1-1 0,-1 1 0,1 0 0,-1-1 0,0 1 0,0-1 0,-27 2 0,24 0 0,-1 1 0,1-1 0,-1 1 0,1-1 0,-1 1 0,1 1 0,0-1 0,0 1 0,-5 3 0,-16 19-1365</inkml:trace>
+  <inkml:trace contextRef="#ctx0" brushRef="#br0">1 71 24575,'7'0'0,"1"-1"0,0 0 0,0-1 0,15-5 0,24-4 0,642-37 0,-201 69 0,-448-13-34,10 3 155,-48-11-212,1 0 1,-1 1-1,1-1 0,-1 0 0,0-1 1,1 1-1,-1 0 0,1-1 0,-1 0 1,0 1-1,1-1 0,-1 0 0,0 0 0,0 0 1,4-3-1</inkml:trace>
 </inkml:ink>
 </file>
 
@@ -1760,7 +2517,7 @@
           <inkml:channelProperty channel="F" name="resolution" value="0" units="1/dev"/>
         </inkml:channelProperties>
       </inkml:inkSource>
-      <inkml:timestamp xml:id="ts0" timeString="2026-03-26T06:33:33.551"/>
+      <inkml:timestamp xml:id="ts0" timeString="2026-05-21T16:22:16.175"/>
     </inkml:context>
     <inkml:brush xml:id="br0">
       <inkml:brushProperty name="width" value="0.1" units="cm"/>
@@ -1768,7 +2525,7 @@
       <inkml:brushProperty name="color" value="#FFC114"/>
     </inkml:brush>
   </inkml:definitions>
-  <inkml:trace contextRef="#ctx0" brushRef="#br0">182 20 24575,'0'-1'0,"0"0"0,-1 0 0,1 0 0,-1 0 0,1 0 0,-1 0 0,1 0 0,-1 0 0,0 0 0,1 0 0,-1 1 0,0-1 0,0 0 0,0 0 0,0 1 0,0-1 0,1 0 0,-1 1 0,0-1 0,0 1 0,0-1 0,-1 1 0,1 0 0,0-1 0,0 1 0,0 0 0,0 0 0,0 0 0,0 0 0,0 0 0,0 0 0,-1 0 0,1 0 0,-1 0 0,-40 5 0,35-3 0,0 1 0,1-1 0,-1 1 0,1 1 0,-8 4 0,12-7 0,1 0 0,-1 0 0,0 0 0,1 0 0,-1 1 0,1-1 0,-1 1 0,1-1 0,0 1 0,0-1 0,-1 1 0,1 0 0,0 0 0,0 0 0,1-1 0,-1 1 0,0 0 0,1 0 0,-1 0 0,1 0 0,0 0 0,-1 3 0,1-4 0,0 0 0,1-1 0,-1 1 0,0 0 0,0-1 0,0 1 0,1 0 0,-1-1 0,0 1 0,1-1 0,-1 1 0,0 0 0,1-1 0,-1 1 0,1-1 0,-1 1 0,1-1 0,-1 1 0,1-1 0,-1 0 0,1 1 0,-1-1 0,1 1 0,0-1 0,-1 0 0,1 0 0,0 1 0,-1-1 0,1 0 0,1 0 0,27-3 0,-26 2 0,1 0 0,-1 0 0,0 0 0,0 0 0,0-1 0,0 1 0,0-1 0,0 0 0,-1 0 0,1 0 0,-1 0 0,1 0 0,-1 0 0,4-5 0,-6 7 0,0 0 0,0 0 0,0 0 0,0-1 0,0 1 0,0 0 0,0 0 0,0 0 0,0 0 0,0 0 0,0-1 0,0 1 0,0 0 0,0 0 0,0 0 0,0 0 0,0 0 0,0-1 0,0 1 0,0 0 0,0 0 0,-1 0 0,1 0 0,0 0 0,0 0 0,0 0 0,0-1 0,0 1 0,0 0 0,0 0 0,0 0 0,-1 0 0,1 0 0,0 0 0,0 0 0,0 0 0,0 0 0,0 0 0,-1 0 0,1 0 0,0 0 0,0 0 0,0-1 0,0 1 0,0 0 0,-1 0 0,1 1 0,0-1 0,0 0 0,0 0 0,0 0 0,-1 0 0,-12 3 0,-10 9 0,13 1 0,13-5 0,-1-7 0,0-1 0,0 1 0,0-1 0,0 1 0,0-1 0,0 0 0,0 0 0,0 0 0,0 0 0,0 0 0,0-1 0,2 0 0,-3 1 0,1 0 0,-1 0 0,0-1 0,1 1 0,-1 0 0,0-1 0,0 1 0,1-1 0,-1 0 0,0 1 0,0-1 0,0 0 0,0 0 0,0 1 0,0-1 0,0 0 0,1-2 0,-6-6 0,-16-1 0,14 8-114,0 1 1,0 0-1,-1 0 0,1 0 0,0 1 1,0 0-1,0 0 0,-1 0 0,1 1 1,0 0-1,-12 4 0,0 0-6712</inkml:trace>
+  <inkml:trace contextRef="#ctx0" brushRef="#br0">54 2 24575,'-11'-1'0,"15"1"0,26 2 0,83 26 0,-47-13 0,-1 3 0,79 32 0,-142-50 0,0 1 0,-1 0 0,1-1 0,0 1 0,-1 0 0,1 0 0,-1 0 0,1 0 0,-1 0 0,0 0 0,1 1 0,-1-1 0,0 0 0,0 1 0,0-1 0,0 1 0,0-1 0,0 1 0,0-1 0,1 4 0,-2-4 0,0 1 0,-1-1 0,1 0 0,0 1 0,0-1 0,-1 1 0,1-1 0,-1 0 0,1 1 0,-1-1 0,0 0 0,1 1 0,-1-1 0,0 0 0,0 0 0,0 0 0,0 1 0,0-1 0,-1 1 0,-7 5 0,-1 0 0,1-1 0,-1 0 0,-20 9 0,-245 83 7,160-62-1379,93-28-5454</inkml:trace>
 </inkml:ink>
 </file>
 
@@ -1788,7 +2545,7 @@
           <inkml:channelProperty channel="F" name="resolution" value="0" units="1/dev"/>
         </inkml:channelProperties>
       </inkml:inkSource>
-      <inkml:timestamp xml:id="ts0" timeString="2026-03-26T06:33:33.552"/>
+      <inkml:timestamp xml:id="ts0" timeString="2026-03-26T06:33:33.531"/>
     </inkml:context>
     <inkml:brush xml:id="br0">
       <inkml:brushProperty name="width" value="0.1" units="cm"/>
@@ -1796,7 +2553,7 @@
       <inkml:brushProperty name="color" value="#FFC114"/>
     </inkml:brush>
   </inkml:definitions>
-  <inkml:trace contextRef="#ctx0" brushRef="#br0">8 62 24575,'0'0'0,"0"0"0,0 0 0,-1 1 0,1-1 0,0 0 0,0 0 0,0 0 0,0 0 0,-1 0 0,1 0 0,0 0 0,0 0 0,0 0 0,0 0 0,-1 0 0,1 0 0,0 0 0,0 0 0,0 0 0,-1 0 0,1 0 0,0 0 0,0 0 0,0-1 0,0 1 0,-1 0 0,1 0 0,0 0 0,0 0 0,0 0 0,0 0 0,0 0 0,0-1 0,-1 1 0,1 0 0,0 0 0,0 0 0,0 0 0,0 0 0,0-1 0,0 1 0,0 0 0,0 0 0,0 0 0,0-1 0,0 1 0,0 0 0,0 0 0,0 0 0,0 0 0,0-1 0,0 1 0,0 0 0,0 0 0,-1 1 0,1 0 0,0 0 0,0 0 0,-1 0 0,1 1 0,0-1 0,0 0 0,0 0 0,0 0 0,0 0 0,1 1 0,-1-1 0,0 0 0,1 0 0,-1 0 0,0 0 0,1 0 0,-1 0 0,1 1 0,1 0 0,13 16 0,0 0 0,2-1 0,0-1 0,1-1 0,0 0 0,31 18 0,-20-13 0,3 2 0,0-2 0,1-1 0,1-1 0,1-2 0,40 12 0,-15-11 0,0-3 0,2-2 0,77 4 0,-101-14 0,-1-2 0,1-2 0,0-1 0,-1-2 0,1-2 0,41-12 0,25-17 0,-2-4 0,176-98 0,-199 100 0,-56 29 0,-1-1 0,0-1 0,-1-1 0,0-1 0,-1-1 0,36-32 0,-46 30-1365</inkml:trace>
+  <inkml:trace contextRef="#ctx0" brushRef="#br0">252 0 24575,'-5'1'0,"1"0"0,-1 0 0,1 0 0,0 0 0,-1 1 0,1 0 0,0-1 0,0 2 0,0-1 0,0 0 0,0 1 0,1 0 0,-1-1 0,1 2 0,0-1 0,0 0 0,-4 6 0,-6 8 0,0 1 0,-12 23 0,21-34 0,-8 18 0,1 1 0,1 0 0,1 1 0,2 0 0,-8 49 0,-6 24 0,9-48 0,-5 68 0,10-64 0,6-34 0,0 0 0,2 1 0,0-1 0,8 37 0,-3-28 0,0 44 0,-6-44 0,0 14 0,2-1 0,11 65 0,-4-61 0,2-1 0,3 0 0,1 0 0,3-2 0,1 0 0,2-1 0,43 65 0,2-3 0,72 162 0,-46-84 0,-75-152 0,5 11 0,2-1 0,36 50 0,-36-70-1365</inkml:trace>
 </inkml:ink>
 </file>
 
@@ -1844,7 +2601,7 @@
           <inkml:channelProperty channel="F" name="resolution" value="0" units="1/dev"/>
         </inkml:channelProperties>
       </inkml:inkSource>
-      <inkml:timestamp xml:id="ts0" timeString="2026-03-26T06:33:33.553"/>
+      <inkml:timestamp xml:id="ts0" timeString="2026-03-26T06:33:33.532"/>
     </inkml:context>
     <inkml:brush xml:id="br0">
       <inkml:brushProperty name="width" value="0.1" units="cm"/>
@@ -1852,7 +2609,7 @@
       <inkml:brushProperty name="color" value="#FFC114"/>
     </inkml:brush>
   </inkml:definitions>
-  <inkml:trace contextRef="#ctx0" brushRef="#br0">1 8 24575,'0'-8'0,"0"11"0,8 17 0,3-6 0,0 0 0,1 0 0,0-1 0,2-1 0,-1 0 0,1-1 0,19 11 0,-12-7 0,0 1 0,24 24 0,-44-39-34,0-1 0,0 1 0,-1 0 0,1-1 0,0 1-1,0 0 1,-1 0 0,1-1 0,0 1 0,-1 0 0,1 0 0,-1 0 0,1 0-1,-1 0 1,0 0 0,1 0 0,-1 0 0,0 0 0,0 0 0,1 0-1,-1 0 1,0 0 0,0 0 0,0 0 0,0 0 0,0 0 0,-1 0 0,1 0-1,0 0 1,0 0 0,-1 0 0,1-1 0,0 1 0,-1 0 0,1 0 0,-1 0-1,1 0 1,-1 0 0,-1 1 0</inkml:trace>
+  <inkml:trace contextRef="#ctx0" brushRef="#br0">9 263 24575,'-5'-20'0,"1"-4"0,8 21 0,9 10 0,91 89 0,-74-65 0,58 45 0,-74-66 0,4 4 0,1-1 0,0 0 0,0-2 0,35 15 0,-50-24 0,1 0 0,0-1 0,0 0 0,-1 0 0,1 0 0,0 0 0,0-1 0,0 1 0,0-1 0,0-1 0,0 1 0,0-1 0,0 0 0,0 0 0,-1 0 0,1 0 0,0-1 0,-1 0 0,1 0 0,-1 0 0,1-1 0,-1 0 0,0 1 0,0-2 0,0 1 0,6-7 0,17-23 0,-2-2 0,-1-1 0,36-73 0,-2 3 0,-48 91-195,-1-2 0,0 1 0,-1-1 0,-1 0 0,-1-1 0,5-22 0,-7 16-6631</inkml:trace>
 </inkml:ink>
 </file>
 
@@ -1872,7 +2629,7 @@
           <inkml:channelProperty channel="F" name="resolution" value="0" units="1/dev"/>
         </inkml:channelProperties>
       </inkml:inkSource>
-      <inkml:timestamp xml:id="ts0" timeString="2026-03-26T06:33:33.554"/>
+      <inkml:timestamp xml:id="ts0" timeString="2026-03-26T06:33:33.533"/>
     </inkml:context>
     <inkml:brush xml:id="br0">
       <inkml:brushProperty name="width" value="0.1" units="cm"/>
@@ -1880,7 +2637,7 @@
       <inkml:brushProperty name="color" value="#FFC114"/>
     </inkml:brush>
   </inkml:definitions>
-  <inkml:trace contextRef="#ctx0" brushRef="#br0">317 240 24575,'-8'-2'0,"1"0"0,-1-1 0,1 0 0,-1 0 0,1 0 0,0-1 0,0 0 0,1-1 0,-1 0 0,1 0 0,0 0 0,-6-7 0,-4-2 0,-66-47 0,-24-19 0,105 79-91,-1-1 0,1 1 0,-1-1 0,1 1 0,-1-1 0,1 0 0,0 0 0,0 0 0,0 1 0,0-1 0,0 0 0,1 0 0,-1 0 0,0-3 0</inkml:trace>
+  <inkml:trace contextRef="#ctx0" brushRef="#br0">2 32 24575,'-1'-14'0,"1"-4"0,6 28 0,1 17 0,-1 1 0,-2 0 0,0 1 0,-1 33 0,-1-22 0,8 49 0,0-16 0,-5-64-1365</inkml:trace>
 </inkml:ink>
 </file>
 
@@ -1900,7 +2657,7 @@
           <inkml:channelProperty channel="F" name="resolution" value="0" units="1/dev"/>
         </inkml:channelProperties>
       </inkml:inkSource>
-      <inkml:timestamp xml:id="ts0" timeString="2026-03-26T06:33:33.555"/>
+      <inkml:timestamp xml:id="ts0" timeString="2026-03-26T06:33:33.534"/>
     </inkml:context>
     <inkml:brush xml:id="br0">
       <inkml:brushProperty name="width" value="0.1" units="cm"/>
@@ -1908,7 +2665,7 @@
       <inkml:brushProperty name="color" value="#FFC114"/>
     </inkml:brush>
   </inkml:definitions>
-  <inkml:trace contextRef="#ctx0" brushRef="#br0">504 1 24575,'-12'1'0,"-1"0"0,0 1 0,1 0 0,0 1 0,-1 0 0,1 1 0,1 0 0,-20 11 0,-9 7 0,-40 31 0,23-15 0,-122 94-1365,160-120-5461</inkml:trace>
+  <inkml:trace contextRef="#ctx0" brushRef="#br0">611 51 24575,'-6'-5'0,"1"0"0,-1 0 0,-1 1 0,1-1 0,0 1 0,-1 1 0,0-1 0,0 1 0,0 1 0,0-1 0,-1 1 0,1 0 0,-1 1 0,1-1 0,-11 1 0,6 1 0,-1 1 0,1 0 0,-1 1 0,1 1 0,0 0 0,0 0 0,0 1 0,-19 9 0,2 3 0,1 0 0,1 2 0,0 1 0,1 2 0,1 0 0,-29 33 0,38-37 0,0 2 0,1 0 0,1 1 0,1 0 0,1 1 0,1 0 0,0 1 0,-11 36 0,18-41 0,0 0 0,1 0 0,0 0 0,2 0 0,0 0 0,1 0 0,0 1 0,2-1 0,0 0 0,1 0 0,0 0 0,11 29 0,-8-30 0,0 0 0,1 0 0,1 0 0,1-1 0,0-1 0,1 1 0,0-1 0,1-1 0,1 0 0,0 0 0,0-1 0,2-1 0,-1 0 0,1-1 0,1-1 0,0 0 0,0-1 0,1 0 0,0-1 0,0-1 0,19 5 0,-2-1 0,0-1 0,0-2 0,1-1 0,-1-1 0,56 0 0,-74-6 0,0 0 0,0 0 0,-1-2 0,1 1 0,-1-2 0,1 0 0,-1-1 0,-1 0 0,1-1 0,16-10 0,-10 2 0,0 0 0,0-2 0,-2 0 0,0-1 0,22-26 0,-29 29 0,0 0 0,-1 0 0,0 0 0,-1-2 0,-1 1 0,0-1 0,-1 0 0,-1-1 0,0 1 0,4-24 0,-4 13 0,-4 18 0,0 0 0,0 0 0,0 0 0,-1 0 0,-1 0 0,0-1 0,0 1 0,-1 0 0,-3-17 0,0 8 0,0-4 0,0 1 0,-2 0 0,-1 0 0,0 0 0,-1 1 0,-2 1 0,-20-35 0,16 36 0,-2 0 0,1 1 0,-2 0 0,0 2 0,-30-22 0,3 8 0,-63-32 0,38 36-204,51 20-957,-2-1-5665</inkml:trace>
 </inkml:ink>
 </file>
 
@@ -1928,7 +2685,7 @@
           <inkml:channelProperty channel="F" name="resolution" value="0" units="1/dev"/>
         </inkml:channelProperties>
       </inkml:inkSource>
-      <inkml:timestamp xml:id="ts0" timeString="2026-03-26T06:33:33.556"/>
+      <inkml:timestamp xml:id="ts0" timeString="2026-03-26T06:33:33.535"/>
     </inkml:context>
     <inkml:brush xml:id="br0">
       <inkml:brushProperty name="width" value="0.1" units="cm"/>
@@ -1936,7 +2693,7 @@
       <inkml:brushProperty name="color" value="#FFC114"/>
     </inkml:brush>
   </inkml:definitions>
-  <inkml:trace contextRef="#ctx0" brushRef="#br0">244 64 24575,'-7'-7'0,"0"0"0,-1 0 0,0 1 0,0 0 0,0 0 0,-1 1 0,1 0 0,-15-5 0,19 9 0,0 0 0,0 0 0,0 0 0,0 1 0,0-1 0,0 1 0,0 0 0,0 0 0,0 1 0,0-1 0,1 1 0,-1 0 0,0 0 0,0 0 0,0 0 0,1 1 0,-1 0 0,1 0 0,-1 0 0,1 0 0,0 0 0,-1 0 0,1 1 0,-3 3 0,0 0 0,1-1 0,0 1 0,0 0 0,0 1 0,1-1 0,0 1 0,0-1 0,1 1 0,-1 1 0,2-1 0,-1 0 0,-2 13 0,5-17 0,-1 0 0,1 0 0,0 0 0,0 0 0,0 0 0,1 0 0,-1 1 0,1-1 0,0 0 0,-1 0 0,1 0 0,1-1 0,-1 1 0,0 0 0,1 0 0,-1-1 0,1 1 0,0 0 0,0-1 0,0 0 0,0 1 0,0-1 0,1 0 0,-1 0 0,1 0 0,-1-1 0,1 1 0,0-1 0,-1 1 0,1-1 0,0 0 0,0 0 0,4 1 0,1 0 0,1 0 0,-1 0 0,0-1 0,1 0 0,-1-1 0,1 0 0,-1 0 0,1 0 0,-1-1 0,0-1 0,1 0 0,-1 0 0,9-3 0,-12 3 0,-1 0 0,1 0 0,-1 0 0,1 0 0,-1-1 0,0 0 0,0 0 0,0 0 0,0 0 0,-1-1 0,1 1 0,-1-1 0,0 0 0,0 0 0,0 0 0,-1-1 0,1 1 0,-1-1 0,0 1 0,0-1 0,-1 0 0,0 1 0,2-9 0,-3 9 0,0 1 0,1 0 0,-2-1 0,1 1 0,0 0 0,-1-1 0,0 1 0,1 0 0,-1-1 0,0 1 0,-1 0 0,1 0 0,-1 0 0,1 0 0,-1 0 0,0 0 0,0 1 0,0-1 0,0 1 0,-1-1 0,1 1 0,-1 0 0,0 0 0,1 0 0,-1 0 0,0 0 0,0 1 0,0-1 0,0 1 0,0 0 0,-6-2 0,2 1 0,0 0 0,0 1 0,0-1 0,-1 1 0,1 1 0,0 0 0,0 0 0,0 0 0,-1 1 0,1 0 0,0 0 0,0 1 0,0-1 0,-7 5 0,4-1 0,0 1 0,0 0 0,1 1 0,0 0 0,-9 10 0,15-14 0,0 0 0,0 0 0,0 1 0,1-1 0,-1 1 0,1 0 0,-3 6 0,4-8 0,1-1 0,0 1 0,-1-1 0,1 0 0,0 1 0,0-1 0,0 1 0,0-1 0,0 0 0,0 1 0,0-1 0,0 1 0,0-1 0,1 0 0,-1 1 0,1-1 0,-1 0 0,1 1 0,-1-1 0,1 0 0,0 0 0,1 3 0,0-3 0,0 1 0,0-1 0,0 0 0,0 0 0,1 0 0,-1 0 0,0 0 0,0-1 0,1 1 0,-1-1 0,0 1 0,1-1 0,-1 0 0,1 0 0,-1 0 0,0 0 0,1 0 0,-1-1 0,0 1 0,1-1 0,-1 1 0,0-1 0,0 0 0,1 0 0,-1 0 0,0 0 0,2-2 0,3 0 0,0-1 0,0 0 0,-1 0 0,1-1 0,-1 1 0,0-1 0,7-8 0,-13 12 0,1 1 0,-1 0 0,1-1 0,-1 1 0,1-1 0,-1 1 0,1-1 0,-1 0 0,0 1 0,1-1 0,-1 1 0,0-1 0,1 0 0,-1 1 0,0-1 0,0 0 0,0 1 0,0-1 0,0 0 0,1 1 0,-1-1 0,0 0 0,0 1 0,-1-1 0,1 0 0,0 1 0,0-1 0,0 0 0,-1 0 0,-16-2 0,-26 16 0,29 0-1365</inkml:trace>
+  <inkml:trace contextRef="#ctx0" brushRef="#br0">56 325 24575,'0'-1'0,"0"0"0,0 1 0,0-1 0,0 0 0,0 0 0,0 0 0,0 1 0,0-1 0,0 0 0,0 0 0,0 1 0,-1-1 0,1 0 0,0 0 0,-1 1 0,1-1 0,0 0 0,-1 1 0,1-1 0,-1 0 0,1 1 0,-1-1 0,1 1 0,-1-1 0,1 1 0,-1-1 0,0 1 0,1-1 0,-1 1 0,0 0 0,1-1 0,-1 1 0,0 0 0,1-1 0,-1 1 0,0 0 0,0 0 0,1 0 0,-1 0 0,0 0 0,0 0 0,-1 0 0,1 0 0,-1 1 0,1-1 0,0 1 0,-1-1 0,1 1 0,0-1 0,-1 1 0,1 0 0,0 0 0,0 0 0,0 0 0,0 0 0,0 0 0,0 0 0,0 0 0,0 0 0,0 0 0,0 1 0,1-1 0,-1 0 0,0 1 0,1-1 0,-1 2 0,-2 10 0,0 0 0,1 1 0,1-1 0,0 1 0,1-1 0,2 22 0,18 81 0,-15-94 0,7 31 0,-10-46 0,-8-36 0,0 4 0,1 0 0,2 0 0,0-1 0,2 1 0,3-48 0,28-143 0,-28 205 0,0-7 0,1 0 0,1 0 0,1 0 0,8-23 0,-11 36 0,1 1 0,-1-1 0,0 1 0,1 0 0,0 0 0,0 0 0,1 0 0,-1 0 0,1 1 0,-1 0 0,1-1 0,0 1 0,0 0 0,1 1 0,-1-1 0,0 1 0,1 0 0,0 0 0,-1 0 0,1 1 0,5-1 0,-6 1 0,1 1 0,-1-1 0,0 1 0,0 1 0,0-1 0,1 0 0,-1 1 0,0 0 0,0 0 0,0 0 0,0 1 0,0-1 0,0 1 0,-1 0 0,1 0 0,0 0 0,-1 0 0,0 1 0,1 0 0,-1-1 0,0 1 0,0 0 0,-1 1 0,1-1 0,3 5 0,4 9 0,1 0 0,-2 1 0,14 36 0,-20-45 0,18 50 0,14 71 0,-32-113 0,-1-1 0,0 33 0,4 20 0,1-55-1365</inkml:trace>
 </inkml:ink>
 </file>
 
@@ -1956,7 +2713,7 @@
           <inkml:channelProperty channel="F" name="resolution" value="0" units="1/dev"/>
         </inkml:channelProperties>
       </inkml:inkSource>
-      <inkml:timestamp xml:id="ts0" timeString="2026-03-26T06:33:33.557"/>
+      <inkml:timestamp xml:id="ts0" timeString="2026-03-26T06:33:33.536"/>
     </inkml:context>
     <inkml:brush xml:id="br0">
       <inkml:brushProperty name="width" value="0.1" units="cm"/>
@@ -1964,7 +2721,7 @@
       <inkml:brushProperty name="color" value="#FFC114"/>
     </inkml:brush>
   </inkml:definitions>
-  <inkml:trace contextRef="#ctx0" brushRef="#br0">248 25 24575,'-3'-3'0,"-1"1"0,0-1 0,1 1 0,-1 0 0,0 0 0,0 0 0,-1 0 0,1 1 0,0-1 0,-1 1 0,1 0 0,0 0 0,-1 1 0,1 0 0,-1-1 0,1 2 0,-1-1 0,1 0 0,-1 1 0,1 0 0,-6 1 0,1 0 0,1 1 0,0 0 0,0 0 0,0 1 0,0 0 0,0 0 0,1 1 0,0 0 0,0 0 0,-6 7 0,7-6 0,0 1 0,0-1 0,1 2 0,0-1 0,1 0 0,-1 1 0,1 0 0,1 0 0,0 0 0,0 0 0,0 0 0,-1 13 0,3-18 0,1 0 0,0 1 0,0-1 0,0 0 0,0 1 0,1-1 0,-1 0 0,1 0 0,0 1 0,0-1 0,0 0 0,0 0 0,1 0 0,-1 0 0,1 0 0,0 0 0,0 0 0,0-1 0,0 1 0,0-1 0,0 1 0,1-1 0,-1 0 0,1 0 0,0 0 0,-1 0 0,1-1 0,0 1 0,0-1 0,0 1 0,0-1 0,1 0 0,-1 0 0,0-1 0,5 2 0,2 0 0,1-1 0,-1 1 0,0-2 0,0 0 0,1 0 0,-1 0 0,0-1 0,0-1 0,0 0 0,0 0 0,17-7 0,-23 8 0,-1-1 0,1 0 0,0 0 0,-1 0 0,1 0 0,-1-1 0,0 1 0,1-1 0,-1 0 0,0 0 0,-1 0 0,1 0 0,-1 0 0,1-1 0,-1 1 0,0-1 0,0 0 0,0 1 0,-1-1 0,1 0 0,-1 0 0,0 0 0,0 0 0,-1 0 0,1-1 0,-1 1 0,0 0 0,0 0 0,0 0 0,0 0 0,-2-7 0,1 9 0,1 0 0,-1-1 0,1 1 0,-1-1 0,0 1 0,0 0 0,0-1 0,0 1 0,-1 0 0,1 0 0,0 0 0,-1 0 0,0 0 0,1 0 0,-1 0 0,0 1 0,0-1 0,0 0 0,0 1 0,0 0 0,0-1 0,-1 1 0,-4-2 0,3 2 0,0 0 0,0 1 0,-1-1 0,1 1 0,0 0 0,-1 0 0,1 0 0,-1 0 0,1 1 0,0 0 0,0 0 0,-1 0 0,-4 2 0,4-1 0,1 0 0,-1 0 0,1 1 0,-1-1 0,1 1 0,0 0 0,0 0 0,0 0 0,0 1 0,1 0 0,-6 6 0,7-7 0,1-1 0,-1 0 0,1 1 0,0 0 0,0-1 0,0 1 0,0 0 0,0-1 0,1 1 0,-1 0 0,1 0 0,0 0 0,-1 0 0,1 0 0,1-1 0,-1 1 0,0 0 0,1 0 0,-1 0 0,1-1 0,1 5 0,-1-6 0,-1 1 0,1-1 0,-1 0 0,1 0 0,0 1 0,-1-1 0,1 0 0,0 0 0,0 0 0,0 0 0,0 0 0,0 0 0,0 0 0,0 0 0,0 0 0,0-1 0,0 1 0,0 0 0,1-1 0,-1 1 0,0-1 0,1 1 0,-1-1 0,0 0 0,2 1 0,0-1 0,-1 0 0,1-1 0,-1 1 0,1-1 0,-1 1 0,1-1 0,-1 0 0,0 0 0,1 0 0,-1 0 0,0 0 0,0 0 0,2-2 0,0 0 0,0 0 0,0 0 0,-1 0 0,1 0 0,-1-1 0,0 1 0,0-1 0,0 0 0,-1 0 0,1 0 0,-1 0 0,0-1 0,0 1 0,2-8 0,-4 12 0,0-1 0,0 0 0,0 0 0,0 1 0,0-1 0,0 0 0,0 0 0,0 1 0,0-1 0,0 0 0,-1 0 0,1 1 0,0-1 0,0 0 0,-1 1 0,1-1 0,-1 0 0,1 1 0,-1-1 0,1 0 0,-1 1 0,1-1 0,-1 1 0,1-1 0,-1 1 0,0-1 0,1 1 0,-1 0 0,0-1 0,1 1 0,-1 0 0,0-1 0,1 1 0,-1 0 0,0 0 0,0 0 0,-2-1 0,0 1 0,0 0 0,1 0 0,-1 0 0,0 1 0,1-1 0,-1 1 0,0-1 0,1 1 0,-6 2 0,6-2 0,1-1 0,-1 1 0,0 0 0,0 0 0,1 0 0,-1 0 0,0 1 0,1-1 0,0 0 0,-1 1 0,1-1 0,0 1 0,-1-1 0,0 3 0,2-3 0,-1 0 0,1 0 0,0 0 0,0-1 0,0 1 0,0 0 0,0 0 0,0 0 0,0-1 0,0 1 0,1 0 0,-1 0 0,0 0 0,0-1 0,1 1 0,-1 0 0,0 0 0,1-1 0,-1 1 0,1 0 0,-1-1 0,1 1 0,-1 0 0,1-1 0,0 1 0,-1-1 0,1 1 0,-1-1 0,1 1 0,0-1 0,0 1 0,-1-1 0,1 0 0,0 1 0,1-1 0,0 1 0,1 0 0,-1 0 0,0 0 0,1 0 0,-1-1 0,1 1 0,-1-1 0,1 1 0,-1-1 0,1 0 0,-1 0 0,1 0 0,-1-1 0,1 1 0,-1-1 0,1 1 0,-1-1 0,5-1 0,-7 1-25,0 1-1,0 0 0,0 0 1,0-1-1,1 1 0,-1 0 1,0 0-1,0-1 0,0 1 1,0 0-1,0-1 0,0 1 0,0 0 1,0 0-1,0-1 0,0 1 1,0 0-1,-1 0 0,1-1 1,0 1-1,0 0 0,0 0 1,0-1-1,0 1 0,0 0 1,0 0-1,-1-1 0,1 1 1,0 0-1,0 0 0,0 0 1,-1-1-1,1 1 0,0 0 1,0 0-1,-1 0 0,1 0 1,0 0-1,0-1 0,-1 1 1,1 0-1,0 0 0,0 0 1,-1 0-1,1 0 0,0 0 1,-1 0-1,1 0 0,0 0 1,0 0-1,-1 0 0</inkml:trace>
+  <inkml:trace contextRef="#ctx0" brushRef="#br0">22 73 24575,'-5'0'0,"-5"0"0,3-5 0,7 0 0,8-5 0,7 0 0,5 1 0,4 3 0,1 1 0,2-1 0,0-1 0,0 1 0,-5 2-8191</inkml:trace>
 </inkml:ink>
 </file>
 
@@ -1984,7 +2741,7 @@
           <inkml:channelProperty channel="F" name="resolution" value="0" units="1/dev"/>
         </inkml:channelProperties>
       </inkml:inkSource>
-      <inkml:timestamp xml:id="ts0" timeString="2026-03-26T06:34:15.323"/>
+      <inkml:timestamp xml:id="ts0" timeString="2026-03-26T06:33:33.537"/>
     </inkml:context>
     <inkml:brush xml:id="br0">
       <inkml:brushProperty name="width" value="0.1" units="cm"/>
@@ -1992,7 +2749,7 @@
       <inkml:brushProperty name="color" value="#FFC114"/>
     </inkml:brush>
   </inkml:definitions>
-  <inkml:trace contextRef="#ctx0" brushRef="#br0">252 0 24575,'-5'1'0,"1"0"0,-1 0 0,1 0 0,0 0 0,-1 1 0,1 0 0,0-1 0,0 2 0,0-1 0,0 0 0,0 1 0,1 0 0,-1-1 0,1 2 0,0-1 0,0 0 0,-4 6 0,-6 8 0,0 1 0,-12 23 0,21-34 0,-8 18 0,1 1 0,1 0 0,1 1 0,2 0 0,-8 49 0,-6 24 0,9-48 0,-5 68 0,10-64 0,6-34 0,0 0 0,2 1 0,0-1 0,8 37 0,-3-28 0,0 44 0,-6-44 0,0 14 0,2-1 0,11 65 0,-4-61 0,2-1 0,3 0 0,1 0 0,3-2 0,1 0 0,2-1 0,43 65 0,2-3 0,72 162 0,-46-84 0,-75-152 0,5 11 0,2-1 0,36 50 0,-36-70-1365</inkml:trace>
+  <inkml:trace contextRef="#ctx0" brushRef="#br0">272 1 24575,'-34'0'0,"3"-1"0,-51 6 0,73-4 0,0 1 0,0 0 0,0 0 0,0 1 0,0 0 0,1 0 0,0 1 0,0 0 0,0 1 0,-9 6 0,16-10 0,-1 0 0,1 0 0,-1 0 0,1 0 0,-1 0 0,1 1 0,0-1 0,0 0 0,-1 1 0,1-1 0,0 1 0,0 0 0,1-1 0,-1 1 0,0-1 0,0 1 0,1 0 0,-1 0 0,1-1 0,0 1 0,-1 0 0,1 0 0,0 0 0,0 0 0,0 1 0,1 0 0,0-1 0,1 1 0,-1-1 0,0 0 0,1 0 0,-1 0 0,1 1 0,0-2 0,0 1 0,0 0 0,0 0 0,0 0 0,0-1 0,0 1 0,3 0 0,10 6 0,1 0 0,0-2 0,32 9 0,11 0 0,50 14 0,-99-25 0,1 0 0,0 1 0,-1 0 0,0 0 0,0 1 0,0 1 0,10 9 0,-19-16 0,0 1 0,0 0 0,0 0 0,0 0 0,0 0 0,0 0 0,0 0 0,0 0 0,0 1 0,-1-1 0,1 0 0,0 0 0,-1 1 0,1-1 0,-1 0 0,1 1 0,-1-1 0,0 0 0,0 1 0,0-1 0,1 1 0,-1-1 0,0 1 0,-1-1 0,1 0 0,0 1 0,0-1 0,-1 2 0,-1 0 0,1-1 0,-1 1 0,0-1 0,0 1 0,0-1 0,0 0 0,-1 0 0,1 0 0,0 0 0,-1 0 0,0 0 0,-3 1 0,-8 4 0,0-1 0,0-1 0,-1 0 0,-17 4 0,-4-4 0,1-1 0,0-2 0,-1-2 0,-56-5 0,90 5-52,0 0-1,0 0 1,0 0-1,0-1 1,0 1-1,1 0 1,-1-1-1,0 1 1,0-1-1,1 0 1,-1 0-1,0 0 1,1 1-1,-1-1 1,0-1-1,1 1 1,0 0-1,-1 0 1,1-1-1,0 1 0,-1 0 1,1-1-1,0 0 1,0 1-1,-1-3 1</inkml:trace>
 </inkml:ink>
 </file>
 
@@ -2012,7 +2769,7 @@
           <inkml:channelProperty channel="F" name="resolution" value="0" units="1/dev"/>
         </inkml:channelProperties>
       </inkml:inkSource>
-      <inkml:timestamp xml:id="ts0" timeString="2026-03-26T06:34:15.324"/>
+      <inkml:timestamp xml:id="ts0" timeString="2026-03-26T06:33:33.538"/>
     </inkml:context>
     <inkml:brush xml:id="br0">
       <inkml:brushProperty name="width" value="0.1" units="cm"/>
@@ -2020,7 +2777,7 @@
       <inkml:brushProperty name="color" value="#FFC114"/>
     </inkml:brush>
   </inkml:definitions>
-  <inkml:trace contextRef="#ctx0" brushRef="#br0">9 263 24575,'-5'-20'0,"1"-4"0,8 21 0,9 10 0,91 89 0,-74-65 0,58 45 0,-74-66 0,4 4 0,1-1 0,0 0 0,0-2 0,35 15 0,-50-24 0,1 0 0,0-1 0,0 0 0,-1 0 0,1 0 0,0 0 0,0-1 0,0 1 0,0-1 0,0-1 0,0 1 0,0-1 0,0 0 0,0 0 0,-1 0 0,1 0 0,0-1 0,-1 0 0,1 0 0,-1 0 0,1-1 0,-1 0 0,0 1 0,0-2 0,0 1 0,6-7 0,17-23 0,-2-2 0,-1-1 0,36-73 0,-2 3 0,-48 91-195,-1-2 0,0 1 0,-1-1 0,-1 0 0,-1-1 0,5-22 0,-7 16-6631</inkml:trace>
+  <inkml:trace contextRef="#ctx0" brushRef="#br0">5 369 24575,'-4'-3'0,"13"-5"0,13-5 0,-4 5 0,0-1 0,-1 0 0,-1-1 0,1-1 0,-1-1 0,21-19 0,-34 27 0,1 0 0,-1 0 0,1 0 0,-1-1 0,0 1 0,-1-1 0,1 1 0,-1-1 0,0 0 0,0 0 0,-1 0 0,1 0 0,-1-1 0,0 1 0,0 0 0,-1 0 0,0-1 0,0 1 0,0 0 0,-1-1 0,1 1 0,-1 0 0,0 0 0,-1-1 0,1 1 0,-1 0 0,0 0 0,-5-8 0,2 3 0,-1-1 0,0 1 0,-1 0 0,0 1 0,-1-1 0,0 2 0,0-1 0,-16-12 0,24 21 0,-1-1 0,0 1 0,0-1 0,0 0 0,1 1 0,-1 0 0,0-1 0,0 1 0,0-1 0,0 1 0,0 0 0,0 0 0,0 0 0,0-1 0,0 1 0,0 0 0,0 0 0,0 0 0,0 1 0,0-1 0,0 0 0,0 0 0,0 0 0,0 1 0,0-1 0,0 1 0,-1 0 0,1 0 0,-1 0 0,1 1 0,0-1 0,0 1 0,0-1 0,0 1 0,0 0 0,0-1 0,0 1 0,0 0 0,1 0 0,-1-1 0,0 4 0,0 3 0,-1 0 0,1 0 0,1 0 0,0 1 0,1 12 0,32 234 0,-28-168 0,-5-65 0,1 0 0,1 0 0,6 26 0,-8-46-96,0-1 62,0-1 1,0 1 0,0-1-1,0 1 1,0 0 0,0-1-1,0 1 1,0-1-1,1 1 1,-1-1 0,0 1-1,0 0 1,0-1-1,1 1 1,-1-1 0,0 1-1,1-1 1,-1 1-1,0-1 1,1 0 0,-1 1-1,1-1 1,-1 1-1,0-1 1,1 0 0,-1 1-1,1-1 1,-1 0-1,1 1 1,-1-1 0,1 0-1,0 0 1,-1 0 0,1 0-1,-1 1 1,1-1-1,1 0 1</inkml:trace>
 </inkml:ink>
 </file>
 
@@ -2040,7 +2797,7 @@
           <inkml:channelProperty channel="F" name="resolution" value="0" units="1/dev"/>
         </inkml:channelProperties>
       </inkml:inkSource>
-      <inkml:timestamp xml:id="ts0" timeString="2026-03-26T06:34:15.325"/>
+      <inkml:timestamp xml:id="ts0" timeString="2026-03-26T06:33:33.539"/>
     </inkml:context>
     <inkml:brush xml:id="br0">
       <inkml:brushProperty name="width" value="0.1" units="cm"/>
@@ -2048,7 +2805,7 @@
       <inkml:brushProperty name="color" value="#FFC114"/>
     </inkml:brush>
   </inkml:definitions>
-  <inkml:trace contextRef="#ctx0" brushRef="#br0">2 32 24575,'-1'-14'0,"1"-4"0,6 28 0,1 17 0,-1 1 0,-2 0 0,0 1 0,-1 33 0,-1-22 0,8 49 0,0-16 0,-5-64-1365</inkml:trace>
+  <inkml:trace contextRef="#ctx0" brushRef="#br0">5 58 24575,'0'0'0,"-1"-1"0,1 0 0,-1 1 0,1-1 0,0 0 0,-1 1 0,1-1 0,0 0 0,0 0 0,-1 1 0,1-1 0,0 0 0,0 0 0,0 1 0,0-1 0,0 0 0,0 0 0,0 1 0,0-1 0,0 0 0,0 0 0,1 1 0,-1-1 0,0 0 0,0 0 0,1 1 0,-1-1 0,1 0 0,-1 1 0,0-1 0,1 0 0,-1 1 0,1-1 0,-1 1 0,1-1 0,0 1 0,-1-1 0,1 1 0,0-1 0,-1 1 0,1 0 0,0-1 0,-1 1 0,1 0 0,0-1 0,1 1 0,35-15 0,-14 10 0,0 1 0,43 0 0,-54 3 0,0 2 0,0-1 0,0 1 0,0 1 0,0 1 0,-1-1 0,16 7 0,-25-8 0,0-1 0,0 1 0,0 0 0,0-1 0,0 1 0,-1 0 0,1 1 0,0-1 0,-1 0 0,1 0 0,-1 1 0,1-1 0,-1 1 0,0-1 0,1 1 0,-1-1 0,0 1 0,0 0 0,0 0 0,0 0 0,-1-1 0,1 1 0,0 0 0,-1 0 0,1 0 0,-1 0 0,0 0 0,0 0 0,0 0 0,0 0 0,0 0 0,0 0 0,0 0 0,0 0 0,-1 0 0,1 0 0,-1 0 0,0 0 0,0 0 0,1 0 0,-3 2 0,0 2 0,-1-2 0,1 1 0,-1 0 0,0-1 0,0 0 0,-1 1 0,1-2 0,-1 1 0,0 0 0,0-1 0,0 0 0,0 0 0,-6 2 0,-22 5 0,-1-1 0,0-1 0,0-2 0,-49 2 0,121 7 0,30 1 0,-1 3 0,94 40 0,-156-57-124,-1 0 0,1 0 0,0-1 0,0 0 0,0 1 0,0-2-1,0 1 1,0 0 0,0-1 0,9-1 0,5-2-6702</inkml:trace>
 </inkml:ink>
 </file>
 
@@ -2068,7 +2825,7 @@
           <inkml:channelProperty channel="F" name="resolution" value="0" units="1/dev"/>
         </inkml:channelProperties>
       </inkml:inkSource>
-      <inkml:timestamp xml:id="ts0" timeString="2026-03-26T06:34:15.326"/>
+      <inkml:timestamp xml:id="ts0" timeString="2026-03-26T06:33:33.540"/>
     </inkml:context>
     <inkml:brush xml:id="br0">
       <inkml:brushProperty name="width" value="0.1" units="cm"/>
@@ -2076,7 +2833,7 @@
       <inkml:brushProperty name="color" value="#FFC114"/>
     </inkml:brush>
   </inkml:definitions>
-  <inkml:trace contextRef="#ctx0" brushRef="#br0">611 51 24575,'-6'-5'0,"1"0"0,-1 0 0,-1 1 0,1-1 0,0 1 0,-1 1 0,0-1 0,0 1 0,0 1 0,0-1 0,-1 1 0,1 0 0,-1 1 0,1-1 0,-11 1 0,6 1 0,-1 1 0,1 0 0,-1 1 0,1 1 0,0 0 0,0 0 0,0 1 0,-19 9 0,2 3 0,1 0 0,1 2 0,0 1 0,1 2 0,1 0 0,-29 33 0,38-37 0,0 2 0,1 0 0,1 1 0,1 0 0,1 1 0,1 0 0,0 1 0,-11 36 0,18-41 0,0 0 0,1 0 0,0 0 0,2 0 0,0 0 0,1 0 0,0 1 0,2-1 0,0 0 0,1 0 0,0 0 0,11 29 0,-8-30 0,0 0 0,1 0 0,1 0 0,1-1 0,0-1 0,1 1 0,0-1 0,1-1 0,1 0 0,0 0 0,0-1 0,2-1 0,-1 0 0,1-1 0,1-1 0,0 0 0,0-1 0,1 0 0,0-1 0,0-1 0,19 5 0,-2-1 0,0-1 0,0-2 0,1-1 0,-1-1 0,56 0 0,-74-6 0,0 0 0,0 0 0,-1-2 0,1 1 0,-1-2 0,1 0 0,-1-1 0,-1 0 0,1-1 0,16-10 0,-10 2 0,0 0 0,0-2 0,-2 0 0,0-1 0,22-26 0,-29 29 0,0 0 0,-1 0 0,0 0 0,-1-2 0,-1 1 0,0-1 0,-1 0 0,-1-1 0,0 1 0,4-24 0,-4 13 0,-4 18 0,0 0 0,0 0 0,0 0 0,-1 0 0,-1 0 0,0-1 0,0 1 0,-1 0 0,-3-17 0,0 8 0,0-4 0,0 1 0,-2 0 0,-1 0 0,0 0 0,-1 1 0,-2 1 0,-20-35 0,16 36 0,-2 0 0,1 1 0,-2 0 0,0 2 0,-30-22 0,3 8 0,-63-32 0,38 36-204,51 20-957,-2-1-5665</inkml:trace>
+  <inkml:trace contextRef="#ctx0" brushRef="#br0">239 26 24575,'-1'-1'0,"1"0"0,-1 0 0,1 0 0,-1 0 0,1 0 0,-1 0 0,0 0 0,1 0 0,-1 0 0,0 0 0,0 0 0,0 0 0,0 1 0,0-1 0,0 0 0,0 1 0,0-1 0,0 0 0,0 1 0,0 0 0,0-1 0,0 1 0,-1-1 0,1 1 0,0 0 0,0 0 0,-2 0 0,-39-5 0,37 5 0,-4-1 0,-75 1 0,80 0 0,0 0 0,0 0 0,0 1 0,0 0 0,1 0 0,-1 0 0,0 0 0,0 1 0,0-1 0,1 1 0,-1 0 0,1 0 0,-1 0 0,1 1 0,0-1 0,0 1 0,-3 3 0,5-4 0,0-1 0,1 0 0,0 1 0,-1-1 0,1 0 0,0 1 0,0-1 0,0 0 0,0 1 0,0-1 0,0 0 0,0 1 0,0-1 0,1 1 0,-1-1 0,0 0 0,1 0 0,-1 1 0,1-1 0,-1 0 0,1 0 0,0 1 0,0-1 0,-1 0 0,1 0 0,0 0 0,0 0 0,0 0 0,0 0 0,0-1 0,0 1 0,1 0 0,-1 0 0,0-1 0,0 1 0,1-1 0,0 1 0,56 27 0,-52-26 0,114 56 0,-52-23 0,-67-35 0,1 1 0,-1-1 0,1 1 0,-1 0 0,1 0 0,-1 0 0,1 0 0,-1 0 0,0 0 0,1 0 0,-1 0 0,0 0 0,0 0 0,0 1 0,0-1 0,0 1 0,0-1 0,0 1 0,-1-1 0,1 1 0,-1-1 0,1 1 0,-1-1 0,1 4 0,-1-3 0,-1-1 0,1 0 0,-1 1 0,0-1 0,0 0 0,1 1 0,-1-1 0,0 0 0,0 0 0,0 0 0,0 0 0,0 0 0,-1 0 0,1 0 0,0 0 0,0 0 0,-1-1 0,1 1 0,0 0 0,-1-1 0,1 1 0,-1-1 0,1 1 0,-1-1 0,1 0 0,-1 0 0,-2 0 0,-33 4 0,0-1 0,-1-3 0,-58-6 0,71 2-1365,3-1-5461</inkml:trace>
 </inkml:ink>
 </file>
 
@@ -2096,7 +2853,7 @@
           <inkml:channelProperty channel="F" name="resolution" value="0" units="1/dev"/>
         </inkml:channelProperties>
       </inkml:inkSource>
-      <inkml:timestamp xml:id="ts0" timeString="2026-03-26T06:34:15.327"/>
+      <inkml:timestamp xml:id="ts0" timeString="2026-03-26T06:33:33.541"/>
     </inkml:context>
     <inkml:brush xml:id="br0">
       <inkml:brushProperty name="width" value="0.1" units="cm"/>
@@ -2104,7 +2861,7 @@
       <inkml:brushProperty name="color" value="#FFC114"/>
     </inkml:brush>
   </inkml:definitions>
-  <inkml:trace contextRef="#ctx0" brushRef="#br0">56 325 24575,'0'-1'0,"0"0"0,0 1 0,0-1 0,0 0 0,0 0 0,0 0 0,0 1 0,0-1 0,0 0 0,0 0 0,0 1 0,-1-1 0,1 0 0,0 0 0,-1 1 0,1-1 0,0 0 0,-1 1 0,1-1 0,-1 0 0,1 1 0,-1-1 0,1 1 0,-1-1 0,1 1 0,-1-1 0,0 1 0,1-1 0,-1 1 0,0 0 0,1-1 0,-1 1 0,0 0 0,1-1 0,-1 1 0,0 0 0,0 0 0,1 0 0,-1 0 0,0 0 0,0 0 0,-1 0 0,1 0 0,-1 1 0,1-1 0,0 1 0,-1-1 0,1 1 0,0-1 0,-1 1 0,1 0 0,0 0 0,0 0 0,0 0 0,0 0 0,0 0 0,0 0 0,0 0 0,0 0 0,0 0 0,0 1 0,1-1 0,-1 0 0,0 1 0,1-1 0,-1 2 0,-2 10 0,0 0 0,1 1 0,1-1 0,0 1 0,1-1 0,2 22 0,18 81 0,-15-94 0,7 31 0,-10-46 0,-8-36 0,0 4 0,1 0 0,2 0 0,0-1 0,2 1 0,3-48 0,28-143 0,-28 205 0,0-7 0,1 0 0,1 0 0,1 0 0,8-23 0,-11 36 0,1 1 0,-1-1 0,0 1 0,1 0 0,0 0 0,0 0 0,1 0 0,-1 0 0,1 1 0,-1 0 0,1-1 0,0 1 0,0 0 0,1 1 0,-1-1 0,0 1 0,1 0 0,0 0 0,-1 0 0,1 1 0,5-1 0,-6 1 0,1 1 0,-1-1 0,0 1 0,0 1 0,0-1 0,1 0 0,-1 1 0,0 0 0,0 0 0,0 0 0,0 1 0,0-1 0,0 1 0,-1 0 0,1 0 0,0 0 0,-1 0 0,0 1 0,1 0 0,-1-1 0,0 1 0,0 0 0,-1 1 0,1-1 0,3 5 0,4 9 0,1 0 0,-2 1 0,14 36 0,-20-45 0,18 50 0,14 71 0,-32-113 0,-1-1 0,0 33 0,4 20 0,1-55-1365</inkml:trace>
+  <inkml:trace contextRef="#ctx0" brushRef="#br0">1 71 24575,'7'0'0,"1"-1"0,0 0 0,0-1 0,15-5 0,24-4 0,642-37 0,-201 69 0,-448-13-34,10 3 155,-48-11-212,1 0 1,-1 1-1,1-1 0,-1 0 0,0-1 1,1 1-1,-1 0 0,1-1 0,-1 0 1,0 1-1,1-1 0,-1 0 0,0 0 0,0 0 1,4-3-1</inkml:trace>
 </inkml:ink>
 </file>
 
@@ -2152,7 +2909,7 @@
           <inkml:channelProperty channel="F" name="resolution" value="0" units="1/dev"/>
         </inkml:channelProperties>
       </inkml:inkSource>
-      <inkml:timestamp xml:id="ts0" timeString="2026-03-26T06:34:15.328"/>
+      <inkml:timestamp xml:id="ts0" timeString="2026-03-26T06:33:33.542"/>
     </inkml:context>
     <inkml:brush xml:id="br0">
       <inkml:brushProperty name="width" value="0.1" units="cm"/>
@@ -2160,7 +2917,7 @@
       <inkml:brushProperty name="color" value="#FFC114"/>
     </inkml:brush>
   </inkml:definitions>
-  <inkml:trace contextRef="#ctx0" brushRef="#br0">22 73 24575,'-5'0'0,"-5"0"0,3-5 0,7 0 0,8-5 0,7 0 0,5 1 0,4 3 0,1 1 0,2-1 0,0-1 0,0 1 0,-5 2-8191</inkml:trace>
+  <inkml:trace contextRef="#ctx0" brushRef="#br0">54 2 24575,'-11'-1'0,"15"1"0,26 2 0,83 26 0,-47-13 0,-1 3 0,79 32 0,-142-50 0,0 1 0,-1 0 0,1-1 0,0 1 0,-1 0 0,1 0 0,-1 0 0,1 0 0,-1 0 0,0 0 0,1 1 0,-1-1 0,0 0 0,0 1 0,0-1 0,0 1 0,0-1 0,0 1 0,0-1 0,1 4 0,-2-4 0,0 1 0,-1-1 0,1 0 0,0 1 0,0-1 0,-1 1 0,1-1 0,-1 0 0,1 1 0,-1-1 0,0 0 0,1 1 0,-1-1 0,0 0 0,0 0 0,0 0 0,0 1 0,0-1 0,-1 1 0,-7 5 0,-1 0 0,1-1 0,-1 0 0,-20 9 0,-245 83 7,160-62-1379,93-28-5454</inkml:trace>
 </inkml:ink>
 </file>
 
@@ -2180,7 +2937,7 @@
           <inkml:channelProperty channel="F" name="resolution" value="0" units="1/dev"/>
         </inkml:channelProperties>
       </inkml:inkSource>
-      <inkml:timestamp xml:id="ts0" timeString="2026-03-26T06:34:15.329"/>
+      <inkml:timestamp xml:id="ts0" timeString="2026-03-26T06:33:33.543"/>
     </inkml:context>
     <inkml:brush xml:id="br0">
       <inkml:brushProperty name="width" value="0.1" units="cm"/>
@@ -2188,7 +2945,7 @@
       <inkml:brushProperty name="color" value="#FFC114"/>
     </inkml:brush>
   </inkml:definitions>
-  <inkml:trace contextRef="#ctx0" brushRef="#br0">272 1 24575,'-34'0'0,"3"-1"0,-51 6 0,73-4 0,0 1 0,0 0 0,0 0 0,0 1 0,0 0 0,1 0 0,0 1 0,0 0 0,0 1 0,-9 6 0,16-10 0,-1 0 0,1 0 0,-1 0 0,1 0 0,-1 0 0,1 1 0,0-1 0,0 0 0,-1 1 0,1-1 0,0 1 0,0 0 0,1-1 0,-1 1 0,0-1 0,0 1 0,1 0 0,-1 0 0,1-1 0,0 1 0,-1 0 0,1 0 0,0 0 0,0 0 0,0 1 0,1 0 0,0-1 0,1 1 0,-1-1 0,0 0 0,1 0 0,-1 0 0,1 1 0,0-2 0,0 1 0,0 0 0,0 0 0,0 0 0,0-1 0,0 1 0,3 0 0,10 6 0,1 0 0,0-2 0,32 9 0,11 0 0,50 14 0,-99-25 0,1 0 0,0 1 0,-1 0 0,0 0 0,0 1 0,0 1 0,10 9 0,-19-16 0,0 1 0,0 0 0,0 0 0,0 0 0,0 0 0,0 0 0,0 0 0,0 0 0,0 1 0,-1-1 0,1 0 0,0 0 0,-1 1 0,1-1 0,-1 0 0,1 1 0,-1-1 0,0 0 0,0 1 0,0-1 0,1 1 0,-1-1 0,0 1 0,-1-1 0,1 0 0,0 1 0,0-1 0,-1 2 0,-1 0 0,1-1 0,-1 1 0,0-1 0,0 1 0,0-1 0,0 0 0,-1 0 0,1 0 0,0 0 0,-1 0 0,0 0 0,-3 1 0,-8 4 0,0-1 0,0-1 0,-1 0 0,-17 4 0,-4-4 0,1-1 0,0-2 0,-1-2 0,-56-5 0,90 5-52,0 0-1,0 0 1,0 0-1,0-1 1,0 1-1,1 0 1,-1-1-1,0 1 1,0-1-1,1 0 1,-1 0-1,0 0 1,1 1-1,-1-1 1,0-1-1,1 1 1,0 0-1,-1 0 1,1-1-1,0 1 0,-1 0 1,1-1-1,0 0 1,0 1-1,-1-3 1</inkml:trace>
+  <inkml:trace contextRef="#ctx0" brushRef="#br0">26 2346 24575,'-1'0'0,"0"0"0,1 0 0,-1 1 0,0-1 0,0 0 0,0 0 0,0 0 0,0-1 0,0 1 0,0 0 0,0 0 0,1 0 0,-1-1 0,0 1 0,0 0 0,0-1 0,1 1 0,-1-1 0,0 1 0,0-1 0,1 1 0,-1-1 0,0 0 0,1 1 0,-1-1 0,0 0 0,1 1 0,-1-1 0,1 0 0,0 0 0,-1 0 0,1 1 0,0-1 0,-1 0 0,1 0 0,0 0 0,0 0 0,-1 0 0,1 0 0,0 1 0,0-1 0,0 0 0,0 0 0,1 0 0,-1 0 0,0 0 0,0 0 0,0 0 0,1 1 0,-1-1 0,0 0 0,1 0 0,-1 0 0,1 1 0,-1-1 0,1 0 0,-1 0 0,2 0 0,2-6 0,0 0 0,0 1 0,1 0 0,0 0 0,9-8 0,15-11 0,-1-1 0,-1-1 0,-2-1 0,0-2 0,-2 0 0,-1-1 0,28-56 0,-22 25 0,-2-1 0,26-106 0,2-12 0,-47 149 0,-1 6 0,-1-2 0,0 1 0,-1-36 0,-2 31 0,11-60 0,-4 37 0,11-64 0,-8 52 0,-2 0 0,0-86 0,-9 19 0,-4-113 0,-21 95 0,22 138 0,-1 0 0,0 0 0,-1 0 0,0 1 0,-13-26 0,16 37 0,0 0 0,0 0 0,0 0 0,0 0 0,-1 0 0,1 0 0,-1 0 0,1 1 0,-1-1 0,0 1 0,0-1 0,0 1 0,0-1 0,0 1 0,0 0 0,0 0 0,0 0 0,0 0 0,-1 0 0,1 1 0,0-1 0,0 1 0,-1-1 0,1 1 0,-1 0 0,1 0 0,0 0 0,-1 0 0,1 0 0,0 1 0,-1-1 0,1 1 0,0 0 0,0-1 0,-1 1 0,1 0 0,0 0 0,0 0 0,0 1 0,0-1 0,0 0 0,-3 4 0,-31 23 0,0 2 0,-41 46 0,38-37 0,-45 36 0,82-75 0,5-7 0,12-19 0,23-32 0,-22 35 0,0 1 0,2 1 0,1 0 0,0 1 0,2 1 0,0 1 0,1 1 0,1 1 0,0 1 0,41-19 0,-58 31 0,0 0 0,0 1 0,1 0 0,-1 0 0,1 0 0,-1 1 0,1 0 0,0 0 0,0 1 0,-1 0 0,1 0 0,0 0 0,-1 1 0,1 0 0,0 1 0,-1-1 0,1 1 0,-1 0 0,0 1 0,0 0 0,12 6 0,210 94 0,-202-90 120,-26-13-143,1 1 1,-1-1-1,0 0 1,1 0-1,-1 0 1,0 1-1,1-1 1,-1 0-1,0 0 1,0 1-1,1-1 1,-1 0-1,0 0 1,0 1-1,1-1 1,-1 0-1,0 1 1,0-1-1,0 0 1,0 1-1,1-1 1,-1 1-1,0-1 1,0 0-1,0 1 1,0-1-1,0 0 1,0 1-1,0-1 1,0 1-1,0-1 1,0 0-1,0 1 1,0-1-1,-1 1 1,1-1-1,0 0 1,0 1-1,0-1 1,0 0-1,-1 1 1,1-1-1,0 0 1,0 1-1,0-1 1,-1 0-1,1 0 1,0 1-1,-1-1 1,1 0-1,0 0 1,-1 0-1,1 1 1,0-1-1,-1 0 1,1 0-1,0 0 1,-1 0-1,1 0 1,0 1-1,-1-1 1,1 0-1,-1 0 1,1 0-1,-1 0 1</inkml:trace>
 </inkml:ink>
 </file>
 
@@ -2208,7 +2965,7 @@
           <inkml:channelProperty channel="F" name="resolution" value="0" units="1/dev"/>
         </inkml:channelProperties>
       </inkml:inkSource>
-      <inkml:timestamp xml:id="ts0" timeString="2026-03-26T06:34:15.330"/>
+      <inkml:timestamp xml:id="ts0" timeString="2026-03-26T06:33:33.544"/>
     </inkml:context>
     <inkml:brush xml:id="br0">
       <inkml:brushProperty name="width" value="0.1" units="cm"/>
@@ -2216,7 +2973,7 @@
       <inkml:brushProperty name="color" value="#FFC114"/>
     </inkml:brush>
   </inkml:definitions>
-  <inkml:trace contextRef="#ctx0" brushRef="#br0">5 369 24575,'-4'-3'0,"13"-5"0,13-5 0,-4 5 0,0-1 0,-1 0 0,-1-1 0,1-1 0,-1-1 0,21-19 0,-34 27 0,1 0 0,-1 0 0,1 0 0,-1-1 0,0 1 0,-1-1 0,1 1 0,-1-1 0,0 0 0,0 0 0,-1 0 0,1 0 0,-1-1 0,0 1 0,0 0 0,-1 0 0,0-1 0,0 1 0,0 0 0,-1-1 0,1 1 0,-1 0 0,0 0 0,-1-1 0,1 1 0,-1 0 0,0 0 0,-5-8 0,2 3 0,-1-1 0,0 1 0,-1 0 0,0 1 0,-1-1 0,0 2 0,0-1 0,-16-12 0,24 21 0,-1-1 0,0 1 0,0-1 0,0 0 0,1 1 0,-1 0 0,0-1 0,0 1 0,0-1 0,0 1 0,0 0 0,0 0 0,0 0 0,0-1 0,0 1 0,0 0 0,0 0 0,0 0 0,0 1 0,0-1 0,0 0 0,0 0 0,0 0 0,0 1 0,0-1 0,0 1 0,-1 0 0,1 0 0,-1 0 0,1 1 0,0-1 0,0 1 0,0-1 0,0 1 0,0 0 0,0-1 0,0 1 0,0 0 0,1 0 0,-1-1 0,0 4 0,0 3 0,-1 0 0,1 0 0,1 0 0,0 1 0,1 12 0,32 234 0,-28-168 0,-5-65 0,1 0 0,1 0 0,6 26 0,-8-46-96,0-1 62,0-1 1,0 1 0,0-1-1,0 1 1,0 0 0,0-1-1,0 1 1,0-1-1,1 1 1,-1-1 0,0 1-1,0 0 1,0-1-1,1 1 1,-1-1 0,0 1-1,1-1 1,-1 1-1,0-1 1,1 0 0,-1 1-1,1-1 1,-1 1-1,0-1 1,1 0 0,-1 1-1,1-1 1,-1 0-1,1 1 1,-1-1 0,1 0-1,0 0 1,-1 0 0,1 0-1,-1 1 1,1-1-1,1 0 1</inkml:trace>
+  <inkml:trace contextRef="#ctx0" brushRef="#br0">35 96 24575,'-2'0'0,"0"0"0,0 0 0,0-1 0,0 1 0,0 0 0,0-1 0,0 1 0,0-1 0,0 1 0,0-1 0,0 0 0,-2-1 0,4 2 0,-1-1 0,1 1 0,-1-1 0,1 1 0,-1-1 0,1 1 0,-1-1 0,1 0 0,0 1 0,-1-1 0,1 1 0,0-1 0,-1 0 0,1 1 0,0-1 0,0 0 0,0 1 0,0-1 0,0 0 0,0 0 0,-1 1 0,2-1 0,-1-1 0,0 0 0,1 0 0,0 0 0,0 0 0,0 0 0,0 0 0,0 0 0,1 0 0,-1 0 0,1 0 0,-1 0 0,1 1 0,0-1 0,-1 1 0,1-1 0,0 1 0,0 0 0,0-1 0,0 1 0,3-1 0,14-5 0,2 1 0,-1 0 0,1 1 0,23-2 0,-15 2 0,-22 4 0,1 1 0,-1-1 0,1 1 0,-1 0 0,0 1 0,1 0 0,-1 0 0,0 0 0,1 1 0,-1 0 0,0 1 0,0 0 0,0 0 0,-1 0 0,9 6 0,-12-7 0,-1 0 0,1 0 0,-1 0 0,1 1 0,-1-1 0,0 1 0,0-1 0,0 1 0,0 0 0,-1 0 0,1 0 0,-1 0 0,0 0 0,1 0 0,-1 0 0,-1 0 0,1 0 0,0 0 0,-1 1 0,0-1 0,0 0 0,0 1 0,0-1 0,0 0 0,-1 0 0,1 1 0,-1-1 0,0 0 0,0 0 0,0 0 0,0 0 0,-1 0 0,1 0 0,-1 0 0,0 0 0,-2 3 0,-4 4 0,1-1 0,-1 0 0,0-1 0,-1 0 0,0 0 0,-20 13 0,-13 10 0,42-30 0,-1-1 0,1 0 0,-1 1 0,1-1 0,-1 0 0,1 1 0,-1-1 0,1 0 0,-1 1 0,1-1 0,0 1 0,-1-1 0,1 1 0,0-1 0,-1 1 0,1-1 0,0 1 0,-1 0 0,1-1 0,0 1 0,0-1 0,0 1 0,0 0 0,0-1 0,0 1 0,0-1 0,0 1 0,0 0 0,0-1 0,0 1 0,0-1 0,0 1 0,0 0 0,1 0 0,21 9 0,36-6 0,-56-4 0,25 0 0,1 1 0,0 1 0,35 7 0,-55-7-195,-1 0 0,1-1 0,0 0 0,0-1 0,-1 0 0,14-1 0,-1-3-6631</inkml:trace>
 </inkml:ink>
 </file>
 
@@ -2236,7 +2993,7 @@
           <inkml:channelProperty channel="F" name="resolution" value="0" units="1/dev"/>
         </inkml:channelProperties>
       </inkml:inkSource>
-      <inkml:timestamp xml:id="ts0" timeString="2026-03-26T06:34:15.331"/>
+      <inkml:timestamp xml:id="ts0" timeString="2026-03-26T06:33:33.545"/>
     </inkml:context>
     <inkml:brush xml:id="br0">
       <inkml:brushProperty name="width" value="0.1" units="cm"/>
@@ -2244,7 +3001,7 @@
       <inkml:brushProperty name="color" value="#FFC114"/>
     </inkml:brush>
   </inkml:definitions>
-  <inkml:trace contextRef="#ctx0" brushRef="#br0">5 58 24575,'0'0'0,"-1"-1"0,1 0 0,-1 1 0,1-1 0,0 0 0,-1 1 0,1-1 0,0 0 0,0 0 0,-1 1 0,1-1 0,0 0 0,0 0 0,0 1 0,0-1 0,0 0 0,0 0 0,0 1 0,0-1 0,0 0 0,0 0 0,1 1 0,-1-1 0,0 0 0,0 0 0,1 1 0,-1-1 0,1 0 0,-1 1 0,0-1 0,1 0 0,-1 1 0,1-1 0,-1 1 0,1-1 0,0 1 0,-1-1 0,1 1 0,0-1 0,-1 1 0,1 0 0,0-1 0,-1 1 0,1 0 0,0-1 0,1 1 0,35-15 0,-14 10 0,0 1 0,43 0 0,-54 3 0,0 2 0,0-1 0,0 1 0,0 1 0,0 1 0,-1-1 0,16 7 0,-25-8 0,0-1 0,0 1 0,0 0 0,0-1 0,0 1 0,-1 0 0,1 1 0,0-1 0,-1 0 0,1 0 0,-1 1 0,1-1 0,-1 1 0,0-1 0,1 1 0,-1-1 0,0 1 0,0 0 0,0 0 0,0 0 0,-1-1 0,1 1 0,0 0 0,-1 0 0,1 0 0,-1 0 0,0 0 0,0 0 0,0 0 0,0 0 0,0 0 0,0 0 0,0 0 0,0 0 0,-1 0 0,1 0 0,-1 0 0,0 0 0,0 0 0,1 0 0,-3 2 0,0 2 0,-1-2 0,1 1 0,-1 0 0,0-1 0,0 0 0,-1 1 0,1-2 0,-1 1 0,0 0 0,0-1 0,0 0 0,0 0 0,-6 2 0,-22 5 0,-1-1 0,0-1 0,0-2 0,-49 2 0,121 7 0,30 1 0,-1 3 0,94 40 0,-156-57-124,-1 0 0,1 0 0,0-1 0,0 0 0,0 1 0,0-2-1,0 1 1,0 0 0,0-1 0,9-1 0,5-2-6702</inkml:trace>
+  <inkml:trace contextRef="#ctx0" brushRef="#br0">765 83 24575,'-1'-2'0,"0"-1"0,0 1 0,0-1 0,0 1 0,0 0 0,0-1 0,-1 1 0,1 0 0,-1 0 0,1 0 0,-1 0 0,0 0 0,0 0 0,0 0 0,0 1 0,0-1 0,0 1 0,-1 0 0,1-1 0,0 1 0,-4-1 0,-52-20 0,34 16 0,-1 2 0,1 0 0,0 2 0,-1 1 0,0 1 0,1 1 0,-26 4 0,2 3 0,0 1 0,-72 25 0,107-30 0,0 1 0,0 0 0,0 1 0,1 0 0,0 1 0,0 0 0,1 1 0,0 1 0,0 0 0,1 0 0,0 0 0,1 2 0,0-1 0,1 1 0,0 0 0,0 1 0,1 0 0,1 0 0,0 1 0,0-1 0,2 1 0,-1 0 0,2 1 0,0-1 0,0 1 0,1-1 0,0 25 0,3-21 0,1 0 0,0 0 0,1 0 0,1 0 0,0-1 0,2 0 0,0 0 0,0 0 0,2 0 0,0-1 0,0 0 0,2-1 0,0 0 0,0 0 0,1-1 0,1-1 0,0 0 0,1 0 0,21 14 0,-8-5 0,-6-5 0,0 0 0,1-2 0,0 0 0,32 14 0,-34-20 0,0-1 0,0-1 0,1-1 0,-1-1 0,40 4 0,-32-5 0,-1-1 0,1-1 0,-1-2 0,1 0 0,0-2 0,-1-1 0,0-1 0,0-1 0,-1-1 0,1-2 0,41-20 0,-43 18 0,-2-2 0,30-21 0,-44 27 0,0 0 0,0 0 0,-1 0 0,0-1 0,-1 0 0,0 0 0,0-1 0,9-18 0,-8 10 0,0 0 0,-2-1 0,0 0 0,-1 0 0,0 0 0,0-26 0,-2 1 0,-7-71 0,4 103 0,-1 1 0,1 0 0,-1-1 0,-1 1 0,0 0 0,-1 0 0,0 1 0,0-1 0,-1 1 0,0-1 0,-1 2 0,-7-11 0,4 10 0,0 0 0,0 0 0,0 1 0,-1 1 0,-1 0 0,1 0 0,-1 1 0,0 0 0,-23-8 0,3 2-195,0 1 0,-1 1 0,0 2 0,0 1 0,-1 1 0,-33 0 0,45 6-6631</inkml:trace>
 </inkml:ink>
 </file>
 
@@ -2264,7 +3021,7 @@
           <inkml:channelProperty channel="F" name="resolution" value="0" units="1/dev"/>
         </inkml:channelProperties>
       </inkml:inkSource>
-      <inkml:timestamp xml:id="ts0" timeString="2026-03-26T06:34:15.332"/>
+      <inkml:timestamp xml:id="ts0" timeString="2026-03-26T06:33:33.546"/>
     </inkml:context>
     <inkml:brush xml:id="br0">
       <inkml:brushProperty name="width" value="0.1" units="cm"/>
@@ -2272,7 +3029,7 @@
       <inkml:brushProperty name="color" value="#FFC114"/>
     </inkml:brush>
   </inkml:definitions>
-  <inkml:trace contextRef="#ctx0" brushRef="#br0">239 26 24575,'-1'-1'0,"1"0"0,-1 0 0,1 0 0,-1 0 0,1 0 0,-1 0 0,0 0 0,1 0 0,-1 0 0,0 0 0,0 0 0,0 0 0,0 1 0,0-1 0,0 0 0,0 1 0,0-1 0,0 0 0,0 1 0,0 0 0,0-1 0,0 1 0,-1-1 0,1 1 0,0 0 0,0 0 0,-2 0 0,-39-5 0,37 5 0,-4-1 0,-75 1 0,80 0 0,0 0 0,0 0 0,0 1 0,0 0 0,1 0 0,-1 0 0,0 0 0,0 1 0,0-1 0,1 1 0,-1 0 0,1 0 0,-1 0 0,1 1 0,0-1 0,0 1 0,-3 3 0,5-4 0,0-1 0,1 0 0,0 1 0,-1-1 0,1 0 0,0 1 0,0-1 0,0 0 0,0 1 0,0-1 0,0 0 0,0 1 0,0-1 0,1 1 0,-1-1 0,0 0 0,1 0 0,-1 1 0,1-1 0,-1 0 0,1 0 0,0 1 0,0-1 0,-1 0 0,1 0 0,0 0 0,0 0 0,0 0 0,0 0 0,0-1 0,0 1 0,1 0 0,-1 0 0,0-1 0,0 1 0,1-1 0,0 1 0,56 27 0,-52-26 0,114 56 0,-52-23 0,-67-35 0,1 1 0,-1-1 0,1 1 0,-1 0 0,1 0 0,-1 0 0,1 0 0,-1 0 0,0 0 0,1 0 0,-1 0 0,0 0 0,0 0 0,0 1 0,0-1 0,0 1 0,0-1 0,0 1 0,-1-1 0,1 1 0,-1-1 0,1 1 0,-1-1 0,1 4 0,-1-3 0,-1-1 0,1 0 0,-1 1 0,0-1 0,0 0 0,1 1 0,-1-1 0,0 0 0,0 0 0,0 0 0,0 0 0,0 0 0,-1 0 0,1 0 0,0 0 0,0 0 0,-1-1 0,1 1 0,0 0 0,-1-1 0,1 1 0,-1-1 0,1 1 0,-1-1 0,1 0 0,-1 0 0,-2 0 0,-33 4 0,0-1 0,-1-3 0,-58-6 0,71 2-1365,3-1-5461</inkml:trace>
+  <inkml:trace contextRef="#ctx0" brushRef="#br0">4 56 24575,'0'0'0,"0"0"0,-1 0 0,1 0 0,0 0 0,0 0 0,0 0 0,0 0 0,0 0 0,0 0 0,-1 0 0,1 0 0,0 0 0,0 0 0,0-1 0,0 1 0,0 0 0,0 0 0,0 0 0,-1 0 0,1 0 0,0 0 0,0 0 0,0 0 0,0 0 0,0 0 0,0-1 0,0 1 0,0 0 0,0 0 0,0 0 0,0 0 0,0 0 0,0 0 0,0-1 0,0 1 0,0 0 0,-1 0 0,1 0 0,0 0 0,1 0 0,-1 0 0,0-1 0,0 1 0,0 0 0,0 0 0,0 0 0,0 0 0,0 0 0,0 0 0,0-1 0,0 1 0,0 0 0,0 0 0,0 0 0,0 0 0,0 0 0,0 0 0,1 0 0,-1 0 0,0-1 0,10-11 0,15-8 0,-10 15 0,1 1 0,-1 1 0,1 0 0,0 2 0,-1-1 0,1 2 0,0 0 0,0 1 0,-1 1 0,1 0 0,0 1 0,-1 1 0,0 0 0,0 1 0,27 13 0,-40-17 0,0-1 0,0 1 0,-1 0 0,1 0 0,0 0 0,-1 0 0,1 0 0,-1 0 0,1 0 0,-1 0 0,0 1 0,1-1 0,-1 1 0,0-1 0,0 1 0,0-1 0,0 1 0,0-1 0,-1 1 0,1 0 0,0 0 0,-1-1 0,1 4 0,-1-2 0,0-1 0,-1 0 0,1 0 0,-1 1 0,0-1 0,0 0 0,0 0 0,0 0 0,0 0 0,0 0 0,0 0 0,-1-1 0,1 1 0,-1 0 0,1-1 0,-4 3 0,-5 4 0,0 0 0,-1-1 0,0 0 0,-1-1 0,-18 8 0,26-13 0,-1 1 0,1 0 0,0 0 0,-1 0 0,1 0 0,0 1 0,0 0 0,-4 4 0,7-7 0,1 0 0,0 1 0,0-1 0,-1 1 0,1-1 0,0 1 0,0-1 0,0 0 0,-1 1 0,1-1 0,0 1 0,0-1 0,0 1 0,0-1 0,0 1 0,0-1 0,0 1 0,0-1 0,0 0 0,0 1 0,0-1 0,1 1 0,-1-1 0,0 1 0,0-1 0,0 1 0,1-1 0,-1 0 0,0 1 0,1 0 0,24 15 0,0-7 0,45 11 0,-54-17 0,0 1 0,-1 0 0,1 1 0,-1 1 0,0 0 0,0 1 0,-1 1 0,19 13 0,-31-20 0,-1 0 0,0 0 0,1 0 0,-1 0 0,0 0 0,1 0 0,-1 1 0,0-1 0,0 0 0,0 1 0,0-1 0,0 1 0,0-1 0,-1 1 0,1-1 0,0 1 0,-1 0 0,1-1 0,-1 1 0,0 0 0,0-1 0,1 1 0,-1 0 0,0-1 0,0 1 0,-1 0 0,1 0 0,0-1 0,0 1 0,-1 0 0,1-1 0,-1 1 0,0-1 0,1 1 0,-1 0 0,0-1 0,0 0 0,0 1 0,0-1 0,0 1 0,0-1 0,0 0 0,-1 0 0,1 0 0,0 0 0,-1 0 0,-1 1 0,-4 3 0,-1 0 0,1-1 0,-1 0 0,0 0 0,0-1 0,0 0 0,0-1 0,-11 3 0,-41 6 0,38-5 0,0-2 0,0 0 0,-1-2 0,1 0 0,0-1 0,-1-1 0,-42-7 0,62 7-57,1 0 0,0-1 1,0 1-1,0-1 0,0 1 0,0-1 0,0 0 0,0 0 0,1 0 0,-1 0 0,0 0 1,0 0-1,1-1 0,-1 1 0,1-1 0,-1 1 0,1-1 0,-1 1 0,1-1 1,0 0-1,0 0 0,0 1 0,-1-4 0</inkml:trace>
 </inkml:ink>
 </file>
 
@@ -2292,7 +3049,7 @@
           <inkml:channelProperty channel="F" name="resolution" value="0" units="1/dev"/>
         </inkml:channelProperties>
       </inkml:inkSource>
-      <inkml:timestamp xml:id="ts0" timeString="2026-03-26T06:34:15.333"/>
+      <inkml:timestamp xml:id="ts0" timeString="2026-03-26T06:33:33.547"/>
     </inkml:context>
     <inkml:brush xml:id="br0">
       <inkml:brushProperty name="width" value="0.1" units="cm"/>
@@ -2300,7 +3057,7 @@
       <inkml:brushProperty name="color" value="#FFC114"/>
     </inkml:brush>
   </inkml:definitions>
-  <inkml:trace contextRef="#ctx0" brushRef="#br0">1 71 24575,'7'0'0,"1"-1"0,0 0 0,0-1 0,15-5 0,24-4 0,642-37 0,-201 69 0,-448-13-34,10 3 155,-48-11-212,1 0 1,-1 1-1,1-1 0,-1 0 0,0-1 1,1 1-1,-1 0 0,1-1 0,-1 0 1,0 1-1,1-1 0,-1 0 0,0 0 0,0 0 1,4-3-1</inkml:trace>
+  <inkml:trace contextRef="#ctx0" brushRef="#br0">689 99 24575,'-1'-1'0,"1"-1"0,-1 0 0,0 1 0,0-1 0,0 1 0,0-1 0,0 1 0,0-1 0,0 1 0,-1 0 0,1 0 0,0 0 0,-1 0 0,1-1 0,-1 2 0,1-1 0,-4-1 0,-29-14 0,8 8 0,0 0 0,0 2 0,0 2 0,0 0 0,-1 1 0,0 2 0,0 1 0,1 1 0,-1 1 0,-34 8 0,40-6 0,1 1 0,-1 0 0,1 2 0,-32 15 0,42-16 0,1 0 0,0 1 0,0-1 0,0 2 0,1-1 0,0 1 0,0 0 0,1 1 0,0 0 0,-9 16 0,5-9 0,2 1 0,0 1 0,1 0 0,1 0 0,1 0 0,0 1 0,2 0 0,0 0 0,1 0 0,1 1 0,0-1 0,2 0 0,0 1 0,1-1 0,1 1 0,1-1 0,1 0 0,1 0 0,9 27 0,0-13 0,2 0 0,31 50 0,-38-71 0,1 1 0,0-1 0,1-1 0,0 0 0,1 0 0,0-1 0,1-1 0,22 14 0,-11-11 0,0-1 0,0-1 0,1-2 0,1 0 0,-1-2 0,51 7 0,-28-9 0,0-2 0,91-7 0,-125 3 0,0-1 0,0-1 0,0 0 0,0-1 0,-1 0 0,0-1 0,0 0 0,-1-1 0,1-1 0,-1 0 0,-1 0 0,0-1 0,0-1 0,-1 0 0,10-11 0,2-6 0,-1-1 0,-1 0 0,-1-2 0,-2 0 0,14-33 0,-25 44 0,-1 0 0,-1 0 0,-1 0 0,-1 0 0,-1-1 0,0 1 0,-1-1 0,-6-37 0,4 45 0,-1-1 0,-1 1 0,0 0 0,-1 0 0,0 1 0,-1-1 0,0 1 0,0 0 0,-1 1 0,-1-1 0,0 1 0,0 1 0,-15-13 0,-1 0 0,-1 0 0,-2 2 0,-56-33 0,44 33-341,-1 1 0,-1 2-1,-52-15 1,76 28-6485</inkml:trace>
 </inkml:ink>
 </file>
 
@@ -2320,7 +3077,7 @@
           <inkml:channelProperty channel="F" name="resolution" value="0" units="1/dev"/>
         </inkml:channelProperties>
       </inkml:inkSource>
-      <inkml:timestamp xml:id="ts0" timeString="2026-03-26T06:34:15.334"/>
+      <inkml:timestamp xml:id="ts0" timeString="2026-03-26T06:33:33.548"/>
     </inkml:context>
     <inkml:brush xml:id="br0">
       <inkml:brushProperty name="width" value="0.1" units="cm"/>
@@ -2328,7 +3085,7 @@
       <inkml:brushProperty name="color" value="#FFC114"/>
     </inkml:brush>
   </inkml:definitions>
-  <inkml:trace contextRef="#ctx0" brushRef="#br0">54 2 24575,'-11'-1'0,"15"1"0,26 2 0,83 26 0,-47-13 0,-1 3 0,79 32 0,-142-50 0,0 1 0,-1 0 0,1-1 0,0 1 0,-1 0 0,1 0 0,-1 0 0,1 0 0,-1 0 0,0 0 0,1 1 0,-1-1 0,0 0 0,0 1 0,0-1 0,0 1 0,0-1 0,0 1 0,0-1 0,1 4 0,-2-4 0,0 1 0,-1-1 0,1 0 0,0 1 0,0-1 0,-1 1 0,1-1 0,-1 0 0,1 1 0,-1-1 0,0 0 0,1 1 0,-1-1 0,0 0 0,0 0 0,0 0 0,0 1 0,0-1 0,-1 1 0,-7 5 0,-1 0 0,1-1 0,-1 0 0,-20 9 0,-245 83 7,160-62-1379,93-28-5454</inkml:trace>
+  <inkml:trace contextRef="#ctx0" brushRef="#br0">51 108 24575,'-2'-3'0,"1"1"0,-1 0 0,1-1 0,0 1 0,-1-1 0,1 1 0,1-1 0,-1 0 0,0 1 0,1-1 0,-1 0 0,1 1 0,0-1 0,0 0 0,0 0 0,0 1 0,0-1 0,1 0 0,-1 0 0,1 1 0,0-4 0,0 4 0,0 0 0,-1-1 0,1 1 0,-1-1 0,1 1 0,-1 0 0,0-1 0,0 1 0,-1-1 0,1 1 0,0-1 0,-1 1 0,1 0 0,-1-1 0,0 1 0,0 0 0,-2-4 0,3 6 0,-1 0 0,1 0 0,-1 0 0,0 0 0,1 0 0,-1 0 0,0 0 0,1 1 0,-1-1 0,1 0 0,-1 0 0,0 1 0,1-1 0,-1 0 0,1 1 0,-1-1 0,1 1 0,-1-1 0,1 1 0,0-1 0,-1 1 0,1-1 0,-1 1 0,1-1 0,0 1 0,0-1 0,-1 1 0,1 0 0,0-1 0,0 1 0,-1 0 0,-10 21 0,9-16 0,0 0 0,0 0 0,1 1 0,0-1 0,0 0 0,0 1 0,1-1 0,0 1 0,0-1 0,0 0 0,1 1 0,0-1 0,0 1 0,1-1 0,0 0 0,0 0 0,0 0 0,1 0 0,0 0 0,0-1 0,0 1 0,1-1 0,0 0 0,8 9 0,-4-7 0,1 0 0,0 0 0,0-1 0,0 0 0,1-1 0,0 0 0,0-1 0,0 0 0,0 0 0,1-1 0,-1 0 0,1-1 0,0 0 0,11 0 0,-8-1 0,0-1 0,1 0 0,-1 0 0,0-1 0,0-1 0,14-4 0,-23 5 0,0-1 0,1 0 0,-1 0 0,0-1 0,-1 1 0,1-1 0,0 0 0,-1 0 0,1-1 0,-1 1 0,0-1 0,0 0 0,-1 0 0,1 0 0,-1-1 0,0 1 0,0-1 0,3-6 0,21-60 0,-25 66 0,-1 0 0,1-1 0,-1 1 0,-1 0 0,1 0 0,-1-1 0,0 1 0,0 0 0,0-1 0,-1 1 0,-2-10 0,3 15 0,0 0 0,0 0 0,0 0 0,0-1 0,0 1 0,0 0 0,0 0 0,0 0 0,0-1 0,-1 1 0,1 0 0,0 0 0,0 0 0,0 0 0,0-1 0,0 1 0,0 0 0,-1 0 0,1 0 0,0 0 0,0 0 0,0-1 0,-1 1 0,1 0 0,0 0 0,0 0 0,0 0 0,0 0 0,-1 0 0,1 0 0,0 0 0,0 0 0,-1 0 0,1 0 0,0 0 0,0 0 0,0 0 0,-1 0 0,1 0 0,0 0 0,0 0 0,0 0 0,-1 0 0,1 0 0,0 1 0,-9 9 0,-4 17 0,9-12 0,1 0 0,1 0 0,0 0 0,1 0 0,0 1 0,2-1 0,-1 0 0,2 0 0,5 23 0,2 51 0,-9-64 0,-1-20 0,0 1 0,1-1 0,0 1 0,0-1 0,0 1 0,1-1 0,0 1 0,0-1 0,0 1 0,3 5 0,5-5-1365</inkml:trace>
 </inkml:ink>
 </file>
 
@@ -2348,7 +3105,7 @@
           <inkml:channelProperty channel="F" name="resolution" value="0" units="1/dev"/>
         </inkml:channelProperties>
       </inkml:inkSource>
-      <inkml:timestamp xml:id="ts0" timeString="2026-03-26T06:34:15.335"/>
+      <inkml:timestamp xml:id="ts0" timeString="2026-03-26T06:33:33.549"/>
     </inkml:context>
     <inkml:brush xml:id="br0">
       <inkml:brushProperty name="width" value="0.1" units="cm"/>
@@ -2356,7 +3113,7 @@
       <inkml:brushProperty name="color" value="#FFC114"/>
     </inkml:brush>
   </inkml:definitions>
-  <inkml:trace contextRef="#ctx0" brushRef="#br0">26 2346 24575,'-1'0'0,"0"0"0,1 0 0,-1 1 0,0-1 0,0 0 0,0 0 0,0 0 0,0-1 0,0 1 0,0 0 0,0 0 0,1 0 0,-1-1 0,0 1 0,0 0 0,0-1 0,1 1 0,-1-1 0,0 1 0,0-1 0,1 1 0,-1-1 0,0 0 0,1 1 0,-1-1 0,0 0 0,1 1 0,-1-1 0,1 0 0,0 0 0,-1 0 0,1 1 0,0-1 0,-1 0 0,1 0 0,0 0 0,0 0 0,-1 0 0,1 0 0,0 1 0,0-1 0,0 0 0,0 0 0,1 0 0,-1 0 0,0 0 0,0 0 0,0 0 0,1 1 0,-1-1 0,0 0 0,1 0 0,-1 0 0,1 1 0,-1-1 0,1 0 0,-1 0 0,2 0 0,2-6 0,0 0 0,0 1 0,1 0 0,0 0 0,9-8 0,15-11 0,-1-1 0,-1-1 0,-2-1 0,0-2 0,-2 0 0,-1-1 0,28-56 0,-22 25 0,-2-1 0,26-106 0,2-12 0,-47 149 0,-1 6 0,-1-2 0,0 1 0,-1-36 0,-2 31 0,11-60 0,-4 37 0,11-64 0,-8 52 0,-2 0 0,0-86 0,-9 19 0,-4-113 0,-21 95 0,22 138 0,-1 0 0,0 0 0,-1 0 0,0 1 0,-13-26 0,16 37 0,0 0 0,0 0 0,0 0 0,0 0 0,-1 0 0,1 0 0,-1 0 0,1 1 0,-1-1 0,0 1 0,0-1 0,0 1 0,0-1 0,0 1 0,0 0 0,0 0 0,0 0 0,0 0 0,-1 0 0,1 1 0,0-1 0,0 1 0,-1-1 0,1 1 0,-1 0 0,1 0 0,0 0 0,-1 0 0,1 0 0,0 1 0,-1-1 0,1 1 0,0 0 0,0-1 0,-1 1 0,1 0 0,0 0 0,0 0 0,0 1 0,0-1 0,0 0 0,-3 4 0,-31 23 0,0 2 0,-41 46 0,38-37 0,-45 36 0,82-75 0,5-7 0,12-19 0,23-32 0,-22 35 0,0 1 0,2 1 0,1 0 0,0 1 0,2 1 0,0 1 0,1 1 0,1 1 0,0 1 0,41-19 0,-58 31 0,0 0 0,0 1 0,1 0 0,-1 0 0,1 0 0,-1 1 0,1 0 0,0 0 0,0 1 0,-1 0 0,1 0 0,0 0 0,-1 1 0,1 0 0,0 1 0,-1-1 0,1 1 0,-1 0 0,0 1 0,0 0 0,12 6 0,210 94 0,-202-90 120,-26-13-143,1 1 1,-1-1-1,0 0 1,1 0-1,-1 0 1,0 1-1,1-1 1,-1 0-1,0 0 1,0 1-1,1-1 1,-1 0-1,0 0 1,0 1-1,1-1 1,-1 0-1,0 1 1,0-1-1,0 0 1,0 1-1,1-1 1,-1 1-1,0-1 1,0 0-1,0 1 1,0-1-1,0 0 1,0 1-1,0-1 1,0 1-1,0-1 1,0 0-1,0 1 1,0-1-1,-1 1 1,1-1-1,0 0 1,0 1-1,0-1 1,0 0-1,-1 1 1,1-1-1,0 0 1,0 1-1,0-1 1,-1 0-1,1 0 1,0 1-1,-1-1 1,1 0-1,0 0 1,-1 0-1,1 1 1,0-1-1,-1 0 1,1 0-1,0 0 1,-1 0-1,1 0 1,0 1-1,-1-1 1,1 0-1,-1 0 1,1 0-1,-1 0 1</inkml:trace>
+  <inkml:trace contextRef="#ctx0" brushRef="#br0">710 100 24575,'-1'-2'0,"1"-1"0,-1 1 0,0 0 0,0-1 0,0 1 0,0 0 0,0-1 0,0 1 0,-1 0 0,1 0 0,-1 0 0,1 0 0,-1 0 0,0 1 0,0-1 0,0 0 0,0 1 0,0-1 0,-3-1 0,-49-25 0,44 23 0,-3 0 0,0 0 0,0 2 0,0-1 0,-1 2 0,1-1 0,-1 2 0,1 0 0,-1 1 0,0 0 0,1 1 0,-1 0 0,-23 6 0,7 0 0,-1 2 0,2 1 0,-1 2 0,-40 21 0,53-23 0,1 1 0,0 0 0,1 1 0,0 1 0,1 0 0,0 1 0,1 1 0,1 0 0,0 1 0,1 0 0,1 0 0,0 1 0,2 1 0,0 0 0,0 0 0,2 0 0,0 1 0,1 0 0,2 0 0,-3 24 0,5-31 0,1-1 0,0 1 0,1 0 0,0-1 0,1 1 0,0-1 0,1 1 0,0-1 0,1 0 0,0 0 0,0 0 0,2-1 0,10 18 0,-3-8 0,2-1 0,0 0 0,1-1 0,0-1 0,33 26 0,-30-29 0,2 0 0,0-2 0,0 0 0,1-2 0,0 0 0,38 10 0,5-3 0,76 10 0,-107-22 0,-1-2 0,1-1 0,0-2 0,-1-2 0,1 0 0,48-11 0,-61 8 0,0-1 0,0 0 0,-1-1 0,0-2 0,0 0 0,-1-1 0,0-1 0,-1 0 0,0-2 0,-1 0 0,19-19 0,-27 24 0,-1-1 0,0 0 0,-1 0 0,0-1 0,0 0 0,-1 0 0,-1-1 0,1 0 0,-2 0 0,1 0 0,-2 0 0,1-1 0,-2 1 0,0-1 0,0 0 0,-1 0 0,0 0 0,-1 0 0,0 1 0,-1-1 0,0 0 0,-1 0 0,-1 0 0,0 1 0,0-1 0,-1 1 0,0 0 0,-11-18 0,3 8 0,-1 1 0,-2 0 0,1 1 0,-2 1 0,-1 1 0,0 0 0,-1 1 0,0 1 0,-29-18 0,17 15 0,-1 1 0,-1 1 0,0 2 0,-1 2 0,-61-16 0,-58-6-1365,130 28-5461</inkml:trace>
 </inkml:ink>
 </file>
 
@@ -2376,7 +3133,7 @@
           <inkml:channelProperty channel="F" name="resolution" value="0" units="1/dev"/>
         </inkml:channelProperties>
       </inkml:inkSource>
-      <inkml:timestamp xml:id="ts0" timeString="2026-03-26T06:34:15.336"/>
+      <inkml:timestamp xml:id="ts0" timeString="2026-03-26T06:33:33.550"/>
     </inkml:context>
     <inkml:brush xml:id="br0">
       <inkml:brushProperty name="width" value="0.1" units="cm"/>
@@ -2384,7 +3141,7 @@
       <inkml:brushProperty name="color" value="#FFC114"/>
     </inkml:brush>
   </inkml:definitions>
-  <inkml:trace contextRef="#ctx0" brushRef="#br0">35 96 24575,'-2'0'0,"0"0"0,0 0 0,0-1 0,0 1 0,0 0 0,0-1 0,0 1 0,0-1 0,0 1 0,0-1 0,0 0 0,-2-1 0,4 2 0,-1-1 0,1 1 0,-1-1 0,1 1 0,-1-1 0,1 1 0,-1-1 0,1 0 0,0 1 0,-1-1 0,1 1 0,0-1 0,-1 0 0,1 1 0,0-1 0,0 0 0,0 1 0,0-1 0,0 0 0,0 0 0,-1 1 0,2-1 0,-1-1 0,0 0 0,1 0 0,0 0 0,0 0 0,0 0 0,0 0 0,0 0 0,1 0 0,-1 0 0,1 0 0,-1 0 0,1 1 0,0-1 0,-1 1 0,1-1 0,0 1 0,0 0 0,0-1 0,0 1 0,3-1 0,14-5 0,2 1 0,-1 0 0,1 1 0,23-2 0,-15 2 0,-22 4 0,1 1 0,-1-1 0,1 1 0,-1 0 0,0 1 0,1 0 0,-1 0 0,0 0 0,1 1 0,-1 0 0,0 1 0,0 0 0,0 0 0,-1 0 0,9 6 0,-12-7 0,-1 0 0,1 0 0,-1 0 0,1 1 0,-1-1 0,0 1 0,0-1 0,0 1 0,0 0 0,-1 0 0,1 0 0,-1 0 0,0 0 0,1 0 0,-1 0 0,-1 0 0,1 0 0,0 0 0,-1 1 0,0-1 0,0 0 0,0 1 0,0-1 0,0 0 0,-1 0 0,1 1 0,-1-1 0,0 0 0,0 0 0,0 0 0,0 0 0,-1 0 0,1 0 0,-1 0 0,0 0 0,-2 3 0,-4 4 0,1-1 0,-1 0 0,0-1 0,-1 0 0,0 0 0,-20 13 0,-13 10 0,42-30 0,-1-1 0,1 0 0,-1 1 0,1-1 0,-1 0 0,1 1 0,-1-1 0,1 0 0,-1 1 0,1-1 0,0 1 0,-1-1 0,1 1 0,0-1 0,-1 1 0,1-1 0,0 1 0,-1 0 0,1-1 0,0 1 0,0-1 0,0 1 0,0 0 0,0-1 0,0 1 0,0-1 0,0 1 0,0 0 0,0-1 0,0 1 0,0-1 0,0 1 0,0 0 0,1 0 0,21 9 0,36-6 0,-56-4 0,25 0 0,1 1 0,0 1 0,35 7 0,-55-7-195,-1 0 0,1-1 0,0 0 0,0-1 0,-1 0 0,14-1 0,-1-3-6631</inkml:trace>
+  <inkml:trace contextRef="#ctx0" brushRef="#br0">122 34 24575,'0'-1'0,"0"0"0,0-1 0,0 1 0,-1-1 0,1 1 0,0 0 0,-1-1 0,1 1 0,-1 0 0,1-1 0,-1 1 0,1 0 0,-1 0 0,0-1 0,0 1 0,0 0 0,0 0 0,0 0 0,0 0 0,0 0 0,0 0 0,0 1 0,0-1 0,0 0 0,-1 0 0,1 1 0,0-1 0,-1 1 0,1-1 0,0 1 0,-1 0 0,1-1 0,0 1 0,-1 0 0,1 0 0,-1 0 0,-1 0 0,-1 0 0,0 0 0,1 1 0,-1-1 0,1 1 0,-1-1 0,0 1 0,1 0 0,-1 1 0,1-1 0,0 1 0,0-1 0,-1 1 0,-3 3 0,4-2 0,0 0 0,0 1 0,0-1 0,1 1 0,-1 0 0,1 0 0,0 0 0,0 0 0,0 0 0,0 0 0,1 1 0,0-1 0,0 0 0,0 1 0,0-1 0,1 6 0,0-8 0,0 0 0,0 0 0,0-1 0,0 1 0,0 0 0,1-1 0,-1 1 0,1 0 0,0-1 0,-1 1 0,1-1 0,0 1 0,0-1 0,0 1 0,0-1 0,0 0 0,0 1 0,0-1 0,0 0 0,1 0 0,-1 0 0,0 0 0,1 0 0,-1 0 0,1 0 0,-1 0 0,1-1 0,-1 1 0,1-1 0,0 1 0,-1-1 0,1 1 0,0-1 0,-1 0 0,1 0 0,0 0 0,0 0 0,-1 0 0,1 0 0,0 0 0,-1-1 0,1 1 0,0-1 0,2 0 0,8-2 0,1 0 0,0-1 0,16-8 0,-27 12 0,1-1 0,0 0 0,-1 0 0,1-1 0,-1 1 0,0-1 0,1 1 0,-1-1 0,0 0 0,0 0 0,0 1 0,0-2 0,0 1 0,0 0 0,-1 0 0,1 0 0,-1-1 0,1 1 0,-1-1 0,0 1 0,1-6 0,-2 7 0,0 1 0,0-1 0,0 0 0,0 1 0,0-1 0,0 0 0,0 1 0,0-1 0,0 0 0,-1 1 0,1-1 0,0 1 0,-1-1 0,1 0 0,0 1 0,-1-1 0,1 1 0,0-1 0,-1 1 0,1-1 0,-1 1 0,1-1 0,-1 1 0,0 0 0,1-1 0,-1 1 0,1 0 0,-1-1 0,0 1 0,0-1 0,-27 2 0,24 0 0,-1 1 0,1-1 0,-1 1 0,1-1 0,-1 1 0,1 1 0,0-1 0,0 1 0,-5 3 0,-16 19-1365</inkml:trace>
 </inkml:ink>
 </file>
 
@@ -2404,7 +3161,7 @@
           <inkml:channelProperty channel="F" name="resolution" value="0" units="1/dev"/>
         </inkml:channelProperties>
       </inkml:inkSource>
-      <inkml:timestamp xml:id="ts0" timeString="2026-03-26T06:34:15.337"/>
+      <inkml:timestamp xml:id="ts0" timeString="2026-03-26T06:33:33.551"/>
     </inkml:context>
     <inkml:brush xml:id="br0">
       <inkml:brushProperty name="width" value="0.1" units="cm"/>
@@ -2412,7 +3169,7 @@
       <inkml:brushProperty name="color" value="#FFC114"/>
     </inkml:brush>
   </inkml:definitions>
-  <inkml:trace contextRef="#ctx0" brushRef="#br0">765 83 24575,'-1'-2'0,"0"-1"0,0 1 0,0-1 0,0 1 0,0 0 0,0-1 0,-1 1 0,1 0 0,-1 0 0,1 0 0,-1 0 0,0 0 0,0 0 0,0 0 0,0 1 0,0-1 0,0 1 0,-1 0 0,1-1 0,0 1 0,-4-1 0,-52-20 0,34 16 0,-1 2 0,1 0 0,0 2 0,-1 1 0,0 1 0,1 1 0,-26 4 0,2 3 0,0 1 0,-72 25 0,107-30 0,0 1 0,0 0 0,0 1 0,1 0 0,0 1 0,0 0 0,1 1 0,0 1 0,0 0 0,1 0 0,0 0 0,1 2 0,0-1 0,1 1 0,0 0 0,0 1 0,1 0 0,1 0 0,0 1 0,0-1 0,2 1 0,-1 0 0,2 1 0,0-1 0,0 1 0,1-1 0,0 25 0,3-21 0,1 0 0,0 0 0,1 0 0,1 0 0,0-1 0,2 0 0,0 0 0,0 0 0,2 0 0,0-1 0,0 0 0,2-1 0,0 0 0,0 0 0,1-1 0,1-1 0,0 0 0,1 0 0,21 14 0,-8-5 0,-6-5 0,0 0 0,1-2 0,0 0 0,32 14 0,-34-20 0,0-1 0,0-1 0,1-1 0,-1-1 0,40 4 0,-32-5 0,-1-1 0,1-1 0,-1-2 0,1 0 0,0-2 0,-1-1 0,0-1 0,0-1 0,-1-1 0,1-2 0,41-20 0,-43 18 0,-2-2 0,30-21 0,-44 27 0,0 0 0,0 0 0,-1 0 0,0-1 0,-1 0 0,0 0 0,0-1 0,9-18 0,-8 10 0,0 0 0,-2-1 0,0 0 0,-1 0 0,0 0 0,0-26 0,-2 1 0,-7-71 0,4 103 0,-1 1 0,1 0 0,-1-1 0,-1 1 0,0 0 0,-1 0 0,0 1 0,0-1 0,-1 1 0,0-1 0,-1 2 0,-7-11 0,4 10 0,0 0 0,0 0 0,0 1 0,-1 1 0,-1 0 0,1 0 0,-1 1 0,0 0 0,-23-8 0,3 2-195,0 1 0,-1 1 0,0 2 0,0 1 0,-1 1 0,-33 0 0,45 6-6631</inkml:trace>
+  <inkml:trace contextRef="#ctx0" brushRef="#br0">182 20 24575,'0'-1'0,"0"0"0,-1 0 0,1 0 0,-1 0 0,1 0 0,-1 0 0,1 0 0,-1 0 0,0 0 0,1 0 0,-1 1 0,0-1 0,0 0 0,0 0 0,0 1 0,0-1 0,1 0 0,-1 1 0,0-1 0,0 1 0,0-1 0,-1 1 0,1 0 0,0-1 0,0 1 0,0 0 0,0 0 0,0 0 0,0 0 0,0 0 0,0 0 0,-1 0 0,1 0 0,-1 0 0,-40 5 0,35-3 0,0 1 0,1-1 0,-1 1 0,1 1 0,-8 4 0,12-7 0,1 0 0,-1 0 0,0 0 0,1 0 0,-1 1 0,1-1 0,-1 1 0,1-1 0,0 1 0,0-1 0,-1 1 0,1 0 0,0 0 0,0 0 0,1-1 0,-1 1 0,0 0 0,1 0 0,-1 0 0,1 0 0,0 0 0,-1 3 0,1-4 0,0 0 0,1-1 0,-1 1 0,0 0 0,0-1 0,0 1 0,1 0 0,-1-1 0,0 1 0,1-1 0,-1 1 0,0 0 0,1-1 0,-1 1 0,1-1 0,-1 1 0,1-1 0,-1 1 0,1-1 0,-1 0 0,1 1 0,-1-1 0,1 1 0,0-1 0,-1 0 0,1 0 0,0 1 0,-1-1 0,1 0 0,1 0 0,27-3 0,-26 2 0,1 0 0,-1 0 0,0 0 0,0 0 0,0-1 0,0 1 0,0-1 0,0 0 0,-1 0 0,1 0 0,-1 0 0,1 0 0,-1 0 0,4-5 0,-6 7 0,0 0 0,0 0 0,0 0 0,0-1 0,0 1 0,0 0 0,0 0 0,0 0 0,0 0 0,0 0 0,0-1 0,0 1 0,0 0 0,0 0 0,0 0 0,0 0 0,0 0 0,0-1 0,0 1 0,0 0 0,0 0 0,-1 0 0,1 0 0,0 0 0,0 0 0,0 0 0,0-1 0,0 1 0,0 0 0,0 0 0,0 0 0,-1 0 0,1 0 0,0 0 0,0 0 0,0 0 0,0 0 0,0 0 0,-1 0 0,1 0 0,0 0 0,0 0 0,0-1 0,0 1 0,0 0 0,-1 0 0,1 1 0,0-1 0,0 0 0,0 0 0,0 0 0,-1 0 0,-12 3 0,-10 9 0,13 1 0,13-5 0,-1-7 0,0-1 0,0 1 0,0-1 0,0 1 0,0-1 0,0 0 0,0 0 0,0 0 0,0 0 0,0 0 0,0-1 0,2 0 0,-3 1 0,1 0 0,-1 0 0,0-1 0,1 1 0,-1 0 0,0-1 0,0 1 0,1-1 0,-1 0 0,0 1 0,0-1 0,0 0 0,0 0 0,0 1 0,0-1 0,0 0 0,1-2 0,-6-6 0,-16-1 0,14 8-114,0 1 1,0 0-1,-1 0 0,1 0 0,0 1 1,0 0-1,0 0 0,-1 0 0,1 1 1,0 0-1,-12 4 0,0 0-6712</inkml:trace>
 </inkml:ink>
 </file>
 
@@ -2460,7 +3217,7 @@
           <inkml:channelProperty channel="F" name="resolution" value="0" units="1/dev"/>
         </inkml:channelProperties>
       </inkml:inkSource>
-      <inkml:timestamp xml:id="ts0" timeString="2026-03-26T06:34:15.338"/>
+      <inkml:timestamp xml:id="ts0" timeString="2026-03-26T06:33:33.552"/>
     </inkml:context>
     <inkml:brush xml:id="br0">
       <inkml:brushProperty name="width" value="0.1" units="cm"/>
@@ -2468,7 +3225,7 @@
       <inkml:brushProperty name="color" value="#FFC114"/>
     </inkml:brush>
   </inkml:definitions>
-  <inkml:trace contextRef="#ctx0" brushRef="#br0">4 56 24575,'0'0'0,"0"0"0,-1 0 0,1 0 0,0 0 0,0 0 0,0 0 0,0 0 0,0 0 0,0 0 0,-1 0 0,1 0 0,0 0 0,0 0 0,0-1 0,0 1 0,0 0 0,0 0 0,0 0 0,-1 0 0,1 0 0,0 0 0,0 0 0,0 0 0,0 0 0,0 0 0,0-1 0,0 1 0,0 0 0,0 0 0,0 0 0,0 0 0,0 0 0,0 0 0,0-1 0,0 1 0,0 0 0,-1 0 0,1 0 0,0 0 0,1 0 0,-1 0 0,0-1 0,0 1 0,0 0 0,0 0 0,0 0 0,0 0 0,0 0 0,0 0 0,0-1 0,0 1 0,0 0 0,0 0 0,0 0 0,0 0 0,0 0 0,0 0 0,1 0 0,-1 0 0,0-1 0,10-11 0,15-8 0,-10 15 0,1 1 0,-1 1 0,1 0 0,0 2 0,-1-1 0,1 2 0,0 0 0,0 1 0,-1 1 0,1 0 0,0 1 0,-1 1 0,0 0 0,0 1 0,27 13 0,-40-17 0,0-1 0,0 1 0,-1 0 0,1 0 0,0 0 0,-1 0 0,1 0 0,-1 0 0,1 0 0,-1 0 0,0 1 0,1-1 0,-1 1 0,0-1 0,0 1 0,0-1 0,0 1 0,0-1 0,-1 1 0,1 0 0,0 0 0,-1-1 0,1 4 0,-1-2 0,0-1 0,-1 0 0,1 0 0,-1 1 0,0-1 0,0 0 0,0 0 0,0 0 0,0 0 0,0 0 0,0 0 0,-1-1 0,1 1 0,-1 0 0,1-1 0,-4 3 0,-5 4 0,0 0 0,-1-1 0,0 0 0,-1-1 0,-18 8 0,26-13 0,-1 1 0,1 0 0,0 0 0,-1 0 0,1 0 0,0 1 0,0 0 0,-4 4 0,7-7 0,1 0 0,0 1 0,0-1 0,-1 1 0,1-1 0,0 1 0,0-1 0,0 0 0,-1 1 0,1-1 0,0 1 0,0-1 0,0 1 0,0-1 0,0 1 0,0-1 0,0 1 0,0-1 0,0 0 0,0 1 0,0-1 0,1 1 0,-1-1 0,0 1 0,0-1 0,0 1 0,1-1 0,-1 0 0,0 1 0,1 0 0,24 15 0,0-7 0,45 11 0,-54-17 0,0 1 0,-1 0 0,1 1 0,-1 1 0,0 0 0,0 1 0,-1 1 0,19 13 0,-31-20 0,-1 0 0,0 0 0,1 0 0,-1 0 0,0 0 0,1 0 0,-1 1 0,0-1 0,0 0 0,0 1 0,0-1 0,0 1 0,0-1 0,-1 1 0,1-1 0,0 1 0,-1 0 0,1-1 0,-1 1 0,0 0 0,0-1 0,1 1 0,-1 0 0,0-1 0,0 1 0,-1 0 0,1 0 0,0-1 0,0 1 0,-1 0 0,1-1 0,-1 1 0,0-1 0,1 1 0,-1 0 0,0-1 0,0 0 0,0 1 0,0-1 0,0 1 0,0-1 0,0 0 0,-1 0 0,1 0 0,0 0 0,-1 0 0,-1 1 0,-4 3 0,-1 0 0,1-1 0,-1 0 0,0 0 0,0-1 0,0 0 0,0-1 0,-11 3 0,-41 6 0,38-5 0,0-2 0,0 0 0,-1-2 0,1 0 0,0-1 0,-1-1 0,-42-7 0,62 7-57,1 0 0,0-1 1,0 1-1,0-1 0,0 1 0,0-1 0,0 0 0,0 0 0,1 0 0,-1 0 0,0 0 1,0 0-1,1-1 0,-1 1 0,1-1 0,-1 1 0,1-1 0,-1 1 0,1-1 1,0 0-1,0 0 0,0 1 0,-1-4 0</inkml:trace>
+  <inkml:trace contextRef="#ctx0" brushRef="#br0">8 62 24575,'0'0'0,"0"0"0,0 0 0,-1 1 0,1-1 0,0 0 0,0 0 0,0 0 0,0 0 0,-1 0 0,1 0 0,0 0 0,0 0 0,0 0 0,0 0 0,-1 0 0,1 0 0,0 0 0,0 0 0,0 0 0,-1 0 0,1 0 0,0 0 0,0 0 0,0-1 0,0 1 0,-1 0 0,1 0 0,0 0 0,0 0 0,0 0 0,0 0 0,0 0 0,0-1 0,-1 1 0,1 0 0,0 0 0,0 0 0,0 0 0,0 0 0,0-1 0,0 1 0,0 0 0,0 0 0,0 0 0,0-1 0,0 1 0,0 0 0,0 0 0,0 0 0,0 0 0,0-1 0,0 1 0,0 0 0,0 0 0,-1 1 0,1 0 0,0 0 0,0 0 0,-1 0 0,1 1 0,0-1 0,0 0 0,0 0 0,0 0 0,0 0 0,1 1 0,-1-1 0,0 0 0,1 0 0,-1 0 0,0 0 0,1 0 0,-1 0 0,1 1 0,1 0 0,13 16 0,0 0 0,2-1 0,0-1 0,1-1 0,0 0 0,31 18 0,-20-13 0,3 2 0,0-2 0,1-1 0,1-1 0,1-2 0,40 12 0,-15-11 0,0-3 0,2-2 0,77 4 0,-101-14 0,-1-2 0,1-2 0,0-1 0,-1-2 0,1-2 0,41-12 0,25-17 0,-2-4 0,176-98 0,-199 100 0,-56 29 0,-1-1 0,0-1 0,-1-1 0,0-1 0,-1-1 0,36-32 0,-46 30-1365</inkml:trace>
 </inkml:ink>
 </file>
 
@@ -2488,7 +3245,7 @@
           <inkml:channelProperty channel="F" name="resolution" value="0" units="1/dev"/>
         </inkml:channelProperties>
       </inkml:inkSource>
-      <inkml:timestamp xml:id="ts0" timeString="2026-03-26T06:34:15.339"/>
+      <inkml:timestamp xml:id="ts0" timeString="2026-03-26T06:33:33.553"/>
     </inkml:context>
     <inkml:brush xml:id="br0">
       <inkml:brushProperty name="width" value="0.1" units="cm"/>
@@ -2496,7 +3253,7 @@
       <inkml:brushProperty name="color" value="#FFC114"/>
     </inkml:brush>
   </inkml:definitions>
-  <inkml:trace contextRef="#ctx0" brushRef="#br0">689 99 24575,'-1'-1'0,"1"-1"0,-1 0 0,0 1 0,0-1 0,0 1 0,0-1 0,0 1 0,0-1 0,0 1 0,-1 0 0,1 0 0,0 0 0,-1 0 0,1-1 0,-1 2 0,1-1 0,-4-1 0,-29-14 0,8 8 0,0 0 0,0 2 0,0 2 0,0 0 0,-1 1 0,0 2 0,0 1 0,1 1 0,-1 1 0,-34 8 0,40-6 0,1 1 0,-1 0 0,1 2 0,-32 15 0,42-16 0,1 0 0,0 1 0,0-1 0,0 2 0,1-1 0,0 1 0,0 0 0,1 1 0,0 0 0,-9 16 0,5-9 0,2 1 0,0 1 0,1 0 0,1 0 0,1 0 0,0 1 0,2 0 0,0 0 0,1 0 0,1 1 0,0-1 0,2 0 0,0 1 0,1-1 0,1 1 0,1-1 0,1 0 0,1 0 0,9 27 0,0-13 0,2 0 0,31 50 0,-38-71 0,1 1 0,0-1 0,1-1 0,0 0 0,1 0 0,0-1 0,1-1 0,22 14 0,-11-11 0,0-1 0,0-1 0,1-2 0,1 0 0,-1-2 0,51 7 0,-28-9 0,0-2 0,91-7 0,-125 3 0,0-1 0,0-1 0,0 0 0,0-1 0,-1 0 0,0-1 0,0 0 0,-1-1 0,1-1 0,-1 0 0,-1 0 0,0-1 0,0-1 0,-1 0 0,10-11 0,2-6 0,-1-1 0,-1 0 0,-1-2 0,-2 0 0,14-33 0,-25 44 0,-1 0 0,-1 0 0,-1 0 0,-1 0 0,-1-1 0,0 1 0,-1-1 0,-6-37 0,4 45 0,-1-1 0,-1 1 0,0 0 0,-1 0 0,0 1 0,-1-1 0,0 1 0,0 0 0,-1 1 0,-1-1 0,0 1 0,0 1 0,-15-13 0,-1 0 0,-1 0 0,-2 2 0,-56-33 0,44 33-341,-1 1 0,-1 2-1,-52-15 1,76 28-6485</inkml:trace>
+  <inkml:trace contextRef="#ctx0" brushRef="#br0">1 8 24575,'0'-8'0,"0"11"0,8 17 0,3-6 0,0 0 0,1 0 0,0-1 0,2-1 0,-1 0 0,1-1 0,19 11 0,-12-7 0,0 1 0,24 24 0,-44-39-34,0-1 0,0 1 0,-1 0 0,1-1 0,0 1-1,0 0 1,-1 0 0,1-1 0,0 1 0,-1 0 0,1 0 0,-1 0 0,1 0-1,-1 0 1,0 0 0,1 0 0,-1 0 0,0 0 0,0 0 0,1 0-1,-1 0 1,0 0 0,0 0 0,0 0 0,0 0 0,0 0 0,-1 0 0,1 0-1,0 0 1,0 0 0,-1 0 0,1-1 0,0 1 0,-1 0 0,1 0 0,-1 0-1,1 0 1,-1 0 0,-1 1 0</inkml:trace>
 </inkml:ink>
 </file>
 
@@ -2516,7 +3273,7 @@
           <inkml:channelProperty channel="F" name="resolution" value="0" units="1/dev"/>
         </inkml:channelProperties>
       </inkml:inkSource>
-      <inkml:timestamp xml:id="ts0" timeString="2026-03-26T06:34:15.340"/>
+      <inkml:timestamp xml:id="ts0" timeString="2026-03-26T06:33:33.554"/>
     </inkml:context>
     <inkml:brush xml:id="br0">
       <inkml:brushProperty name="width" value="0.1" units="cm"/>
@@ -2524,7 +3281,7 @@
       <inkml:brushProperty name="color" value="#FFC114"/>
     </inkml:brush>
   </inkml:definitions>
-  <inkml:trace contextRef="#ctx0" brushRef="#br0">51 108 24575,'-2'-3'0,"1"1"0,-1 0 0,1-1 0,0 1 0,-1-1 0,1 1 0,1-1 0,-1 0 0,0 1 0,1-1 0,-1 0 0,1 1 0,0-1 0,0 0 0,0 0 0,0 1 0,0-1 0,1 0 0,-1 0 0,1 1 0,0-4 0,0 4 0,0 0 0,-1-1 0,1 1 0,-1-1 0,1 1 0,-1 0 0,0-1 0,0 1 0,-1-1 0,1 1 0,0-1 0,-1 1 0,1 0 0,-1-1 0,0 1 0,0 0 0,-2-4 0,3 6 0,-1 0 0,1 0 0,-1 0 0,0 0 0,1 0 0,-1 0 0,0 0 0,1 1 0,-1-1 0,1 0 0,-1 0 0,0 1 0,1-1 0,-1 0 0,1 1 0,-1-1 0,1 1 0,-1-1 0,1 1 0,0-1 0,-1 1 0,1-1 0,-1 1 0,1-1 0,0 1 0,0-1 0,-1 1 0,1 0 0,0-1 0,0 1 0,-1 0 0,-10 21 0,9-16 0,0 0 0,0 0 0,1 1 0,0-1 0,0 0 0,0 1 0,1-1 0,0 1 0,0-1 0,0 0 0,1 1 0,0-1 0,0 1 0,1-1 0,0 0 0,0 0 0,0 0 0,1 0 0,0 0 0,0-1 0,0 1 0,1-1 0,0 0 0,8 9 0,-4-7 0,1 0 0,0 0 0,0-1 0,0 0 0,1-1 0,0 0 0,0-1 0,0 0 0,0 0 0,1-1 0,-1 0 0,1-1 0,0 0 0,11 0 0,-8-1 0,0-1 0,1 0 0,-1 0 0,0-1 0,0-1 0,14-4 0,-23 5 0,0-1 0,1 0 0,-1 0 0,0-1 0,-1 1 0,1-1 0,0 0 0,-1 0 0,1-1 0,-1 1 0,0-1 0,0 0 0,-1 0 0,1 0 0,-1-1 0,0 1 0,0-1 0,3-6 0,21-60 0,-25 66 0,-1 0 0,1-1 0,-1 1 0,-1 0 0,1 0 0,-1-1 0,0 1 0,0 0 0,0-1 0,-1 1 0,-2-10 0,3 15 0,0 0 0,0 0 0,0 0 0,0-1 0,0 1 0,0 0 0,0 0 0,0 0 0,0-1 0,-1 1 0,1 0 0,0 0 0,0 0 0,0 0 0,0-1 0,0 1 0,0 0 0,-1 0 0,1 0 0,0 0 0,0 0 0,0-1 0,-1 1 0,1 0 0,0 0 0,0 0 0,0 0 0,0 0 0,-1 0 0,1 0 0,0 0 0,0 0 0,-1 0 0,1 0 0,0 0 0,0 0 0,0 0 0,-1 0 0,1 0 0,0 0 0,0 0 0,0 0 0,-1 0 0,1 0 0,0 1 0,-9 9 0,-4 17 0,9-12 0,1 0 0,1 0 0,0 0 0,1 0 0,0 1 0,2-1 0,-1 0 0,2 0 0,5 23 0,2 51 0,-9-64 0,-1-20 0,0 1 0,1-1 0,0 1 0,0-1 0,0 1 0,1-1 0,0 1 0,0-1 0,0 1 0,3 5 0,5-5-1365</inkml:trace>
+  <inkml:trace contextRef="#ctx0" brushRef="#br0">317 240 24575,'-8'-2'0,"1"0"0,-1-1 0,1 0 0,-1 0 0,1 0 0,0-1 0,0 0 0,1-1 0,-1 0 0,1 0 0,0 0 0,-6-7 0,-4-2 0,-66-47 0,-24-19 0,105 79-91,-1-1 0,1 1 0,-1-1 0,1 1 0,-1-1 0,1 0 0,0 0 0,0 0 0,0 1 0,0-1 0,0 0 0,1 0 0,-1 0 0,0-3 0</inkml:trace>
 </inkml:ink>
 </file>
 
@@ -2544,7 +3301,7 @@
           <inkml:channelProperty channel="F" name="resolution" value="0" units="1/dev"/>
         </inkml:channelProperties>
       </inkml:inkSource>
-      <inkml:timestamp xml:id="ts0" timeString="2026-03-26T06:34:15.341"/>
+      <inkml:timestamp xml:id="ts0" timeString="2026-03-26T06:33:33.555"/>
     </inkml:context>
     <inkml:brush xml:id="br0">
       <inkml:brushProperty name="width" value="0.1" units="cm"/>
@@ -2552,7 +3309,7 @@
       <inkml:brushProperty name="color" value="#FFC114"/>
     </inkml:brush>
   </inkml:definitions>
-  <inkml:trace contextRef="#ctx0" brushRef="#br0">710 100 24575,'-1'-2'0,"1"-1"0,-1 1 0,0 0 0,0-1 0,0 1 0,0 0 0,0-1 0,0 1 0,-1 0 0,1 0 0,-1 0 0,1 0 0,-1 0 0,0 1 0,0-1 0,0 0 0,0 1 0,0-1 0,-3-1 0,-49-25 0,44 23 0,-3 0 0,0 0 0,0 2 0,0-1 0,-1 2 0,1-1 0,-1 2 0,1 0 0,-1 1 0,0 0 0,1 1 0,-1 0 0,-23 6 0,7 0 0,-1 2 0,2 1 0,-1 2 0,-40 21 0,53-23 0,1 1 0,0 0 0,1 1 0,0 1 0,1 0 0,0 1 0,1 1 0,1 0 0,0 1 0,1 0 0,1 0 0,0 1 0,2 1 0,0 0 0,0 0 0,2 0 0,0 1 0,1 0 0,2 0 0,-3 24 0,5-31 0,1-1 0,0 1 0,1 0 0,0-1 0,1 1 0,0-1 0,1 1 0,0-1 0,1 0 0,0 0 0,0 0 0,2-1 0,10 18 0,-3-8 0,2-1 0,0 0 0,1-1 0,0-1 0,33 26 0,-30-29 0,2 0 0,0-2 0,0 0 0,1-2 0,0 0 0,38 10 0,5-3 0,76 10 0,-107-22 0,-1-2 0,1-1 0,0-2 0,-1-2 0,1 0 0,48-11 0,-61 8 0,0-1 0,0 0 0,-1-1 0,0-2 0,0 0 0,-1-1 0,0-1 0,-1 0 0,0-2 0,-1 0 0,19-19 0,-27 24 0,-1-1 0,0 0 0,-1 0 0,0-1 0,0 0 0,-1 0 0,-1-1 0,1 0 0,-2 0 0,1 0 0,-2 0 0,1-1 0,-2 1 0,0-1 0,0 0 0,-1 0 0,0 0 0,-1 0 0,0 1 0,-1-1 0,0 0 0,-1 0 0,-1 0 0,0 1 0,0-1 0,-1 1 0,0 0 0,-11-18 0,3 8 0,-1 1 0,-2 0 0,1 1 0,-2 1 0,-1 1 0,0 0 0,-1 1 0,0 1 0,-29-18 0,17 15 0,-1 1 0,-1 1 0,0 2 0,-1 2 0,-61-16 0,-58-6-1365,130 28-5461</inkml:trace>
+  <inkml:trace contextRef="#ctx0" brushRef="#br0">504 1 24575,'-12'1'0,"-1"0"0,0 1 0,1 0 0,0 1 0,-1 0 0,1 1 0,1 0 0,-20 11 0,-9 7 0,-40 31 0,23-15 0,-122 94-1365,160-120-5461</inkml:trace>
 </inkml:ink>
 </file>
 
@@ -2572,7 +3329,7 @@
           <inkml:channelProperty channel="F" name="resolution" value="0" units="1/dev"/>
         </inkml:channelProperties>
       </inkml:inkSource>
-      <inkml:timestamp xml:id="ts0" timeString="2026-03-26T06:34:15.342"/>
+      <inkml:timestamp xml:id="ts0" timeString="2026-03-26T06:33:33.556"/>
     </inkml:context>
     <inkml:brush xml:id="br0">
       <inkml:brushProperty name="width" value="0.1" units="cm"/>
@@ -2580,7 +3337,7 @@
       <inkml:brushProperty name="color" value="#FFC114"/>
     </inkml:brush>
   </inkml:definitions>
-  <inkml:trace contextRef="#ctx0" brushRef="#br0">122 34 24575,'0'-1'0,"0"0"0,0-1 0,0 1 0,-1-1 0,1 1 0,0 0 0,-1-1 0,1 1 0,-1 0 0,1-1 0,-1 1 0,1 0 0,-1 0 0,0-1 0,0 1 0,0 0 0,0 0 0,0 0 0,0 0 0,0 0 0,0 0 0,0 1 0,0-1 0,0 0 0,-1 0 0,1 1 0,0-1 0,-1 1 0,1-1 0,0 1 0,-1 0 0,1-1 0,0 1 0,-1 0 0,1 0 0,-1 0 0,-1 0 0,-1 0 0,0 0 0,1 1 0,-1-1 0,1 1 0,-1-1 0,0 1 0,1 0 0,-1 1 0,1-1 0,0 1 0,0-1 0,-1 1 0,-3 3 0,4-2 0,0 0 0,0 1 0,0-1 0,1 1 0,-1 0 0,1 0 0,0 0 0,0 0 0,0 0 0,0 0 0,1 1 0,0-1 0,0 0 0,0 1 0,0-1 0,1 6 0,0-8 0,0 0 0,0 0 0,0-1 0,0 1 0,0 0 0,1-1 0,-1 1 0,1 0 0,0-1 0,-1 1 0,1-1 0,0 1 0,0-1 0,0 1 0,0-1 0,0 0 0,0 1 0,0-1 0,0 0 0,1 0 0,-1 0 0,0 0 0,1 0 0,-1 0 0,1 0 0,-1 0 0,1-1 0,-1 1 0,1-1 0,0 1 0,-1-1 0,1 1 0,0-1 0,-1 0 0,1 0 0,0 0 0,0 0 0,-1 0 0,1 0 0,0 0 0,-1-1 0,1 1 0,0-1 0,2 0 0,8-2 0,1 0 0,0-1 0,16-8 0,-27 12 0,1-1 0,0 0 0,-1 0 0,1-1 0,-1 1 0,0-1 0,1 1 0,-1-1 0,0 0 0,0 0 0,0 1 0,0-2 0,0 1 0,0 0 0,-1 0 0,1 0 0,-1-1 0,1 1 0,-1-1 0,0 1 0,1-6 0,-2 7 0,0 1 0,0-1 0,0 0 0,0 1 0,0-1 0,0 0 0,0 1 0,0-1 0,0 0 0,-1 1 0,1-1 0,0 1 0,-1-1 0,1 0 0,0 1 0,-1-1 0,1 1 0,0-1 0,-1 1 0,1-1 0,-1 1 0,1-1 0,-1 1 0,0 0 0,1-1 0,-1 1 0,1 0 0,-1-1 0,0 1 0,0-1 0,-27 2 0,24 0 0,-1 1 0,1-1 0,-1 1 0,1-1 0,-1 1 0,1 1 0,0-1 0,0 1 0,-5 3 0,-16 19-1365</inkml:trace>
+  <inkml:trace contextRef="#ctx0" brushRef="#br0">244 64 24575,'-7'-7'0,"0"0"0,-1 0 0,0 1 0,0 0 0,0 0 0,-1 1 0,1 0 0,-15-5 0,19 9 0,0 0 0,0 0 0,0 0 0,0 1 0,0-1 0,0 1 0,0 0 0,0 0 0,0 1 0,0-1 0,1 1 0,-1 0 0,0 0 0,0 0 0,0 0 0,1 1 0,-1 0 0,1 0 0,-1 0 0,1 0 0,0 0 0,-1 0 0,1 1 0,-3 3 0,0 0 0,1-1 0,0 1 0,0 0 0,0 1 0,1-1 0,0 1 0,0-1 0,1 1 0,-1 1 0,2-1 0,-1 0 0,-2 13 0,5-17 0,-1 0 0,1 0 0,0 0 0,0 0 0,0 0 0,1 0 0,-1 1 0,1-1 0,0 0 0,-1 0 0,1 0 0,1-1 0,-1 1 0,0 0 0,1 0 0,-1-1 0,1 1 0,0 0 0,0-1 0,0 0 0,0 1 0,0-1 0,1 0 0,-1 0 0,1 0 0,-1-1 0,1 1 0,0-1 0,-1 1 0,1-1 0,0 0 0,0 0 0,4 1 0,1 0 0,1 0 0,-1 0 0,0-1 0,1 0 0,-1-1 0,1 0 0,-1 0 0,1 0 0,-1-1 0,0-1 0,1 0 0,-1 0 0,9-3 0,-12 3 0,-1 0 0,1 0 0,-1 0 0,1 0 0,-1-1 0,0 0 0,0 0 0,0 0 0,0 0 0,-1-1 0,1 1 0,-1-1 0,0 0 0,0 0 0,0 0 0,-1-1 0,1 1 0,-1-1 0,0 1 0,0-1 0,-1 0 0,0 1 0,2-9 0,-3 9 0,0 1 0,1 0 0,-2-1 0,1 1 0,0 0 0,-1-1 0,0 1 0,1 0 0,-1-1 0,0 1 0,-1 0 0,1 0 0,-1 0 0,1 0 0,-1 0 0,0 0 0,0 1 0,0-1 0,0 1 0,-1-1 0,1 1 0,-1 0 0,0 0 0,1 0 0,-1 0 0,0 0 0,0 1 0,0-1 0,0 1 0,0 0 0,-6-2 0,2 1 0,0 0 0,0 1 0,0-1 0,-1 1 0,1 1 0,0 0 0,0 0 0,0 0 0,-1 1 0,1 0 0,0 0 0,0 1 0,0-1 0,-7 5 0,4-1 0,0 1 0,0 0 0,1 1 0,0 0 0,-9 10 0,15-14 0,0 0 0,0 0 0,0 1 0,1-1 0,-1 1 0,1 0 0,-3 6 0,4-8 0,1-1 0,0 1 0,-1-1 0,1 0 0,0 1 0,0-1 0,0 1 0,0-1 0,0 0 0,0 1 0,0-1 0,0 1 0,0-1 0,1 0 0,-1 1 0,1-1 0,-1 0 0,1 1 0,-1-1 0,1 0 0,0 0 0,1 3 0,0-3 0,0 1 0,0-1 0,0 0 0,0 0 0,1 0 0,-1 0 0,0 0 0,0-1 0,1 1 0,-1-1 0,0 1 0,1-1 0,-1 0 0,1 0 0,-1 0 0,0 0 0,1 0 0,-1-1 0,0 1 0,1-1 0,-1 1 0,0-1 0,0 0 0,1 0 0,-1 0 0,0 0 0,2-2 0,3 0 0,0-1 0,0 0 0,-1 0 0,1-1 0,-1 1 0,0-1 0,7-8 0,-13 12 0,1 1 0,-1 0 0,1-1 0,-1 1 0,1-1 0,-1 1 0,1-1 0,-1 0 0,0 1 0,1-1 0,-1 1 0,0-1 0,1 0 0,-1 1 0,0-1 0,0 0 0,0 1 0,0-1 0,0 0 0,1 1 0,-1-1 0,0 0 0,0 1 0,-1-1 0,1 0 0,0 1 0,0-1 0,0 0 0,-1 0 0,-16-2 0,-26 16 0,29 0-1365</inkml:trace>
 </inkml:ink>
 </file>
 
@@ -2600,7 +3357,7 @@
           <inkml:channelProperty channel="F" name="resolution" value="0" units="1/dev"/>
         </inkml:channelProperties>
       </inkml:inkSource>
-      <inkml:timestamp xml:id="ts0" timeString="2026-03-26T06:34:15.343"/>
+      <inkml:timestamp xml:id="ts0" timeString="2026-03-26T06:33:33.557"/>
     </inkml:context>
     <inkml:brush xml:id="br0">
       <inkml:brushProperty name="width" value="0.1" units="cm"/>
@@ -2608,7 +3365,7 @@
       <inkml:brushProperty name="color" value="#FFC114"/>
     </inkml:brush>
   </inkml:definitions>
-  <inkml:trace contextRef="#ctx0" brushRef="#br0">182 20 24575,'0'-1'0,"0"0"0,-1 0 0,1 0 0,-1 0 0,1 0 0,-1 0 0,1 0 0,-1 0 0,0 0 0,1 0 0,-1 1 0,0-1 0,0 0 0,0 0 0,0 1 0,0-1 0,1 0 0,-1 1 0,0-1 0,0 1 0,0-1 0,-1 1 0,1 0 0,0-1 0,0 1 0,0 0 0,0 0 0,0 0 0,0 0 0,0 0 0,0 0 0,-1 0 0,1 0 0,-1 0 0,-40 5 0,35-3 0,0 1 0,1-1 0,-1 1 0,1 1 0,-8 4 0,12-7 0,1 0 0,-1 0 0,0 0 0,1 0 0,-1 1 0,1-1 0,-1 1 0,1-1 0,0 1 0,0-1 0,-1 1 0,1 0 0,0 0 0,0 0 0,1-1 0,-1 1 0,0 0 0,1 0 0,-1 0 0,1 0 0,0 0 0,-1 3 0,1-4 0,0 0 0,1-1 0,-1 1 0,0 0 0,0-1 0,0 1 0,1 0 0,-1-1 0,0 1 0,1-1 0,-1 1 0,0 0 0,1-1 0,-1 1 0,1-1 0,-1 1 0,1-1 0,-1 1 0,1-1 0,-1 0 0,1 1 0,-1-1 0,1 1 0,0-1 0,-1 0 0,1 0 0,0 1 0,-1-1 0,1 0 0,1 0 0,27-3 0,-26 2 0,1 0 0,-1 0 0,0 0 0,0 0 0,0-1 0,0 1 0,0-1 0,0 0 0,-1 0 0,1 0 0,-1 0 0,1 0 0,-1 0 0,4-5 0,-6 7 0,0 0 0,0 0 0,0 0 0,0-1 0,0 1 0,0 0 0,0 0 0,0 0 0,0 0 0,0 0 0,0-1 0,0 1 0,0 0 0,0 0 0,0 0 0,0 0 0,0 0 0,0-1 0,0 1 0,0 0 0,0 0 0,-1 0 0,1 0 0,0 0 0,0 0 0,0 0 0,0-1 0,0 1 0,0 0 0,0 0 0,0 0 0,-1 0 0,1 0 0,0 0 0,0 0 0,0 0 0,0 0 0,0 0 0,-1 0 0,1 0 0,0 0 0,0 0 0,0-1 0,0 1 0,0 0 0,-1 0 0,1 1 0,0-1 0,0 0 0,0 0 0,0 0 0,-1 0 0,-12 3 0,-10 9 0,13 1 0,13-5 0,-1-7 0,0-1 0,0 1 0,0-1 0,0 1 0,0-1 0,0 0 0,0 0 0,0 0 0,0 0 0,0 0 0,0-1 0,2 0 0,-3 1 0,1 0 0,-1 0 0,0-1 0,1 1 0,-1 0 0,0-1 0,0 1 0,1-1 0,-1 0 0,0 1 0,0-1 0,0 0 0,0 0 0,0 1 0,0-1 0,0 0 0,1-2 0,-6-6 0,-16-1 0,14 8-114,0 1 1,0 0-1,-1 0 0,1 0 0,0 1 1,0 0-1,0 0 0,-1 0 0,1 1 1,0 0-1,-12 4 0,0 0-6712</inkml:trace>
+  <inkml:trace contextRef="#ctx0" brushRef="#br0">248 25 24575,'-3'-3'0,"-1"1"0,0-1 0,1 1 0,-1 0 0,0 0 0,0 0 0,-1 0 0,1 1 0,0-1 0,-1 1 0,1 0 0,0 0 0,-1 1 0,1 0 0,-1-1 0,1 2 0,-1-1 0,1 0 0,-1 1 0,1 0 0,-6 1 0,1 0 0,1 1 0,0 0 0,0 0 0,0 1 0,0 0 0,0 0 0,1 1 0,0 0 0,0 0 0,-6 7 0,7-6 0,0 1 0,0-1 0,1 2 0,0-1 0,1 0 0,-1 1 0,1 0 0,1 0 0,0 0 0,0 0 0,0 0 0,-1 13 0,3-18 0,1 0 0,0 1 0,0-1 0,0 0 0,0 1 0,1-1 0,-1 0 0,1 0 0,0 1 0,0-1 0,0 0 0,0 0 0,1 0 0,-1 0 0,1 0 0,0 0 0,0 0 0,0-1 0,0 1 0,0-1 0,0 1 0,1-1 0,-1 0 0,1 0 0,0 0 0,-1 0 0,1-1 0,0 1 0,0-1 0,0 1 0,0-1 0,1 0 0,-1 0 0,0-1 0,5 2 0,2 0 0,1-1 0,-1 1 0,0-2 0,0 0 0,1 0 0,-1 0 0,0-1 0,0-1 0,0 0 0,0 0 0,17-7 0,-23 8 0,-1-1 0,1 0 0,0 0 0,-1 0 0,1 0 0,-1-1 0,0 1 0,1-1 0,-1 0 0,0 0 0,-1 0 0,1 0 0,-1 0 0,1-1 0,-1 1 0,0-1 0,0 0 0,0 1 0,-1-1 0,1 0 0,-1 0 0,0 0 0,0 0 0,-1 0 0,1-1 0,-1 1 0,0 0 0,0 0 0,0 0 0,0 0 0,-2-7 0,1 9 0,1 0 0,-1-1 0,1 1 0,-1-1 0,0 1 0,0 0 0,0-1 0,0 1 0,-1 0 0,1 0 0,0 0 0,-1 0 0,0 0 0,1 0 0,-1 0 0,0 1 0,0-1 0,0 0 0,0 1 0,0 0 0,0-1 0,-1 1 0,-4-2 0,3 2 0,0 0 0,0 1 0,-1-1 0,1 1 0,0 0 0,-1 0 0,1 0 0,-1 0 0,1 1 0,0 0 0,0 0 0,-1 0 0,-4 2 0,4-1 0,1 0 0,-1 0 0,1 1 0,-1-1 0,1 1 0,0 0 0,0 0 0,0 0 0,0 1 0,1 0 0,-6 6 0,7-7 0,1-1 0,-1 0 0,1 1 0,0 0 0,0-1 0,0 1 0,0 0 0,0-1 0,1 1 0,-1 0 0,1 0 0,0 0 0,-1 0 0,1 0 0,1-1 0,-1 1 0,0 0 0,1 0 0,-1 0 0,1-1 0,1 5 0,-1-6 0,-1 1 0,1-1 0,-1 0 0,1 0 0,0 1 0,-1-1 0,1 0 0,0 0 0,0 0 0,0 0 0,0 0 0,0 0 0,0 0 0,0 0 0,0 0 0,0-1 0,0 1 0,0 0 0,1-1 0,-1 1 0,0-1 0,1 1 0,-1-1 0,0 0 0,2 1 0,0-1 0,-1 0 0,1-1 0,-1 1 0,1-1 0,-1 1 0,1-1 0,-1 0 0,0 0 0,1 0 0,-1 0 0,0 0 0,0 0 0,2-2 0,0 0 0,0 0 0,0 0 0,-1 0 0,1 0 0,-1-1 0,0 1 0,0-1 0,0 0 0,-1 0 0,1 0 0,-1 0 0,0-1 0,0 1 0,2-8 0,-4 12 0,0-1 0,0 0 0,0 0 0,0 1 0,0-1 0,0 0 0,0 0 0,0 1 0,0-1 0,0 0 0,-1 0 0,1 1 0,0-1 0,0 0 0,-1 1 0,1-1 0,-1 0 0,1 1 0,-1-1 0,1 0 0,-1 1 0,1-1 0,-1 1 0,1-1 0,-1 1 0,0-1 0,1 1 0,-1 0 0,0-1 0,1 1 0,-1 0 0,0-1 0,1 1 0,-1 0 0,0 0 0,0 0 0,-2-1 0,0 1 0,0 0 0,1 0 0,-1 0 0,0 1 0,1-1 0,-1 1 0,0-1 0,1 1 0,-6 2 0,6-2 0,1-1 0,-1 1 0,0 0 0,0 0 0,1 0 0,-1 0 0,0 1 0,1-1 0,0 0 0,-1 1 0,1-1 0,0 1 0,-1-1 0,0 3 0,2-3 0,-1 0 0,1 0 0,0 0 0,0-1 0,0 1 0,0 0 0,0 0 0,0 0 0,0-1 0,0 1 0,1 0 0,-1 0 0,0 0 0,0-1 0,1 1 0,-1 0 0,0 0 0,1-1 0,-1 1 0,1 0 0,-1-1 0,1 1 0,-1 0 0,1-1 0,0 1 0,-1-1 0,1 1 0,-1-1 0,1 1 0,0-1 0,0 1 0,-1-1 0,1 0 0,0 1 0,1-1 0,0 1 0,1 0 0,-1 0 0,0 0 0,1 0 0,-1-1 0,1 1 0,-1-1 0,1 1 0,-1-1 0,1 0 0,-1 0 0,1 0 0,-1-1 0,1 1 0,-1-1 0,1 1 0,-1-1 0,5-1 0,-7 1-25,0 1-1,0 0 0,0 0 1,0-1-1,1 1 0,-1 0 1,0 0-1,0-1 0,0 1 1,0 0-1,0-1 0,0 1 0,0 0 1,0 0-1,0-1 0,0 1 1,0 0-1,-1 0 0,1-1 1,0 1-1,0 0 0,0 0 1,0-1-1,0 1 0,0 0 1,0 0-1,-1-1 0,1 1 1,0 0-1,0 0 0,0 0 1,-1-1-1,1 1 0,0 0 1,0 0-1,-1 0 0,1 0 1,0 0-1,0-1 0,-1 1 1,1 0-1,0 0 0,0 0 1,-1 0-1,1 0 0,0 0 1,-1 0-1,1 0 0,0 0 1,0 0-1,-1 0 0</inkml:trace>
 </inkml:ink>
 </file>
 
@@ -2628,7 +3385,7 @@
           <inkml:channelProperty channel="F" name="resolution" value="0" units="1/dev"/>
         </inkml:channelProperties>
       </inkml:inkSource>
-      <inkml:timestamp xml:id="ts0" timeString="2026-03-26T06:34:15.344"/>
+      <inkml:timestamp xml:id="ts0" timeString="2026-05-21T16:23:39.388"/>
     </inkml:context>
     <inkml:brush xml:id="br0">
       <inkml:brushProperty name="width" value="0.1" units="cm"/>
@@ -2636,7 +3393,7 @@
       <inkml:brushProperty name="color" value="#FFC114"/>
     </inkml:brush>
   </inkml:definitions>
-  <inkml:trace contextRef="#ctx0" brushRef="#br0">8 62 24575,'0'0'0,"0"0"0,0 0 0,-1 1 0,1-1 0,0 0 0,0 0 0,0 0 0,0 0 0,-1 0 0,1 0 0,0 0 0,0 0 0,0 0 0,0 0 0,-1 0 0,1 0 0,0 0 0,0 0 0,0 0 0,-1 0 0,1 0 0,0 0 0,0 0 0,0-1 0,0 1 0,-1 0 0,1 0 0,0 0 0,0 0 0,0 0 0,0 0 0,0 0 0,0-1 0,-1 1 0,1 0 0,0 0 0,0 0 0,0 0 0,0 0 0,0-1 0,0 1 0,0 0 0,0 0 0,0 0 0,0-1 0,0 1 0,0 0 0,0 0 0,0 0 0,0 0 0,0-1 0,0 1 0,0 0 0,0 0 0,-1 1 0,1 0 0,0 0 0,0 0 0,-1 0 0,1 1 0,0-1 0,0 0 0,0 0 0,0 0 0,0 0 0,1 1 0,-1-1 0,0 0 0,1 0 0,-1 0 0,0 0 0,1 0 0,-1 0 0,1 1 0,1 0 0,13 16 0,0 0 0,2-1 0,0-1 0,1-1 0,0 0 0,31 18 0,-20-13 0,3 2 0,0-2 0,1-1 0,1-1 0,1-2 0,40 12 0,-15-11 0,0-3 0,2-2 0,77 4 0,-101-14 0,-1-2 0,1-2 0,0-1 0,-1-2 0,1-2 0,41-12 0,25-17 0,-2-4 0,176-98 0,-199 100 0,-56 29 0,-1-1 0,0-1 0,-1-1 0,0-1 0,-1-1 0,36-32 0,-46 30-1365</inkml:trace>
+  <inkml:trace contextRef="#ctx0" brushRef="#br0">1 71 24575,'7'0'0,"1"-1"0,0 0 0,0-1 0,15-5 0,24-4 0,642-37 0,-201 69 0,-448-13-34,10 3 155,-48-11-212,1 0 1,-1 1-1,1-1 0,-1 0 0,0-1 1,1 1-1,-1 0 0,1-1 0,-1 0 1,0 1-1,1-1 0,-1 0 0,0 0 0,0 0 1,4-3-1</inkml:trace>
 </inkml:ink>
 </file>
 
@@ -2656,7 +3413,7 @@
           <inkml:channelProperty channel="F" name="resolution" value="0" units="1/dev"/>
         </inkml:channelProperties>
       </inkml:inkSource>
-      <inkml:timestamp xml:id="ts0" timeString="2026-03-26T06:34:15.345"/>
+      <inkml:timestamp xml:id="ts0" timeString="2026-05-21T16:23:39.389"/>
     </inkml:context>
     <inkml:brush xml:id="br0">
       <inkml:brushProperty name="width" value="0.1" units="cm"/>
@@ -2664,7 +3421,7 @@
       <inkml:brushProperty name="color" value="#FFC114"/>
     </inkml:brush>
   </inkml:definitions>
-  <inkml:trace contextRef="#ctx0" brushRef="#br0">1 8 24575,'0'-8'0,"0"11"0,8 17 0,3-6 0,0 0 0,1 0 0,0-1 0,2-1 0,-1 0 0,1-1 0,19 11 0,-12-7 0,0 1 0,24 24 0,-44-39-34,0-1 0,0 1 0,-1 0 0,1-1 0,0 1-1,0 0 1,-1 0 0,1-1 0,0 1 0,-1 0 0,1 0 0,-1 0 0,1 0-1,-1 0 1,0 0 0,1 0 0,-1 0 0,0 0 0,0 0 0,1 0-1,-1 0 1,0 0 0,0 0 0,0 0 0,0 0 0,0 0 0,-1 0 0,1 0-1,0 0 1,0 0 0,-1 0 0,1-1 0,0 1 0,-1 0 0,1 0 0,-1 0-1,1 0 1,-1 0 0,-1 1 0</inkml:trace>
+  <inkml:trace contextRef="#ctx0" brushRef="#br0">54 2 24575,'-11'-1'0,"15"1"0,26 2 0,83 26 0,-47-13 0,-1 3 0,79 32 0,-142-50 0,0 1 0,-1 0 0,1-1 0,0 1 0,-1 0 0,1 0 0,-1 0 0,1 0 0,-1 0 0,0 0 0,1 1 0,-1-1 0,0 0 0,0 1 0,0-1 0,0 1 0,0-1 0,0 1 0,0-1 0,1 4 0,-2-4 0,0 1 0,-1-1 0,1 0 0,0 1 0,0-1 0,-1 1 0,1-1 0,-1 0 0,1 1 0,-1-1 0,0 0 0,1 1 0,-1-1 0,0 0 0,0 0 0,0 0 0,0 1 0,0-1 0,-1 1 0,-7 5 0,-1 0 0,1-1 0,-1 0 0,-20 9 0,-245 83 7,160-62-1379,93-28-5454</inkml:trace>
 </inkml:ink>
 </file>
 
@@ -2684,7 +3441,7 @@
           <inkml:channelProperty channel="F" name="resolution" value="0" units="1/dev"/>
         </inkml:channelProperties>
       </inkml:inkSource>
-      <inkml:timestamp xml:id="ts0" timeString="2026-03-26T06:34:15.346"/>
+      <inkml:timestamp xml:id="ts0" timeString="2026-03-26T06:34:15.323"/>
     </inkml:context>
     <inkml:brush xml:id="br0">
       <inkml:brushProperty name="width" value="0.1" units="cm"/>
@@ -2692,7 +3449,7 @@
       <inkml:brushProperty name="color" value="#FFC114"/>
     </inkml:brush>
   </inkml:definitions>
-  <inkml:trace contextRef="#ctx0" brushRef="#br0">317 240 24575,'-8'-2'0,"1"0"0,-1-1 0,1 0 0,-1 0 0,1 0 0,0-1 0,0 0 0,1-1 0,-1 0 0,1 0 0,0 0 0,-6-7 0,-4-2 0,-66-47 0,-24-19 0,105 79-91,-1-1 0,1 1 0,-1-1 0,1 1 0,-1-1 0,1 0 0,0 0 0,0 0 0,0 1 0,0-1 0,0 0 0,1 0 0,-1 0 0,0-3 0</inkml:trace>
+  <inkml:trace contextRef="#ctx0" brushRef="#br0">252 0 24575,'-5'1'0,"1"0"0,-1 0 0,1 0 0,0 0 0,-1 1 0,1 0 0,0-1 0,0 2 0,0-1 0,0 0 0,0 1 0,1 0 0,-1-1 0,1 2 0,0-1 0,0 0 0,-4 6 0,-6 8 0,0 1 0,-12 23 0,21-34 0,-8 18 0,1 1 0,1 0 0,1 1 0,2 0 0,-8 49 0,-6 24 0,9-48 0,-5 68 0,10-64 0,6-34 0,0 0 0,2 1 0,0-1 0,8 37 0,-3-28 0,0 44 0,-6-44 0,0 14 0,2-1 0,11 65 0,-4-61 0,2-1 0,3 0 0,1 0 0,3-2 0,1 0 0,2-1 0,43 65 0,2-3 0,72 162 0,-46-84 0,-75-152 0,5 11 0,2-1 0,36 50 0,-36-70-1365</inkml:trace>
 </inkml:ink>
 </file>
 
@@ -2712,7 +3469,7 @@
           <inkml:channelProperty channel="F" name="resolution" value="0" units="1/dev"/>
         </inkml:channelProperties>
       </inkml:inkSource>
-      <inkml:timestamp xml:id="ts0" timeString="2026-03-26T06:34:15.347"/>
+      <inkml:timestamp xml:id="ts0" timeString="2026-03-26T06:34:15.324"/>
     </inkml:context>
     <inkml:brush xml:id="br0">
       <inkml:brushProperty name="width" value="0.1" units="cm"/>
@@ -2720,7 +3477,7 @@
       <inkml:brushProperty name="color" value="#FFC114"/>
     </inkml:brush>
   </inkml:definitions>
-  <inkml:trace contextRef="#ctx0" brushRef="#br0">504 1 24575,'-12'1'0,"-1"0"0,0 1 0,1 0 0,0 1 0,-1 0 0,1 1 0,1 0 0,-20 11 0,-9 7 0,-40 31 0,23-15 0,-122 94-1365,160-120-5461</inkml:trace>
+  <inkml:trace contextRef="#ctx0" brushRef="#br0">9 263 24575,'-5'-20'0,"1"-4"0,8 21 0,9 10 0,91 89 0,-74-65 0,58 45 0,-74-66 0,4 4 0,1-1 0,0 0 0,0-2 0,35 15 0,-50-24 0,1 0 0,0-1 0,0 0 0,-1 0 0,1 0 0,0 0 0,0-1 0,0 1 0,0-1 0,0-1 0,0 1 0,0-1 0,0 0 0,0 0 0,-1 0 0,1 0 0,0-1 0,-1 0 0,1 0 0,-1 0 0,1-1 0,-1 0 0,0 1 0,0-2 0,0 1 0,6-7 0,17-23 0,-2-2 0,-1-1 0,36-73 0,-2 3 0,-48 91-195,-1-2 0,0 1 0,-1-1 0,-1 0 0,-1-1 0,5-22 0,-7 16-6631</inkml:trace>
 </inkml:ink>
 </file>
 
@@ -2768,7 +3525,7 @@
           <inkml:channelProperty channel="F" name="resolution" value="0" units="1/dev"/>
         </inkml:channelProperties>
       </inkml:inkSource>
-      <inkml:timestamp xml:id="ts0" timeString="2026-03-26T06:34:15.348"/>
+      <inkml:timestamp xml:id="ts0" timeString="2026-03-26T06:34:15.325"/>
     </inkml:context>
     <inkml:brush xml:id="br0">
       <inkml:brushProperty name="width" value="0.1" units="cm"/>
@@ -2776,7 +3533,7 @@
       <inkml:brushProperty name="color" value="#FFC114"/>
     </inkml:brush>
   </inkml:definitions>
-  <inkml:trace contextRef="#ctx0" brushRef="#br0">244 64 24575,'-7'-7'0,"0"0"0,-1 0 0,0 1 0,0 0 0,0 0 0,-1 1 0,1 0 0,-15-5 0,19 9 0,0 0 0,0 0 0,0 0 0,0 1 0,0-1 0,0 1 0,0 0 0,0 0 0,0 1 0,0-1 0,1 1 0,-1 0 0,0 0 0,0 0 0,0 0 0,1 1 0,-1 0 0,1 0 0,-1 0 0,1 0 0,0 0 0,-1 0 0,1 1 0,-3 3 0,0 0 0,1-1 0,0 1 0,0 0 0,0 1 0,1-1 0,0 1 0,0-1 0,1 1 0,-1 1 0,2-1 0,-1 0 0,-2 13 0,5-17 0,-1 0 0,1 0 0,0 0 0,0 0 0,0 0 0,1 0 0,-1 1 0,1-1 0,0 0 0,-1 0 0,1 0 0,1-1 0,-1 1 0,0 0 0,1 0 0,-1-1 0,1 1 0,0 0 0,0-1 0,0 0 0,0 1 0,0-1 0,1 0 0,-1 0 0,1 0 0,-1-1 0,1 1 0,0-1 0,-1 1 0,1-1 0,0 0 0,0 0 0,4 1 0,1 0 0,1 0 0,-1 0 0,0-1 0,1 0 0,-1-1 0,1 0 0,-1 0 0,1 0 0,-1-1 0,0-1 0,1 0 0,-1 0 0,9-3 0,-12 3 0,-1 0 0,1 0 0,-1 0 0,1 0 0,-1-1 0,0 0 0,0 0 0,0 0 0,0 0 0,-1-1 0,1 1 0,-1-1 0,0 0 0,0 0 0,0 0 0,-1-1 0,1 1 0,-1-1 0,0 1 0,0-1 0,-1 0 0,0 1 0,2-9 0,-3 9 0,0 1 0,1 0 0,-2-1 0,1 1 0,0 0 0,-1-1 0,0 1 0,1 0 0,-1-1 0,0 1 0,-1 0 0,1 0 0,-1 0 0,1 0 0,-1 0 0,0 0 0,0 1 0,0-1 0,0 1 0,-1-1 0,1 1 0,-1 0 0,0 0 0,1 0 0,-1 0 0,0 0 0,0 1 0,0-1 0,0 1 0,0 0 0,-6-2 0,2 1 0,0 0 0,0 1 0,0-1 0,-1 1 0,1 1 0,0 0 0,0 0 0,0 0 0,-1 1 0,1 0 0,0 0 0,0 1 0,0-1 0,-7 5 0,4-1 0,0 1 0,0 0 0,1 1 0,0 0 0,-9 10 0,15-14 0,0 0 0,0 0 0,0 1 0,1-1 0,-1 1 0,1 0 0,-3 6 0,4-8 0,1-1 0,0 1 0,-1-1 0,1 0 0,0 1 0,0-1 0,0 1 0,0-1 0,0 0 0,0 1 0,0-1 0,0 1 0,0-1 0,1 0 0,-1 1 0,1-1 0,-1 0 0,1 1 0,-1-1 0,1 0 0,0 0 0,1 3 0,0-3 0,0 1 0,0-1 0,0 0 0,0 0 0,1 0 0,-1 0 0,0 0 0,0-1 0,1 1 0,-1-1 0,0 1 0,1-1 0,-1 0 0,1 0 0,-1 0 0,0 0 0,1 0 0,-1-1 0,0 1 0,1-1 0,-1 1 0,0-1 0,0 0 0,1 0 0,-1 0 0,0 0 0,2-2 0,3 0 0,0-1 0,0 0 0,-1 0 0,1-1 0,-1 1 0,0-1 0,7-8 0,-13 12 0,1 1 0,-1 0 0,1-1 0,-1 1 0,1-1 0,-1 1 0,1-1 0,-1 0 0,0 1 0,1-1 0,-1 1 0,0-1 0,1 0 0,-1 1 0,0-1 0,0 0 0,0 1 0,0-1 0,0 0 0,1 1 0,-1-1 0,0 0 0,0 1 0,-1-1 0,1 0 0,0 1 0,0-1 0,0 0 0,-1 0 0,-16-2 0,-26 16 0,29 0-1365</inkml:trace>
+  <inkml:trace contextRef="#ctx0" brushRef="#br0">2 32 24575,'-1'-14'0,"1"-4"0,6 28 0,1 17 0,-1 1 0,-2 0 0,0 1 0,-1 33 0,-1-22 0,8 49 0,0-16 0,-5-64-1365</inkml:trace>
 </inkml:ink>
 </file>
 
@@ -2796,7 +3553,7 @@
           <inkml:channelProperty channel="F" name="resolution" value="0" units="1/dev"/>
         </inkml:channelProperties>
       </inkml:inkSource>
-      <inkml:timestamp xml:id="ts0" timeString="2026-03-26T06:34:15.349"/>
+      <inkml:timestamp xml:id="ts0" timeString="2026-03-26T06:34:15.326"/>
     </inkml:context>
     <inkml:brush xml:id="br0">
       <inkml:brushProperty name="width" value="0.1" units="cm"/>
@@ -2804,7 +3561,7 @@
       <inkml:brushProperty name="color" value="#FFC114"/>
     </inkml:brush>
   </inkml:definitions>
-  <inkml:trace contextRef="#ctx0" brushRef="#br0">248 25 24575,'-3'-3'0,"-1"1"0,0-1 0,1 1 0,-1 0 0,0 0 0,0 0 0,-1 0 0,1 1 0,0-1 0,-1 1 0,1 0 0,0 0 0,-1 1 0,1 0 0,-1-1 0,1 2 0,-1-1 0,1 0 0,-1 1 0,1 0 0,-6 1 0,1 0 0,1 1 0,0 0 0,0 0 0,0 1 0,0 0 0,0 0 0,1 1 0,0 0 0,0 0 0,-6 7 0,7-6 0,0 1 0,0-1 0,1 2 0,0-1 0,1 0 0,-1 1 0,1 0 0,1 0 0,0 0 0,0 0 0,0 0 0,-1 13 0,3-18 0,1 0 0,0 1 0,0-1 0,0 0 0,0 1 0,1-1 0,-1 0 0,1 0 0,0 1 0,0-1 0,0 0 0,0 0 0,1 0 0,-1 0 0,1 0 0,0 0 0,0 0 0,0-1 0,0 1 0,0-1 0,0 1 0,1-1 0,-1 0 0,1 0 0,0 0 0,-1 0 0,1-1 0,0 1 0,0-1 0,0 1 0,0-1 0,1 0 0,-1 0 0,0-1 0,5 2 0,2 0 0,1-1 0,-1 1 0,0-2 0,0 0 0,1 0 0,-1 0 0,0-1 0,0-1 0,0 0 0,0 0 0,17-7 0,-23 8 0,-1-1 0,1 0 0,0 0 0,-1 0 0,1 0 0,-1-1 0,0 1 0,1-1 0,-1 0 0,0 0 0,-1 0 0,1 0 0,-1 0 0,1-1 0,-1 1 0,0-1 0,0 0 0,0 1 0,-1-1 0,1 0 0,-1 0 0,0 0 0,0 0 0,-1 0 0,1-1 0,-1 1 0,0 0 0,0 0 0,0 0 0,0 0 0,-2-7 0,1 9 0,1 0 0,-1-1 0,1 1 0,-1-1 0,0 1 0,0 0 0,0-1 0,0 1 0,-1 0 0,1 0 0,0 0 0,-1 0 0,0 0 0,1 0 0,-1 0 0,0 1 0,0-1 0,0 0 0,0 1 0,0 0 0,0-1 0,-1 1 0,-4-2 0,3 2 0,0 0 0,0 1 0,-1-1 0,1 1 0,0 0 0,-1 0 0,1 0 0,-1 0 0,1 1 0,0 0 0,0 0 0,-1 0 0,-4 2 0,4-1 0,1 0 0,-1 0 0,1 1 0,-1-1 0,1 1 0,0 0 0,0 0 0,0 0 0,0 1 0,1 0 0,-6 6 0,7-7 0,1-1 0,-1 0 0,1 1 0,0 0 0,0-1 0,0 1 0,0 0 0,0-1 0,1 1 0,-1 0 0,1 0 0,0 0 0,-1 0 0,1 0 0,1-1 0,-1 1 0,0 0 0,1 0 0,-1 0 0,1-1 0,1 5 0,-1-6 0,-1 1 0,1-1 0,-1 0 0,1 0 0,0 1 0,-1-1 0,1 0 0,0 0 0,0 0 0,0 0 0,0 0 0,0 0 0,0 0 0,0 0 0,0 0 0,0-1 0,0 1 0,0 0 0,1-1 0,-1 1 0,0-1 0,1 1 0,-1-1 0,0 0 0,2 1 0,0-1 0,-1 0 0,1-1 0,-1 1 0,1-1 0,-1 1 0,1-1 0,-1 0 0,0 0 0,1 0 0,-1 0 0,0 0 0,0 0 0,2-2 0,0 0 0,0 0 0,0 0 0,-1 0 0,1 0 0,-1-1 0,0 1 0,0-1 0,0 0 0,-1 0 0,1 0 0,-1 0 0,0-1 0,0 1 0,2-8 0,-4 12 0,0-1 0,0 0 0,0 0 0,0 1 0,0-1 0,0 0 0,0 0 0,0 1 0,0-1 0,0 0 0,-1 0 0,1 1 0,0-1 0,0 0 0,-1 1 0,1-1 0,-1 0 0,1 1 0,-1-1 0,1 0 0,-1 1 0,1-1 0,-1 1 0,1-1 0,-1 1 0,0-1 0,1 1 0,-1 0 0,0-1 0,1 1 0,-1 0 0,0-1 0,1 1 0,-1 0 0,0 0 0,0 0 0,-2-1 0,0 1 0,0 0 0,1 0 0,-1 0 0,0 1 0,1-1 0,-1 1 0,0-1 0,1 1 0,-6 2 0,6-2 0,1-1 0,-1 1 0,0 0 0,0 0 0,1 0 0,-1 0 0,0 1 0,1-1 0,0 0 0,-1 1 0,1-1 0,0 1 0,-1-1 0,0 3 0,2-3 0,-1 0 0,1 0 0,0 0 0,0-1 0,0 1 0,0 0 0,0 0 0,0 0 0,0-1 0,0 1 0,1 0 0,-1 0 0,0 0 0,0-1 0,1 1 0,-1 0 0,0 0 0,1-1 0,-1 1 0,1 0 0,-1-1 0,1 1 0,-1 0 0,1-1 0,0 1 0,-1-1 0,1 1 0,-1-1 0,1 1 0,0-1 0,0 1 0,-1-1 0,1 0 0,0 1 0,1-1 0,0 1 0,1 0 0,-1 0 0,0 0 0,1 0 0,-1-1 0,1 1 0,-1-1 0,1 1 0,-1-1 0,1 0 0,-1 0 0,1 0 0,-1-1 0,1 1 0,-1-1 0,1 1 0,-1-1 0,5-1 0,-7 1-25,0 1-1,0 0 0,0 0 1,0-1-1,1 1 0,-1 0 1,0 0-1,0-1 0,0 1 1,0 0-1,0-1 0,0 1 0,0 0 1,0 0-1,0-1 0,0 1 1,0 0-1,-1 0 0,1-1 1,0 1-1,0 0 0,0 0 1,0-1-1,0 1 0,0 0 1,0 0-1,-1-1 0,1 1 1,0 0-1,0 0 0,0 0 1,-1-1-1,1 1 0,0 0 1,0 0-1,-1 0 0,1 0 1,0 0-1,0-1 0,-1 1 1,1 0-1,0 0 0,0 0 1,-1 0-1,1 0 0,0 0 1,-1 0-1,1 0 0,0 0 1,0 0-1,-1 0 0</inkml:trace>
+  <inkml:trace contextRef="#ctx0" brushRef="#br0">611 51 24575,'-6'-5'0,"1"0"0,-1 0 0,-1 1 0,1-1 0,0 1 0,-1 1 0,0-1 0,0 1 0,0 1 0,0-1 0,-1 1 0,1 0 0,-1 1 0,1-1 0,-11 1 0,6 1 0,-1 1 0,1 0 0,-1 1 0,1 1 0,0 0 0,0 0 0,0 1 0,-19 9 0,2 3 0,1 0 0,1 2 0,0 1 0,1 2 0,1 0 0,-29 33 0,38-37 0,0 2 0,1 0 0,1 1 0,1 0 0,1 1 0,1 0 0,0 1 0,-11 36 0,18-41 0,0 0 0,1 0 0,0 0 0,2 0 0,0 0 0,1 0 0,0 1 0,2-1 0,0 0 0,1 0 0,0 0 0,11 29 0,-8-30 0,0 0 0,1 0 0,1 0 0,1-1 0,0-1 0,1 1 0,0-1 0,1-1 0,1 0 0,0 0 0,0-1 0,2-1 0,-1 0 0,1-1 0,1-1 0,0 0 0,0-1 0,1 0 0,0-1 0,0-1 0,19 5 0,-2-1 0,0-1 0,0-2 0,1-1 0,-1-1 0,56 0 0,-74-6 0,0 0 0,0 0 0,-1-2 0,1 1 0,-1-2 0,1 0 0,-1-1 0,-1 0 0,1-1 0,16-10 0,-10 2 0,0 0 0,0-2 0,-2 0 0,0-1 0,22-26 0,-29 29 0,0 0 0,-1 0 0,0 0 0,-1-2 0,-1 1 0,0-1 0,-1 0 0,-1-1 0,0 1 0,4-24 0,-4 13 0,-4 18 0,0 0 0,0 0 0,0 0 0,-1 0 0,-1 0 0,0-1 0,0 1 0,-1 0 0,-3-17 0,0 8 0,0-4 0,0 1 0,-2 0 0,-1 0 0,0 0 0,-1 1 0,-2 1 0,-20-35 0,16 36 0,-2 0 0,1 1 0,-2 0 0,0 2 0,-30-22 0,3 8 0,-63-32 0,38 36-204,51 20-957,-2-1-5665</inkml:trace>
 </inkml:ink>
 </file>
 
@@ -2824,7 +3581,7 @@
           <inkml:channelProperty channel="F" name="resolution" value="0" units="1/dev"/>
         </inkml:channelProperties>
       </inkml:inkSource>
-      <inkml:timestamp xml:id="ts0" timeString="2026-03-26T06:34:29.130"/>
+      <inkml:timestamp xml:id="ts0" timeString="2026-03-26T06:34:15.327"/>
     </inkml:context>
     <inkml:brush xml:id="br0">
       <inkml:brushProperty name="width" value="0.1" units="cm"/>
@@ -2832,7 +3589,7 @@
       <inkml:brushProperty name="color" value="#FFC114"/>
     </inkml:brush>
   </inkml:definitions>
-  <inkml:trace contextRef="#ctx0" brushRef="#br0">252 0 24575,'-5'1'0,"1"0"0,-1 0 0,1 0 0,0 0 0,-1 1 0,1 0 0,0-1 0,0 2 0,0-1 0,0 0 0,0 1 0,1 0 0,-1-1 0,1 2 0,0-1 0,0 0 0,-4 6 0,-6 8 0,0 1 0,-12 23 0,21-34 0,-8 18 0,1 1 0,1 0 0,1 1 0,2 0 0,-8 49 0,-6 24 0,9-48 0,-5 68 0,10-64 0,6-34 0,0 0 0,2 1 0,0-1 0,8 37 0,-3-28 0,0 44 0,-6-44 0,0 14 0,2-1 0,11 65 0,-4-61 0,2-1 0,3 0 0,1 0 0,3-2 0,1 0 0,2-1 0,43 65 0,2-3 0,72 162 0,-46-84 0,-75-152 0,5 11 0,2-1 0,36 50 0,-36-70-1365</inkml:trace>
+  <inkml:trace contextRef="#ctx0" brushRef="#br0">56 325 24575,'0'-1'0,"0"0"0,0 1 0,0-1 0,0 0 0,0 0 0,0 0 0,0 1 0,0-1 0,0 0 0,0 0 0,0 1 0,-1-1 0,1 0 0,0 0 0,-1 1 0,1-1 0,0 0 0,-1 1 0,1-1 0,-1 0 0,1 1 0,-1-1 0,1 1 0,-1-1 0,1 1 0,-1-1 0,0 1 0,1-1 0,-1 1 0,0 0 0,1-1 0,-1 1 0,0 0 0,1-1 0,-1 1 0,0 0 0,0 0 0,1 0 0,-1 0 0,0 0 0,0 0 0,-1 0 0,1 0 0,-1 1 0,1-1 0,0 1 0,-1-1 0,1 1 0,0-1 0,-1 1 0,1 0 0,0 0 0,0 0 0,0 0 0,0 0 0,0 0 0,0 0 0,0 0 0,0 0 0,0 0 0,0 1 0,1-1 0,-1 0 0,0 1 0,1-1 0,-1 2 0,-2 10 0,0 0 0,1 1 0,1-1 0,0 1 0,1-1 0,2 22 0,18 81 0,-15-94 0,7 31 0,-10-46 0,-8-36 0,0 4 0,1 0 0,2 0 0,0-1 0,2 1 0,3-48 0,28-143 0,-28 205 0,0-7 0,1 0 0,1 0 0,1 0 0,8-23 0,-11 36 0,1 1 0,-1-1 0,0 1 0,1 0 0,0 0 0,0 0 0,1 0 0,-1 0 0,1 1 0,-1 0 0,1-1 0,0 1 0,0 0 0,1 1 0,-1-1 0,0 1 0,1 0 0,0 0 0,-1 0 0,1 1 0,5-1 0,-6 1 0,1 1 0,-1-1 0,0 1 0,0 1 0,0-1 0,1 0 0,-1 1 0,0 0 0,0 0 0,0 0 0,0 1 0,0-1 0,0 1 0,-1 0 0,1 0 0,0 0 0,-1 0 0,0 1 0,1 0 0,-1-1 0,0 1 0,0 0 0,-1 1 0,1-1 0,3 5 0,4 9 0,1 0 0,-2 1 0,14 36 0,-20-45 0,18 50 0,14 71 0,-32-113 0,-1-1 0,0 33 0,4 20 0,1-55-1365</inkml:trace>
 </inkml:ink>
 </file>
 
@@ -2852,7 +3609,7 @@
           <inkml:channelProperty channel="F" name="resolution" value="0" units="1/dev"/>
         </inkml:channelProperties>
       </inkml:inkSource>
-      <inkml:timestamp xml:id="ts0" timeString="2026-03-26T06:34:29.131"/>
+      <inkml:timestamp xml:id="ts0" timeString="2026-03-26T06:34:15.328"/>
     </inkml:context>
     <inkml:brush xml:id="br0">
       <inkml:brushProperty name="width" value="0.1" units="cm"/>
@@ -2860,7 +3617,7 @@
       <inkml:brushProperty name="color" value="#FFC114"/>
     </inkml:brush>
   </inkml:definitions>
-  <inkml:trace contextRef="#ctx0" brushRef="#br0">9 263 24575,'-5'-20'0,"1"-4"0,8 21 0,9 10 0,91 89 0,-74-65 0,58 45 0,-74-66 0,4 4 0,1-1 0,0 0 0,0-2 0,35 15 0,-50-24 0,1 0 0,0-1 0,0 0 0,-1 0 0,1 0 0,0 0 0,0-1 0,0 1 0,0-1 0,0-1 0,0 1 0,0-1 0,0 0 0,0 0 0,-1 0 0,1 0 0,0-1 0,-1 0 0,1 0 0,-1 0 0,1-1 0,-1 0 0,0 1 0,0-2 0,0 1 0,6-7 0,17-23 0,-2-2 0,-1-1 0,36-73 0,-2 3 0,-48 91-195,-1-2 0,0 1 0,-1-1 0,-1 0 0,-1-1 0,5-22 0,-7 16-6631</inkml:trace>
+  <inkml:trace contextRef="#ctx0" brushRef="#br0">22 73 24575,'-5'0'0,"-5"0"0,3-5 0,7 0 0,8-5 0,7 0 0,5 1 0,4 3 0,1 1 0,2-1 0,0-1 0,0 1 0,-5 2-8191</inkml:trace>
 </inkml:ink>
 </file>
 
@@ -2880,7 +3637,7 @@
           <inkml:channelProperty channel="F" name="resolution" value="0" units="1/dev"/>
         </inkml:channelProperties>
       </inkml:inkSource>
-      <inkml:timestamp xml:id="ts0" timeString="2026-03-26T06:34:29.132"/>
+      <inkml:timestamp xml:id="ts0" timeString="2026-03-26T06:34:15.329"/>
     </inkml:context>
     <inkml:brush xml:id="br0">
       <inkml:brushProperty name="width" value="0.1" units="cm"/>
@@ -2888,7 +3645,7 @@
       <inkml:brushProperty name="color" value="#FFC114"/>
     </inkml:brush>
   </inkml:definitions>
-  <inkml:trace contextRef="#ctx0" brushRef="#br0">2 32 24575,'-1'-14'0,"1"-4"0,6 28 0,1 17 0,-1 1 0,-2 0 0,0 1 0,-1 33 0,-1-22 0,8 49 0,0-16 0,-5-64-1365</inkml:trace>
+  <inkml:trace contextRef="#ctx0" brushRef="#br0">272 1 24575,'-34'0'0,"3"-1"0,-51 6 0,73-4 0,0 1 0,0 0 0,0 0 0,0 1 0,0 0 0,1 0 0,0 1 0,0 0 0,0 1 0,-9 6 0,16-10 0,-1 0 0,1 0 0,-1 0 0,1 0 0,-1 0 0,1 1 0,0-1 0,0 0 0,-1 1 0,1-1 0,0 1 0,0 0 0,1-1 0,-1 1 0,0-1 0,0 1 0,1 0 0,-1 0 0,1-1 0,0 1 0,-1 0 0,1 0 0,0 0 0,0 0 0,0 1 0,1 0 0,0-1 0,1 1 0,-1-1 0,0 0 0,1 0 0,-1 0 0,1 1 0,0-2 0,0 1 0,0 0 0,0 0 0,0 0 0,0-1 0,0 1 0,3 0 0,10 6 0,1 0 0,0-2 0,32 9 0,11 0 0,50 14 0,-99-25 0,1 0 0,0 1 0,-1 0 0,0 0 0,0 1 0,0 1 0,10 9 0,-19-16 0,0 1 0,0 0 0,0 0 0,0 0 0,0 0 0,0 0 0,0 0 0,0 0 0,0 1 0,-1-1 0,1 0 0,0 0 0,-1 1 0,1-1 0,-1 0 0,1 1 0,-1-1 0,0 0 0,0 1 0,0-1 0,1 1 0,-1-1 0,0 1 0,-1-1 0,1 0 0,0 1 0,0-1 0,-1 2 0,-1 0 0,1-1 0,-1 1 0,0-1 0,0 1 0,0-1 0,0 0 0,-1 0 0,1 0 0,0 0 0,-1 0 0,0 0 0,-3 1 0,-8 4 0,0-1 0,0-1 0,-1 0 0,-17 4 0,-4-4 0,1-1 0,0-2 0,-1-2 0,-56-5 0,90 5-52,0 0-1,0 0 1,0 0-1,0-1 1,0 1-1,1 0 1,-1-1-1,0 1 1,0-1-1,1 0 1,-1 0-1,0 0 1,1 1-1,-1-1 1,0-1-1,1 1 1,0 0-1,-1 0 1,1-1-1,0 1 0,-1 0 1,1-1-1,0 0 1,0 1-1,-1-3 1</inkml:trace>
 </inkml:ink>
 </file>
 
@@ -2908,7 +3665,7 @@
           <inkml:channelProperty channel="F" name="resolution" value="0" units="1/dev"/>
         </inkml:channelProperties>
       </inkml:inkSource>
-      <inkml:timestamp xml:id="ts0" timeString="2026-03-26T06:34:29.133"/>
+      <inkml:timestamp xml:id="ts0" timeString="2026-03-26T06:34:15.330"/>
     </inkml:context>
     <inkml:brush xml:id="br0">
       <inkml:brushProperty name="width" value="0.1" units="cm"/>
@@ -2916,7 +3673,7 @@
       <inkml:brushProperty name="color" value="#FFC114"/>
     </inkml:brush>
   </inkml:definitions>
-  <inkml:trace contextRef="#ctx0" brushRef="#br0">611 51 24575,'-6'-5'0,"1"0"0,-1 0 0,-1 1 0,1-1 0,0 1 0,-1 1 0,0-1 0,0 1 0,0 1 0,0-1 0,-1 1 0,1 0 0,-1 1 0,1-1 0,-11 1 0,6 1 0,-1 1 0,1 0 0,-1 1 0,1 1 0,0 0 0,0 0 0,0 1 0,-19 9 0,2 3 0,1 0 0,1 2 0,0 1 0,1 2 0,1 0 0,-29 33 0,38-37 0,0 2 0,1 0 0,1 1 0,1 0 0,1 1 0,1 0 0,0 1 0,-11 36 0,18-41 0,0 0 0,1 0 0,0 0 0,2 0 0,0 0 0,1 0 0,0 1 0,2-1 0,0 0 0,1 0 0,0 0 0,11 29 0,-8-30 0,0 0 0,1 0 0,1 0 0,1-1 0,0-1 0,1 1 0,0-1 0,1-1 0,1 0 0,0 0 0,0-1 0,2-1 0,-1 0 0,1-1 0,1-1 0,0 0 0,0-1 0,1 0 0,0-1 0,0-1 0,19 5 0,-2-1 0,0-1 0,0-2 0,1-1 0,-1-1 0,56 0 0,-74-6 0,0 0 0,0 0 0,-1-2 0,1 1 0,-1-2 0,1 0 0,-1-1 0,-1 0 0,1-1 0,16-10 0,-10 2 0,0 0 0,0-2 0,-2 0 0,0-1 0,22-26 0,-29 29 0,0 0 0,-1 0 0,0 0 0,-1-2 0,-1 1 0,0-1 0,-1 0 0,-1-1 0,0 1 0,4-24 0,-4 13 0,-4 18 0,0 0 0,0 0 0,0 0 0,-1 0 0,-1 0 0,0-1 0,0 1 0,-1 0 0,-3-17 0,0 8 0,0-4 0,0 1 0,-2 0 0,-1 0 0,0 0 0,-1 1 0,-2 1 0,-20-35 0,16 36 0,-2 0 0,1 1 0,-2 0 0,0 2 0,-30-22 0,3 8 0,-63-32 0,38 36-204,51 20-957,-2-1-5665</inkml:trace>
+  <inkml:trace contextRef="#ctx0" brushRef="#br0">5 369 24575,'-4'-3'0,"13"-5"0,13-5 0,-4 5 0,0-1 0,-1 0 0,-1-1 0,1-1 0,-1-1 0,21-19 0,-34 27 0,1 0 0,-1 0 0,1 0 0,-1-1 0,0 1 0,-1-1 0,1 1 0,-1-1 0,0 0 0,0 0 0,-1 0 0,1 0 0,-1-1 0,0 1 0,0 0 0,-1 0 0,0-1 0,0 1 0,0 0 0,-1-1 0,1 1 0,-1 0 0,0 0 0,-1-1 0,1 1 0,-1 0 0,0 0 0,-5-8 0,2 3 0,-1-1 0,0 1 0,-1 0 0,0 1 0,-1-1 0,0 2 0,0-1 0,-16-12 0,24 21 0,-1-1 0,0 1 0,0-1 0,0 0 0,1 1 0,-1 0 0,0-1 0,0 1 0,0-1 0,0 1 0,0 0 0,0 0 0,0 0 0,0-1 0,0 1 0,0 0 0,0 0 0,0 0 0,0 1 0,0-1 0,0 0 0,0 0 0,0 0 0,0 1 0,0-1 0,0 1 0,-1 0 0,1 0 0,-1 0 0,1 1 0,0-1 0,0 1 0,0-1 0,0 1 0,0 0 0,0-1 0,0 1 0,0 0 0,1 0 0,-1-1 0,0 4 0,0 3 0,-1 0 0,1 0 0,1 0 0,0 1 0,1 12 0,32 234 0,-28-168 0,-5-65 0,1 0 0,1 0 0,6 26 0,-8-46-96,0-1 62,0-1 1,0 1 0,0-1-1,0 1 1,0 0 0,0-1-1,0 1 1,0-1-1,1 1 1,-1-1 0,0 1-1,0 0 1,0-1-1,1 1 1,-1-1 0,0 1-1,1-1 1,-1 1-1,0-1 1,1 0 0,-1 1-1,1-1 1,-1 1-1,0-1 1,1 0 0,-1 1-1,1-1 1,-1 0-1,1 1 1,-1-1 0,1 0-1,0 0 1,-1 0 0,1 0-1,-1 1 1,1-1-1,1 0 1</inkml:trace>
 </inkml:ink>
 </file>
 
@@ -2936,7 +3693,7 @@
           <inkml:channelProperty channel="F" name="resolution" value="0" units="1/dev"/>
         </inkml:channelProperties>
       </inkml:inkSource>
-      <inkml:timestamp xml:id="ts0" timeString="2026-03-26T06:34:29.134"/>
+      <inkml:timestamp xml:id="ts0" timeString="2026-03-26T06:34:15.331"/>
     </inkml:context>
     <inkml:brush xml:id="br0">
       <inkml:brushProperty name="width" value="0.1" units="cm"/>
@@ -2944,7 +3701,7 @@
       <inkml:brushProperty name="color" value="#FFC114"/>
     </inkml:brush>
   </inkml:definitions>
-  <inkml:trace contextRef="#ctx0" brushRef="#br0">56 325 24575,'0'-1'0,"0"0"0,0 1 0,0-1 0,0 0 0,0 0 0,0 0 0,0 1 0,0-1 0,0 0 0,0 0 0,0 1 0,-1-1 0,1 0 0,0 0 0,-1 1 0,1-1 0,0 0 0,-1 1 0,1-1 0,-1 0 0,1 1 0,-1-1 0,1 1 0,-1-1 0,1 1 0,-1-1 0,0 1 0,1-1 0,-1 1 0,0 0 0,1-1 0,-1 1 0,0 0 0,1-1 0,-1 1 0,0 0 0,0 0 0,1 0 0,-1 0 0,0 0 0,0 0 0,-1 0 0,1 0 0,-1 1 0,1-1 0,0 1 0,-1-1 0,1 1 0,0-1 0,-1 1 0,1 0 0,0 0 0,0 0 0,0 0 0,0 0 0,0 0 0,0 0 0,0 0 0,0 0 0,0 0 0,0 1 0,1-1 0,-1 0 0,0 1 0,1-1 0,-1 2 0,-2 10 0,0 0 0,1 1 0,1-1 0,0 1 0,1-1 0,2 22 0,18 81 0,-15-94 0,7 31 0,-10-46 0,-8-36 0,0 4 0,1 0 0,2 0 0,0-1 0,2 1 0,3-48 0,28-143 0,-28 205 0,0-7 0,1 0 0,1 0 0,1 0 0,8-23 0,-11 36 0,1 1 0,-1-1 0,0 1 0,1 0 0,0 0 0,0 0 0,1 0 0,-1 0 0,1 1 0,-1 0 0,1-1 0,0 1 0,0 0 0,1 1 0,-1-1 0,0 1 0,1 0 0,0 0 0,-1 0 0,1 1 0,5-1 0,-6 1 0,1 1 0,-1-1 0,0 1 0,0 1 0,0-1 0,1 0 0,-1 1 0,0 0 0,0 0 0,0 0 0,0 1 0,0-1 0,0 1 0,-1 0 0,1 0 0,0 0 0,-1 0 0,0 1 0,1 0 0,-1-1 0,0 1 0,0 0 0,-1 1 0,1-1 0,3 5 0,4 9 0,1 0 0,-2 1 0,14 36 0,-20-45 0,18 50 0,14 71 0,-32-113 0,-1-1 0,0 33 0,4 20 0,1-55-1365</inkml:trace>
+  <inkml:trace contextRef="#ctx0" brushRef="#br0">5 58 24575,'0'0'0,"-1"-1"0,1 0 0,-1 1 0,1-1 0,0 0 0,-1 1 0,1-1 0,0 0 0,0 0 0,-1 1 0,1-1 0,0 0 0,0 0 0,0 1 0,0-1 0,0 0 0,0 0 0,0 1 0,0-1 0,0 0 0,0 0 0,1 1 0,-1-1 0,0 0 0,0 0 0,1 1 0,-1-1 0,1 0 0,-1 1 0,0-1 0,1 0 0,-1 1 0,1-1 0,-1 1 0,1-1 0,0 1 0,-1-1 0,1 1 0,0-1 0,-1 1 0,1 0 0,0-1 0,-1 1 0,1 0 0,0-1 0,1 1 0,35-15 0,-14 10 0,0 1 0,43 0 0,-54 3 0,0 2 0,0-1 0,0 1 0,0 1 0,0 1 0,-1-1 0,16 7 0,-25-8 0,0-1 0,0 1 0,0 0 0,0-1 0,0 1 0,-1 0 0,1 1 0,0-1 0,-1 0 0,1 0 0,-1 1 0,1-1 0,-1 1 0,0-1 0,1 1 0,-1-1 0,0 1 0,0 0 0,0 0 0,0 0 0,-1-1 0,1 1 0,0 0 0,-1 0 0,1 0 0,-1 0 0,0 0 0,0 0 0,0 0 0,0 0 0,0 0 0,0 0 0,0 0 0,0 0 0,-1 0 0,1 0 0,-1 0 0,0 0 0,0 0 0,1 0 0,-3 2 0,0 2 0,-1-2 0,1 1 0,-1 0 0,0-1 0,0 0 0,-1 1 0,1-2 0,-1 1 0,0 0 0,0-1 0,0 0 0,0 0 0,-6 2 0,-22 5 0,-1-1 0,0-1 0,0-2 0,-49 2 0,121 7 0,30 1 0,-1 3 0,94 40 0,-156-57-124,-1 0 0,1 0 0,0-1 0,0 0 0,0 1 0,0-2-1,0 1 1,0 0 0,0-1 0,9-1 0,5-2-6702</inkml:trace>
 </inkml:ink>
 </file>
 
@@ -2964,7 +3721,7 @@
           <inkml:channelProperty channel="F" name="resolution" value="0" units="1/dev"/>
         </inkml:channelProperties>
       </inkml:inkSource>
-      <inkml:timestamp xml:id="ts0" timeString="2026-03-26T06:34:29.135"/>
+      <inkml:timestamp xml:id="ts0" timeString="2026-03-26T06:34:15.332"/>
     </inkml:context>
     <inkml:brush xml:id="br0">
       <inkml:brushProperty name="width" value="0.1" units="cm"/>
@@ -2972,7 +3729,7 @@
       <inkml:brushProperty name="color" value="#FFC114"/>
     </inkml:brush>
   </inkml:definitions>
-  <inkml:trace contextRef="#ctx0" brushRef="#br0">22 73 24575,'-5'0'0,"-5"0"0,3-5 0,7 0 0,8-5 0,7 0 0,5 1 0,4 3 0,1 1 0,2-1 0,0-1 0,0 1 0,-5 2-8191</inkml:trace>
+  <inkml:trace contextRef="#ctx0" brushRef="#br0">239 26 24575,'-1'-1'0,"1"0"0,-1 0 0,1 0 0,-1 0 0,1 0 0,-1 0 0,0 0 0,1 0 0,-1 0 0,0 0 0,0 0 0,0 0 0,0 1 0,0-1 0,0 0 0,0 1 0,0-1 0,0 0 0,0 1 0,0 0 0,0-1 0,0 1 0,-1-1 0,1 1 0,0 0 0,0 0 0,-2 0 0,-39-5 0,37 5 0,-4-1 0,-75 1 0,80 0 0,0 0 0,0 0 0,0 1 0,0 0 0,1 0 0,-1 0 0,0 0 0,0 1 0,0-1 0,1 1 0,-1 0 0,1 0 0,-1 0 0,1 1 0,0-1 0,0 1 0,-3 3 0,5-4 0,0-1 0,1 0 0,0 1 0,-1-1 0,1 0 0,0 1 0,0-1 0,0 0 0,0 1 0,0-1 0,0 0 0,0 1 0,0-1 0,1 1 0,-1-1 0,0 0 0,1 0 0,-1 1 0,1-1 0,-1 0 0,1 0 0,0 1 0,0-1 0,-1 0 0,1 0 0,0 0 0,0 0 0,0 0 0,0 0 0,0-1 0,0 1 0,1 0 0,-1 0 0,0-1 0,0 1 0,1-1 0,0 1 0,56 27 0,-52-26 0,114 56 0,-52-23 0,-67-35 0,1 1 0,-1-1 0,1 1 0,-1 0 0,1 0 0,-1 0 0,1 0 0,-1 0 0,0 0 0,1 0 0,-1 0 0,0 0 0,0 0 0,0 1 0,0-1 0,0 1 0,0-1 0,0 1 0,-1-1 0,1 1 0,-1-1 0,1 1 0,-1-1 0,1 4 0,-1-3 0,-1-1 0,1 0 0,-1 1 0,0-1 0,0 0 0,1 1 0,-1-1 0,0 0 0,0 0 0,0 0 0,0 0 0,0 0 0,-1 0 0,1 0 0,0 0 0,0 0 0,-1-1 0,1 1 0,0 0 0,-1-1 0,1 1 0,-1-1 0,1 1 0,-1-1 0,1 0 0,-1 0 0,-2 0 0,-33 4 0,0-1 0,-1-3 0,-58-6 0,71 2-1365,3-1-5461</inkml:trace>
 </inkml:ink>
 </file>
 
@@ -2992,7 +3749,7 @@
           <inkml:channelProperty channel="F" name="resolution" value="0" units="1/dev"/>
         </inkml:channelProperties>
       </inkml:inkSource>
-      <inkml:timestamp xml:id="ts0" timeString="2026-03-26T06:34:29.136"/>
+      <inkml:timestamp xml:id="ts0" timeString="2026-03-26T06:34:15.333"/>
     </inkml:context>
     <inkml:brush xml:id="br0">
       <inkml:brushProperty name="width" value="0.1" units="cm"/>
@@ -3000,7 +3757,7 @@
       <inkml:brushProperty name="color" value="#FFC114"/>
     </inkml:brush>
   </inkml:definitions>
-  <inkml:trace contextRef="#ctx0" brushRef="#br0">272 1 24575,'-34'0'0,"3"-1"0,-51 6 0,73-4 0,0 1 0,0 0 0,0 0 0,0 1 0,0 0 0,1 0 0,0 1 0,0 0 0,0 1 0,-9 6 0,16-10 0,-1 0 0,1 0 0,-1 0 0,1 0 0,-1 0 0,1 1 0,0-1 0,0 0 0,-1 1 0,1-1 0,0 1 0,0 0 0,1-1 0,-1 1 0,0-1 0,0 1 0,1 0 0,-1 0 0,1-1 0,0 1 0,-1 0 0,1 0 0,0 0 0,0 0 0,0 1 0,1 0 0,0-1 0,1 1 0,-1-1 0,0 0 0,1 0 0,-1 0 0,1 1 0,0-2 0,0 1 0,0 0 0,0 0 0,0 0 0,0-1 0,0 1 0,3 0 0,10 6 0,1 0 0,0-2 0,32 9 0,11 0 0,50 14 0,-99-25 0,1 0 0,0 1 0,-1 0 0,0 0 0,0 1 0,0 1 0,10 9 0,-19-16 0,0 1 0,0 0 0,0 0 0,0 0 0,0 0 0,0 0 0,0 0 0,0 0 0,0 1 0,-1-1 0,1 0 0,0 0 0,-1 1 0,1-1 0,-1 0 0,1 1 0,-1-1 0,0 0 0,0 1 0,0-1 0,1 1 0,-1-1 0,0 1 0,-1-1 0,1 0 0,0 1 0,0-1 0,-1 2 0,-1 0 0,1-1 0,-1 1 0,0-1 0,0 1 0,0-1 0,0 0 0,-1 0 0,1 0 0,0 0 0,-1 0 0,0 0 0,-3 1 0,-8 4 0,0-1 0,0-1 0,-1 0 0,-17 4 0,-4-4 0,1-1 0,0-2 0,-1-2 0,-56-5 0,90 5-52,0 0-1,0 0 1,0 0-1,0-1 1,0 1-1,1 0 1,-1-1-1,0 1 1,0-1-1,1 0 1,-1 0-1,0 0 1,1 1-1,-1-1 1,0-1-1,1 1 1,0 0-1,-1 0 1,1-1-1,0 1 0,-1 0 1,1-1-1,0 0 1,0 1-1,-1-3 1</inkml:trace>
+  <inkml:trace contextRef="#ctx0" brushRef="#br0">1 71 24575,'7'0'0,"1"-1"0,0 0 0,0-1 0,15-5 0,24-4 0,642-37 0,-201 69 0,-448-13-34,10 3 155,-48-11-212,1 0 1,-1 1-1,1-1 0,-1 0 0,0-1 1,1 1-1,-1 0 0,1-1 0,-1 0 1,0 1-1,1-1 0,-1 0 0,0 0 0,0 0 1,4-3-1</inkml:trace>
 </inkml:ink>
 </file>
 
@@ -3020,7 +3777,7 @@
           <inkml:channelProperty channel="F" name="resolution" value="0" units="1/dev"/>
         </inkml:channelProperties>
       </inkml:inkSource>
-      <inkml:timestamp xml:id="ts0" timeString="2026-03-26T06:34:29.137"/>
+      <inkml:timestamp xml:id="ts0" timeString="2026-03-26T06:34:15.334"/>
     </inkml:context>
     <inkml:brush xml:id="br0">
       <inkml:brushProperty name="width" value="0.1" units="cm"/>
@@ -3028,7 +3785,7 @@
       <inkml:brushProperty name="color" value="#FFC114"/>
     </inkml:brush>
   </inkml:definitions>
-  <inkml:trace contextRef="#ctx0" brushRef="#br0">5 369 24575,'-4'-3'0,"13"-5"0,13-5 0,-4 5 0,0-1 0,-1 0 0,-1-1 0,1-1 0,-1-1 0,21-19 0,-34 27 0,1 0 0,-1 0 0,1 0 0,-1-1 0,0 1 0,-1-1 0,1 1 0,-1-1 0,0 0 0,0 0 0,-1 0 0,1 0 0,-1-1 0,0 1 0,0 0 0,-1 0 0,0-1 0,0 1 0,0 0 0,-1-1 0,1 1 0,-1 0 0,0 0 0,-1-1 0,1 1 0,-1 0 0,0 0 0,-5-8 0,2 3 0,-1-1 0,0 1 0,-1 0 0,0 1 0,-1-1 0,0 2 0,0-1 0,-16-12 0,24 21 0,-1-1 0,0 1 0,0-1 0,0 0 0,1 1 0,-1 0 0,0-1 0,0 1 0,0-1 0,0 1 0,0 0 0,0 0 0,0 0 0,0-1 0,0 1 0,0 0 0,0 0 0,0 0 0,0 1 0,0-1 0,0 0 0,0 0 0,0 0 0,0 1 0,0-1 0,0 1 0,-1 0 0,1 0 0,-1 0 0,1 1 0,0-1 0,0 1 0,0-1 0,0 1 0,0 0 0,0-1 0,0 1 0,0 0 0,1 0 0,-1-1 0,0 4 0,0 3 0,-1 0 0,1 0 0,1 0 0,0 1 0,1 12 0,32 234 0,-28-168 0,-5-65 0,1 0 0,1 0 0,6 26 0,-8-46-96,0-1 62,0-1 1,0 1 0,0-1-1,0 1 1,0 0 0,0-1-1,0 1 1,0-1-1,1 1 1,-1-1 0,0 1-1,0 0 1,0-1-1,1 1 1,-1-1 0,0 1-1,1-1 1,-1 1-1,0-1 1,1 0 0,-1 1-1,1-1 1,-1 1-1,0-1 1,1 0 0,-1 1-1,1-1 1,-1 0-1,1 1 1,-1-1 0,1 0-1,0 0 1,-1 0 0,1 0-1,-1 1 1,1-1-1,1 0 1</inkml:trace>
+  <inkml:trace contextRef="#ctx0" brushRef="#br0">54 2 24575,'-11'-1'0,"15"1"0,26 2 0,83 26 0,-47-13 0,-1 3 0,79 32 0,-142-50 0,0 1 0,-1 0 0,1-1 0,0 1 0,-1 0 0,1 0 0,-1 0 0,1 0 0,-1 0 0,0 0 0,1 1 0,-1-1 0,0 0 0,0 1 0,0-1 0,0 1 0,0-1 0,0 1 0,0-1 0,1 4 0,-2-4 0,0 1 0,-1-1 0,1 0 0,0 1 0,0-1 0,-1 1 0,1-1 0,-1 0 0,1 1 0,-1-1 0,0 0 0,1 1 0,-1-1 0,0 0 0,0 0 0,0 0 0,0 1 0,0-1 0,-1 1 0,-7 5 0,-1 0 0,1-1 0,-1 0 0,-20 9 0,-245 83 7,160-62-1379,93-28-5454</inkml:trace>
 </inkml:ink>
 </file>
 
@@ -3076,7 +3833,7 @@
           <inkml:channelProperty channel="F" name="resolution" value="0" units="1/dev"/>
         </inkml:channelProperties>
       </inkml:inkSource>
-      <inkml:timestamp xml:id="ts0" timeString="2026-03-26T06:34:29.138"/>
+      <inkml:timestamp xml:id="ts0" timeString="2026-03-26T06:34:15.335"/>
     </inkml:context>
     <inkml:brush xml:id="br0">
       <inkml:brushProperty name="width" value="0.1" units="cm"/>
@@ -3084,7 +3841,7 @@
       <inkml:brushProperty name="color" value="#FFC114"/>
     </inkml:brush>
   </inkml:definitions>
-  <inkml:trace contextRef="#ctx0" brushRef="#br0">5 58 24575,'0'0'0,"-1"-1"0,1 0 0,-1 1 0,1-1 0,0 0 0,-1 1 0,1-1 0,0 0 0,0 0 0,-1 1 0,1-1 0,0 0 0,0 0 0,0 1 0,0-1 0,0 0 0,0 0 0,0 1 0,0-1 0,0 0 0,0 0 0,1 1 0,-1-1 0,0 0 0,0 0 0,1 1 0,-1-1 0,1 0 0,-1 1 0,0-1 0,1 0 0,-1 1 0,1-1 0,-1 1 0,1-1 0,0 1 0,-1-1 0,1 1 0,0-1 0,-1 1 0,1 0 0,0-1 0,-1 1 0,1 0 0,0-1 0,1 1 0,35-15 0,-14 10 0,0 1 0,43 0 0,-54 3 0,0 2 0,0-1 0,0 1 0,0 1 0,0 1 0,-1-1 0,16 7 0,-25-8 0,0-1 0,0 1 0,0 0 0,0-1 0,0 1 0,-1 0 0,1 1 0,0-1 0,-1 0 0,1 0 0,-1 1 0,1-1 0,-1 1 0,0-1 0,1 1 0,-1-1 0,0 1 0,0 0 0,0 0 0,0 0 0,-1-1 0,1 1 0,0 0 0,-1 0 0,1 0 0,-1 0 0,0 0 0,0 0 0,0 0 0,0 0 0,0 0 0,0 0 0,0 0 0,0 0 0,-1 0 0,1 0 0,-1 0 0,0 0 0,0 0 0,1 0 0,-3 2 0,0 2 0,-1-2 0,1 1 0,-1 0 0,0-1 0,0 0 0,-1 1 0,1-2 0,-1 1 0,0 0 0,0-1 0,0 0 0,0 0 0,-6 2 0,-22 5 0,-1-1 0,0-1 0,0-2 0,-49 2 0,121 7 0,30 1 0,-1 3 0,94 40 0,-156-57-124,-1 0 0,1 0 0,0-1 0,0 0 0,0 1 0,0-2-1,0 1 1,0 0 0,0-1 0,9-1 0,5-2-6702</inkml:trace>
+  <inkml:trace contextRef="#ctx0" brushRef="#br0">26 2346 24575,'-1'0'0,"0"0"0,1 0 0,-1 1 0,0-1 0,0 0 0,0 0 0,0 0 0,0-1 0,0 1 0,0 0 0,0 0 0,1 0 0,-1-1 0,0 1 0,0 0 0,0-1 0,1 1 0,-1-1 0,0 1 0,0-1 0,1 1 0,-1-1 0,0 0 0,1 1 0,-1-1 0,0 0 0,1 1 0,-1-1 0,1 0 0,0 0 0,-1 0 0,1 1 0,0-1 0,-1 0 0,1 0 0,0 0 0,0 0 0,-1 0 0,1 0 0,0 1 0,0-1 0,0 0 0,0 0 0,1 0 0,-1 0 0,0 0 0,0 0 0,0 0 0,1 1 0,-1-1 0,0 0 0,1 0 0,-1 0 0,1 1 0,-1-1 0,1 0 0,-1 0 0,2 0 0,2-6 0,0 0 0,0 1 0,1 0 0,0 0 0,9-8 0,15-11 0,-1-1 0,-1-1 0,-2-1 0,0-2 0,-2 0 0,-1-1 0,28-56 0,-22 25 0,-2-1 0,26-106 0,2-12 0,-47 149 0,-1 6 0,-1-2 0,0 1 0,-1-36 0,-2 31 0,11-60 0,-4 37 0,11-64 0,-8 52 0,-2 0 0,0-86 0,-9 19 0,-4-113 0,-21 95 0,22 138 0,-1 0 0,0 0 0,-1 0 0,0 1 0,-13-26 0,16 37 0,0 0 0,0 0 0,0 0 0,0 0 0,-1 0 0,1 0 0,-1 0 0,1 1 0,-1-1 0,0 1 0,0-1 0,0 1 0,0-1 0,0 1 0,0 0 0,0 0 0,0 0 0,0 0 0,-1 0 0,1 1 0,0-1 0,0 1 0,-1-1 0,1 1 0,-1 0 0,1 0 0,0 0 0,-1 0 0,1 0 0,0 1 0,-1-1 0,1 1 0,0 0 0,0-1 0,-1 1 0,1 0 0,0 0 0,0 0 0,0 1 0,0-1 0,0 0 0,-3 4 0,-31 23 0,0 2 0,-41 46 0,38-37 0,-45 36 0,82-75 0,5-7 0,12-19 0,23-32 0,-22 35 0,0 1 0,2 1 0,1 0 0,0 1 0,2 1 0,0 1 0,1 1 0,1 1 0,0 1 0,41-19 0,-58 31 0,0 0 0,0 1 0,1 0 0,-1 0 0,1 0 0,-1 1 0,1 0 0,0 0 0,0 1 0,-1 0 0,1 0 0,0 0 0,-1 1 0,1 0 0,0 1 0,-1-1 0,1 1 0,-1 0 0,0 1 0,0 0 0,12 6 0,210 94 0,-202-90 120,-26-13-143,1 1 1,-1-1-1,0 0 1,1 0-1,-1 0 1,0 1-1,1-1 1,-1 0-1,0 0 1,0 1-1,1-1 1,-1 0-1,0 0 1,0 1-1,1-1 1,-1 0-1,0 1 1,0-1-1,0 0 1,0 1-1,1-1 1,-1 1-1,0-1 1,0 0-1,0 1 1,0-1-1,0 0 1,0 1-1,0-1 1,0 1-1,0-1 1,0 0-1,0 1 1,0-1-1,-1 1 1,1-1-1,0 0 1,0 1-1,0-1 1,0 0-1,-1 1 1,1-1-1,0 0 1,0 1-1,0-1 1,-1 0-1,1 0 1,0 1-1,-1-1 1,1 0-1,0 0 1,-1 0-1,1 1 1,0-1-1,-1 0 1,1 0-1,0 0 1,-1 0-1,1 0 1,0 1-1,-1-1 1,1 0-1,-1 0 1,1 0-1,-1 0 1</inkml:trace>
 </inkml:ink>
 </file>
 
@@ -3104,7 +3861,7 @@
           <inkml:channelProperty channel="F" name="resolution" value="0" units="1/dev"/>
         </inkml:channelProperties>
       </inkml:inkSource>
-      <inkml:timestamp xml:id="ts0" timeString="2026-03-26T06:34:29.139"/>
+      <inkml:timestamp xml:id="ts0" timeString="2026-03-26T06:34:15.336"/>
     </inkml:context>
     <inkml:brush xml:id="br0">
       <inkml:brushProperty name="width" value="0.1" units="cm"/>
@@ -3112,7 +3869,7 @@
       <inkml:brushProperty name="color" value="#FFC114"/>
     </inkml:brush>
   </inkml:definitions>
-  <inkml:trace contextRef="#ctx0" brushRef="#br0">239 26 24575,'-1'-1'0,"1"0"0,-1 0 0,1 0 0,-1 0 0,1 0 0,-1 0 0,0 0 0,1 0 0,-1 0 0,0 0 0,0 0 0,0 0 0,0 1 0,0-1 0,0 0 0,0 1 0,0-1 0,0 0 0,0 1 0,0 0 0,0-1 0,0 1 0,-1-1 0,1 1 0,0 0 0,0 0 0,-2 0 0,-39-5 0,37 5 0,-4-1 0,-75 1 0,80 0 0,0 0 0,0 0 0,0 1 0,0 0 0,1 0 0,-1 0 0,0 0 0,0 1 0,0-1 0,1 1 0,-1 0 0,1 0 0,-1 0 0,1 1 0,0-1 0,0 1 0,-3 3 0,5-4 0,0-1 0,1 0 0,0 1 0,-1-1 0,1 0 0,0 1 0,0-1 0,0 0 0,0 1 0,0-1 0,0 0 0,0 1 0,0-1 0,1 1 0,-1-1 0,0 0 0,1 0 0,-1 1 0,1-1 0,-1 0 0,1 0 0,0 1 0,0-1 0,-1 0 0,1 0 0,0 0 0,0 0 0,0 0 0,0 0 0,0-1 0,0 1 0,1 0 0,-1 0 0,0-1 0,0 1 0,1-1 0,0 1 0,56 27 0,-52-26 0,114 56 0,-52-23 0,-67-35 0,1 1 0,-1-1 0,1 1 0,-1 0 0,1 0 0,-1 0 0,1 0 0,-1 0 0,0 0 0,1 0 0,-1 0 0,0 0 0,0 0 0,0 1 0,0-1 0,0 1 0,0-1 0,0 1 0,-1-1 0,1 1 0,-1-1 0,1 1 0,-1-1 0,1 4 0,-1-3 0,-1-1 0,1 0 0,-1 1 0,0-1 0,0 0 0,1 1 0,-1-1 0,0 0 0,0 0 0,0 0 0,0 0 0,0 0 0,-1 0 0,1 0 0,0 0 0,0 0 0,-1-1 0,1 1 0,0 0 0,-1-1 0,1 1 0,-1-1 0,1 1 0,-1-1 0,1 0 0,-1 0 0,-2 0 0,-33 4 0,0-1 0,-1-3 0,-58-6 0,71 2-1365,3-1-5461</inkml:trace>
+  <inkml:trace contextRef="#ctx0" brushRef="#br0">35 96 24575,'-2'0'0,"0"0"0,0 0 0,0-1 0,0 1 0,0 0 0,0-1 0,0 1 0,0-1 0,0 1 0,0-1 0,0 0 0,-2-1 0,4 2 0,-1-1 0,1 1 0,-1-1 0,1 1 0,-1-1 0,1 1 0,-1-1 0,1 0 0,0 1 0,-1-1 0,1 1 0,0-1 0,-1 0 0,1 1 0,0-1 0,0 0 0,0 1 0,0-1 0,0 0 0,0 0 0,-1 1 0,2-1 0,-1-1 0,0 0 0,1 0 0,0 0 0,0 0 0,0 0 0,0 0 0,0 0 0,1 0 0,-1 0 0,1 0 0,-1 0 0,1 1 0,0-1 0,-1 1 0,1-1 0,0 1 0,0 0 0,0-1 0,0 1 0,3-1 0,14-5 0,2 1 0,-1 0 0,1 1 0,23-2 0,-15 2 0,-22 4 0,1 1 0,-1-1 0,1 1 0,-1 0 0,0 1 0,1 0 0,-1 0 0,0 0 0,1 1 0,-1 0 0,0 1 0,0 0 0,0 0 0,-1 0 0,9 6 0,-12-7 0,-1 0 0,1 0 0,-1 0 0,1 1 0,-1-1 0,0 1 0,0-1 0,0 1 0,0 0 0,-1 0 0,1 0 0,-1 0 0,0 0 0,1 0 0,-1 0 0,-1 0 0,1 0 0,0 0 0,-1 1 0,0-1 0,0 0 0,0 1 0,0-1 0,0 0 0,-1 0 0,1 1 0,-1-1 0,0 0 0,0 0 0,0 0 0,0 0 0,-1 0 0,1 0 0,-1 0 0,0 0 0,-2 3 0,-4 4 0,1-1 0,-1 0 0,0-1 0,-1 0 0,0 0 0,-20 13 0,-13 10 0,42-30 0,-1-1 0,1 0 0,-1 1 0,1-1 0,-1 0 0,1 1 0,-1-1 0,1 0 0,-1 1 0,1-1 0,0 1 0,-1-1 0,1 1 0,0-1 0,-1 1 0,1-1 0,0 1 0,-1 0 0,1-1 0,0 1 0,0-1 0,0 1 0,0 0 0,0-1 0,0 1 0,0-1 0,0 1 0,0 0 0,0-1 0,0 1 0,0-1 0,0 1 0,0 0 0,1 0 0,21 9 0,36-6 0,-56-4 0,25 0 0,1 1 0,0 1 0,35 7 0,-55-7-195,-1 0 0,1-1 0,0 0 0,0-1 0,-1 0 0,14-1 0,-1-3-6631</inkml:trace>
 </inkml:ink>
 </file>
 
@@ -3132,7 +3889,7 @@
           <inkml:channelProperty channel="F" name="resolution" value="0" units="1/dev"/>
         </inkml:channelProperties>
       </inkml:inkSource>
-      <inkml:timestamp xml:id="ts0" timeString="2026-03-26T06:34:29.140"/>
+      <inkml:timestamp xml:id="ts0" timeString="2026-03-26T06:34:15.337"/>
     </inkml:context>
     <inkml:brush xml:id="br0">
       <inkml:brushProperty name="width" value="0.1" units="cm"/>
@@ -3140,7 +3897,7 @@
       <inkml:brushProperty name="color" value="#FFC114"/>
     </inkml:brush>
   </inkml:definitions>
-  <inkml:trace contextRef="#ctx0" brushRef="#br0">1 71 24575,'7'0'0,"1"-1"0,0 0 0,0-1 0,15-5 0,24-4 0,642-37 0,-201 69 0,-448-13-34,10 3 155,-48-11-212,1 0 1,-1 1-1,1-1 0,-1 0 0,0-1 1,1 1-1,-1 0 0,1-1 0,-1 0 1,0 1-1,1-1 0,-1 0 0,0 0 0,0 0 1,4-3-1</inkml:trace>
+  <inkml:trace contextRef="#ctx0" brushRef="#br0">765 83 24575,'-1'-2'0,"0"-1"0,0 1 0,0-1 0,0 1 0,0 0 0,0-1 0,-1 1 0,1 0 0,-1 0 0,1 0 0,-1 0 0,0 0 0,0 0 0,0 0 0,0 1 0,0-1 0,0 1 0,-1 0 0,1-1 0,0 1 0,-4-1 0,-52-20 0,34 16 0,-1 2 0,1 0 0,0 2 0,-1 1 0,0 1 0,1 1 0,-26 4 0,2 3 0,0 1 0,-72 25 0,107-30 0,0 1 0,0 0 0,0 1 0,1 0 0,0 1 0,0 0 0,1 1 0,0 1 0,0 0 0,1 0 0,0 0 0,1 2 0,0-1 0,1 1 0,0 0 0,0 1 0,1 0 0,1 0 0,0 1 0,0-1 0,2 1 0,-1 0 0,2 1 0,0-1 0,0 1 0,1-1 0,0 25 0,3-21 0,1 0 0,0 0 0,1 0 0,1 0 0,0-1 0,2 0 0,0 0 0,0 0 0,2 0 0,0-1 0,0 0 0,2-1 0,0 0 0,0 0 0,1-1 0,1-1 0,0 0 0,1 0 0,21 14 0,-8-5 0,-6-5 0,0 0 0,1-2 0,0 0 0,32 14 0,-34-20 0,0-1 0,0-1 0,1-1 0,-1-1 0,40 4 0,-32-5 0,-1-1 0,1-1 0,-1-2 0,1 0 0,0-2 0,-1-1 0,0-1 0,0-1 0,-1-1 0,1-2 0,41-20 0,-43 18 0,-2-2 0,30-21 0,-44 27 0,0 0 0,0 0 0,-1 0 0,0-1 0,-1 0 0,0 0 0,0-1 0,9-18 0,-8 10 0,0 0 0,-2-1 0,0 0 0,-1 0 0,0 0 0,0-26 0,-2 1 0,-7-71 0,4 103 0,-1 1 0,1 0 0,-1-1 0,-1 1 0,0 0 0,-1 0 0,0 1 0,0-1 0,-1 1 0,0-1 0,-1 2 0,-7-11 0,4 10 0,0 0 0,0 0 0,0 1 0,-1 1 0,-1 0 0,1 0 0,-1 1 0,0 0 0,-23-8 0,3 2-195,0 1 0,-1 1 0,0 2 0,0 1 0,-1 1 0,-33 0 0,45 6-6631</inkml:trace>
 </inkml:ink>
 </file>
 
@@ -3160,7 +3917,7 @@
           <inkml:channelProperty channel="F" name="resolution" value="0" units="1/dev"/>
         </inkml:channelProperties>
       </inkml:inkSource>
-      <inkml:timestamp xml:id="ts0" timeString="2026-03-26T06:34:29.141"/>
+      <inkml:timestamp xml:id="ts0" timeString="2026-03-26T06:34:15.338"/>
     </inkml:context>
     <inkml:brush xml:id="br0">
       <inkml:brushProperty name="width" value="0.1" units="cm"/>
@@ -3168,7 +3925,7 @@
       <inkml:brushProperty name="color" value="#FFC114"/>
     </inkml:brush>
   </inkml:definitions>
-  <inkml:trace contextRef="#ctx0" brushRef="#br0">54 2 24575,'-11'-1'0,"15"1"0,26 2 0,83 26 0,-47-13 0,-1 3 0,79 32 0,-142-50 0,0 1 0,-1 0 0,1-1 0,0 1 0,-1 0 0,1 0 0,-1 0 0,1 0 0,-1 0 0,0 0 0,1 1 0,-1-1 0,0 0 0,0 1 0,0-1 0,0 1 0,0-1 0,0 1 0,0-1 0,1 4 0,-2-4 0,0 1 0,-1-1 0,1 0 0,0 1 0,0-1 0,-1 1 0,1-1 0,-1 0 0,1 1 0,-1-1 0,0 0 0,1 1 0,-1-1 0,0 0 0,0 0 0,0 0 0,0 1 0,0-1 0,-1 1 0,-7 5 0,-1 0 0,1-1 0,-1 0 0,-20 9 0,-245 83 7,160-62-1379,93-28-5454</inkml:trace>
+  <inkml:trace contextRef="#ctx0" brushRef="#br0">4 56 24575,'0'0'0,"0"0"0,-1 0 0,1 0 0,0 0 0,0 0 0,0 0 0,0 0 0,0 0 0,0 0 0,-1 0 0,1 0 0,0 0 0,0 0 0,0-1 0,0 1 0,0 0 0,0 0 0,0 0 0,-1 0 0,1 0 0,0 0 0,0 0 0,0 0 0,0 0 0,0 0 0,0-1 0,0 1 0,0 0 0,0 0 0,0 0 0,0 0 0,0 0 0,0 0 0,0-1 0,0 1 0,0 0 0,-1 0 0,1 0 0,0 0 0,1 0 0,-1 0 0,0-1 0,0 1 0,0 0 0,0 0 0,0 0 0,0 0 0,0 0 0,0 0 0,0-1 0,0 1 0,0 0 0,0 0 0,0 0 0,0 0 0,0 0 0,0 0 0,1 0 0,-1 0 0,0-1 0,10-11 0,15-8 0,-10 15 0,1 1 0,-1 1 0,1 0 0,0 2 0,-1-1 0,1 2 0,0 0 0,0 1 0,-1 1 0,1 0 0,0 1 0,-1 1 0,0 0 0,0 1 0,27 13 0,-40-17 0,0-1 0,0 1 0,-1 0 0,1 0 0,0 0 0,-1 0 0,1 0 0,-1 0 0,1 0 0,-1 0 0,0 1 0,1-1 0,-1 1 0,0-1 0,0 1 0,0-1 0,0 1 0,0-1 0,-1 1 0,1 0 0,0 0 0,-1-1 0,1 4 0,-1-2 0,0-1 0,-1 0 0,1 0 0,-1 1 0,0-1 0,0 0 0,0 0 0,0 0 0,0 0 0,0 0 0,0 0 0,-1-1 0,1 1 0,-1 0 0,1-1 0,-4 3 0,-5 4 0,0 0 0,-1-1 0,0 0 0,-1-1 0,-18 8 0,26-13 0,-1 1 0,1 0 0,0 0 0,-1 0 0,1 0 0,0 1 0,0 0 0,-4 4 0,7-7 0,1 0 0,0 1 0,0-1 0,-1 1 0,1-1 0,0 1 0,0-1 0,0 0 0,-1 1 0,1-1 0,0 1 0,0-1 0,0 1 0,0-1 0,0 1 0,0-1 0,0 1 0,0-1 0,0 0 0,0 1 0,0-1 0,1 1 0,-1-1 0,0 1 0,0-1 0,0 1 0,1-1 0,-1 0 0,0 1 0,1 0 0,24 15 0,0-7 0,45 11 0,-54-17 0,0 1 0,-1 0 0,1 1 0,-1 1 0,0 0 0,0 1 0,-1 1 0,19 13 0,-31-20 0,-1 0 0,0 0 0,1 0 0,-1 0 0,0 0 0,1 0 0,-1 1 0,0-1 0,0 0 0,0 1 0,0-1 0,0 1 0,0-1 0,-1 1 0,1-1 0,0 1 0,-1 0 0,1-1 0,-1 1 0,0 0 0,0-1 0,1 1 0,-1 0 0,0-1 0,0 1 0,-1 0 0,1 0 0,0-1 0,0 1 0,-1 0 0,1-1 0,-1 1 0,0-1 0,1 1 0,-1 0 0,0-1 0,0 0 0,0 1 0,0-1 0,0 1 0,0-1 0,0 0 0,-1 0 0,1 0 0,0 0 0,-1 0 0,-1 1 0,-4 3 0,-1 0 0,1-1 0,-1 0 0,0 0 0,0-1 0,0 0 0,0-1 0,-11 3 0,-41 6 0,38-5 0,0-2 0,0 0 0,-1-2 0,1 0 0,0-1 0,-1-1 0,-42-7 0,62 7-57,1 0 0,0-1 1,0 1-1,0-1 0,0 1 0,0-1 0,0 0 0,0 0 0,1 0 0,-1 0 0,0 0 1,0 0-1,1-1 0,-1 1 0,1-1 0,-1 1 0,1-1 0,-1 1 0,1-1 1,0 0-1,0 0 0,0 1 0,-1-4 0</inkml:trace>
 </inkml:ink>
 </file>
 
@@ -3188,7 +3945,7 @@
           <inkml:channelProperty channel="F" name="resolution" value="0" units="1/dev"/>
         </inkml:channelProperties>
       </inkml:inkSource>
-      <inkml:timestamp xml:id="ts0" timeString="2026-03-26T06:34:29.142"/>
+      <inkml:timestamp xml:id="ts0" timeString="2026-03-26T06:34:15.339"/>
     </inkml:context>
     <inkml:brush xml:id="br0">
       <inkml:brushProperty name="width" value="0.1" units="cm"/>
@@ -3196,7 +3953,7 @@
       <inkml:brushProperty name="color" value="#FFC114"/>
     </inkml:brush>
   </inkml:definitions>
-  <inkml:trace contextRef="#ctx0" brushRef="#br0">26 2346 24575,'-1'0'0,"0"0"0,1 0 0,-1 1 0,0-1 0,0 0 0,0 0 0,0 0 0,0-1 0,0 1 0,0 0 0,0 0 0,1 0 0,-1-1 0,0 1 0,0 0 0,0-1 0,1 1 0,-1-1 0,0 1 0,0-1 0,1 1 0,-1-1 0,0 0 0,1 1 0,-1-1 0,0 0 0,1 1 0,-1-1 0,1 0 0,0 0 0,-1 0 0,1 1 0,0-1 0,-1 0 0,1 0 0,0 0 0,0 0 0,-1 0 0,1 0 0,0 1 0,0-1 0,0 0 0,0 0 0,1 0 0,-1 0 0,0 0 0,0 0 0,0 0 0,1 1 0,-1-1 0,0 0 0,1 0 0,-1 0 0,1 1 0,-1-1 0,1 0 0,-1 0 0,2 0 0,2-6 0,0 0 0,0 1 0,1 0 0,0 0 0,9-8 0,15-11 0,-1-1 0,-1-1 0,-2-1 0,0-2 0,-2 0 0,-1-1 0,28-56 0,-22 25 0,-2-1 0,26-106 0,2-12 0,-47 149 0,-1 6 0,-1-2 0,0 1 0,-1-36 0,-2 31 0,11-60 0,-4 37 0,11-64 0,-8 52 0,-2 0 0,0-86 0,-9 19 0,-4-113 0,-21 95 0,22 138 0,-1 0 0,0 0 0,-1 0 0,0 1 0,-13-26 0,16 37 0,0 0 0,0 0 0,0 0 0,0 0 0,-1 0 0,1 0 0,-1 0 0,1 1 0,-1-1 0,0 1 0,0-1 0,0 1 0,0-1 0,0 1 0,0 0 0,0 0 0,0 0 0,0 0 0,-1 0 0,1 1 0,0-1 0,0 1 0,-1-1 0,1 1 0,-1 0 0,1 0 0,0 0 0,-1 0 0,1 0 0,0 1 0,-1-1 0,1 1 0,0 0 0,0-1 0,-1 1 0,1 0 0,0 0 0,0 0 0,0 1 0,0-1 0,0 0 0,-3 4 0,-31 23 0,0 2 0,-41 46 0,38-37 0,-45 36 0,82-75 0,5-7 0,12-19 0,23-32 0,-22 35 0,0 1 0,2 1 0,1 0 0,0 1 0,2 1 0,0 1 0,1 1 0,1 1 0,0 1 0,41-19 0,-58 31 0,0 0 0,0 1 0,1 0 0,-1 0 0,1 0 0,-1 1 0,1 0 0,0 0 0,0 1 0,-1 0 0,1 0 0,0 0 0,-1 1 0,1 0 0,0 1 0,-1-1 0,1 1 0,-1 0 0,0 1 0,0 0 0,12 6 0,210 94 0,-202-90 120,-26-13-143,1 1 1,-1-1-1,0 0 1,1 0-1,-1 0 1,0 1-1,1-1 1,-1 0-1,0 0 1,0 1-1,1-1 1,-1 0-1,0 0 1,0 1-1,1-1 1,-1 0-1,0 1 1,0-1-1,0 0 1,0 1-1,1-1 1,-1 1-1,0-1 1,0 0-1,0 1 1,0-1-1,0 0 1,0 1-1,0-1 1,0 1-1,0-1 1,0 0-1,0 1 1,0-1-1,-1 1 1,1-1-1,0 0 1,0 1-1,0-1 1,0 0-1,-1 1 1,1-1-1,0 0 1,0 1-1,0-1 1,-1 0-1,1 0 1,0 1-1,-1-1 1,1 0-1,0 0 1,-1 0-1,1 1 1,0-1-1,-1 0 1,1 0-1,0 0 1,-1 0-1,1 0 1,0 1-1,-1-1 1,1 0-1,-1 0 1,1 0-1,-1 0 1</inkml:trace>
+  <inkml:trace contextRef="#ctx0" brushRef="#br0">689 99 24575,'-1'-1'0,"1"-1"0,-1 0 0,0 1 0,0-1 0,0 1 0,0-1 0,0 1 0,0-1 0,0 1 0,-1 0 0,1 0 0,0 0 0,-1 0 0,1-1 0,-1 2 0,1-1 0,-4-1 0,-29-14 0,8 8 0,0 0 0,0 2 0,0 2 0,0 0 0,-1 1 0,0 2 0,0 1 0,1 1 0,-1 1 0,-34 8 0,40-6 0,1 1 0,-1 0 0,1 2 0,-32 15 0,42-16 0,1 0 0,0 1 0,0-1 0,0 2 0,1-1 0,0 1 0,0 0 0,1 1 0,0 0 0,-9 16 0,5-9 0,2 1 0,0 1 0,1 0 0,1 0 0,1 0 0,0 1 0,2 0 0,0 0 0,1 0 0,1 1 0,0-1 0,2 0 0,0 1 0,1-1 0,1 1 0,1-1 0,1 0 0,1 0 0,9 27 0,0-13 0,2 0 0,31 50 0,-38-71 0,1 1 0,0-1 0,1-1 0,0 0 0,1 0 0,0-1 0,1-1 0,22 14 0,-11-11 0,0-1 0,0-1 0,1-2 0,1 0 0,-1-2 0,51 7 0,-28-9 0,0-2 0,91-7 0,-125 3 0,0-1 0,0-1 0,0 0 0,0-1 0,-1 0 0,0-1 0,0 0 0,-1-1 0,1-1 0,-1 0 0,-1 0 0,0-1 0,0-1 0,-1 0 0,10-11 0,2-6 0,-1-1 0,-1 0 0,-1-2 0,-2 0 0,14-33 0,-25 44 0,-1 0 0,-1 0 0,-1 0 0,-1 0 0,-1-1 0,0 1 0,-1-1 0,-6-37 0,4 45 0,-1-1 0,-1 1 0,0 0 0,-1 0 0,0 1 0,-1-1 0,0 1 0,0 0 0,-1 1 0,-1-1 0,0 1 0,0 1 0,-15-13 0,-1 0 0,-1 0 0,-2 2 0,-56-33 0,44 33-341,-1 1 0,-1 2-1,-52-15 1,76 28-6485</inkml:trace>
 </inkml:ink>
 </file>
 
@@ -3216,7 +3973,7 @@
           <inkml:channelProperty channel="F" name="resolution" value="0" units="1/dev"/>
         </inkml:channelProperties>
       </inkml:inkSource>
-      <inkml:timestamp xml:id="ts0" timeString="2026-03-26T06:34:29.143"/>
+      <inkml:timestamp xml:id="ts0" timeString="2026-03-26T06:34:15.340"/>
     </inkml:context>
     <inkml:brush xml:id="br0">
       <inkml:brushProperty name="width" value="0.1" units="cm"/>
@@ -3224,7 +3981,7 @@
       <inkml:brushProperty name="color" value="#FFC114"/>
     </inkml:brush>
   </inkml:definitions>
-  <inkml:trace contextRef="#ctx0" brushRef="#br0">35 96 24575,'-2'0'0,"0"0"0,0 0 0,0-1 0,0 1 0,0 0 0,0-1 0,0 1 0,0-1 0,0 1 0,0-1 0,0 0 0,-2-1 0,4 2 0,-1-1 0,1 1 0,-1-1 0,1 1 0,-1-1 0,1 1 0,-1-1 0,1 0 0,0 1 0,-1-1 0,1 1 0,0-1 0,-1 0 0,1 1 0,0-1 0,0 0 0,0 1 0,0-1 0,0 0 0,0 0 0,-1 1 0,2-1 0,-1-1 0,0 0 0,1 0 0,0 0 0,0 0 0,0 0 0,0 0 0,0 0 0,1 0 0,-1 0 0,1 0 0,-1 0 0,1 1 0,0-1 0,-1 1 0,1-1 0,0 1 0,0 0 0,0-1 0,0 1 0,3-1 0,14-5 0,2 1 0,-1 0 0,1 1 0,23-2 0,-15 2 0,-22 4 0,1 1 0,-1-1 0,1 1 0,-1 0 0,0 1 0,1 0 0,-1 0 0,0 0 0,1 1 0,-1 0 0,0 1 0,0 0 0,0 0 0,-1 0 0,9 6 0,-12-7 0,-1 0 0,1 0 0,-1 0 0,1 1 0,-1-1 0,0 1 0,0-1 0,0 1 0,0 0 0,-1 0 0,1 0 0,-1 0 0,0 0 0,1 0 0,-1 0 0,-1 0 0,1 0 0,0 0 0,-1 1 0,0-1 0,0 0 0,0 1 0,0-1 0,0 0 0,-1 0 0,1 1 0,-1-1 0,0 0 0,0 0 0,0 0 0,0 0 0,-1 0 0,1 0 0,-1 0 0,0 0 0,-2 3 0,-4 4 0,1-1 0,-1 0 0,0-1 0,-1 0 0,0 0 0,-20 13 0,-13 10 0,42-30 0,-1-1 0,1 0 0,-1 1 0,1-1 0,-1 0 0,1 1 0,-1-1 0,1 0 0,-1 1 0,1-1 0,0 1 0,-1-1 0,1 1 0,0-1 0,-1 1 0,1-1 0,0 1 0,-1 0 0,1-1 0,0 1 0,0-1 0,0 1 0,0 0 0,0-1 0,0 1 0,0-1 0,0 1 0,0 0 0,0-1 0,0 1 0,0-1 0,0 1 0,0 0 0,1 0 0,21 9 0,36-6 0,-56-4 0,25 0 0,1 1 0,0 1 0,35 7 0,-55-7-195,-1 0 0,1-1 0,0 0 0,0-1 0,-1 0 0,14-1 0,-1-3-6631</inkml:trace>
+  <inkml:trace contextRef="#ctx0" brushRef="#br0">51 108 24575,'-2'-3'0,"1"1"0,-1 0 0,1-1 0,0 1 0,-1-1 0,1 1 0,1-1 0,-1 0 0,0 1 0,1-1 0,-1 0 0,1 1 0,0-1 0,0 0 0,0 0 0,0 1 0,0-1 0,1 0 0,-1 0 0,1 1 0,0-4 0,0 4 0,0 0 0,-1-1 0,1 1 0,-1-1 0,1 1 0,-1 0 0,0-1 0,0 1 0,-1-1 0,1 1 0,0-1 0,-1 1 0,1 0 0,-1-1 0,0 1 0,0 0 0,-2-4 0,3 6 0,-1 0 0,1 0 0,-1 0 0,0 0 0,1 0 0,-1 0 0,0 0 0,1 1 0,-1-1 0,1 0 0,-1 0 0,0 1 0,1-1 0,-1 0 0,1 1 0,-1-1 0,1 1 0,-1-1 0,1 1 0,0-1 0,-1 1 0,1-1 0,-1 1 0,1-1 0,0 1 0,0-1 0,-1 1 0,1 0 0,0-1 0,0 1 0,-1 0 0,-10 21 0,9-16 0,0 0 0,0 0 0,1 1 0,0-1 0,0 0 0,0 1 0,1-1 0,0 1 0,0-1 0,0 0 0,1 1 0,0-1 0,0 1 0,1-1 0,0 0 0,0 0 0,0 0 0,1 0 0,0 0 0,0-1 0,0 1 0,1-1 0,0 0 0,8 9 0,-4-7 0,1 0 0,0 0 0,0-1 0,0 0 0,1-1 0,0 0 0,0-1 0,0 0 0,0 0 0,1-1 0,-1 0 0,1-1 0,0 0 0,11 0 0,-8-1 0,0-1 0,1 0 0,-1 0 0,0-1 0,0-1 0,14-4 0,-23 5 0,0-1 0,1 0 0,-1 0 0,0-1 0,-1 1 0,1-1 0,0 0 0,-1 0 0,1-1 0,-1 1 0,0-1 0,0 0 0,-1 0 0,1 0 0,-1-1 0,0 1 0,0-1 0,3-6 0,21-60 0,-25 66 0,-1 0 0,1-1 0,-1 1 0,-1 0 0,1 0 0,-1-1 0,0 1 0,0 0 0,0-1 0,-1 1 0,-2-10 0,3 15 0,0 0 0,0 0 0,0 0 0,0-1 0,0 1 0,0 0 0,0 0 0,0 0 0,0-1 0,-1 1 0,1 0 0,0 0 0,0 0 0,0 0 0,0-1 0,0 1 0,0 0 0,-1 0 0,1 0 0,0 0 0,0 0 0,0-1 0,-1 1 0,1 0 0,0 0 0,0 0 0,0 0 0,0 0 0,-1 0 0,1 0 0,0 0 0,0 0 0,-1 0 0,1 0 0,0 0 0,0 0 0,0 0 0,-1 0 0,1 0 0,0 0 0,0 0 0,0 0 0,-1 0 0,1 0 0,0 1 0,-9 9 0,-4 17 0,9-12 0,1 0 0,1 0 0,0 0 0,1 0 0,0 1 0,2-1 0,-1 0 0,2 0 0,5 23 0,2 51 0,-9-64 0,-1-20 0,0 1 0,1-1 0,0 1 0,0-1 0,0 1 0,1-1 0,0 1 0,0-1 0,0 1 0,3 5 0,5-5-1365</inkml:trace>
 </inkml:ink>
 </file>
 
@@ -3244,7 +4001,7 @@
           <inkml:channelProperty channel="F" name="resolution" value="0" units="1/dev"/>
         </inkml:channelProperties>
       </inkml:inkSource>
-      <inkml:timestamp xml:id="ts0" timeString="2026-03-26T06:34:29.144"/>
+      <inkml:timestamp xml:id="ts0" timeString="2026-03-26T06:34:15.341"/>
     </inkml:context>
     <inkml:brush xml:id="br0">
       <inkml:brushProperty name="width" value="0.1" units="cm"/>
@@ -3252,7 +4009,7 @@
       <inkml:brushProperty name="color" value="#FFC114"/>
     </inkml:brush>
   </inkml:definitions>
-  <inkml:trace contextRef="#ctx0" brushRef="#br0">765 83 24575,'-1'-2'0,"0"-1"0,0 1 0,0-1 0,0 1 0,0 0 0,0-1 0,-1 1 0,1 0 0,-1 0 0,1 0 0,-1 0 0,0 0 0,0 0 0,0 0 0,0 1 0,0-1 0,0 1 0,-1 0 0,1-1 0,0 1 0,-4-1 0,-52-20 0,34 16 0,-1 2 0,1 0 0,0 2 0,-1 1 0,0 1 0,1 1 0,-26 4 0,2 3 0,0 1 0,-72 25 0,107-30 0,0 1 0,0 0 0,0 1 0,1 0 0,0 1 0,0 0 0,1 1 0,0 1 0,0 0 0,1 0 0,0 0 0,1 2 0,0-1 0,1 1 0,0 0 0,0 1 0,1 0 0,1 0 0,0 1 0,0-1 0,2 1 0,-1 0 0,2 1 0,0-1 0,0 1 0,1-1 0,0 25 0,3-21 0,1 0 0,0 0 0,1 0 0,1 0 0,0-1 0,2 0 0,0 0 0,0 0 0,2 0 0,0-1 0,0 0 0,2-1 0,0 0 0,0 0 0,1-1 0,1-1 0,0 0 0,1 0 0,21 14 0,-8-5 0,-6-5 0,0 0 0,1-2 0,0 0 0,32 14 0,-34-20 0,0-1 0,0-1 0,1-1 0,-1-1 0,40 4 0,-32-5 0,-1-1 0,1-1 0,-1-2 0,1 0 0,0-2 0,-1-1 0,0-1 0,0-1 0,-1-1 0,1-2 0,41-20 0,-43 18 0,-2-2 0,30-21 0,-44 27 0,0 0 0,0 0 0,-1 0 0,0-1 0,-1 0 0,0 0 0,0-1 0,9-18 0,-8 10 0,0 0 0,-2-1 0,0 0 0,-1 0 0,0 0 0,0-26 0,-2 1 0,-7-71 0,4 103 0,-1 1 0,1 0 0,-1-1 0,-1 1 0,0 0 0,-1 0 0,0 1 0,0-1 0,-1 1 0,0-1 0,-1 2 0,-7-11 0,4 10 0,0 0 0,0 0 0,0 1 0,-1 1 0,-1 0 0,1 0 0,-1 1 0,0 0 0,-23-8 0,3 2-195,0 1 0,-1 1 0,0 2 0,0 1 0,-1 1 0,-33 0 0,45 6-6631</inkml:trace>
+  <inkml:trace contextRef="#ctx0" brushRef="#br0">710 100 24575,'-1'-2'0,"1"-1"0,-1 1 0,0 0 0,0-1 0,0 1 0,0 0 0,0-1 0,0 1 0,-1 0 0,1 0 0,-1 0 0,1 0 0,-1 0 0,0 1 0,0-1 0,0 0 0,0 1 0,0-1 0,-3-1 0,-49-25 0,44 23 0,-3 0 0,0 0 0,0 2 0,0-1 0,-1 2 0,1-1 0,-1 2 0,1 0 0,-1 1 0,0 0 0,1 1 0,-1 0 0,-23 6 0,7 0 0,-1 2 0,2 1 0,-1 2 0,-40 21 0,53-23 0,1 1 0,0 0 0,1 1 0,0 1 0,1 0 0,0 1 0,1 1 0,1 0 0,0 1 0,1 0 0,1 0 0,0 1 0,2 1 0,0 0 0,0 0 0,2 0 0,0 1 0,1 0 0,2 0 0,-3 24 0,5-31 0,1-1 0,0 1 0,1 0 0,0-1 0,1 1 0,0-1 0,1 1 0,0-1 0,1 0 0,0 0 0,0 0 0,2-1 0,10 18 0,-3-8 0,2-1 0,0 0 0,1-1 0,0-1 0,33 26 0,-30-29 0,2 0 0,0-2 0,0 0 0,1-2 0,0 0 0,38 10 0,5-3 0,76 10 0,-107-22 0,-1-2 0,1-1 0,0-2 0,-1-2 0,1 0 0,48-11 0,-61 8 0,0-1 0,0 0 0,-1-1 0,0-2 0,0 0 0,-1-1 0,0-1 0,-1 0 0,0-2 0,-1 0 0,19-19 0,-27 24 0,-1-1 0,0 0 0,-1 0 0,0-1 0,0 0 0,-1 0 0,-1-1 0,1 0 0,-2 0 0,1 0 0,-2 0 0,1-1 0,-2 1 0,0-1 0,0 0 0,-1 0 0,0 0 0,-1 0 0,0 1 0,-1-1 0,0 0 0,-1 0 0,-1 0 0,0 1 0,0-1 0,-1 1 0,0 0 0,-11-18 0,3 8 0,-1 1 0,-2 0 0,1 1 0,-2 1 0,-1 1 0,0 0 0,-1 1 0,0 1 0,-29-18 0,17 15 0,-1 1 0,-1 1 0,0 2 0,-1 2 0,-61-16 0,-58-6-1365,130 28-5461</inkml:trace>
 </inkml:ink>
 </file>
 
@@ -3272,7 +4029,7 @@
           <inkml:channelProperty channel="F" name="resolution" value="0" units="1/dev"/>
         </inkml:channelProperties>
       </inkml:inkSource>
-      <inkml:timestamp xml:id="ts0" timeString="2026-03-26T06:34:29.145"/>
+      <inkml:timestamp xml:id="ts0" timeString="2026-03-26T06:34:15.342"/>
     </inkml:context>
     <inkml:brush xml:id="br0">
       <inkml:brushProperty name="width" value="0.1" units="cm"/>
@@ -3280,7 +4037,7 @@
       <inkml:brushProperty name="color" value="#FFC114"/>
     </inkml:brush>
   </inkml:definitions>
-  <inkml:trace contextRef="#ctx0" brushRef="#br0">4 56 24575,'0'0'0,"0"0"0,-1 0 0,1 0 0,0 0 0,0 0 0,0 0 0,0 0 0,0 0 0,0 0 0,-1 0 0,1 0 0,0 0 0,0 0 0,0-1 0,0 1 0,0 0 0,0 0 0,0 0 0,-1 0 0,1 0 0,0 0 0,0 0 0,0 0 0,0 0 0,0 0 0,0-1 0,0 1 0,0 0 0,0 0 0,0 0 0,0 0 0,0 0 0,0 0 0,0-1 0,0 1 0,0 0 0,-1 0 0,1 0 0,0 0 0,1 0 0,-1 0 0,0-1 0,0 1 0,0 0 0,0 0 0,0 0 0,0 0 0,0 0 0,0 0 0,0-1 0,0 1 0,0 0 0,0 0 0,0 0 0,0 0 0,0 0 0,0 0 0,1 0 0,-1 0 0,0-1 0,10-11 0,15-8 0,-10 15 0,1 1 0,-1 1 0,1 0 0,0 2 0,-1-1 0,1 2 0,0 0 0,0 1 0,-1 1 0,1 0 0,0 1 0,-1 1 0,0 0 0,0 1 0,27 13 0,-40-17 0,0-1 0,0 1 0,-1 0 0,1 0 0,0 0 0,-1 0 0,1 0 0,-1 0 0,1 0 0,-1 0 0,0 1 0,1-1 0,-1 1 0,0-1 0,0 1 0,0-1 0,0 1 0,0-1 0,-1 1 0,1 0 0,0 0 0,-1-1 0,1 4 0,-1-2 0,0-1 0,-1 0 0,1 0 0,-1 1 0,0-1 0,0 0 0,0 0 0,0 0 0,0 0 0,0 0 0,0 0 0,-1-1 0,1 1 0,-1 0 0,1-1 0,-4 3 0,-5 4 0,0 0 0,-1-1 0,0 0 0,-1-1 0,-18 8 0,26-13 0,-1 1 0,1 0 0,0 0 0,-1 0 0,1 0 0,0 1 0,0 0 0,-4 4 0,7-7 0,1 0 0,0 1 0,0-1 0,-1 1 0,1-1 0,0 1 0,0-1 0,0 0 0,-1 1 0,1-1 0,0 1 0,0-1 0,0 1 0,0-1 0,0 1 0,0-1 0,0 1 0,0-1 0,0 0 0,0 1 0,0-1 0,1 1 0,-1-1 0,0 1 0,0-1 0,0 1 0,1-1 0,-1 0 0,0 1 0,1 0 0,24 15 0,0-7 0,45 11 0,-54-17 0,0 1 0,-1 0 0,1 1 0,-1 1 0,0 0 0,0 1 0,-1 1 0,19 13 0,-31-20 0,-1 0 0,0 0 0,1 0 0,-1 0 0,0 0 0,1 0 0,-1 1 0,0-1 0,0 0 0,0 1 0,0-1 0,0 1 0,0-1 0,-1 1 0,1-1 0,0 1 0,-1 0 0,1-1 0,-1 1 0,0 0 0,0-1 0,1 1 0,-1 0 0,0-1 0,0 1 0,-1 0 0,1 0 0,0-1 0,0 1 0,-1 0 0,1-1 0,-1 1 0,0-1 0,1 1 0,-1 0 0,0-1 0,0 0 0,0 1 0,0-1 0,0 1 0,0-1 0,0 0 0,-1 0 0,1 0 0,0 0 0,-1 0 0,-1 1 0,-4 3 0,-1 0 0,1-1 0,-1 0 0,0 0 0,0-1 0,0 0 0,0-1 0,-11 3 0,-41 6 0,38-5 0,0-2 0,0 0 0,-1-2 0,1 0 0,0-1 0,-1-1 0,-42-7 0,62 7-57,1 0 0,0-1 1,0 1-1,0-1 0,0 1 0,0-1 0,0 0 0,0 0 0,1 0 0,-1 0 0,0 0 1,0 0-1,1-1 0,-1 1 0,1-1 0,-1 1 0,1-1 0,-1 1 0,1-1 1,0 0-1,0 0 0,0 1 0,-1-4 0</inkml:trace>
+  <inkml:trace contextRef="#ctx0" brushRef="#br0">122 34 24575,'0'-1'0,"0"0"0,0-1 0,0 1 0,-1-1 0,1 1 0,0 0 0,-1-1 0,1 1 0,-1 0 0,1-1 0,-1 1 0,1 0 0,-1 0 0,0-1 0,0 1 0,0 0 0,0 0 0,0 0 0,0 0 0,0 0 0,0 0 0,0 1 0,0-1 0,0 0 0,-1 0 0,1 1 0,0-1 0,-1 1 0,1-1 0,0 1 0,-1 0 0,1-1 0,0 1 0,-1 0 0,1 0 0,-1 0 0,-1 0 0,-1 0 0,0 0 0,1 1 0,-1-1 0,1 1 0,-1-1 0,0 1 0,1 0 0,-1 1 0,1-1 0,0 1 0,0-1 0,-1 1 0,-3 3 0,4-2 0,0 0 0,0 1 0,0-1 0,1 1 0,-1 0 0,1 0 0,0 0 0,0 0 0,0 0 0,0 0 0,1 1 0,0-1 0,0 0 0,0 1 0,0-1 0,1 6 0,0-8 0,0 0 0,0 0 0,0-1 0,0 1 0,0 0 0,1-1 0,-1 1 0,1 0 0,0-1 0,-1 1 0,1-1 0,0 1 0,0-1 0,0 1 0,0-1 0,0 0 0,0 1 0,0-1 0,0 0 0,1 0 0,-1 0 0,0 0 0,1 0 0,-1 0 0,1 0 0,-1 0 0,1-1 0,-1 1 0,1-1 0,0 1 0,-1-1 0,1 1 0,0-1 0,-1 0 0,1 0 0,0 0 0,0 0 0,-1 0 0,1 0 0,0 0 0,-1-1 0,1 1 0,0-1 0,2 0 0,8-2 0,1 0 0,0-1 0,16-8 0,-27 12 0,1-1 0,0 0 0,-1 0 0,1-1 0,-1 1 0,0-1 0,1 1 0,-1-1 0,0 0 0,0 0 0,0 1 0,0-2 0,0 1 0,0 0 0,-1 0 0,1 0 0,-1-1 0,1 1 0,-1-1 0,0 1 0,1-6 0,-2 7 0,0 1 0,0-1 0,0 0 0,0 1 0,0-1 0,0 0 0,0 1 0,0-1 0,0 0 0,-1 1 0,1-1 0,0 1 0,-1-1 0,1 0 0,0 1 0,-1-1 0,1 1 0,0-1 0,-1 1 0,1-1 0,-1 1 0,1-1 0,-1 1 0,0 0 0,1-1 0,-1 1 0,1 0 0,-1-1 0,0 1 0,0-1 0,-27 2 0,24 0 0,-1 1 0,1-1 0,-1 1 0,1-1 0,-1 1 0,1 1 0,0-1 0,0 1 0,-5 3 0,-16 19-1365</inkml:trace>
 </inkml:ink>
 </file>
 
@@ -3300,7 +4057,7 @@
           <inkml:channelProperty channel="F" name="resolution" value="0" units="1/dev"/>
         </inkml:channelProperties>
       </inkml:inkSource>
-      <inkml:timestamp xml:id="ts0" timeString="2026-03-26T06:34:29.146"/>
+      <inkml:timestamp xml:id="ts0" timeString="2026-03-26T06:34:15.343"/>
     </inkml:context>
     <inkml:brush xml:id="br0">
       <inkml:brushProperty name="width" value="0.1" units="cm"/>
@@ -3308,7 +4065,7 @@
       <inkml:brushProperty name="color" value="#FFC114"/>
     </inkml:brush>
   </inkml:definitions>
-  <inkml:trace contextRef="#ctx0" brushRef="#br0">689 99 24575,'-1'-1'0,"1"-1"0,-1 0 0,0 1 0,0-1 0,0 1 0,0-1 0,0 1 0,0-1 0,0 1 0,-1 0 0,1 0 0,0 0 0,-1 0 0,1-1 0,-1 2 0,1-1 0,-4-1 0,-29-14 0,8 8 0,0 0 0,0 2 0,0 2 0,0 0 0,-1 1 0,0 2 0,0 1 0,1 1 0,-1 1 0,-34 8 0,40-6 0,1 1 0,-1 0 0,1 2 0,-32 15 0,42-16 0,1 0 0,0 1 0,0-1 0,0 2 0,1-1 0,0 1 0,0 0 0,1 1 0,0 0 0,-9 16 0,5-9 0,2 1 0,0 1 0,1 0 0,1 0 0,1 0 0,0 1 0,2 0 0,0 0 0,1 0 0,1 1 0,0-1 0,2 0 0,0 1 0,1-1 0,1 1 0,1-1 0,1 0 0,1 0 0,9 27 0,0-13 0,2 0 0,31 50 0,-38-71 0,1 1 0,0-1 0,1-1 0,0 0 0,1 0 0,0-1 0,1-1 0,22 14 0,-11-11 0,0-1 0,0-1 0,1-2 0,1 0 0,-1-2 0,51 7 0,-28-9 0,0-2 0,91-7 0,-125 3 0,0-1 0,0-1 0,0 0 0,0-1 0,-1 0 0,0-1 0,0 0 0,-1-1 0,1-1 0,-1 0 0,-1 0 0,0-1 0,0-1 0,-1 0 0,10-11 0,2-6 0,-1-1 0,-1 0 0,-1-2 0,-2 0 0,14-33 0,-25 44 0,-1 0 0,-1 0 0,-1 0 0,-1 0 0,-1-1 0,0 1 0,-1-1 0,-6-37 0,4 45 0,-1-1 0,-1 1 0,0 0 0,-1 0 0,0 1 0,-1-1 0,0 1 0,0 0 0,-1 1 0,-1-1 0,0 1 0,0 1 0,-15-13 0,-1 0 0,-1 0 0,-2 2 0,-56-33 0,44 33-341,-1 1 0,-1 2-1,-52-15 1,76 28-6485</inkml:trace>
+  <inkml:trace contextRef="#ctx0" brushRef="#br0">182 20 24575,'0'-1'0,"0"0"0,-1 0 0,1 0 0,-1 0 0,1 0 0,-1 0 0,1 0 0,-1 0 0,0 0 0,1 0 0,-1 1 0,0-1 0,0 0 0,0 0 0,0 1 0,0-1 0,1 0 0,-1 1 0,0-1 0,0 1 0,0-1 0,-1 1 0,1 0 0,0-1 0,0 1 0,0 0 0,0 0 0,0 0 0,0 0 0,0 0 0,0 0 0,-1 0 0,1 0 0,-1 0 0,-40 5 0,35-3 0,0 1 0,1-1 0,-1 1 0,1 1 0,-8 4 0,12-7 0,1 0 0,-1 0 0,0 0 0,1 0 0,-1 1 0,1-1 0,-1 1 0,1-1 0,0 1 0,0-1 0,-1 1 0,1 0 0,0 0 0,0 0 0,1-1 0,-1 1 0,0 0 0,1 0 0,-1 0 0,1 0 0,0 0 0,-1 3 0,1-4 0,0 0 0,1-1 0,-1 1 0,0 0 0,0-1 0,0 1 0,1 0 0,-1-1 0,0 1 0,1-1 0,-1 1 0,0 0 0,1-1 0,-1 1 0,1-1 0,-1 1 0,1-1 0,-1 1 0,1-1 0,-1 0 0,1 1 0,-1-1 0,1 1 0,0-1 0,-1 0 0,1 0 0,0 1 0,-1-1 0,1 0 0,1 0 0,27-3 0,-26 2 0,1 0 0,-1 0 0,0 0 0,0 0 0,0-1 0,0 1 0,0-1 0,0 0 0,-1 0 0,1 0 0,-1 0 0,1 0 0,-1 0 0,4-5 0,-6 7 0,0 0 0,0 0 0,0 0 0,0-1 0,0 1 0,0 0 0,0 0 0,0 0 0,0 0 0,0 0 0,0-1 0,0 1 0,0 0 0,0 0 0,0 0 0,0 0 0,0 0 0,0-1 0,0 1 0,0 0 0,0 0 0,-1 0 0,1 0 0,0 0 0,0 0 0,0 0 0,0-1 0,0 1 0,0 0 0,0 0 0,0 0 0,-1 0 0,1 0 0,0 0 0,0 0 0,0 0 0,0 0 0,0 0 0,-1 0 0,1 0 0,0 0 0,0 0 0,0-1 0,0 1 0,0 0 0,-1 0 0,1 1 0,0-1 0,0 0 0,0 0 0,0 0 0,-1 0 0,-12 3 0,-10 9 0,13 1 0,13-5 0,-1-7 0,0-1 0,0 1 0,0-1 0,0 1 0,0-1 0,0 0 0,0 0 0,0 0 0,0 0 0,0 0 0,0-1 0,2 0 0,-3 1 0,1 0 0,-1 0 0,0-1 0,1 1 0,-1 0 0,0-1 0,0 1 0,1-1 0,-1 0 0,0 1 0,0-1 0,0 0 0,0 0 0,0 1 0,0-1 0,0 0 0,1-2 0,-6-6 0,-16-1 0,14 8-114,0 1 1,0 0-1,-1 0 0,1 0 0,0 1 1,0 0-1,0 0 0,-1 0 0,1 1 1,0 0-1,-12 4 0,0 0-6712</inkml:trace>
 </inkml:ink>
 </file>
 
@@ -3328,7 +4085,7 @@
           <inkml:channelProperty channel="F" name="resolution" value="0" units="1/dev"/>
         </inkml:channelProperties>
       </inkml:inkSource>
-      <inkml:timestamp xml:id="ts0" timeString="2026-03-26T06:34:29.147"/>
+      <inkml:timestamp xml:id="ts0" timeString="2026-03-26T06:34:15.344"/>
     </inkml:context>
     <inkml:brush xml:id="br0">
       <inkml:brushProperty name="width" value="0.1" units="cm"/>
@@ -3336,7 +4093,7 @@
       <inkml:brushProperty name="color" value="#FFC114"/>
     </inkml:brush>
   </inkml:definitions>
-  <inkml:trace contextRef="#ctx0" brushRef="#br0">51 108 24575,'-2'-3'0,"1"1"0,-1 0 0,1-1 0,0 1 0,-1-1 0,1 1 0,1-1 0,-1 0 0,0 1 0,1-1 0,-1 0 0,1 1 0,0-1 0,0 0 0,0 0 0,0 1 0,0-1 0,1 0 0,-1 0 0,1 1 0,0-4 0,0 4 0,0 0 0,-1-1 0,1 1 0,-1-1 0,1 1 0,-1 0 0,0-1 0,0 1 0,-1-1 0,1 1 0,0-1 0,-1 1 0,1 0 0,-1-1 0,0 1 0,0 0 0,-2-4 0,3 6 0,-1 0 0,1 0 0,-1 0 0,0 0 0,1 0 0,-1 0 0,0 0 0,1 1 0,-1-1 0,1 0 0,-1 0 0,0 1 0,1-1 0,-1 0 0,1 1 0,-1-1 0,1 1 0,-1-1 0,1 1 0,0-1 0,-1 1 0,1-1 0,-1 1 0,1-1 0,0 1 0,0-1 0,-1 1 0,1 0 0,0-1 0,0 1 0,-1 0 0,-10 21 0,9-16 0,0 0 0,0 0 0,1 1 0,0-1 0,0 0 0,0 1 0,1-1 0,0 1 0,0-1 0,0 0 0,1 1 0,0-1 0,0 1 0,1-1 0,0 0 0,0 0 0,0 0 0,1 0 0,0 0 0,0-1 0,0 1 0,1-1 0,0 0 0,8 9 0,-4-7 0,1 0 0,0 0 0,0-1 0,0 0 0,1-1 0,0 0 0,0-1 0,0 0 0,0 0 0,1-1 0,-1 0 0,1-1 0,0 0 0,11 0 0,-8-1 0,0-1 0,1 0 0,-1 0 0,0-1 0,0-1 0,14-4 0,-23 5 0,0-1 0,1 0 0,-1 0 0,0-1 0,-1 1 0,1-1 0,0 0 0,-1 0 0,1-1 0,-1 1 0,0-1 0,0 0 0,-1 0 0,1 0 0,-1-1 0,0 1 0,0-1 0,3-6 0,21-60 0,-25 66 0,-1 0 0,1-1 0,-1 1 0,-1 0 0,1 0 0,-1-1 0,0 1 0,0 0 0,0-1 0,-1 1 0,-2-10 0,3 15 0,0 0 0,0 0 0,0 0 0,0-1 0,0 1 0,0 0 0,0 0 0,0 0 0,0-1 0,-1 1 0,1 0 0,0 0 0,0 0 0,0 0 0,0-1 0,0 1 0,0 0 0,-1 0 0,1 0 0,0 0 0,0 0 0,0-1 0,-1 1 0,1 0 0,0 0 0,0 0 0,0 0 0,0 0 0,-1 0 0,1 0 0,0 0 0,0 0 0,-1 0 0,1 0 0,0 0 0,0 0 0,0 0 0,-1 0 0,1 0 0,0 0 0,0 0 0,0 0 0,-1 0 0,1 0 0,0 1 0,-9 9 0,-4 17 0,9-12 0,1 0 0,1 0 0,0 0 0,1 0 0,0 1 0,2-1 0,-1 0 0,2 0 0,5 23 0,2 51 0,-9-64 0,-1-20 0,0 1 0,1-1 0,0 1 0,0-1 0,0 1 0,1-1 0,0 1 0,0-1 0,0 1 0,3 5 0,5-5-1365</inkml:trace>
+  <inkml:trace contextRef="#ctx0" brushRef="#br0">8 62 24575,'0'0'0,"0"0"0,0 0 0,-1 1 0,1-1 0,0 0 0,0 0 0,0 0 0,0 0 0,-1 0 0,1 0 0,0 0 0,0 0 0,0 0 0,0 0 0,-1 0 0,1 0 0,0 0 0,0 0 0,0 0 0,-1 0 0,1 0 0,0 0 0,0 0 0,0-1 0,0 1 0,-1 0 0,1 0 0,0 0 0,0 0 0,0 0 0,0 0 0,0 0 0,0-1 0,-1 1 0,1 0 0,0 0 0,0 0 0,0 0 0,0 0 0,0-1 0,0 1 0,0 0 0,0 0 0,0 0 0,0-1 0,0 1 0,0 0 0,0 0 0,0 0 0,0 0 0,0-1 0,0 1 0,0 0 0,0 0 0,-1 1 0,1 0 0,0 0 0,0 0 0,-1 0 0,1 1 0,0-1 0,0 0 0,0 0 0,0 0 0,0 0 0,1 1 0,-1-1 0,0 0 0,1 0 0,-1 0 0,0 0 0,1 0 0,-1 0 0,1 1 0,1 0 0,13 16 0,0 0 0,2-1 0,0-1 0,1-1 0,0 0 0,31 18 0,-20-13 0,3 2 0,0-2 0,1-1 0,1-1 0,1-2 0,40 12 0,-15-11 0,0-3 0,2-2 0,77 4 0,-101-14 0,-1-2 0,1-2 0,0-1 0,-1-2 0,1-2 0,41-12 0,25-17 0,-2-4 0,176-98 0,-199 100 0,-56 29 0,-1-1 0,0-1 0,-1-1 0,0-1 0,-1-1 0,36-32 0,-46 30-1365</inkml:trace>
 </inkml:ink>
 </file>
 
@@ -3422,7 +4179,7 @@
           <a:p>
             <a:fld id="{CB233BD1-3BA8-448D-9D08-7846095EA517}" type="datetimeFigureOut">
               <a:rPr lang="en-US" smtClean="0"/>
-              <a:t>4/23/2026</a:t>
+              <a:t>5/21/2026</a:t>
             </a:fld>
             <a:endParaRPr lang="en-US"/>
           </a:p>
@@ -3836,7 +4593,7 @@
           <a:p>
             <a:fld id="{6383FAE1-13DE-4511-8C1B-C8AFB720664C}" type="datetimeFigureOut">
               <a:rPr lang="en-US" smtClean="0"/>
-              <a:t>4/23/2026</a:t>
+              <a:t>5/21/2026</a:t>
             </a:fld>
             <a:endParaRPr lang="en-US"/>
           </a:p>
@@ -4034,7 +4791,7 @@
           <a:p>
             <a:fld id="{6383FAE1-13DE-4511-8C1B-C8AFB720664C}" type="datetimeFigureOut">
               <a:rPr lang="en-US" smtClean="0"/>
-              <a:t>4/23/2026</a:t>
+              <a:t>5/21/2026</a:t>
             </a:fld>
             <a:endParaRPr lang="en-US"/>
           </a:p>
@@ -4242,7 +4999,7 @@
           <a:p>
             <a:fld id="{6383FAE1-13DE-4511-8C1B-C8AFB720664C}" type="datetimeFigureOut">
               <a:rPr lang="en-US" smtClean="0"/>
-              <a:t>4/23/2026</a:t>
+              <a:t>5/21/2026</a:t>
             </a:fld>
             <a:endParaRPr lang="en-US"/>
           </a:p>
@@ -4440,7 +5197,7 @@
           <a:p>
             <a:fld id="{6383FAE1-13DE-4511-8C1B-C8AFB720664C}" type="datetimeFigureOut">
               <a:rPr lang="en-US" smtClean="0"/>
-              <a:t>4/23/2026</a:t>
+              <a:t>5/21/2026</a:t>
             </a:fld>
             <a:endParaRPr lang="en-US"/>
           </a:p>
@@ -4715,7 +5472,7 @@
           <a:p>
             <a:fld id="{6383FAE1-13DE-4511-8C1B-C8AFB720664C}" type="datetimeFigureOut">
               <a:rPr lang="en-US" smtClean="0"/>
-              <a:t>4/23/2026</a:t>
+              <a:t>5/21/2026</a:t>
             </a:fld>
             <a:endParaRPr lang="en-US"/>
           </a:p>
@@ -4980,7 +5737,7 @@
           <a:p>
             <a:fld id="{6383FAE1-13DE-4511-8C1B-C8AFB720664C}" type="datetimeFigureOut">
               <a:rPr lang="en-US" smtClean="0"/>
-              <a:t>4/23/2026</a:t>
+              <a:t>5/21/2026</a:t>
             </a:fld>
             <a:endParaRPr lang="en-US"/>
           </a:p>
@@ -5392,7 +6149,7 @@
           <a:p>
             <a:fld id="{6383FAE1-13DE-4511-8C1B-C8AFB720664C}" type="datetimeFigureOut">
               <a:rPr lang="en-US" smtClean="0"/>
-              <a:t>4/23/2026</a:t>
+              <a:t>5/21/2026</a:t>
             </a:fld>
             <a:endParaRPr lang="en-US"/>
           </a:p>
@@ -5533,7 +6290,7 @@
           <a:p>
             <a:fld id="{6383FAE1-13DE-4511-8C1B-C8AFB720664C}" type="datetimeFigureOut">
               <a:rPr lang="en-US" smtClean="0"/>
-              <a:t>4/23/2026</a:t>
+              <a:t>5/21/2026</a:t>
             </a:fld>
             <a:endParaRPr lang="en-US"/>
           </a:p>
@@ -5646,7 +6403,7 @@
           <a:p>
             <a:fld id="{6383FAE1-13DE-4511-8C1B-C8AFB720664C}" type="datetimeFigureOut">
               <a:rPr lang="en-US" smtClean="0"/>
-              <a:t>4/23/2026</a:t>
+              <a:t>5/21/2026</a:t>
             </a:fld>
             <a:endParaRPr lang="en-US"/>
           </a:p>
@@ -5957,7 +6714,7 @@
           <a:p>
             <a:fld id="{6383FAE1-13DE-4511-8C1B-C8AFB720664C}" type="datetimeFigureOut">
               <a:rPr lang="en-US" smtClean="0"/>
-              <a:t>4/23/2026</a:t>
+              <a:t>5/21/2026</a:t>
             </a:fld>
             <a:endParaRPr lang="en-US"/>
           </a:p>
@@ -6248,7 +7005,7 @@
           <a:p>
             <a:fld id="{6383FAE1-13DE-4511-8C1B-C8AFB720664C}" type="datetimeFigureOut">
               <a:rPr lang="en-US" smtClean="0"/>
-              <a:t>4/23/2026</a:t>
+              <a:t>5/21/2026</a:t>
             </a:fld>
             <a:endParaRPr lang="en-US"/>
           </a:p>
@@ -6492,7 +7249,7 @@
           <a:p>
             <a:fld id="{6383FAE1-13DE-4511-8C1B-C8AFB720664C}" type="datetimeFigureOut">
               <a:rPr lang="en-US" smtClean="0"/>
-              <a:t>4/23/2026</a:t>
+              <a:t>5/21/2026</a:t>
             </a:fld>
             <a:endParaRPr lang="en-US"/>
           </a:p>
@@ -7066,7 +7823,7 @@
         <p:spPr>
           <a:xfrm>
             <a:off x="477520" y="1003776"/>
-            <a:ext cx="10292080" cy="1077218"/>
+            <a:ext cx="10292080" cy="3046988"/>
           </a:xfrm>
           <a:prstGeom prst="rect">
             <a:avLst/>
@@ -7109,6 +7866,59 @@
               </a:rPr>
               <a:t>And Compare With Fine Tuning</a:t>
             </a:r>
+          </a:p>
+          <a:p>
+            <a:pPr algn="ctr">
+              <a:buNone/>
+            </a:pPr>
+            <a:endParaRPr lang="en-US" sz="3200" b="1" dirty="0">
+              <a:solidFill>
+                <a:schemeClr val="accent6">
+                  <a:lumMod val="60000"/>
+                  <a:lumOff val="40000"/>
+                </a:schemeClr>
+              </a:solidFill>
+            </a:endParaRPr>
+          </a:p>
+          <a:p>
+            <a:pPr algn="ctr">
+              <a:buNone/>
+            </a:pPr>
+            <a:endParaRPr lang="en-US" sz="3200" b="1" dirty="0">
+              <a:solidFill>
+                <a:schemeClr val="accent6">
+                  <a:lumMod val="60000"/>
+                  <a:lumOff val="40000"/>
+                </a:schemeClr>
+              </a:solidFill>
+            </a:endParaRPr>
+          </a:p>
+          <a:p>
+            <a:pPr algn="ctr"/>
+            <a:r>
+              <a:rPr lang="en-US" sz="3200" b="1" dirty="0">
+                <a:solidFill>
+                  <a:schemeClr val="accent6">
+                    <a:lumMod val="60000"/>
+                    <a:lumOff val="40000"/>
+                  </a:schemeClr>
+                </a:solidFill>
+              </a:rPr>
+              <a:t>RAG (Retrieval-Augmented Generation)</a:t>
+            </a:r>
+          </a:p>
+          <a:p>
+            <a:pPr algn="ctr">
+              <a:buNone/>
+            </a:pPr>
+            <a:endParaRPr lang="en-US" sz="3200" b="1" dirty="0">
+              <a:solidFill>
+                <a:schemeClr val="accent6">
+                  <a:lumMod val="60000"/>
+                  <a:lumOff val="40000"/>
+                </a:schemeClr>
+              </a:solidFill>
+            </a:endParaRPr>
           </a:p>
         </p:txBody>
       </p:sp>
@@ -7154,6 +7964,1381 @@
             <a:extLst>
               <a:ext uri="{FF2B5EF4-FFF2-40B4-BE49-F238E27FC236}">
                 <a16:creationId xmlns:a16="http://schemas.microsoft.com/office/drawing/2014/main" id="{46DDDEA2-3EA5-BBB1-82DB-8787366C81FB}"/>
+              </a:ext>
+            </a:extLst>
+          </p:cNvPr>
+          <p:cNvSpPr txBox="1"/>
+          <p:nvPr/>
+        </p:nvSpPr>
+        <p:spPr>
+          <a:xfrm>
+            <a:off x="148336" y="199104"/>
+            <a:ext cx="10292080" cy="3046988"/>
+          </a:xfrm>
+          <a:prstGeom prst="rect">
+            <a:avLst/>
+          </a:prstGeom>
+          <a:noFill/>
+        </p:spPr>
+        <p:txBody>
+          <a:bodyPr wrap="square">
+            <a:spAutoFit/>
+          </a:bodyPr>
+          <a:lstStyle/>
+          <a:p>
+            <a:r>
+              <a:rPr lang="en-US" sz="2400" b="1" dirty="0">
+                <a:solidFill>
+                  <a:schemeClr val="accent6">
+                    <a:lumMod val="60000"/>
+                    <a:lumOff val="40000"/>
+                  </a:schemeClr>
+                </a:solidFill>
+              </a:rPr>
+              <a:t>Problem without RAG</a:t>
+            </a:r>
+          </a:p>
+          <a:p>
+            <a:endParaRPr lang="en-US" sz="2400" b="1" dirty="0">
+              <a:solidFill>
+                <a:schemeClr val="accent6">
+                  <a:lumMod val="60000"/>
+                  <a:lumOff val="40000"/>
+                </a:schemeClr>
+              </a:solidFill>
+            </a:endParaRPr>
+          </a:p>
+          <a:p>
+            <a:r>
+              <a:rPr lang="en-US" sz="2400" dirty="0">
+                <a:solidFill>
+                  <a:schemeClr val="accent6">
+                    <a:lumMod val="60000"/>
+                    <a:lumOff val="40000"/>
+                  </a:schemeClr>
+                </a:solidFill>
+              </a:rPr>
+              <a:t>Suppose User asks:</a:t>
+            </a:r>
+          </a:p>
+          <a:p>
+            <a:r>
+              <a:rPr lang="en-US" sz="2400" dirty="0">
+                <a:solidFill>
+                  <a:schemeClr val="accent6">
+                    <a:lumMod val="60000"/>
+                    <a:lumOff val="40000"/>
+                  </a:schemeClr>
+                </a:solidFill>
+              </a:rPr>
+              <a:t>“What is the notice period of employee in a company XYZ ?”</a:t>
+            </a:r>
+          </a:p>
+          <a:p>
+            <a:endParaRPr lang="en-US" sz="2400" dirty="0">
+              <a:solidFill>
+                <a:schemeClr val="accent6">
+                  <a:lumMod val="60000"/>
+                  <a:lumOff val="40000"/>
+                </a:schemeClr>
+              </a:solidFill>
+            </a:endParaRPr>
+          </a:p>
+          <a:p>
+            <a:r>
+              <a:rPr lang="en-US" sz="2400" dirty="0">
+                <a:solidFill>
+                  <a:schemeClr val="accent6">
+                    <a:lumMod val="60000"/>
+                    <a:lumOff val="40000"/>
+                  </a:schemeClr>
+                </a:solidFill>
+              </a:rPr>
+              <a:t>Regular LLM:</a:t>
+            </a:r>
+          </a:p>
+          <a:p>
+            <a:pPr marL="342900" indent="-342900">
+              <a:buFont typeface="Arial" panose="020B0604020202020204" pitchFamily="34" charset="0"/>
+              <a:buChar char="•"/>
+            </a:pPr>
+            <a:r>
+              <a:rPr lang="en-US" sz="2400" dirty="0">
+                <a:solidFill>
+                  <a:schemeClr val="accent6">
+                    <a:lumMod val="60000"/>
+                    <a:lumOff val="40000"/>
+                  </a:schemeClr>
+                </a:solidFill>
+              </a:rPr>
+              <a:t>I do not know the answer</a:t>
+            </a:r>
+          </a:p>
+          <a:p>
+            <a:pPr marL="342900" indent="-342900">
+              <a:buFont typeface="Arial" panose="020B0604020202020204" pitchFamily="34" charset="0"/>
+              <a:buChar char="•"/>
+            </a:pPr>
+            <a:r>
+              <a:rPr lang="en-US" sz="2400" dirty="0">
+                <a:solidFill>
+                  <a:schemeClr val="accent6">
+                    <a:lumMod val="60000"/>
+                    <a:lumOff val="40000"/>
+                  </a:schemeClr>
+                </a:solidFill>
+              </a:rPr>
+              <a:t>The notice period is 90 days (Hallucination)</a:t>
+            </a:r>
+          </a:p>
+        </p:txBody>
+      </p:sp>
+      <p:sp>
+        <p:nvSpPr>
+          <p:cNvPr id="2" name="Oval 1">
+            <a:extLst>
+              <a:ext uri="{FF2B5EF4-FFF2-40B4-BE49-F238E27FC236}">
+                <a16:creationId xmlns:a16="http://schemas.microsoft.com/office/drawing/2014/main" id="{34E06E64-2BAD-CB49-F418-EEC904645F4D}"/>
+              </a:ext>
+            </a:extLst>
+          </p:cNvPr>
+          <p:cNvSpPr/>
+          <p:nvPr/>
+        </p:nvSpPr>
+        <p:spPr>
+          <a:xfrm>
+            <a:off x="9455904" y="2093976"/>
+            <a:ext cx="1306584" cy="1124712"/>
+          </a:xfrm>
+          <a:prstGeom prst="ellipse">
+            <a:avLst/>
+          </a:prstGeom>
+        </p:spPr>
+        <p:style>
+          <a:lnRef idx="2">
+            <a:schemeClr val="accent1">
+              <a:shade val="15000"/>
+            </a:schemeClr>
+          </a:lnRef>
+          <a:fillRef idx="1">
+            <a:schemeClr val="accent1"/>
+          </a:fillRef>
+          <a:effectRef idx="0">
+            <a:schemeClr val="accent1"/>
+          </a:effectRef>
+          <a:fontRef idx="minor">
+            <a:schemeClr val="lt1"/>
+          </a:fontRef>
+        </p:style>
+        <p:txBody>
+          <a:bodyPr rtlCol="0" anchor="ctr"/>
+          <a:lstStyle/>
+          <a:p>
+            <a:pPr algn="ctr"/>
+            <a:r>
+              <a:rPr lang="en-US" dirty="0"/>
+              <a:t>User</a:t>
+            </a:r>
+          </a:p>
+        </p:txBody>
+      </p:sp>
+      <p:sp>
+        <p:nvSpPr>
+          <p:cNvPr id="3" name="Oval 2">
+            <a:extLst>
+              <a:ext uri="{FF2B5EF4-FFF2-40B4-BE49-F238E27FC236}">
+                <a16:creationId xmlns:a16="http://schemas.microsoft.com/office/drawing/2014/main" id="{29011818-563F-D9FB-E9F3-4F652DCB583E}"/>
+              </a:ext>
+            </a:extLst>
+          </p:cNvPr>
+          <p:cNvSpPr/>
+          <p:nvPr/>
+        </p:nvSpPr>
+        <p:spPr>
+          <a:xfrm>
+            <a:off x="8912352" y="4386072"/>
+            <a:ext cx="2316480" cy="969264"/>
+          </a:xfrm>
+          <a:prstGeom prst="ellipse">
+            <a:avLst/>
+          </a:prstGeom>
+        </p:spPr>
+        <p:style>
+          <a:lnRef idx="2">
+            <a:schemeClr val="accent1">
+              <a:shade val="15000"/>
+            </a:schemeClr>
+          </a:lnRef>
+          <a:fillRef idx="1">
+            <a:schemeClr val="accent1"/>
+          </a:fillRef>
+          <a:effectRef idx="0">
+            <a:schemeClr val="accent1"/>
+          </a:effectRef>
+          <a:fontRef idx="minor">
+            <a:schemeClr val="lt1"/>
+          </a:fontRef>
+        </p:style>
+        <p:txBody>
+          <a:bodyPr rtlCol="0" anchor="ctr"/>
+          <a:lstStyle/>
+          <a:p>
+            <a:pPr algn="ctr"/>
+            <a:r>
+              <a:rPr lang="en-US" dirty="0"/>
+              <a:t>LLM</a:t>
+            </a:r>
+          </a:p>
+          <a:p>
+            <a:pPr algn="ctr"/>
+            <a:r>
+              <a:rPr lang="en-US" dirty="0"/>
+              <a:t>(ChatGPT, </a:t>
+            </a:r>
+            <a:r>
+              <a:rPr lang="en-US" dirty="0" err="1"/>
+              <a:t>etc</a:t>
+            </a:r>
+            <a:r>
+              <a:rPr lang="en-US" dirty="0"/>
+              <a:t>)</a:t>
+            </a:r>
+          </a:p>
+        </p:txBody>
+      </p:sp>
+      <p:grpSp>
+        <p:nvGrpSpPr>
+          <p:cNvPr id="11" name="Group 10">
+            <a:extLst>
+              <a:ext uri="{FF2B5EF4-FFF2-40B4-BE49-F238E27FC236}">
+                <a16:creationId xmlns:a16="http://schemas.microsoft.com/office/drawing/2014/main" id="{577286D2-5F53-6A13-D382-C24F6B7D603D}"/>
+              </a:ext>
+            </a:extLst>
+          </p:cNvPr>
+          <p:cNvGrpSpPr/>
+          <p:nvPr/>
+        </p:nvGrpSpPr>
+        <p:grpSpPr>
+          <a:xfrm>
+            <a:off x="9455904" y="3291696"/>
+            <a:ext cx="337680" cy="907560"/>
+            <a:chOff x="9455904" y="3291696"/>
+            <a:chExt cx="337680" cy="907560"/>
+          </a:xfrm>
+        </p:grpSpPr>
+        <mc:AlternateContent xmlns:mc="http://schemas.openxmlformats.org/markup-compatibility/2006" xmlns:p14="http://schemas.microsoft.com/office/powerpoint/2010/main">
+          <mc:Choice Requires="p14">
+            <p:contentPart p14:bwMode="auto" r:id="rId2">
+              <p14:nvContentPartPr>
+                <p14:cNvPr id="8" name="Ink 7">
+                  <a:extLst>
+                    <a:ext uri="{FF2B5EF4-FFF2-40B4-BE49-F238E27FC236}">
+                      <a16:creationId xmlns:a16="http://schemas.microsoft.com/office/drawing/2014/main" id="{88426E6E-3230-67F4-43DE-62D9D2CB0666}"/>
+                    </a:ext>
+                  </a:extLst>
+                </p14:cNvPr>
+                <p14:cNvContentPartPr/>
+                <p14:nvPr/>
+              </p14:nvContentPartPr>
+              <p14:xfrm>
+                <a:off x="9455904" y="3291696"/>
+                <a:ext cx="234720" cy="851760"/>
+              </p14:xfrm>
+            </p:contentPart>
+          </mc:Choice>
+          <mc:Fallback xmlns="">
+            <p:pic>
+              <p:nvPicPr>
+                <p:cNvPr id="8" name="Ink 7">
+                  <a:extLst>
+                    <a:ext uri="{FF2B5EF4-FFF2-40B4-BE49-F238E27FC236}">
+                      <a16:creationId xmlns:a16="http://schemas.microsoft.com/office/drawing/2014/main" id="{88426E6E-3230-67F4-43DE-62D9D2CB0666}"/>
+                    </a:ext>
+                  </a:extLst>
+                </p:cNvPr>
+                <p:cNvPicPr/>
+                <p:nvPr/>
+              </p:nvPicPr>
+              <p:blipFill>
+                <a:blip r:embed="rId3"/>
+                <a:stretch>
+                  <a:fillRect/>
+                </a:stretch>
+              </p:blipFill>
+              <p:spPr>
+                <a:xfrm>
+                  <a:off x="9437904" y="3273696"/>
+                  <a:ext cx="270360" cy="887400"/>
+                </a:xfrm>
+                <a:prstGeom prst="rect">
+                  <a:avLst/>
+                </a:prstGeom>
+              </p:spPr>
+            </p:pic>
+          </mc:Fallback>
+        </mc:AlternateContent>
+        <mc:AlternateContent xmlns:mc="http://schemas.openxmlformats.org/markup-compatibility/2006" xmlns:p14="http://schemas.microsoft.com/office/powerpoint/2010/main">
+          <mc:Choice Requires="p14">
+            <p:contentPart p14:bwMode="auto" r:id="rId4">
+              <p14:nvContentPartPr>
+                <p14:cNvPr id="10" name="Ink 9">
+                  <a:extLst>
+                    <a:ext uri="{FF2B5EF4-FFF2-40B4-BE49-F238E27FC236}">
+                      <a16:creationId xmlns:a16="http://schemas.microsoft.com/office/drawing/2014/main" id="{F899B411-75FA-99E7-D2AF-15C51AAE7A6C}"/>
+                    </a:ext>
+                  </a:extLst>
+                </p14:cNvPr>
+                <p14:cNvContentPartPr/>
+                <p14:nvPr/>
+              </p14:nvContentPartPr>
+              <p14:xfrm>
+                <a:off x="9515664" y="4010976"/>
+                <a:ext cx="277920" cy="188280"/>
+              </p14:xfrm>
+            </p:contentPart>
+          </mc:Choice>
+          <mc:Fallback xmlns="">
+            <p:pic>
+              <p:nvPicPr>
+                <p:cNvPr id="10" name="Ink 9">
+                  <a:extLst>
+                    <a:ext uri="{FF2B5EF4-FFF2-40B4-BE49-F238E27FC236}">
+                      <a16:creationId xmlns:a16="http://schemas.microsoft.com/office/drawing/2014/main" id="{F899B411-75FA-99E7-D2AF-15C51AAE7A6C}"/>
+                    </a:ext>
+                  </a:extLst>
+                </p:cNvPr>
+                <p:cNvPicPr/>
+                <p:nvPr/>
+              </p:nvPicPr>
+              <p:blipFill>
+                <a:blip r:embed="rId5"/>
+                <a:stretch>
+                  <a:fillRect/>
+                </a:stretch>
+              </p:blipFill>
+              <p:spPr>
+                <a:xfrm>
+                  <a:off x="9497664" y="3993336"/>
+                  <a:ext cx="313560" cy="223920"/>
+                </a:xfrm>
+                <a:prstGeom prst="rect">
+                  <a:avLst/>
+                </a:prstGeom>
+              </p:spPr>
+            </p:pic>
+          </mc:Fallback>
+        </mc:AlternateContent>
+      </p:grpSp>
+      <p:grpSp>
+        <p:nvGrpSpPr>
+          <p:cNvPr id="21" name="Group 20">
+            <a:extLst>
+              <a:ext uri="{FF2B5EF4-FFF2-40B4-BE49-F238E27FC236}">
+                <a16:creationId xmlns:a16="http://schemas.microsoft.com/office/drawing/2014/main" id="{208EBFBC-B12C-6BBE-F185-EF96921A268E}"/>
+              </a:ext>
+            </a:extLst>
+          </p:cNvPr>
+          <p:cNvGrpSpPr/>
+          <p:nvPr/>
+        </p:nvGrpSpPr>
+        <p:grpSpPr>
+          <a:xfrm>
+            <a:off x="8273664" y="3241296"/>
+            <a:ext cx="894600" cy="563760"/>
+            <a:chOff x="8273664" y="3241296"/>
+            <a:chExt cx="894600" cy="563760"/>
+          </a:xfrm>
+        </p:grpSpPr>
+        <mc:AlternateContent xmlns:mc="http://schemas.openxmlformats.org/markup-compatibility/2006" xmlns:p14="http://schemas.microsoft.com/office/powerpoint/2010/main">
+          <mc:Choice Requires="p14">
+            <p:contentPart p14:bwMode="auto" r:id="rId6">
+              <p14:nvContentPartPr>
+                <p14:cNvPr id="12" name="Ink 11">
+                  <a:extLst>
+                    <a:ext uri="{FF2B5EF4-FFF2-40B4-BE49-F238E27FC236}">
+                      <a16:creationId xmlns:a16="http://schemas.microsoft.com/office/drawing/2014/main" id="{DF432866-E2DD-21C0-213C-E528F2E45B0D}"/>
+                    </a:ext>
+                  </a:extLst>
+                </p14:cNvPr>
+                <p14:cNvContentPartPr/>
+                <p14:nvPr/>
+              </p14:nvContentPartPr>
+              <p14:xfrm>
+                <a:off x="8996904" y="3554856"/>
+                <a:ext cx="20880" cy="142560"/>
+              </p14:xfrm>
+            </p:contentPart>
+          </mc:Choice>
+          <mc:Fallback xmlns="">
+            <p:pic>
+              <p:nvPicPr>
+                <p:cNvPr id="12" name="Ink 11">
+                  <a:extLst>
+                    <a:ext uri="{FF2B5EF4-FFF2-40B4-BE49-F238E27FC236}">
+                      <a16:creationId xmlns:a16="http://schemas.microsoft.com/office/drawing/2014/main" id="{DF432866-E2DD-21C0-213C-E528F2E45B0D}"/>
+                    </a:ext>
+                  </a:extLst>
+                </p:cNvPr>
+                <p:cNvPicPr/>
+                <p:nvPr/>
+              </p:nvPicPr>
+              <p:blipFill>
+                <a:blip r:embed="rId7"/>
+                <a:stretch>
+                  <a:fillRect/>
+                </a:stretch>
+              </p:blipFill>
+              <p:spPr>
+                <a:xfrm>
+                  <a:off x="8979264" y="3536856"/>
+                  <a:ext cx="56520" cy="178200"/>
+                </a:xfrm>
+                <a:prstGeom prst="rect">
+                  <a:avLst/>
+                </a:prstGeom>
+              </p:spPr>
+            </p:pic>
+          </mc:Fallback>
+        </mc:AlternateContent>
+        <mc:AlternateContent xmlns:mc="http://schemas.openxmlformats.org/markup-compatibility/2006" xmlns:p14="http://schemas.microsoft.com/office/powerpoint/2010/main">
+          <mc:Choice Requires="p14">
+            <p:contentPart p14:bwMode="auto" r:id="rId8">
+              <p14:nvContentPartPr>
+                <p14:cNvPr id="13" name="Ink 12">
+                  <a:extLst>
+                    <a:ext uri="{FF2B5EF4-FFF2-40B4-BE49-F238E27FC236}">
+                      <a16:creationId xmlns:a16="http://schemas.microsoft.com/office/drawing/2014/main" id="{43ECEBC8-7A1A-BBA0-B233-11937321D795}"/>
+                    </a:ext>
+                  </a:extLst>
+                </p14:cNvPr>
+                <p14:cNvContentPartPr/>
+                <p14:nvPr/>
+              </p14:nvContentPartPr>
+              <p14:xfrm>
+                <a:off x="8814384" y="3456216"/>
+                <a:ext cx="353880" cy="348840"/>
+              </p14:xfrm>
+            </p:contentPart>
+          </mc:Choice>
+          <mc:Fallback xmlns="">
+            <p:pic>
+              <p:nvPicPr>
+                <p:cNvPr id="13" name="Ink 12">
+                  <a:extLst>
+                    <a:ext uri="{FF2B5EF4-FFF2-40B4-BE49-F238E27FC236}">
+                      <a16:creationId xmlns:a16="http://schemas.microsoft.com/office/drawing/2014/main" id="{43ECEBC8-7A1A-BBA0-B233-11937321D795}"/>
+                    </a:ext>
+                  </a:extLst>
+                </p:cNvPr>
+                <p:cNvPicPr/>
+                <p:nvPr/>
+              </p:nvPicPr>
+              <p:blipFill>
+                <a:blip r:embed="rId9"/>
+                <a:stretch>
+                  <a:fillRect/>
+                </a:stretch>
+              </p:blipFill>
+              <p:spPr>
+                <a:xfrm>
+                  <a:off x="8796744" y="3438216"/>
+                  <a:ext cx="389520" cy="384480"/>
+                </a:xfrm>
+                <a:prstGeom prst="rect">
+                  <a:avLst/>
+                </a:prstGeom>
+              </p:spPr>
+            </p:pic>
+          </mc:Fallback>
+        </mc:AlternateContent>
+        <mc:AlternateContent xmlns:mc="http://schemas.openxmlformats.org/markup-compatibility/2006" xmlns:p14="http://schemas.microsoft.com/office/powerpoint/2010/main">
+          <mc:Choice Requires="p14">
+            <p:contentPart p14:bwMode="auto" r:id="rId10">
+              <p14:nvContentPartPr>
+                <p14:cNvPr id="15" name="Ink 14">
+                  <a:extLst>
+                    <a:ext uri="{FF2B5EF4-FFF2-40B4-BE49-F238E27FC236}">
+                      <a16:creationId xmlns:a16="http://schemas.microsoft.com/office/drawing/2014/main" id="{9DB8F780-5473-A123-8886-14FDB0BAD76D}"/>
+                    </a:ext>
+                  </a:extLst>
+                </p14:cNvPr>
+                <p14:cNvContentPartPr/>
+                <p14:nvPr/>
+              </p14:nvContentPartPr>
+              <p14:xfrm>
+                <a:off x="8273664" y="3284496"/>
+                <a:ext cx="142560" cy="230400"/>
+              </p14:xfrm>
+            </p:contentPart>
+          </mc:Choice>
+          <mc:Fallback xmlns="">
+            <p:pic>
+              <p:nvPicPr>
+                <p:cNvPr id="15" name="Ink 14">
+                  <a:extLst>
+                    <a:ext uri="{FF2B5EF4-FFF2-40B4-BE49-F238E27FC236}">
+                      <a16:creationId xmlns:a16="http://schemas.microsoft.com/office/drawing/2014/main" id="{9DB8F780-5473-A123-8886-14FDB0BAD76D}"/>
+                    </a:ext>
+                  </a:extLst>
+                </p:cNvPr>
+                <p:cNvPicPr/>
+                <p:nvPr/>
+              </p:nvPicPr>
+              <p:blipFill>
+                <a:blip r:embed="rId11"/>
+                <a:stretch>
+                  <a:fillRect/>
+                </a:stretch>
+              </p:blipFill>
+              <p:spPr>
+                <a:xfrm>
+                  <a:off x="8256024" y="3266496"/>
+                  <a:ext cx="178200" cy="266040"/>
+                </a:xfrm>
+                <a:prstGeom prst="rect">
+                  <a:avLst/>
+                </a:prstGeom>
+              </p:spPr>
+            </p:pic>
+          </mc:Fallback>
+        </mc:AlternateContent>
+        <mc:AlternateContent xmlns:mc="http://schemas.openxmlformats.org/markup-compatibility/2006" xmlns:p14="http://schemas.microsoft.com/office/powerpoint/2010/main">
+          <mc:Choice Requires="p14">
+            <p:contentPart p14:bwMode="auto" r:id="rId12">
+              <p14:nvContentPartPr>
+                <p14:cNvPr id="16" name="Ink 15">
+                  <a:extLst>
+                    <a:ext uri="{FF2B5EF4-FFF2-40B4-BE49-F238E27FC236}">
+                      <a16:creationId xmlns:a16="http://schemas.microsoft.com/office/drawing/2014/main" id="{4349F2BA-B32B-92E4-31D4-F73206289EE1}"/>
+                    </a:ext>
+                  </a:extLst>
+                </p14:cNvPr>
+                <p14:cNvContentPartPr/>
+                <p14:nvPr/>
+              </p14:nvContentPartPr>
+              <p14:xfrm>
+                <a:off x="8304264" y="3411936"/>
+                <a:ext cx="70560" cy="26280"/>
+              </p14:xfrm>
+            </p:contentPart>
+          </mc:Choice>
+          <mc:Fallback xmlns="">
+            <p:pic>
+              <p:nvPicPr>
+                <p:cNvPr id="16" name="Ink 15">
+                  <a:extLst>
+                    <a:ext uri="{FF2B5EF4-FFF2-40B4-BE49-F238E27FC236}">
+                      <a16:creationId xmlns:a16="http://schemas.microsoft.com/office/drawing/2014/main" id="{4349F2BA-B32B-92E4-31D4-F73206289EE1}"/>
+                    </a:ext>
+                  </a:extLst>
+                </p:cNvPr>
+                <p:cNvPicPr/>
+                <p:nvPr/>
+              </p:nvPicPr>
+              <p:blipFill>
+                <a:blip r:embed="rId13"/>
+                <a:stretch>
+                  <a:fillRect/>
+                </a:stretch>
+              </p:blipFill>
+              <p:spPr>
+                <a:xfrm>
+                  <a:off x="8286264" y="3393936"/>
+                  <a:ext cx="106200" cy="61920"/>
+                </a:xfrm>
+                <a:prstGeom prst="rect">
+                  <a:avLst/>
+                </a:prstGeom>
+              </p:spPr>
+            </p:pic>
+          </mc:Fallback>
+        </mc:AlternateContent>
+        <mc:AlternateContent xmlns:mc="http://schemas.openxmlformats.org/markup-compatibility/2006" xmlns:p14="http://schemas.microsoft.com/office/powerpoint/2010/main">
+          <mc:Choice Requires="p14">
+            <p:contentPart p14:bwMode="auto" r:id="rId14">
+              <p14:nvContentPartPr>
+                <p14:cNvPr id="17" name="Ink 16">
+                  <a:extLst>
+                    <a:ext uri="{FF2B5EF4-FFF2-40B4-BE49-F238E27FC236}">
+                      <a16:creationId xmlns:a16="http://schemas.microsoft.com/office/drawing/2014/main" id="{4ADADBC0-1287-633C-4540-786952FF53FB}"/>
+                    </a:ext>
+                  </a:extLst>
+                </p14:cNvPr>
+                <p14:cNvContentPartPr/>
+                <p14:nvPr/>
+              </p14:nvContentPartPr>
+              <p14:xfrm>
+                <a:off x="8469864" y="3337056"/>
+                <a:ext cx="144000" cy="130680"/>
+              </p14:xfrm>
+            </p:contentPart>
+          </mc:Choice>
+          <mc:Fallback xmlns="">
+            <p:pic>
+              <p:nvPicPr>
+                <p:cNvPr id="17" name="Ink 16">
+                  <a:extLst>
+                    <a:ext uri="{FF2B5EF4-FFF2-40B4-BE49-F238E27FC236}">
+                      <a16:creationId xmlns:a16="http://schemas.microsoft.com/office/drawing/2014/main" id="{4ADADBC0-1287-633C-4540-786952FF53FB}"/>
+                    </a:ext>
+                  </a:extLst>
+                </p:cNvPr>
+                <p:cNvPicPr/>
+                <p:nvPr/>
+              </p:nvPicPr>
+              <p:blipFill>
+                <a:blip r:embed="rId15"/>
+                <a:stretch>
+                  <a:fillRect/>
+                </a:stretch>
+              </p:blipFill>
+              <p:spPr>
+                <a:xfrm>
+                  <a:off x="8451864" y="3319056"/>
+                  <a:ext cx="179640" cy="166320"/>
+                </a:xfrm>
+                <a:prstGeom prst="rect">
+                  <a:avLst/>
+                </a:prstGeom>
+              </p:spPr>
+            </p:pic>
+          </mc:Fallback>
+        </mc:AlternateContent>
+        <mc:AlternateContent xmlns:mc="http://schemas.openxmlformats.org/markup-compatibility/2006" xmlns:p14="http://schemas.microsoft.com/office/powerpoint/2010/main">
+          <mc:Choice Requires="p14">
+            <p:contentPart p14:bwMode="auto" r:id="rId16">
+              <p14:nvContentPartPr>
+                <p14:cNvPr id="18" name="Ink 17">
+                  <a:extLst>
+                    <a:ext uri="{FF2B5EF4-FFF2-40B4-BE49-F238E27FC236}">
+                      <a16:creationId xmlns:a16="http://schemas.microsoft.com/office/drawing/2014/main" id="{B132E71D-4D5E-4FA4-78C8-6A8D017BFD11}"/>
+                    </a:ext>
+                  </a:extLst>
+                </p14:cNvPr>
+                <p14:cNvContentPartPr/>
+                <p14:nvPr/>
+              </p14:nvContentPartPr>
+              <p14:xfrm>
+                <a:off x="8612064" y="3241296"/>
+                <a:ext cx="74880" cy="203400"/>
+              </p14:xfrm>
+            </p:contentPart>
+          </mc:Choice>
+          <mc:Fallback xmlns="">
+            <p:pic>
+              <p:nvPicPr>
+                <p:cNvPr id="18" name="Ink 17">
+                  <a:extLst>
+                    <a:ext uri="{FF2B5EF4-FFF2-40B4-BE49-F238E27FC236}">
+                      <a16:creationId xmlns:a16="http://schemas.microsoft.com/office/drawing/2014/main" id="{B132E71D-4D5E-4FA4-78C8-6A8D017BFD11}"/>
+                    </a:ext>
+                  </a:extLst>
+                </p:cNvPr>
+                <p:cNvPicPr/>
+                <p:nvPr/>
+              </p:nvPicPr>
+              <p:blipFill>
+                <a:blip r:embed="rId17"/>
+                <a:stretch>
+                  <a:fillRect/>
+                </a:stretch>
+              </p:blipFill>
+              <p:spPr>
+                <a:xfrm>
+                  <a:off x="8594424" y="3223296"/>
+                  <a:ext cx="110520" cy="239040"/>
+                </a:xfrm>
+                <a:prstGeom prst="rect">
+                  <a:avLst/>
+                </a:prstGeom>
+              </p:spPr>
+            </p:pic>
+          </mc:Fallback>
+        </mc:AlternateContent>
+        <mc:AlternateContent xmlns:mc="http://schemas.openxmlformats.org/markup-compatibility/2006" xmlns:p14="http://schemas.microsoft.com/office/powerpoint/2010/main">
+          <mc:Choice Requires="p14">
+            <p:contentPart p14:bwMode="auto" r:id="rId18">
+              <p14:nvContentPartPr>
+                <p14:cNvPr id="19" name="Ink 18">
+                  <a:extLst>
+                    <a:ext uri="{FF2B5EF4-FFF2-40B4-BE49-F238E27FC236}">
+                      <a16:creationId xmlns:a16="http://schemas.microsoft.com/office/drawing/2014/main" id="{543F36F5-E3CC-23E3-985C-A9A698CD7922}"/>
+                    </a:ext>
+                  </a:extLst>
+                </p14:cNvPr>
+                <p14:cNvContentPartPr/>
+                <p14:nvPr/>
+              </p14:nvContentPartPr>
+              <p14:xfrm>
+                <a:off x="8666784" y="3316536"/>
+                <a:ext cx="156240" cy="111240"/>
+              </p14:xfrm>
+            </p:contentPart>
+          </mc:Choice>
+          <mc:Fallback xmlns="">
+            <p:pic>
+              <p:nvPicPr>
+                <p:cNvPr id="19" name="Ink 18">
+                  <a:extLst>
+                    <a:ext uri="{FF2B5EF4-FFF2-40B4-BE49-F238E27FC236}">
+                      <a16:creationId xmlns:a16="http://schemas.microsoft.com/office/drawing/2014/main" id="{543F36F5-E3CC-23E3-985C-A9A698CD7922}"/>
+                    </a:ext>
+                  </a:extLst>
+                </p:cNvPr>
+                <p:cNvPicPr/>
+                <p:nvPr/>
+              </p:nvPicPr>
+              <p:blipFill>
+                <a:blip r:embed="rId19"/>
+                <a:stretch>
+                  <a:fillRect/>
+                </a:stretch>
+              </p:blipFill>
+              <p:spPr>
+                <a:xfrm>
+                  <a:off x="8649144" y="3298536"/>
+                  <a:ext cx="191880" cy="146880"/>
+                </a:xfrm>
+                <a:prstGeom prst="rect">
+                  <a:avLst/>
+                </a:prstGeom>
+              </p:spPr>
+            </p:pic>
+          </mc:Fallback>
+        </mc:AlternateContent>
+        <mc:AlternateContent xmlns:mc="http://schemas.openxmlformats.org/markup-compatibility/2006" xmlns:p14="http://schemas.microsoft.com/office/powerpoint/2010/main">
+          <mc:Choice Requires="p14">
+            <p:contentPart p14:bwMode="auto" r:id="rId20">
+              <p14:nvContentPartPr>
+                <p14:cNvPr id="20" name="Ink 19">
+                  <a:extLst>
+                    <a:ext uri="{FF2B5EF4-FFF2-40B4-BE49-F238E27FC236}">
+                      <a16:creationId xmlns:a16="http://schemas.microsoft.com/office/drawing/2014/main" id="{10CD522A-DB0C-2138-5CC2-93A723F85761}"/>
+                    </a:ext>
+                  </a:extLst>
+                </p14:cNvPr>
+                <p14:cNvContentPartPr/>
+                <p14:nvPr/>
+              </p14:nvContentPartPr>
+              <p14:xfrm>
+                <a:off x="8856864" y="3309696"/>
+                <a:ext cx="109080" cy="93960"/>
+              </p14:xfrm>
+            </p:contentPart>
+          </mc:Choice>
+          <mc:Fallback xmlns="">
+            <p:pic>
+              <p:nvPicPr>
+                <p:cNvPr id="20" name="Ink 19">
+                  <a:extLst>
+                    <a:ext uri="{FF2B5EF4-FFF2-40B4-BE49-F238E27FC236}">
+                      <a16:creationId xmlns:a16="http://schemas.microsoft.com/office/drawing/2014/main" id="{10CD522A-DB0C-2138-5CC2-93A723F85761}"/>
+                    </a:ext>
+                  </a:extLst>
+                </p:cNvPr>
+                <p:cNvPicPr/>
+                <p:nvPr/>
+              </p:nvPicPr>
+              <p:blipFill>
+                <a:blip r:embed="rId21"/>
+                <a:stretch>
+                  <a:fillRect/>
+                </a:stretch>
+              </p:blipFill>
+              <p:spPr>
+                <a:xfrm>
+                  <a:off x="8839224" y="3292056"/>
+                  <a:ext cx="144720" cy="129600"/>
+                </a:xfrm>
+                <a:prstGeom prst="rect">
+                  <a:avLst/>
+                </a:prstGeom>
+              </p:spPr>
+            </p:pic>
+          </mc:Fallback>
+        </mc:AlternateContent>
+      </p:grpSp>
+      <mc:AlternateContent xmlns:mc="http://schemas.openxmlformats.org/markup-compatibility/2006" xmlns:p14="http://schemas.microsoft.com/office/powerpoint/2010/main">
+        <mc:Choice Requires="p14">
+          <p:contentPart p14:bwMode="auto" r:id="rId22">
+            <p14:nvContentPartPr>
+              <p14:cNvPr id="28" name="Ink 27">
+                <a:extLst>
+                  <a:ext uri="{FF2B5EF4-FFF2-40B4-BE49-F238E27FC236}">
+                    <a16:creationId xmlns:a16="http://schemas.microsoft.com/office/drawing/2014/main" id="{2720D8C6-5A26-04CE-BAD7-201795DCC581}"/>
+                  </a:ext>
+                </a:extLst>
+              </p14:cNvPr>
+              <p14:cNvContentPartPr/>
+              <p14:nvPr/>
+            </p14:nvContentPartPr>
+            <p14:xfrm>
+              <a:off x="10241064" y="3315816"/>
+              <a:ext cx="304920" cy="844920"/>
+            </p14:xfrm>
+          </p:contentPart>
+        </mc:Choice>
+        <mc:Fallback xmlns="">
+          <p:pic>
+            <p:nvPicPr>
+              <p:cNvPr id="28" name="Ink 27">
+                <a:extLst>
+                  <a:ext uri="{FF2B5EF4-FFF2-40B4-BE49-F238E27FC236}">
+                    <a16:creationId xmlns:a16="http://schemas.microsoft.com/office/drawing/2014/main" id="{2720D8C6-5A26-04CE-BAD7-201795DCC581}"/>
+                  </a:ext>
+                </a:extLst>
+              </p:cNvPr>
+              <p:cNvPicPr/>
+              <p:nvPr/>
+            </p:nvPicPr>
+            <p:blipFill>
+              <a:blip r:embed="rId27"/>
+              <a:stretch>
+                <a:fillRect/>
+              </a:stretch>
+            </p:blipFill>
+            <p:spPr>
+              <a:xfrm>
+                <a:off x="10223064" y="3298176"/>
+                <a:ext cx="340560" cy="880560"/>
+              </a:xfrm>
+              <a:prstGeom prst="rect">
+                <a:avLst/>
+              </a:prstGeom>
+            </p:spPr>
+          </p:pic>
+        </mc:Fallback>
+      </mc:AlternateContent>
+      <mc:AlternateContent xmlns:mc="http://schemas.openxmlformats.org/markup-compatibility/2006" xmlns:p14="http://schemas.microsoft.com/office/powerpoint/2010/main">
+        <mc:Choice Requires="p14">
+          <p:contentPart p14:bwMode="auto" r:id="rId28">
+            <p14:nvContentPartPr>
+              <p14:cNvPr id="37" name="Ink 36">
+                <a:extLst>
+                  <a:ext uri="{FF2B5EF4-FFF2-40B4-BE49-F238E27FC236}">
+                    <a16:creationId xmlns:a16="http://schemas.microsoft.com/office/drawing/2014/main" id="{B4446189-62EA-CC1B-4560-E05CA83E4637}"/>
+                  </a:ext>
+                </a:extLst>
+              </p14:cNvPr>
+              <p14:cNvContentPartPr/>
+              <p14:nvPr/>
+            </p14:nvContentPartPr>
+            <p14:xfrm>
+              <a:off x="9767664" y="2356056"/>
+              <a:ext cx="60480" cy="47520"/>
+            </p14:xfrm>
+          </p:contentPart>
+        </mc:Choice>
+        <mc:Fallback xmlns="">
+          <p:pic>
+            <p:nvPicPr>
+              <p:cNvPr id="37" name="Ink 36">
+                <a:extLst>
+                  <a:ext uri="{FF2B5EF4-FFF2-40B4-BE49-F238E27FC236}">
+                    <a16:creationId xmlns:a16="http://schemas.microsoft.com/office/drawing/2014/main" id="{B4446189-62EA-CC1B-4560-E05CA83E4637}"/>
+                  </a:ext>
+                </a:extLst>
+              </p:cNvPr>
+              <p:cNvPicPr/>
+              <p:nvPr/>
+            </p:nvPicPr>
+            <p:blipFill>
+              <a:blip r:embed="rId41"/>
+              <a:stretch>
+                <a:fillRect/>
+              </a:stretch>
+            </p:blipFill>
+            <p:spPr>
+              <a:xfrm>
+                <a:off x="9749664" y="2338416"/>
+                <a:ext cx="96120" cy="83160"/>
+              </a:xfrm>
+              <a:prstGeom prst="rect">
+                <a:avLst/>
+              </a:prstGeom>
+            </p:spPr>
+          </p:pic>
+        </mc:Fallback>
+      </mc:AlternateContent>
+      <mc:AlternateContent xmlns:mc="http://schemas.openxmlformats.org/markup-compatibility/2006" xmlns:p14="http://schemas.microsoft.com/office/powerpoint/2010/main">
+        <mc:Choice Requires="p14">
+          <p:contentPart p14:bwMode="auto" r:id="rId42">
+            <p14:nvContentPartPr>
+              <p14:cNvPr id="38" name="Ink 37">
+                <a:extLst>
+                  <a:ext uri="{FF2B5EF4-FFF2-40B4-BE49-F238E27FC236}">
+                    <a16:creationId xmlns:a16="http://schemas.microsoft.com/office/drawing/2014/main" id="{6DDA8256-AC7A-5DD6-374F-7A5DAC3862EC}"/>
+                  </a:ext>
+                </a:extLst>
+              </p14:cNvPr>
+              <p14:cNvContentPartPr/>
+              <p14:nvPr/>
+            </p14:nvContentPartPr>
+            <p14:xfrm>
+              <a:off x="10340424" y="2388456"/>
+              <a:ext cx="65520" cy="30960"/>
+            </p14:xfrm>
+          </p:contentPart>
+        </mc:Choice>
+        <mc:Fallback xmlns="">
+          <p:pic>
+            <p:nvPicPr>
+              <p:cNvPr id="38" name="Ink 37">
+                <a:extLst>
+                  <a:ext uri="{FF2B5EF4-FFF2-40B4-BE49-F238E27FC236}">
+                    <a16:creationId xmlns:a16="http://schemas.microsoft.com/office/drawing/2014/main" id="{6DDA8256-AC7A-5DD6-374F-7A5DAC3862EC}"/>
+                  </a:ext>
+                </a:extLst>
+              </p:cNvPr>
+              <p:cNvPicPr/>
+              <p:nvPr/>
+            </p:nvPicPr>
+            <p:blipFill>
+              <a:blip r:embed="rId43"/>
+              <a:stretch>
+                <a:fillRect/>
+              </a:stretch>
+            </p:blipFill>
+            <p:spPr>
+              <a:xfrm>
+                <a:off x="10322784" y="2370816"/>
+                <a:ext cx="101160" cy="66600"/>
+              </a:xfrm>
+              <a:prstGeom prst="rect">
+                <a:avLst/>
+              </a:prstGeom>
+            </p:spPr>
+          </p:pic>
+        </mc:Fallback>
+      </mc:AlternateContent>
+      <p:grpSp>
+        <p:nvGrpSpPr>
+          <p:cNvPr id="45" name="Group 44">
+            <a:extLst>
+              <a:ext uri="{FF2B5EF4-FFF2-40B4-BE49-F238E27FC236}">
+                <a16:creationId xmlns:a16="http://schemas.microsoft.com/office/drawing/2014/main" id="{7B75E350-3089-2A90-FF5D-0BB8BCE93146}"/>
+              </a:ext>
+            </a:extLst>
+          </p:cNvPr>
+          <p:cNvGrpSpPr/>
+          <p:nvPr/>
+        </p:nvGrpSpPr>
+        <p:grpSpPr>
+          <a:xfrm>
+            <a:off x="9602424" y="2761056"/>
+            <a:ext cx="894240" cy="239040"/>
+            <a:chOff x="9602424" y="2761056"/>
+            <a:chExt cx="894240" cy="239040"/>
+          </a:xfrm>
+        </p:grpSpPr>
+        <mc:AlternateContent xmlns:mc="http://schemas.openxmlformats.org/markup-compatibility/2006" xmlns:p14="http://schemas.microsoft.com/office/powerpoint/2010/main">
+          <mc:Choice Requires="p14">
+            <p:contentPart p14:bwMode="auto" r:id="rId44">
+              <p14:nvContentPartPr>
+                <p14:cNvPr id="40" name="Ink 39">
+                  <a:extLst>
+                    <a:ext uri="{FF2B5EF4-FFF2-40B4-BE49-F238E27FC236}">
+                      <a16:creationId xmlns:a16="http://schemas.microsoft.com/office/drawing/2014/main" id="{A51581A7-6284-89DA-3365-1C060C962501}"/>
+                    </a:ext>
+                  </a:extLst>
+                </p14:cNvPr>
+                <p14:cNvContentPartPr/>
+                <p14:nvPr/>
+              </p14:nvContentPartPr>
+              <p14:xfrm>
+                <a:off x="9790344" y="2848896"/>
+                <a:ext cx="651600" cy="151200"/>
+              </p14:xfrm>
+            </p:contentPart>
+          </mc:Choice>
+          <mc:Fallback xmlns="">
+            <p:pic>
+              <p:nvPicPr>
+                <p:cNvPr id="40" name="Ink 39">
+                  <a:extLst>
+                    <a:ext uri="{FF2B5EF4-FFF2-40B4-BE49-F238E27FC236}">
+                      <a16:creationId xmlns:a16="http://schemas.microsoft.com/office/drawing/2014/main" id="{A51581A7-6284-89DA-3365-1C060C962501}"/>
+                    </a:ext>
+                  </a:extLst>
+                </p:cNvPr>
+                <p:cNvPicPr/>
+                <p:nvPr/>
+              </p:nvPicPr>
+              <p:blipFill>
+                <a:blip r:embed="rId45"/>
+                <a:stretch>
+                  <a:fillRect/>
+                </a:stretch>
+              </p:blipFill>
+              <p:spPr>
+                <a:xfrm>
+                  <a:off x="9772344" y="2830896"/>
+                  <a:ext cx="687240" cy="186840"/>
+                </a:xfrm>
+                <a:prstGeom prst="rect">
+                  <a:avLst/>
+                </a:prstGeom>
+              </p:spPr>
+            </p:pic>
+          </mc:Fallback>
+        </mc:AlternateContent>
+        <mc:AlternateContent xmlns:mc="http://schemas.openxmlformats.org/markup-compatibility/2006" xmlns:p14="http://schemas.microsoft.com/office/powerpoint/2010/main">
+          <mc:Choice Requires="p14">
+            <p:contentPart p14:bwMode="auto" r:id="rId46">
+              <p14:nvContentPartPr>
+                <p14:cNvPr id="41" name="Ink 40">
+                  <a:extLst>
+                    <a:ext uri="{FF2B5EF4-FFF2-40B4-BE49-F238E27FC236}">
+                      <a16:creationId xmlns:a16="http://schemas.microsoft.com/office/drawing/2014/main" id="{6951254D-881E-D11D-2245-ADEF168194B2}"/>
+                    </a:ext>
+                  </a:extLst>
+                </p14:cNvPr>
+                <p14:cNvContentPartPr/>
+                <p14:nvPr/>
+              </p14:nvContentPartPr>
+              <p14:xfrm>
+                <a:off x="10414584" y="2804616"/>
+                <a:ext cx="82080" cy="87480"/>
+              </p14:xfrm>
+            </p:contentPart>
+          </mc:Choice>
+          <mc:Fallback xmlns="">
+            <p:pic>
+              <p:nvPicPr>
+                <p:cNvPr id="41" name="Ink 40">
+                  <a:extLst>
+                    <a:ext uri="{FF2B5EF4-FFF2-40B4-BE49-F238E27FC236}">
+                      <a16:creationId xmlns:a16="http://schemas.microsoft.com/office/drawing/2014/main" id="{6951254D-881E-D11D-2245-ADEF168194B2}"/>
+                    </a:ext>
+                  </a:extLst>
+                </p:cNvPr>
+                <p:cNvPicPr/>
+                <p:nvPr/>
+              </p:nvPicPr>
+              <p:blipFill>
+                <a:blip r:embed="rId47"/>
+                <a:stretch>
+                  <a:fillRect/>
+                </a:stretch>
+              </p:blipFill>
+              <p:spPr>
+                <a:xfrm>
+                  <a:off x="10396944" y="2786616"/>
+                  <a:ext cx="117720" cy="123120"/>
+                </a:xfrm>
+                <a:prstGeom prst="rect">
+                  <a:avLst/>
+                </a:prstGeom>
+              </p:spPr>
+            </p:pic>
+          </mc:Fallback>
+        </mc:AlternateContent>
+        <mc:AlternateContent xmlns:mc="http://schemas.openxmlformats.org/markup-compatibility/2006" xmlns:p14="http://schemas.microsoft.com/office/powerpoint/2010/main">
+          <mc:Choice Requires="p14">
+            <p:contentPart p14:bwMode="auto" r:id="rId48">
+              <p14:nvContentPartPr>
+                <p14:cNvPr id="43" name="Ink 42">
+                  <a:extLst>
+                    <a:ext uri="{FF2B5EF4-FFF2-40B4-BE49-F238E27FC236}">
+                      <a16:creationId xmlns:a16="http://schemas.microsoft.com/office/drawing/2014/main" id="{D87A8007-C872-ED75-9F29-A0D2D116C65B}"/>
+                    </a:ext>
+                  </a:extLst>
+                </p14:cNvPr>
+                <p14:cNvContentPartPr/>
+                <p14:nvPr/>
+              </p14:nvContentPartPr>
+              <p14:xfrm>
+                <a:off x="9706464" y="2821536"/>
+                <a:ext cx="114480" cy="86760"/>
+              </p14:xfrm>
+            </p:contentPart>
+          </mc:Choice>
+          <mc:Fallback xmlns="">
+            <p:pic>
+              <p:nvPicPr>
+                <p:cNvPr id="43" name="Ink 42">
+                  <a:extLst>
+                    <a:ext uri="{FF2B5EF4-FFF2-40B4-BE49-F238E27FC236}">
+                      <a16:creationId xmlns:a16="http://schemas.microsoft.com/office/drawing/2014/main" id="{D87A8007-C872-ED75-9F29-A0D2D116C65B}"/>
+                    </a:ext>
+                  </a:extLst>
+                </p:cNvPr>
+                <p:cNvPicPr/>
+                <p:nvPr/>
+              </p:nvPicPr>
+              <p:blipFill>
+                <a:blip r:embed="rId49"/>
+                <a:stretch>
+                  <a:fillRect/>
+                </a:stretch>
+              </p:blipFill>
+              <p:spPr>
+                <a:xfrm>
+                  <a:off x="9688464" y="2803536"/>
+                  <a:ext cx="150120" cy="122400"/>
+                </a:xfrm>
+                <a:prstGeom prst="rect">
+                  <a:avLst/>
+                </a:prstGeom>
+              </p:spPr>
+            </p:pic>
+          </mc:Fallback>
+        </mc:AlternateContent>
+        <mc:AlternateContent xmlns:mc="http://schemas.openxmlformats.org/markup-compatibility/2006" xmlns:p14="http://schemas.microsoft.com/office/powerpoint/2010/main">
+          <mc:Choice Requires="p14">
+            <p:contentPart p14:bwMode="auto" r:id="rId50">
+              <p14:nvContentPartPr>
+                <p14:cNvPr id="44" name="Ink 43">
+                  <a:extLst>
+                    <a:ext uri="{FF2B5EF4-FFF2-40B4-BE49-F238E27FC236}">
+                      <a16:creationId xmlns:a16="http://schemas.microsoft.com/office/drawing/2014/main" id="{D5E4451B-F3DC-6488-5BC9-7BE98F3548E0}"/>
+                    </a:ext>
+                  </a:extLst>
+                </p14:cNvPr>
+                <p14:cNvContentPartPr/>
+                <p14:nvPr/>
+              </p14:nvContentPartPr>
+              <p14:xfrm>
+                <a:off x="9602424" y="2761056"/>
+                <a:ext cx="181800" cy="105480"/>
+              </p14:xfrm>
+            </p:contentPart>
+          </mc:Choice>
+          <mc:Fallback xmlns="">
+            <p:pic>
+              <p:nvPicPr>
+                <p:cNvPr id="44" name="Ink 43">
+                  <a:extLst>
+                    <a:ext uri="{FF2B5EF4-FFF2-40B4-BE49-F238E27FC236}">
+                      <a16:creationId xmlns:a16="http://schemas.microsoft.com/office/drawing/2014/main" id="{D5E4451B-F3DC-6488-5BC9-7BE98F3548E0}"/>
+                    </a:ext>
+                  </a:extLst>
+                </p:cNvPr>
+                <p:cNvPicPr/>
+                <p:nvPr/>
+              </p:nvPicPr>
+              <p:blipFill>
+                <a:blip r:embed="rId51"/>
+                <a:stretch>
+                  <a:fillRect/>
+                </a:stretch>
+              </p:blipFill>
+              <p:spPr>
+                <a:xfrm>
+                  <a:off x="9584424" y="2743416"/>
+                  <a:ext cx="217440" cy="141120"/>
+                </a:xfrm>
+                <a:prstGeom prst="rect">
+                  <a:avLst/>
+                </a:prstGeom>
+              </p:spPr>
+            </p:pic>
+          </mc:Fallback>
+        </mc:AlternateContent>
+      </p:grpSp>
+      <mc:AlternateContent xmlns:mc="http://schemas.openxmlformats.org/markup-compatibility/2006" xmlns:p14="http://schemas.microsoft.com/office/powerpoint/2010/main">
+        <mc:Choice Requires="p14">
+          <p:contentPart p14:bwMode="auto" r:id="rId52">
+            <p14:nvContentPartPr>
+              <p14:cNvPr id="46" name="Ink 45">
+                <a:extLst>
+                  <a:ext uri="{FF2B5EF4-FFF2-40B4-BE49-F238E27FC236}">
+                    <a16:creationId xmlns:a16="http://schemas.microsoft.com/office/drawing/2014/main" id="{FAE539F5-1814-F360-E50D-DDCA801CDAED}"/>
+                  </a:ext>
+                </a:extLst>
+              </p14:cNvPr>
+              <p14:cNvContentPartPr/>
+              <p14:nvPr/>
+            </p14:nvContentPartPr>
+            <p14:xfrm>
+              <a:off x="9732744" y="2354256"/>
+              <a:ext cx="96480" cy="78480"/>
+            </p14:xfrm>
+          </p:contentPart>
+        </mc:Choice>
+        <mc:Fallback xmlns="">
+          <p:pic>
+            <p:nvPicPr>
+              <p:cNvPr id="46" name="Ink 45">
+                <a:extLst>
+                  <a:ext uri="{FF2B5EF4-FFF2-40B4-BE49-F238E27FC236}">
+                    <a16:creationId xmlns:a16="http://schemas.microsoft.com/office/drawing/2014/main" id="{FAE539F5-1814-F360-E50D-DDCA801CDAED}"/>
+                  </a:ext>
+                </a:extLst>
+              </p:cNvPr>
+              <p:cNvPicPr/>
+              <p:nvPr/>
+            </p:nvPicPr>
+            <p:blipFill>
+              <a:blip r:embed="rId53"/>
+              <a:stretch>
+                <a:fillRect/>
+              </a:stretch>
+            </p:blipFill>
+            <p:spPr>
+              <a:xfrm>
+                <a:off x="9715104" y="2336256"/>
+                <a:ext cx="132120" cy="114120"/>
+              </a:xfrm>
+              <a:prstGeom prst="rect">
+                <a:avLst/>
+              </a:prstGeom>
+            </p:spPr>
+          </p:pic>
+        </mc:Fallback>
+      </mc:AlternateContent>
+      <mc:AlternateContent xmlns:mc="http://schemas.openxmlformats.org/markup-compatibility/2006" xmlns:p14="http://schemas.microsoft.com/office/powerpoint/2010/main">
+        <mc:Choice Requires="p14">
+          <p:contentPart p14:bwMode="auto" r:id="rId54">
+            <p14:nvContentPartPr>
+              <p14:cNvPr id="47" name="Ink 46">
+                <a:extLst>
+                  <a:ext uri="{FF2B5EF4-FFF2-40B4-BE49-F238E27FC236}">
+                    <a16:creationId xmlns:a16="http://schemas.microsoft.com/office/drawing/2014/main" id="{2C841379-515F-EBF3-5CD8-636904F768F6}"/>
+                  </a:ext>
+                </a:extLst>
+              </p14:cNvPr>
+              <p14:cNvContentPartPr/>
+              <p14:nvPr/>
+            </p14:nvContentPartPr>
+            <p14:xfrm>
+              <a:off x="10298304" y="2368296"/>
+              <a:ext cx="97920" cy="93240"/>
+            </p14:xfrm>
+          </p:contentPart>
+        </mc:Choice>
+        <mc:Fallback xmlns="">
+          <p:pic>
+            <p:nvPicPr>
+              <p:cNvPr id="47" name="Ink 46">
+                <a:extLst>
+                  <a:ext uri="{FF2B5EF4-FFF2-40B4-BE49-F238E27FC236}">
+                    <a16:creationId xmlns:a16="http://schemas.microsoft.com/office/drawing/2014/main" id="{2C841379-515F-EBF3-5CD8-636904F768F6}"/>
+                  </a:ext>
+                </a:extLst>
+              </p:cNvPr>
+              <p:cNvPicPr/>
+              <p:nvPr/>
+            </p:nvPicPr>
+            <p:blipFill>
+              <a:blip r:embed="rId55"/>
+              <a:stretch>
+                <a:fillRect/>
+              </a:stretch>
+            </p:blipFill>
+            <p:spPr>
+              <a:xfrm>
+                <a:off x="10280664" y="2350296"/>
+                <a:ext cx="133560" cy="128880"/>
+              </a:xfrm>
+              <a:prstGeom prst="rect">
+                <a:avLst/>
+              </a:prstGeom>
+            </p:spPr>
+          </p:pic>
+        </mc:Fallback>
+      </mc:AlternateContent>
+      <p:sp>
+        <p:nvSpPr>
+          <p:cNvPr id="5" name="Rectangle 4">
+            <a:extLst>
+              <a:ext uri="{FF2B5EF4-FFF2-40B4-BE49-F238E27FC236}">
+                <a16:creationId xmlns:a16="http://schemas.microsoft.com/office/drawing/2014/main" id="{7AD9283A-5E97-4EA0-23E7-F839907A29D3}"/>
+              </a:ext>
+            </a:extLst>
+          </p:cNvPr>
+          <p:cNvSpPr/>
+          <p:nvPr/>
+        </p:nvSpPr>
+        <p:spPr>
+          <a:xfrm>
+            <a:off x="6684264" y="4532376"/>
+            <a:ext cx="1499616" cy="798576"/>
+          </a:xfrm>
+          <a:prstGeom prst="rect">
+            <a:avLst/>
+          </a:prstGeom>
+          <a:solidFill>
+            <a:srgbClr val="C00000"/>
+          </a:solidFill>
+        </p:spPr>
+        <p:style>
+          <a:lnRef idx="2">
+            <a:schemeClr val="accent1">
+              <a:shade val="15000"/>
+            </a:schemeClr>
+          </a:lnRef>
+          <a:fillRef idx="1">
+            <a:schemeClr val="accent1"/>
+          </a:fillRef>
+          <a:effectRef idx="0">
+            <a:schemeClr val="accent1"/>
+          </a:effectRef>
+          <a:fontRef idx="minor">
+            <a:schemeClr val="lt1"/>
+          </a:fontRef>
+        </p:style>
+        <p:txBody>
+          <a:bodyPr rtlCol="0" anchor="ctr"/>
+          <a:lstStyle/>
+          <a:p>
+            <a:pPr algn="ctr"/>
+            <a:r>
+              <a:rPr lang="en-US" dirty="0"/>
+              <a:t>Private Data</a:t>
+            </a:r>
+          </a:p>
+          <a:p>
+            <a:pPr algn="ctr"/>
+            <a:r>
+              <a:rPr lang="en-US" dirty="0"/>
+              <a:t>PDF, DB, etc.</a:t>
+            </a:r>
+          </a:p>
+        </p:txBody>
+      </p:sp>
+    </p:spTree>
+    <p:extLst>
+      <p:ext uri="{BB962C8B-B14F-4D97-AF65-F5344CB8AC3E}">
+        <p14:creationId xmlns:p14="http://schemas.microsoft.com/office/powerpoint/2010/main" val="545105049"/>
+      </p:ext>
+    </p:extLst>
+  </p:cSld>
+  <p:clrMapOvr>
+    <a:masterClrMapping/>
+  </p:clrMapOvr>
+</p:sld>
+</file>
+
+<file path=ppt/slides/slide3.xml><?xml version="1.0" encoding="utf-8"?>
+<p:sld xmlns:a="http://schemas.openxmlformats.org/drawingml/2006/main" xmlns:r="http://schemas.openxmlformats.org/officeDocument/2006/relationships" xmlns:p="http://schemas.openxmlformats.org/presentationml/2006/main">
+  <p:cSld>
+    <p:spTree>
+      <p:nvGrpSpPr>
+        <p:cNvPr id="1" name="">
+          <a:extLst>
+            <a:ext uri="{FF2B5EF4-FFF2-40B4-BE49-F238E27FC236}">
+              <a16:creationId xmlns:a16="http://schemas.microsoft.com/office/drawing/2014/main" id="{D42AD85E-81EB-7A2C-49AA-000A420A1BDD}"/>
+            </a:ext>
+          </a:extLst>
+        </p:cNvPr>
+        <p:cNvGrpSpPr/>
+        <p:nvPr/>
+      </p:nvGrpSpPr>
+      <p:grpSpPr>
+        <a:xfrm>
+          <a:off x="0" y="0"/>
+          <a:ext cx="0" cy="0"/>
+          <a:chOff x="0" y="0"/>
+          <a:chExt cx="0" cy="0"/>
+        </a:xfrm>
+      </p:grpSpPr>
+      <p:sp>
+        <p:nvSpPr>
+          <p:cNvPr id="9" name="TextBox 8">
+            <a:extLst>
+              <a:ext uri="{FF2B5EF4-FFF2-40B4-BE49-F238E27FC236}">
+                <a16:creationId xmlns:a16="http://schemas.microsoft.com/office/drawing/2014/main" id="{0B87C816-4415-F0A7-0B90-55C375306F2C}"/>
               </a:ext>
             </a:extLst>
           </p:cNvPr>
@@ -7355,7 +9540,7 @@
           <p:cNvPr id="2" name="Oval 1">
             <a:extLst>
               <a:ext uri="{FF2B5EF4-FFF2-40B4-BE49-F238E27FC236}">
-                <a16:creationId xmlns:a16="http://schemas.microsoft.com/office/drawing/2014/main" id="{34E06E64-2BAD-CB49-F418-EEC904645F4D}"/>
+                <a16:creationId xmlns:a16="http://schemas.microsoft.com/office/drawing/2014/main" id="{F688B27D-5939-C881-6CE3-E22526A2CEEE}"/>
               </a:ext>
             </a:extLst>
           </p:cNvPr>
@@ -7404,7 +9589,7 @@
           <p:cNvPr id="3" name="Oval 2">
             <a:extLst>
               <a:ext uri="{FF2B5EF4-FFF2-40B4-BE49-F238E27FC236}">
-                <a16:creationId xmlns:a16="http://schemas.microsoft.com/office/drawing/2014/main" id="{29011818-563F-D9FB-E9F3-4F652DCB583E}"/>
+                <a16:creationId xmlns:a16="http://schemas.microsoft.com/office/drawing/2014/main" id="{6CC4B6E6-8BCE-C182-AB0F-AEBF970FABFD}"/>
               </a:ext>
             </a:extLst>
           </p:cNvPr>
@@ -7468,7 +9653,7 @@
           <p:cNvPr id="4" name="Rectangle 3">
             <a:extLst>
               <a:ext uri="{FF2B5EF4-FFF2-40B4-BE49-F238E27FC236}">
-                <a16:creationId xmlns:a16="http://schemas.microsoft.com/office/drawing/2014/main" id="{4C8B7814-4E14-1317-37DA-AE7AED4717F6}"/>
+                <a16:creationId xmlns:a16="http://schemas.microsoft.com/office/drawing/2014/main" id="{1EE9052F-179B-73A3-9D44-A7541BCB99DF}"/>
               </a:ext>
             </a:extLst>
           </p:cNvPr>
@@ -7513,6 +9698,13 @@
               <a:t>Private Data</a:t>
             </a:r>
           </a:p>
+          <a:p>
+            <a:pPr algn="ctr"/>
+            <a:r>
+              <a:rPr lang="en-US" dirty="0"/>
+              <a:t>PDF, DB, etc.</a:t>
+            </a:r>
+          </a:p>
         </p:txBody>
       </p:sp>
       <p:grpSp>
@@ -7520,7 +9712,7 @@
           <p:cNvPr id="11" name="Group 10">
             <a:extLst>
               <a:ext uri="{FF2B5EF4-FFF2-40B4-BE49-F238E27FC236}">
-                <a16:creationId xmlns:a16="http://schemas.microsoft.com/office/drawing/2014/main" id="{577286D2-5F53-6A13-D382-C24F6B7D603D}"/>
+                <a16:creationId xmlns:a16="http://schemas.microsoft.com/office/drawing/2014/main" id="{CEE326C3-BF1F-2457-42E7-B994EA7275CA}"/>
               </a:ext>
             </a:extLst>
           </p:cNvPr>
@@ -7535,14 +9727,14 @@
             <a:chExt cx="337680" cy="907560"/>
           </a:xfrm>
         </p:grpSpPr>
-        <mc:AlternateContent xmlns:mc="http://schemas.openxmlformats.org/markup-compatibility/2006" xmlns:p14="http://schemas.microsoft.com/office/powerpoint/2010/main">
-          <mc:Choice Requires="p14">
+        <mc:AlternateContent xmlns:mc="http://schemas.openxmlformats.org/markup-compatibility/2006">
+          <mc:Choice xmlns:p14="http://schemas.microsoft.com/office/powerpoint/2010/main" Requires="p14">
             <p:contentPart p14:bwMode="auto" r:id="rId2">
               <p14:nvContentPartPr>
                 <p14:cNvPr id="8" name="Ink 7">
                   <a:extLst>
                     <a:ext uri="{FF2B5EF4-FFF2-40B4-BE49-F238E27FC236}">
-                      <a16:creationId xmlns:a16="http://schemas.microsoft.com/office/drawing/2014/main" id="{88426E6E-3230-67F4-43DE-62D9D2CB0666}"/>
+                      <a16:creationId xmlns:a16="http://schemas.microsoft.com/office/drawing/2014/main" id="{6A3C9D0D-7524-4564-0F00-B04ED46EAA65}"/>
                     </a:ext>
                   </a:extLst>
                 </p14:cNvPr>
@@ -7555,13 +9747,13 @@
               </p14:xfrm>
             </p:contentPart>
           </mc:Choice>
-          <mc:Fallback xmlns="">
+          <mc:Fallback>
             <p:pic>
               <p:nvPicPr>
                 <p:cNvPr id="8" name="Ink 7">
                   <a:extLst>
                     <a:ext uri="{FF2B5EF4-FFF2-40B4-BE49-F238E27FC236}">
-                      <a16:creationId xmlns:a16="http://schemas.microsoft.com/office/drawing/2014/main" id="{88426E6E-3230-67F4-43DE-62D9D2CB0666}"/>
+                      <a16:creationId xmlns:a16="http://schemas.microsoft.com/office/drawing/2014/main" id="{6A3C9D0D-7524-4564-0F00-B04ED46EAA65}"/>
                     </a:ext>
                   </a:extLst>
                 </p:cNvPr>
@@ -7576,8 +9768,8 @@
               </p:blipFill>
               <p:spPr>
                 <a:xfrm>
-                  <a:off x="9437904" y="3273696"/>
-                  <a:ext cx="270360" cy="887400"/>
+                  <a:off x="9437932" y="3273704"/>
+                  <a:ext cx="270305" cy="887385"/>
                 </a:xfrm>
                 <a:prstGeom prst="rect">
                   <a:avLst/>
@@ -7586,14 +9778,14 @@
             </p:pic>
           </mc:Fallback>
         </mc:AlternateContent>
-        <mc:AlternateContent xmlns:mc="http://schemas.openxmlformats.org/markup-compatibility/2006" xmlns:p14="http://schemas.microsoft.com/office/powerpoint/2010/main">
-          <mc:Choice Requires="p14">
+        <mc:AlternateContent xmlns:mc="http://schemas.openxmlformats.org/markup-compatibility/2006">
+          <mc:Choice xmlns:p14="http://schemas.microsoft.com/office/powerpoint/2010/main" Requires="p14">
             <p:contentPart p14:bwMode="auto" r:id="rId4">
               <p14:nvContentPartPr>
                 <p14:cNvPr id="10" name="Ink 9">
                   <a:extLst>
                     <a:ext uri="{FF2B5EF4-FFF2-40B4-BE49-F238E27FC236}">
-                      <a16:creationId xmlns:a16="http://schemas.microsoft.com/office/drawing/2014/main" id="{F899B411-75FA-99E7-D2AF-15C51AAE7A6C}"/>
+                      <a16:creationId xmlns:a16="http://schemas.microsoft.com/office/drawing/2014/main" id="{66B47C8D-1526-1F2D-F082-22D0E479E1C7}"/>
                     </a:ext>
                   </a:extLst>
                 </p14:cNvPr>
@@ -7606,13 +9798,13 @@
               </p14:xfrm>
             </p:contentPart>
           </mc:Choice>
-          <mc:Fallback xmlns="">
+          <mc:Fallback>
             <p:pic>
               <p:nvPicPr>
                 <p:cNvPr id="10" name="Ink 9">
                   <a:extLst>
                     <a:ext uri="{FF2B5EF4-FFF2-40B4-BE49-F238E27FC236}">
-                      <a16:creationId xmlns:a16="http://schemas.microsoft.com/office/drawing/2014/main" id="{F899B411-75FA-99E7-D2AF-15C51AAE7A6C}"/>
+                      <a16:creationId xmlns:a16="http://schemas.microsoft.com/office/drawing/2014/main" id="{66B47C8D-1526-1F2D-F082-22D0E479E1C7}"/>
                     </a:ext>
                   </a:extLst>
                 </p:cNvPr>
@@ -7627,7 +9819,7 @@
               </p:blipFill>
               <p:spPr>
                 <a:xfrm>
-                  <a:off x="9497664" y="3993336"/>
+                  <a:off x="9497664" y="3992976"/>
                   <a:ext cx="313560" cy="223920"/>
                 </a:xfrm>
                 <a:prstGeom prst="rect">
@@ -7643,7 +9835,7 @@
           <p:cNvPr id="21" name="Group 20">
             <a:extLst>
               <a:ext uri="{FF2B5EF4-FFF2-40B4-BE49-F238E27FC236}">
-                <a16:creationId xmlns:a16="http://schemas.microsoft.com/office/drawing/2014/main" id="{208EBFBC-B12C-6BBE-F185-EF96921A268E}"/>
+                <a16:creationId xmlns:a16="http://schemas.microsoft.com/office/drawing/2014/main" id="{24FB312A-3A87-50D3-DB6C-99C260A6594A}"/>
               </a:ext>
             </a:extLst>
           </p:cNvPr>
@@ -7658,14 +9850,14 @@
             <a:chExt cx="894600" cy="563760"/>
           </a:xfrm>
         </p:grpSpPr>
-        <mc:AlternateContent xmlns:mc="http://schemas.openxmlformats.org/markup-compatibility/2006" xmlns:p14="http://schemas.microsoft.com/office/powerpoint/2010/main">
-          <mc:Choice Requires="p14">
+        <mc:AlternateContent xmlns:mc="http://schemas.openxmlformats.org/markup-compatibility/2006">
+          <mc:Choice xmlns:p14="http://schemas.microsoft.com/office/powerpoint/2010/main" Requires="p14">
             <p:contentPart p14:bwMode="auto" r:id="rId6">
               <p14:nvContentPartPr>
                 <p14:cNvPr id="12" name="Ink 11">
                   <a:extLst>
                     <a:ext uri="{FF2B5EF4-FFF2-40B4-BE49-F238E27FC236}">
-                      <a16:creationId xmlns:a16="http://schemas.microsoft.com/office/drawing/2014/main" id="{DF432866-E2DD-21C0-213C-E528F2E45B0D}"/>
+                      <a16:creationId xmlns:a16="http://schemas.microsoft.com/office/drawing/2014/main" id="{D18329E9-92F4-4DDE-51C8-1E48A49E31E0}"/>
                     </a:ext>
                   </a:extLst>
                 </p14:cNvPr>
@@ -7678,13 +9870,13 @@
               </p14:xfrm>
             </p:contentPart>
           </mc:Choice>
-          <mc:Fallback xmlns="">
+          <mc:Fallback>
             <p:pic>
               <p:nvPicPr>
                 <p:cNvPr id="12" name="Ink 11">
                   <a:extLst>
                     <a:ext uri="{FF2B5EF4-FFF2-40B4-BE49-F238E27FC236}">
-                      <a16:creationId xmlns:a16="http://schemas.microsoft.com/office/drawing/2014/main" id="{DF432866-E2DD-21C0-213C-E528F2E45B0D}"/>
+                      <a16:creationId xmlns:a16="http://schemas.microsoft.com/office/drawing/2014/main" id="{D18329E9-92F4-4DDE-51C8-1E48A49E31E0}"/>
                     </a:ext>
                   </a:extLst>
                 </p:cNvPr>
@@ -7699,7 +9891,7 @@
               </p:blipFill>
               <p:spPr>
                 <a:xfrm>
-                  <a:off x="8979264" y="3536856"/>
+                  <a:off x="8978904" y="3536856"/>
                   <a:ext cx="56520" cy="178200"/>
                 </a:xfrm>
                 <a:prstGeom prst="rect">
@@ -7709,14 +9901,14 @@
             </p:pic>
           </mc:Fallback>
         </mc:AlternateContent>
-        <mc:AlternateContent xmlns:mc="http://schemas.openxmlformats.org/markup-compatibility/2006" xmlns:p14="http://schemas.microsoft.com/office/powerpoint/2010/main">
-          <mc:Choice Requires="p14">
+        <mc:AlternateContent xmlns:mc="http://schemas.openxmlformats.org/markup-compatibility/2006">
+          <mc:Choice xmlns:p14="http://schemas.microsoft.com/office/powerpoint/2010/main" Requires="p14">
             <p:contentPart p14:bwMode="auto" r:id="rId8">
               <p14:nvContentPartPr>
                 <p14:cNvPr id="13" name="Ink 12">
                   <a:extLst>
                     <a:ext uri="{FF2B5EF4-FFF2-40B4-BE49-F238E27FC236}">
-                      <a16:creationId xmlns:a16="http://schemas.microsoft.com/office/drawing/2014/main" id="{43ECEBC8-7A1A-BBA0-B233-11937321D795}"/>
+                      <a16:creationId xmlns:a16="http://schemas.microsoft.com/office/drawing/2014/main" id="{1408450C-FC5C-BFC1-AC21-4441900A6718}"/>
                     </a:ext>
                   </a:extLst>
                 </p14:cNvPr>
@@ -7729,13 +9921,13 @@
               </p14:xfrm>
             </p:contentPart>
           </mc:Choice>
-          <mc:Fallback xmlns="">
+          <mc:Fallback>
             <p:pic>
               <p:nvPicPr>
                 <p:cNvPr id="13" name="Ink 12">
                   <a:extLst>
                     <a:ext uri="{FF2B5EF4-FFF2-40B4-BE49-F238E27FC236}">
-                      <a16:creationId xmlns:a16="http://schemas.microsoft.com/office/drawing/2014/main" id="{43ECEBC8-7A1A-BBA0-B233-11937321D795}"/>
+                      <a16:creationId xmlns:a16="http://schemas.microsoft.com/office/drawing/2014/main" id="{1408450C-FC5C-BFC1-AC21-4441900A6718}"/>
                     </a:ext>
                   </a:extLst>
                 </p:cNvPr>
@@ -7750,8 +9942,8 @@
               </p:blipFill>
               <p:spPr>
                 <a:xfrm>
-                  <a:off x="8796744" y="3438216"/>
-                  <a:ext cx="389520" cy="384480"/>
+                  <a:off x="8796366" y="3438216"/>
+                  <a:ext cx="389556" cy="384480"/>
                 </a:xfrm>
                 <a:prstGeom prst="rect">
                   <a:avLst/>
@@ -7760,14 +9952,14 @@
             </p:pic>
           </mc:Fallback>
         </mc:AlternateContent>
-        <mc:AlternateContent xmlns:mc="http://schemas.openxmlformats.org/markup-compatibility/2006" xmlns:p14="http://schemas.microsoft.com/office/powerpoint/2010/main">
-          <mc:Choice Requires="p14">
+        <mc:AlternateContent xmlns:mc="http://schemas.openxmlformats.org/markup-compatibility/2006">
+          <mc:Choice xmlns:p14="http://schemas.microsoft.com/office/powerpoint/2010/main" Requires="p14">
             <p:contentPart p14:bwMode="auto" r:id="rId10">
               <p14:nvContentPartPr>
                 <p14:cNvPr id="15" name="Ink 14">
                   <a:extLst>
                     <a:ext uri="{FF2B5EF4-FFF2-40B4-BE49-F238E27FC236}">
-                      <a16:creationId xmlns:a16="http://schemas.microsoft.com/office/drawing/2014/main" id="{9DB8F780-5473-A123-8886-14FDB0BAD76D}"/>
+                      <a16:creationId xmlns:a16="http://schemas.microsoft.com/office/drawing/2014/main" id="{6C7102A8-5F1A-F587-7366-6A19D88BB182}"/>
                     </a:ext>
                   </a:extLst>
                 </p14:cNvPr>
@@ -7780,13 +9972,13 @@
               </p14:xfrm>
             </p:contentPart>
           </mc:Choice>
-          <mc:Fallback xmlns="">
+          <mc:Fallback>
             <p:pic>
               <p:nvPicPr>
                 <p:cNvPr id="15" name="Ink 14">
                   <a:extLst>
                     <a:ext uri="{FF2B5EF4-FFF2-40B4-BE49-F238E27FC236}">
-                      <a16:creationId xmlns:a16="http://schemas.microsoft.com/office/drawing/2014/main" id="{9DB8F780-5473-A123-8886-14FDB0BAD76D}"/>
+                      <a16:creationId xmlns:a16="http://schemas.microsoft.com/office/drawing/2014/main" id="{6C7102A8-5F1A-F587-7366-6A19D88BB182}"/>
                     </a:ext>
                   </a:extLst>
                 </p:cNvPr>
@@ -7801,8 +9993,8 @@
               </p:blipFill>
               <p:spPr>
                 <a:xfrm>
-                  <a:off x="8256024" y="3266496"/>
-                  <a:ext cx="178200" cy="266040"/>
+                  <a:off x="8255664" y="3266524"/>
+                  <a:ext cx="178200" cy="265984"/>
                 </a:xfrm>
                 <a:prstGeom prst="rect">
                   <a:avLst/>
@@ -7811,14 +10003,14 @@
             </p:pic>
           </mc:Fallback>
         </mc:AlternateContent>
-        <mc:AlternateContent xmlns:mc="http://schemas.openxmlformats.org/markup-compatibility/2006" xmlns:p14="http://schemas.microsoft.com/office/powerpoint/2010/main">
-          <mc:Choice Requires="p14">
+        <mc:AlternateContent xmlns:mc="http://schemas.openxmlformats.org/markup-compatibility/2006">
+          <mc:Choice xmlns:p14="http://schemas.microsoft.com/office/powerpoint/2010/main" Requires="p14">
             <p:contentPart p14:bwMode="auto" r:id="rId12">
               <p14:nvContentPartPr>
                 <p14:cNvPr id="16" name="Ink 15">
                   <a:extLst>
                     <a:ext uri="{FF2B5EF4-FFF2-40B4-BE49-F238E27FC236}">
-                      <a16:creationId xmlns:a16="http://schemas.microsoft.com/office/drawing/2014/main" id="{4349F2BA-B32B-92E4-31D4-F73206289EE1}"/>
+                      <a16:creationId xmlns:a16="http://schemas.microsoft.com/office/drawing/2014/main" id="{0BDFA906-6501-1AEB-F402-7CB7E13991E8}"/>
                     </a:ext>
                   </a:extLst>
                 </p14:cNvPr>
@@ -7831,13 +10023,13 @@
               </p14:xfrm>
             </p:contentPart>
           </mc:Choice>
-          <mc:Fallback xmlns="">
+          <mc:Fallback>
             <p:pic>
               <p:nvPicPr>
                 <p:cNvPr id="16" name="Ink 15">
                   <a:extLst>
                     <a:ext uri="{FF2B5EF4-FFF2-40B4-BE49-F238E27FC236}">
-                      <a16:creationId xmlns:a16="http://schemas.microsoft.com/office/drawing/2014/main" id="{4349F2BA-B32B-92E4-31D4-F73206289EE1}"/>
+                      <a16:creationId xmlns:a16="http://schemas.microsoft.com/office/drawing/2014/main" id="{0BDFA906-6501-1AEB-F402-7CB7E13991E8}"/>
                     </a:ext>
                   </a:extLst>
                 </p:cNvPr>
@@ -7852,8 +10044,8 @@
               </p:blipFill>
               <p:spPr>
                 <a:xfrm>
-                  <a:off x="8286264" y="3393936"/>
-                  <a:ext cx="106200" cy="61920"/>
+                  <a:off x="8286264" y="3394179"/>
+                  <a:ext cx="106200" cy="61438"/>
                 </a:xfrm>
                 <a:prstGeom prst="rect">
                   <a:avLst/>
@@ -7862,14 +10054,14 @@
             </p:pic>
           </mc:Fallback>
         </mc:AlternateContent>
-        <mc:AlternateContent xmlns:mc="http://schemas.openxmlformats.org/markup-compatibility/2006" xmlns:p14="http://schemas.microsoft.com/office/powerpoint/2010/main">
-          <mc:Choice Requires="p14">
+        <mc:AlternateContent xmlns:mc="http://schemas.openxmlformats.org/markup-compatibility/2006">
+          <mc:Choice xmlns:p14="http://schemas.microsoft.com/office/powerpoint/2010/main" Requires="p14">
             <p:contentPart p14:bwMode="auto" r:id="rId14">
               <p14:nvContentPartPr>
                 <p14:cNvPr id="17" name="Ink 16">
                   <a:extLst>
                     <a:ext uri="{FF2B5EF4-FFF2-40B4-BE49-F238E27FC236}">
-                      <a16:creationId xmlns:a16="http://schemas.microsoft.com/office/drawing/2014/main" id="{4ADADBC0-1287-633C-4540-786952FF53FB}"/>
+                      <a16:creationId xmlns:a16="http://schemas.microsoft.com/office/drawing/2014/main" id="{8B17624F-2848-DFA0-AB8F-D14269BA947F}"/>
                     </a:ext>
                   </a:extLst>
                 </p14:cNvPr>
@@ -7882,13 +10074,13 @@
               </p14:xfrm>
             </p:contentPart>
           </mc:Choice>
-          <mc:Fallback xmlns="">
+          <mc:Fallback>
             <p:pic>
               <p:nvPicPr>
                 <p:cNvPr id="17" name="Ink 16">
                   <a:extLst>
                     <a:ext uri="{FF2B5EF4-FFF2-40B4-BE49-F238E27FC236}">
-                      <a16:creationId xmlns:a16="http://schemas.microsoft.com/office/drawing/2014/main" id="{4ADADBC0-1287-633C-4540-786952FF53FB}"/>
+                      <a16:creationId xmlns:a16="http://schemas.microsoft.com/office/drawing/2014/main" id="{8B17624F-2848-DFA0-AB8F-D14269BA947F}"/>
                     </a:ext>
                   </a:extLst>
                 </p:cNvPr>
@@ -7903,8 +10095,8 @@
               </p:blipFill>
               <p:spPr>
                 <a:xfrm>
-                  <a:off x="8451864" y="3319056"/>
-                  <a:ext cx="179640" cy="166320"/>
+                  <a:off x="8451909" y="3319056"/>
+                  <a:ext cx="179551" cy="166320"/>
                 </a:xfrm>
                 <a:prstGeom prst="rect">
                   <a:avLst/>
@@ -7913,14 +10105,14 @@
             </p:pic>
           </mc:Fallback>
         </mc:AlternateContent>
-        <mc:AlternateContent xmlns:mc="http://schemas.openxmlformats.org/markup-compatibility/2006" xmlns:p14="http://schemas.microsoft.com/office/powerpoint/2010/main">
-          <mc:Choice Requires="p14">
+        <mc:AlternateContent xmlns:mc="http://schemas.openxmlformats.org/markup-compatibility/2006">
+          <mc:Choice xmlns:p14="http://schemas.microsoft.com/office/powerpoint/2010/main" Requires="p14">
             <p:contentPart p14:bwMode="auto" r:id="rId16">
               <p14:nvContentPartPr>
                 <p14:cNvPr id="18" name="Ink 17">
                   <a:extLst>
                     <a:ext uri="{FF2B5EF4-FFF2-40B4-BE49-F238E27FC236}">
-                      <a16:creationId xmlns:a16="http://schemas.microsoft.com/office/drawing/2014/main" id="{B132E71D-4D5E-4FA4-78C8-6A8D017BFD11}"/>
+                      <a16:creationId xmlns:a16="http://schemas.microsoft.com/office/drawing/2014/main" id="{1B0D44D9-A798-FE14-9077-F24FD4519A72}"/>
                     </a:ext>
                   </a:extLst>
                 </p14:cNvPr>
@@ -7933,13 +10125,13 @@
               </p14:xfrm>
             </p:contentPart>
           </mc:Choice>
-          <mc:Fallback xmlns="">
+          <mc:Fallback>
             <p:pic>
               <p:nvPicPr>
                 <p:cNvPr id="18" name="Ink 17">
                   <a:extLst>
                     <a:ext uri="{FF2B5EF4-FFF2-40B4-BE49-F238E27FC236}">
-                      <a16:creationId xmlns:a16="http://schemas.microsoft.com/office/drawing/2014/main" id="{B132E71D-4D5E-4FA4-78C8-6A8D017BFD11}"/>
+                      <a16:creationId xmlns:a16="http://schemas.microsoft.com/office/drawing/2014/main" id="{1B0D44D9-A798-FE14-9077-F24FD4519A72}"/>
                     </a:ext>
                   </a:extLst>
                 </p:cNvPr>
@@ -7954,8 +10146,8 @@
               </p:blipFill>
               <p:spPr>
                 <a:xfrm>
-                  <a:off x="8594424" y="3223296"/>
-                  <a:ext cx="110520" cy="239040"/>
+                  <a:off x="8594064" y="3223328"/>
+                  <a:ext cx="110520" cy="238977"/>
                 </a:xfrm>
                 <a:prstGeom prst="rect">
                   <a:avLst/>
@@ -7964,14 +10156,14 @@
             </p:pic>
           </mc:Fallback>
         </mc:AlternateContent>
-        <mc:AlternateContent xmlns:mc="http://schemas.openxmlformats.org/markup-compatibility/2006" xmlns:p14="http://schemas.microsoft.com/office/powerpoint/2010/main">
-          <mc:Choice Requires="p14">
+        <mc:AlternateContent xmlns:mc="http://schemas.openxmlformats.org/markup-compatibility/2006">
+          <mc:Choice xmlns:p14="http://schemas.microsoft.com/office/powerpoint/2010/main" Requires="p14">
             <p:contentPart p14:bwMode="auto" r:id="rId18">
               <p14:nvContentPartPr>
                 <p14:cNvPr id="19" name="Ink 18">
                   <a:extLst>
                     <a:ext uri="{FF2B5EF4-FFF2-40B4-BE49-F238E27FC236}">
-                      <a16:creationId xmlns:a16="http://schemas.microsoft.com/office/drawing/2014/main" id="{543F36F5-E3CC-23E3-985C-A9A698CD7922}"/>
+                      <a16:creationId xmlns:a16="http://schemas.microsoft.com/office/drawing/2014/main" id="{754EFDDB-398D-B7D5-C561-71B91B1820C2}"/>
                     </a:ext>
                   </a:extLst>
                 </p14:cNvPr>
@@ -7984,13 +10176,13 @@
               </p14:xfrm>
             </p:contentPart>
           </mc:Choice>
-          <mc:Fallback xmlns="">
+          <mc:Fallback>
             <p:pic>
               <p:nvPicPr>
                 <p:cNvPr id="19" name="Ink 18">
                   <a:extLst>
                     <a:ext uri="{FF2B5EF4-FFF2-40B4-BE49-F238E27FC236}">
-                      <a16:creationId xmlns:a16="http://schemas.microsoft.com/office/drawing/2014/main" id="{543F36F5-E3CC-23E3-985C-A9A698CD7922}"/>
+                      <a16:creationId xmlns:a16="http://schemas.microsoft.com/office/drawing/2014/main" id="{754EFDDB-398D-B7D5-C561-71B91B1820C2}"/>
                     </a:ext>
                   </a:extLst>
                 </p:cNvPr>
@@ -8005,7 +10197,7 @@
               </p:blipFill>
               <p:spPr>
                 <a:xfrm>
-                  <a:off x="8649144" y="3298536"/>
+                  <a:off x="8648784" y="3298536"/>
                   <a:ext cx="191880" cy="146880"/>
                 </a:xfrm>
                 <a:prstGeom prst="rect">
@@ -8015,14 +10207,14 @@
             </p:pic>
           </mc:Fallback>
         </mc:AlternateContent>
-        <mc:AlternateContent xmlns:mc="http://schemas.openxmlformats.org/markup-compatibility/2006" xmlns:p14="http://schemas.microsoft.com/office/powerpoint/2010/main">
-          <mc:Choice Requires="p14">
+        <mc:AlternateContent xmlns:mc="http://schemas.openxmlformats.org/markup-compatibility/2006">
+          <mc:Choice xmlns:p14="http://schemas.microsoft.com/office/powerpoint/2010/main" Requires="p14">
             <p:contentPart p14:bwMode="auto" r:id="rId20">
               <p14:nvContentPartPr>
                 <p14:cNvPr id="20" name="Ink 19">
                   <a:extLst>
                     <a:ext uri="{FF2B5EF4-FFF2-40B4-BE49-F238E27FC236}">
-                      <a16:creationId xmlns:a16="http://schemas.microsoft.com/office/drawing/2014/main" id="{10CD522A-DB0C-2138-5CC2-93A723F85761}"/>
+                      <a16:creationId xmlns:a16="http://schemas.microsoft.com/office/drawing/2014/main" id="{F81536E5-D9CD-9FA4-F6CF-2B08A101BDAC}"/>
                     </a:ext>
                   </a:extLst>
                 </p14:cNvPr>
@@ -8035,13 +10227,13 @@
               </p14:xfrm>
             </p:contentPart>
           </mc:Choice>
-          <mc:Fallback xmlns="">
+          <mc:Fallback>
             <p:pic>
               <p:nvPicPr>
                 <p:cNvPr id="20" name="Ink 19">
                   <a:extLst>
                     <a:ext uri="{FF2B5EF4-FFF2-40B4-BE49-F238E27FC236}">
-                      <a16:creationId xmlns:a16="http://schemas.microsoft.com/office/drawing/2014/main" id="{10CD522A-DB0C-2138-5CC2-93A723F85761}"/>
+                      <a16:creationId xmlns:a16="http://schemas.microsoft.com/office/drawing/2014/main" id="{F81536E5-D9CD-9FA4-F6CF-2B08A101BDAC}"/>
                     </a:ext>
                   </a:extLst>
                 </p:cNvPr>
@@ -8056,8 +10248,8 @@
               </p:blipFill>
               <p:spPr>
                 <a:xfrm>
-                  <a:off x="8839224" y="3292056"/>
-                  <a:ext cx="144720" cy="129600"/>
+                  <a:off x="8838804" y="3291627"/>
+                  <a:ext cx="144838" cy="129737"/>
                 </a:xfrm>
                 <a:prstGeom prst="rect">
                   <a:avLst/>
@@ -8072,7 +10264,7 @@
           <p:cNvPr id="27" name="Group 26">
             <a:extLst>
               <a:ext uri="{FF2B5EF4-FFF2-40B4-BE49-F238E27FC236}">
-                <a16:creationId xmlns:a16="http://schemas.microsoft.com/office/drawing/2014/main" id="{11525B0E-8F39-7B0B-3082-A9A4A4D07494}"/>
+                <a16:creationId xmlns:a16="http://schemas.microsoft.com/office/drawing/2014/main" id="{675FA308-B19D-05F2-DE4F-E35E358F9CB7}"/>
               </a:ext>
             </a:extLst>
           </p:cNvPr>
@@ -8087,14 +10279,14 @@
             <a:chExt cx="551520" cy="126360"/>
           </a:xfrm>
         </p:grpSpPr>
-        <mc:AlternateContent xmlns:mc="http://schemas.openxmlformats.org/markup-compatibility/2006" xmlns:p14="http://schemas.microsoft.com/office/powerpoint/2010/main">
-          <mc:Choice Requires="p14">
+        <mc:AlternateContent xmlns:mc="http://schemas.openxmlformats.org/markup-compatibility/2006">
+          <mc:Choice xmlns:p14="http://schemas.microsoft.com/office/powerpoint/2010/main" Requires="p14">
             <p:contentPart p14:bwMode="auto" r:id="rId22">
               <p14:nvContentPartPr>
                 <p14:cNvPr id="22" name="Ink 21">
                   <a:extLst>
                     <a:ext uri="{FF2B5EF4-FFF2-40B4-BE49-F238E27FC236}">
-                      <a16:creationId xmlns:a16="http://schemas.microsoft.com/office/drawing/2014/main" id="{6C181C98-598D-3B44-6EDD-B8F12D2E9027}"/>
+                      <a16:creationId xmlns:a16="http://schemas.microsoft.com/office/drawing/2014/main" id="{03660660-8ACE-032F-1C94-F335DB496A3C}"/>
                     </a:ext>
                   </a:extLst>
                 </p14:cNvPr>
@@ -8107,13 +10299,13 @@
               </p14:xfrm>
             </p:contentPart>
           </mc:Choice>
-          <mc:Fallback xmlns="">
+          <mc:Fallback>
             <p:pic>
               <p:nvPicPr>
                 <p:cNvPr id="22" name="Ink 21">
                   <a:extLst>
                     <a:ext uri="{FF2B5EF4-FFF2-40B4-BE49-F238E27FC236}">
-                      <a16:creationId xmlns:a16="http://schemas.microsoft.com/office/drawing/2014/main" id="{6C181C98-598D-3B44-6EDD-B8F12D2E9027}"/>
+                      <a16:creationId xmlns:a16="http://schemas.microsoft.com/office/drawing/2014/main" id="{03660660-8ACE-032F-1C94-F335DB496A3C}"/>
                     </a:ext>
                   </a:extLst>
                 </p:cNvPr>
@@ -8128,8 +10320,8 @@
               </p:blipFill>
               <p:spPr>
                 <a:xfrm>
-                  <a:off x="8294184" y="4848696"/>
-                  <a:ext cx="543600" cy="61560"/>
+                  <a:off x="8293811" y="4848082"/>
+                  <a:ext cx="543625" cy="62062"/>
                 </a:xfrm>
                 <a:prstGeom prst="rect">
                   <a:avLst/>
@@ -8138,14 +10330,14 @@
             </p:pic>
           </mc:Fallback>
         </mc:AlternateContent>
-        <mc:AlternateContent xmlns:mc="http://schemas.openxmlformats.org/markup-compatibility/2006" xmlns:p14="http://schemas.microsoft.com/office/powerpoint/2010/main">
-          <mc:Choice Requires="p14">
+        <mc:AlternateContent xmlns:mc="http://schemas.openxmlformats.org/markup-compatibility/2006">
+          <mc:Choice xmlns:p14="http://schemas.microsoft.com/office/powerpoint/2010/main" Requires="p14">
             <p:contentPart p14:bwMode="auto" r:id="rId24">
               <p14:nvContentPartPr>
                 <p14:cNvPr id="23" name="Ink 22">
                   <a:extLst>
                     <a:ext uri="{FF2B5EF4-FFF2-40B4-BE49-F238E27FC236}">
-                      <a16:creationId xmlns:a16="http://schemas.microsoft.com/office/drawing/2014/main" id="{8AE588F6-4D65-BF1F-B26D-09620B15EB49}"/>
+                      <a16:creationId xmlns:a16="http://schemas.microsoft.com/office/drawing/2014/main" id="{12674970-8443-EDFE-AABF-DCD40C0A95FC}"/>
                     </a:ext>
                   </a:extLst>
                 </p14:cNvPr>
@@ -8158,13 +10350,13 @@
               </p14:xfrm>
             </p:contentPart>
           </mc:Choice>
-          <mc:Fallback xmlns="">
+          <mc:Fallback>
             <p:pic>
               <p:nvPicPr>
                 <p:cNvPr id="23" name="Ink 22">
                   <a:extLst>
                     <a:ext uri="{FF2B5EF4-FFF2-40B4-BE49-F238E27FC236}">
-                      <a16:creationId xmlns:a16="http://schemas.microsoft.com/office/drawing/2014/main" id="{8AE588F6-4D65-BF1F-B26D-09620B15EB49}"/>
+                      <a16:creationId xmlns:a16="http://schemas.microsoft.com/office/drawing/2014/main" id="{12674970-8443-EDFE-AABF-DCD40C0A95FC}"/>
                     </a:ext>
                   </a:extLst>
                 </p:cNvPr>
@@ -8179,7 +10371,7 @@
               </p:blipFill>
               <p:spPr>
                 <a:xfrm>
-                  <a:off x="8667864" y="4800456"/>
+                  <a:off x="8667504" y="4800096"/>
                   <a:ext cx="213480" cy="162000"/>
                 </a:xfrm>
                 <a:prstGeom prst="rect">
@@ -8190,14 +10382,14 @@
           </mc:Fallback>
         </mc:AlternateContent>
       </p:grpSp>
-      <mc:AlternateContent xmlns:mc="http://schemas.openxmlformats.org/markup-compatibility/2006" xmlns:p14="http://schemas.microsoft.com/office/powerpoint/2010/main">
-        <mc:Choice Requires="p14">
+      <mc:AlternateContent xmlns:mc="http://schemas.openxmlformats.org/markup-compatibility/2006">
+        <mc:Choice xmlns:p14="http://schemas.microsoft.com/office/powerpoint/2010/main" Requires="p14">
           <p:contentPart p14:bwMode="auto" r:id="rId26">
             <p14:nvContentPartPr>
               <p14:cNvPr id="28" name="Ink 27">
                 <a:extLst>
                   <a:ext uri="{FF2B5EF4-FFF2-40B4-BE49-F238E27FC236}">
-                    <a16:creationId xmlns:a16="http://schemas.microsoft.com/office/drawing/2014/main" id="{2720D8C6-5A26-04CE-BAD7-201795DCC581}"/>
+                    <a16:creationId xmlns:a16="http://schemas.microsoft.com/office/drawing/2014/main" id="{16088388-7A43-B9D0-77AE-BB1F908D7703}"/>
                   </a:ext>
                 </a:extLst>
               </p14:cNvPr>
@@ -8210,13 +10402,13 @@
             </p14:xfrm>
           </p:contentPart>
         </mc:Choice>
-        <mc:Fallback xmlns="">
+        <mc:Fallback>
           <p:pic>
             <p:nvPicPr>
               <p:cNvPr id="28" name="Ink 27">
                 <a:extLst>
                   <a:ext uri="{FF2B5EF4-FFF2-40B4-BE49-F238E27FC236}">
-                    <a16:creationId xmlns:a16="http://schemas.microsoft.com/office/drawing/2014/main" id="{2720D8C6-5A26-04CE-BAD7-201795DCC581}"/>
+                    <a16:creationId xmlns:a16="http://schemas.microsoft.com/office/drawing/2014/main" id="{16088388-7A43-B9D0-77AE-BB1F908D7703}"/>
                   </a:ext>
                 </a:extLst>
               </p:cNvPr>
@@ -8231,7 +10423,7 @@
             </p:blipFill>
             <p:spPr>
               <a:xfrm>
-                <a:off x="10223064" y="3298176"/>
+                <a:off x="10223064" y="3297816"/>
                 <a:ext cx="340560" cy="880560"/>
               </a:xfrm>
               <a:prstGeom prst="rect">
@@ -8246,7 +10438,7 @@
           <p:cNvPr id="33" name="Group 32">
             <a:extLst>
               <a:ext uri="{FF2B5EF4-FFF2-40B4-BE49-F238E27FC236}">
-                <a16:creationId xmlns:a16="http://schemas.microsoft.com/office/drawing/2014/main" id="{3CF53778-E3AE-0470-5993-B18DAA27A3CD}"/>
+                <a16:creationId xmlns:a16="http://schemas.microsoft.com/office/drawing/2014/main" id="{FF393226-0E41-D4A2-5BC0-57AF18D715B1}"/>
               </a:ext>
             </a:extLst>
           </p:cNvPr>
@@ -8261,14 +10453,14 @@
             <a:chExt cx="853560" cy="329760"/>
           </a:xfrm>
         </p:grpSpPr>
-        <mc:AlternateContent xmlns:mc="http://schemas.openxmlformats.org/markup-compatibility/2006" xmlns:p14="http://schemas.microsoft.com/office/powerpoint/2010/main">
-          <mc:Choice Requires="p14">
+        <mc:AlternateContent xmlns:mc="http://schemas.openxmlformats.org/markup-compatibility/2006">
+          <mc:Choice xmlns:p14="http://schemas.microsoft.com/office/powerpoint/2010/main" Requires="p14">
             <p:contentPart p14:bwMode="auto" r:id="rId28">
               <p14:nvContentPartPr>
                 <p14:cNvPr id="29" name="Ink 28">
                   <a:extLst>
                     <a:ext uri="{FF2B5EF4-FFF2-40B4-BE49-F238E27FC236}">
-                      <a16:creationId xmlns:a16="http://schemas.microsoft.com/office/drawing/2014/main" id="{0CCAAC7A-3C96-E70F-3231-D613E1FF9C44}"/>
+                      <a16:creationId xmlns:a16="http://schemas.microsoft.com/office/drawing/2014/main" id="{27F71587-E73D-9842-00A4-B3EAAB59E59F}"/>
                     </a:ext>
                   </a:extLst>
                 </p14:cNvPr>
@@ -8281,13 +10473,13 @@
               </p14:xfrm>
             </p:contentPart>
           </mc:Choice>
-          <mc:Fallback xmlns="">
+          <mc:Fallback>
             <p:pic>
               <p:nvPicPr>
                 <p:cNvPr id="29" name="Ink 28">
                   <a:extLst>
                     <a:ext uri="{FF2B5EF4-FFF2-40B4-BE49-F238E27FC236}">
-                      <a16:creationId xmlns:a16="http://schemas.microsoft.com/office/drawing/2014/main" id="{0CCAAC7A-3C96-E70F-3231-D613E1FF9C44}"/>
+                      <a16:creationId xmlns:a16="http://schemas.microsoft.com/office/drawing/2014/main" id="{27F71587-E73D-9842-00A4-B3EAAB59E59F}"/>
                     </a:ext>
                   </a:extLst>
                 </p:cNvPr>
@@ -8312,14 +10504,14 @@
             </p:pic>
           </mc:Fallback>
         </mc:AlternateContent>
-        <mc:AlternateContent xmlns:mc="http://schemas.openxmlformats.org/markup-compatibility/2006" xmlns:p14="http://schemas.microsoft.com/office/powerpoint/2010/main">
-          <mc:Choice Requires="p14">
+        <mc:AlternateContent xmlns:mc="http://schemas.openxmlformats.org/markup-compatibility/2006">
+          <mc:Choice xmlns:p14="http://schemas.microsoft.com/office/powerpoint/2010/main" Requires="p14">
             <p:contentPart p14:bwMode="auto" r:id="rId30">
               <p14:nvContentPartPr>
                 <p14:cNvPr id="30" name="Ink 29">
                   <a:extLst>
                     <a:ext uri="{FF2B5EF4-FFF2-40B4-BE49-F238E27FC236}">
-                      <a16:creationId xmlns:a16="http://schemas.microsoft.com/office/drawing/2014/main" id="{10ADA723-8238-C03C-1854-C5C46704874D}"/>
+                      <a16:creationId xmlns:a16="http://schemas.microsoft.com/office/drawing/2014/main" id="{C90FECD3-7BDF-EE49-C57F-3D0198F17B32}"/>
                     </a:ext>
                   </a:extLst>
                 </p14:cNvPr>
@@ -8332,13 +10524,13 @@
               </p14:xfrm>
             </p:contentPart>
           </mc:Choice>
-          <mc:Fallback xmlns="">
+          <mc:Fallback>
             <p:pic>
               <p:nvPicPr>
                 <p:cNvPr id="30" name="Ink 29">
                   <a:extLst>
                     <a:ext uri="{FF2B5EF4-FFF2-40B4-BE49-F238E27FC236}">
-                      <a16:creationId xmlns:a16="http://schemas.microsoft.com/office/drawing/2014/main" id="{10ADA723-8238-C03C-1854-C5C46704874D}"/>
+                      <a16:creationId xmlns:a16="http://schemas.microsoft.com/office/drawing/2014/main" id="{C90FECD3-7BDF-EE49-C57F-3D0198F17B32}"/>
                     </a:ext>
                   </a:extLst>
                 </p:cNvPr>
@@ -8353,7 +10545,7 @@
               </p:blipFill>
               <p:spPr>
                 <a:xfrm>
-                  <a:off x="8146584" y="4231656"/>
+                  <a:off x="8146584" y="4231296"/>
                   <a:ext cx="413640" cy="334080"/>
                 </a:xfrm>
                 <a:prstGeom prst="rect">
@@ -8363,14 +10555,14 @@
             </p:pic>
           </mc:Fallback>
         </mc:AlternateContent>
-        <mc:AlternateContent xmlns:mc="http://schemas.openxmlformats.org/markup-compatibility/2006" xmlns:p14="http://schemas.microsoft.com/office/powerpoint/2010/main">
-          <mc:Choice Requires="p14">
+        <mc:AlternateContent xmlns:mc="http://schemas.openxmlformats.org/markup-compatibility/2006">
+          <mc:Choice xmlns:p14="http://schemas.microsoft.com/office/powerpoint/2010/main" Requires="p14">
             <p:contentPart p14:bwMode="auto" r:id="rId32">
               <p14:nvContentPartPr>
                 <p14:cNvPr id="31" name="Ink 30">
                   <a:extLst>
                     <a:ext uri="{FF2B5EF4-FFF2-40B4-BE49-F238E27FC236}">
-                      <a16:creationId xmlns:a16="http://schemas.microsoft.com/office/drawing/2014/main" id="{6AB49C60-6662-8017-B0A6-CDC9C9F8C472}"/>
+                      <a16:creationId xmlns:a16="http://schemas.microsoft.com/office/drawing/2014/main" id="{8633CD0F-7395-0A2A-71D6-A7F664DE156B}"/>
                     </a:ext>
                   </a:extLst>
                 </p14:cNvPr>
@@ -8383,13 +10575,13 @@
               </p14:xfrm>
             </p:contentPart>
           </mc:Choice>
-          <mc:Fallback xmlns="">
+          <mc:Fallback>
             <p:pic>
               <p:nvPicPr>
                 <p:cNvPr id="31" name="Ink 30">
                   <a:extLst>
                     <a:ext uri="{FF2B5EF4-FFF2-40B4-BE49-F238E27FC236}">
-                      <a16:creationId xmlns:a16="http://schemas.microsoft.com/office/drawing/2014/main" id="{6AB49C60-6662-8017-B0A6-CDC9C9F8C472}"/>
+                      <a16:creationId xmlns:a16="http://schemas.microsoft.com/office/drawing/2014/main" id="{8633CD0F-7395-0A2A-71D6-A7F664DE156B}"/>
                     </a:ext>
                   </a:extLst>
                 </p:cNvPr>
@@ -8404,8 +10596,8 @@
               </p:blipFill>
               <p:spPr>
                 <a:xfrm>
-                  <a:off x="8722224" y="4296096"/>
-                  <a:ext cx="212760" cy="194400"/>
+                  <a:off x="8722261" y="4296096"/>
+                  <a:ext cx="212688" cy="194400"/>
                 </a:xfrm>
                 <a:prstGeom prst="rect">
                   <a:avLst/>
@@ -8414,14 +10606,14 @@
             </p:pic>
           </mc:Fallback>
         </mc:AlternateContent>
-        <mc:AlternateContent xmlns:mc="http://schemas.openxmlformats.org/markup-compatibility/2006" xmlns:p14="http://schemas.microsoft.com/office/powerpoint/2010/main">
-          <mc:Choice Requires="p14">
+        <mc:AlternateContent xmlns:mc="http://schemas.openxmlformats.org/markup-compatibility/2006">
+          <mc:Choice xmlns:p14="http://schemas.microsoft.com/office/powerpoint/2010/main" Requires="p14">
             <p:contentPart p14:bwMode="auto" r:id="rId34">
               <p14:nvContentPartPr>
                 <p14:cNvPr id="32" name="Ink 31">
                   <a:extLst>
                     <a:ext uri="{FF2B5EF4-FFF2-40B4-BE49-F238E27FC236}">
-                      <a16:creationId xmlns:a16="http://schemas.microsoft.com/office/drawing/2014/main" id="{54C9E551-A748-36C0-E991-22F3FA161BD1}"/>
+                      <a16:creationId xmlns:a16="http://schemas.microsoft.com/office/drawing/2014/main" id="{E5DF6578-808C-2ACA-C66E-EB4085BB4EA2}"/>
                     </a:ext>
                   </a:extLst>
                 </p14:cNvPr>
@@ -8434,13 +10626,13 @@
               </p14:xfrm>
             </p:contentPart>
           </mc:Choice>
-          <mc:Fallback xmlns="">
+          <mc:Fallback>
             <p:pic>
               <p:nvPicPr>
                 <p:cNvPr id="32" name="Ink 31">
                   <a:extLst>
                     <a:ext uri="{FF2B5EF4-FFF2-40B4-BE49-F238E27FC236}">
-                      <a16:creationId xmlns:a16="http://schemas.microsoft.com/office/drawing/2014/main" id="{54C9E551-A748-36C0-E991-22F3FA161BD1}"/>
+                      <a16:creationId xmlns:a16="http://schemas.microsoft.com/office/drawing/2014/main" id="{E5DF6578-808C-2ACA-C66E-EB4085BB4EA2}"/>
                     </a:ext>
                   </a:extLst>
                 </p:cNvPr>
@@ -8455,7 +10647,7 @@
               </p:blipFill>
               <p:spPr>
                 <a:xfrm>
-                  <a:off x="8622504" y="4207896"/>
+                  <a:off x="8622144" y="4207536"/>
                   <a:ext cx="413640" cy="365400"/>
                 </a:xfrm>
                 <a:prstGeom prst="rect">
@@ -8471,7 +10663,7 @@
           <p:cNvPr id="36" name="Group 35">
             <a:extLst>
               <a:ext uri="{FF2B5EF4-FFF2-40B4-BE49-F238E27FC236}">
-                <a16:creationId xmlns:a16="http://schemas.microsoft.com/office/drawing/2014/main" id="{1E5E5633-C155-927A-573C-BEDBC63C6773}"/>
+                <a16:creationId xmlns:a16="http://schemas.microsoft.com/office/drawing/2014/main" id="{01A4E89F-99C3-9618-C3A1-E548964DA0C9}"/>
               </a:ext>
             </a:extLst>
           </p:cNvPr>
@@ -8486,14 +10678,14 @@
             <a:chExt cx="426600" cy="320040"/>
           </a:xfrm>
         </p:grpSpPr>
-        <mc:AlternateContent xmlns:mc="http://schemas.openxmlformats.org/markup-compatibility/2006" xmlns:p14="http://schemas.microsoft.com/office/powerpoint/2010/main">
-          <mc:Choice Requires="p14">
+        <mc:AlternateContent xmlns:mc="http://schemas.openxmlformats.org/markup-compatibility/2006">
+          <mc:Choice xmlns:p14="http://schemas.microsoft.com/office/powerpoint/2010/main" Requires="p14">
             <p:contentPart p14:bwMode="auto" r:id="rId36">
               <p14:nvContentPartPr>
                 <p14:cNvPr id="34" name="Ink 33">
                   <a:extLst>
                     <a:ext uri="{FF2B5EF4-FFF2-40B4-BE49-F238E27FC236}">
-                      <a16:creationId xmlns:a16="http://schemas.microsoft.com/office/drawing/2014/main" id="{B6ED7EA7-3CA2-677A-61F7-A8921532BB1C}"/>
+                      <a16:creationId xmlns:a16="http://schemas.microsoft.com/office/drawing/2014/main" id="{83784F9E-90C7-BB7D-9217-B9C92A34434B}"/>
                     </a:ext>
                   </a:extLst>
                 </p14:cNvPr>
@@ -8506,13 +10698,13 @@
               </p14:xfrm>
             </p:contentPart>
           </mc:Choice>
-          <mc:Fallback xmlns="">
+          <mc:Fallback>
             <p:pic>
               <p:nvPicPr>
                 <p:cNvPr id="34" name="Ink 33">
                   <a:extLst>
                     <a:ext uri="{FF2B5EF4-FFF2-40B4-BE49-F238E27FC236}">
-                      <a16:creationId xmlns:a16="http://schemas.microsoft.com/office/drawing/2014/main" id="{B6ED7EA7-3CA2-677A-61F7-A8921532BB1C}"/>
+                      <a16:creationId xmlns:a16="http://schemas.microsoft.com/office/drawing/2014/main" id="{83784F9E-90C7-BB7D-9217-B9C92A34434B}"/>
                     </a:ext>
                   </a:extLst>
                 </p:cNvPr>
@@ -8527,8 +10719,8 @@
               </p:blipFill>
               <p:spPr>
                 <a:xfrm>
-                  <a:off x="10598544" y="3674376"/>
-                  <a:ext cx="191880" cy="192240"/>
+                  <a:off x="10598142" y="3674016"/>
+                  <a:ext cx="191962" cy="192240"/>
                 </a:xfrm>
                 <a:prstGeom prst="rect">
                   <a:avLst/>
@@ -8537,14 +10729,14 @@
             </p:pic>
           </mc:Fallback>
         </mc:AlternateContent>
-        <mc:AlternateContent xmlns:mc="http://schemas.openxmlformats.org/markup-compatibility/2006" xmlns:p14="http://schemas.microsoft.com/office/powerpoint/2010/main">
-          <mc:Choice Requires="p14">
+        <mc:AlternateContent xmlns:mc="http://schemas.openxmlformats.org/markup-compatibility/2006">
+          <mc:Choice xmlns:p14="http://schemas.microsoft.com/office/powerpoint/2010/main" Requires="p14">
             <p:contentPart p14:bwMode="auto" r:id="rId38">
               <p14:nvContentPartPr>
                 <p14:cNvPr id="35" name="Ink 34">
                   <a:extLst>
                     <a:ext uri="{FF2B5EF4-FFF2-40B4-BE49-F238E27FC236}">
-                      <a16:creationId xmlns:a16="http://schemas.microsoft.com/office/drawing/2014/main" id="{1EA7B2CC-21B6-2802-DC85-59D99004FD8F}"/>
+                      <a16:creationId xmlns:a16="http://schemas.microsoft.com/office/drawing/2014/main" id="{7A8CB541-4DC3-80C4-D24E-2BA0BD1B5BA0}"/>
                     </a:ext>
                   </a:extLst>
                 </p14:cNvPr>
@@ -8557,13 +10749,13 @@
               </p14:xfrm>
             </p:contentPart>
           </mc:Choice>
-          <mc:Fallback xmlns="">
+          <mc:Fallback>
             <p:pic>
               <p:nvPicPr>
                 <p:cNvPr id="35" name="Ink 34">
                   <a:extLst>
                     <a:ext uri="{FF2B5EF4-FFF2-40B4-BE49-F238E27FC236}">
-                      <a16:creationId xmlns:a16="http://schemas.microsoft.com/office/drawing/2014/main" id="{1EA7B2CC-21B6-2802-DC85-59D99004FD8F}"/>
+                      <a16:creationId xmlns:a16="http://schemas.microsoft.com/office/drawing/2014/main" id="{7A8CB541-4DC3-80C4-D24E-2BA0BD1B5BA0}"/>
                     </a:ext>
                   </a:extLst>
                 </p:cNvPr>
@@ -8578,8 +10770,8 @@
               </p:blipFill>
               <p:spPr>
                 <a:xfrm>
-                  <a:off x="10498464" y="3576456"/>
-                  <a:ext cx="462240" cy="355680"/>
+                  <a:off x="10498089" y="3576096"/>
+                  <a:ext cx="462270" cy="355680"/>
                 </a:xfrm>
                 <a:prstGeom prst="rect">
                   <a:avLst/>
@@ -8589,14 +10781,14 @@
           </mc:Fallback>
         </mc:AlternateContent>
       </p:grpSp>
-      <mc:AlternateContent xmlns:mc="http://schemas.openxmlformats.org/markup-compatibility/2006" xmlns:p14="http://schemas.microsoft.com/office/powerpoint/2010/main">
-        <mc:Choice Requires="p14">
+      <mc:AlternateContent xmlns:mc="http://schemas.openxmlformats.org/markup-compatibility/2006">
+        <mc:Choice xmlns:p14="http://schemas.microsoft.com/office/powerpoint/2010/main" Requires="p14">
           <p:contentPart p14:bwMode="auto" r:id="rId40">
             <p14:nvContentPartPr>
               <p14:cNvPr id="37" name="Ink 36">
                 <a:extLst>
                   <a:ext uri="{FF2B5EF4-FFF2-40B4-BE49-F238E27FC236}">
-                    <a16:creationId xmlns:a16="http://schemas.microsoft.com/office/drawing/2014/main" id="{B4446189-62EA-CC1B-4560-E05CA83E4637}"/>
+                    <a16:creationId xmlns:a16="http://schemas.microsoft.com/office/drawing/2014/main" id="{823A3DCF-DF5C-0269-06C5-49962E563A98}"/>
                   </a:ext>
                 </a:extLst>
               </p14:cNvPr>
@@ -8609,13 +10801,13 @@
             </p14:xfrm>
           </p:contentPart>
         </mc:Choice>
-        <mc:Fallback xmlns="">
+        <mc:Fallback>
           <p:pic>
             <p:nvPicPr>
               <p:cNvPr id="37" name="Ink 36">
                 <a:extLst>
                   <a:ext uri="{FF2B5EF4-FFF2-40B4-BE49-F238E27FC236}">
-                    <a16:creationId xmlns:a16="http://schemas.microsoft.com/office/drawing/2014/main" id="{B4446189-62EA-CC1B-4560-E05CA83E4637}"/>
+                    <a16:creationId xmlns:a16="http://schemas.microsoft.com/office/drawing/2014/main" id="{823A3DCF-DF5C-0269-06C5-49962E563A98}"/>
                   </a:ext>
                 </a:extLst>
               </p:cNvPr>
@@ -8630,8 +10822,8 @@
             </p:blipFill>
             <p:spPr>
               <a:xfrm>
-                <a:off x="9749664" y="2338416"/>
-                <a:ext cx="96120" cy="83160"/>
+                <a:off x="9749556" y="2338056"/>
+                <a:ext cx="96333" cy="83160"/>
               </a:xfrm>
               <a:prstGeom prst="rect">
                 <a:avLst/>
@@ -8640,14 +10832,14 @@
           </p:pic>
         </mc:Fallback>
       </mc:AlternateContent>
-      <mc:AlternateContent xmlns:mc="http://schemas.openxmlformats.org/markup-compatibility/2006" xmlns:p14="http://schemas.microsoft.com/office/powerpoint/2010/main">
-        <mc:Choice Requires="p14">
+      <mc:AlternateContent xmlns:mc="http://schemas.openxmlformats.org/markup-compatibility/2006">
+        <mc:Choice xmlns:p14="http://schemas.microsoft.com/office/powerpoint/2010/main" Requires="p14">
           <p:contentPart p14:bwMode="auto" r:id="rId42">
             <p14:nvContentPartPr>
               <p14:cNvPr id="38" name="Ink 37">
                 <a:extLst>
                   <a:ext uri="{FF2B5EF4-FFF2-40B4-BE49-F238E27FC236}">
-                    <a16:creationId xmlns:a16="http://schemas.microsoft.com/office/drawing/2014/main" id="{6DDA8256-AC7A-5DD6-374F-7A5DAC3862EC}"/>
+                    <a16:creationId xmlns:a16="http://schemas.microsoft.com/office/drawing/2014/main" id="{66350142-038C-ECE8-B003-397B800239AF}"/>
                   </a:ext>
                 </a:extLst>
               </p14:cNvPr>
@@ -8660,13 +10852,13 @@
             </p14:xfrm>
           </p:contentPart>
         </mc:Choice>
-        <mc:Fallback xmlns="">
+        <mc:Fallback>
           <p:pic>
             <p:nvPicPr>
               <p:cNvPr id="38" name="Ink 37">
                 <a:extLst>
                   <a:ext uri="{FF2B5EF4-FFF2-40B4-BE49-F238E27FC236}">
-                    <a16:creationId xmlns:a16="http://schemas.microsoft.com/office/drawing/2014/main" id="{6DDA8256-AC7A-5DD6-374F-7A5DAC3862EC}"/>
+                    <a16:creationId xmlns:a16="http://schemas.microsoft.com/office/drawing/2014/main" id="{66350142-038C-ECE8-B003-397B800239AF}"/>
                   </a:ext>
                 </a:extLst>
               </p:cNvPr>
@@ -8681,7 +10873,7 @@
             </p:blipFill>
             <p:spPr>
               <a:xfrm>
-                <a:off x="10322784" y="2370816"/>
+                <a:off x="10322424" y="2370456"/>
                 <a:ext cx="101160" cy="66600"/>
               </a:xfrm>
               <a:prstGeom prst="rect">
@@ -8696,7 +10888,7 @@
           <p:cNvPr id="45" name="Group 44">
             <a:extLst>
               <a:ext uri="{FF2B5EF4-FFF2-40B4-BE49-F238E27FC236}">
-                <a16:creationId xmlns:a16="http://schemas.microsoft.com/office/drawing/2014/main" id="{7B75E350-3089-2A90-FF5D-0BB8BCE93146}"/>
+                <a16:creationId xmlns:a16="http://schemas.microsoft.com/office/drawing/2014/main" id="{C84E4624-149A-97BC-8ED7-1447C0B21977}"/>
               </a:ext>
             </a:extLst>
           </p:cNvPr>
@@ -8711,14 +10903,14 @@
             <a:chExt cx="894240" cy="239040"/>
           </a:xfrm>
         </p:grpSpPr>
-        <mc:AlternateContent xmlns:mc="http://schemas.openxmlformats.org/markup-compatibility/2006" xmlns:p14="http://schemas.microsoft.com/office/powerpoint/2010/main">
-          <mc:Choice Requires="p14">
+        <mc:AlternateContent xmlns:mc="http://schemas.openxmlformats.org/markup-compatibility/2006">
+          <mc:Choice xmlns:p14="http://schemas.microsoft.com/office/powerpoint/2010/main" Requires="p14">
             <p:contentPart p14:bwMode="auto" r:id="rId44">
               <p14:nvContentPartPr>
                 <p14:cNvPr id="40" name="Ink 39">
                   <a:extLst>
                     <a:ext uri="{FF2B5EF4-FFF2-40B4-BE49-F238E27FC236}">
-                      <a16:creationId xmlns:a16="http://schemas.microsoft.com/office/drawing/2014/main" id="{A51581A7-6284-89DA-3365-1C060C962501}"/>
+                      <a16:creationId xmlns:a16="http://schemas.microsoft.com/office/drawing/2014/main" id="{2F72B349-8FC1-2C2F-4B95-8EE1E1ECEA2A}"/>
                     </a:ext>
                   </a:extLst>
                 </p14:cNvPr>
@@ -8731,13 +10923,13 @@
               </p14:xfrm>
             </p:contentPart>
           </mc:Choice>
-          <mc:Fallback xmlns="">
+          <mc:Fallback>
             <p:pic>
               <p:nvPicPr>
                 <p:cNvPr id="40" name="Ink 39">
                   <a:extLst>
                     <a:ext uri="{FF2B5EF4-FFF2-40B4-BE49-F238E27FC236}">
-                      <a16:creationId xmlns:a16="http://schemas.microsoft.com/office/drawing/2014/main" id="{A51581A7-6284-89DA-3365-1C060C962501}"/>
+                      <a16:creationId xmlns:a16="http://schemas.microsoft.com/office/drawing/2014/main" id="{2F72B349-8FC1-2C2F-4B95-8EE1E1ECEA2A}"/>
                     </a:ext>
                   </a:extLst>
                 </p:cNvPr>
@@ -8762,14 +10954,14 @@
             </p:pic>
           </mc:Fallback>
         </mc:AlternateContent>
-        <mc:AlternateContent xmlns:mc="http://schemas.openxmlformats.org/markup-compatibility/2006" xmlns:p14="http://schemas.microsoft.com/office/powerpoint/2010/main">
-          <mc:Choice Requires="p14">
+        <mc:AlternateContent xmlns:mc="http://schemas.openxmlformats.org/markup-compatibility/2006">
+          <mc:Choice xmlns:p14="http://schemas.microsoft.com/office/powerpoint/2010/main" Requires="p14">
             <p:contentPart p14:bwMode="auto" r:id="rId46">
               <p14:nvContentPartPr>
                 <p14:cNvPr id="41" name="Ink 40">
                   <a:extLst>
                     <a:ext uri="{FF2B5EF4-FFF2-40B4-BE49-F238E27FC236}">
-                      <a16:creationId xmlns:a16="http://schemas.microsoft.com/office/drawing/2014/main" id="{6951254D-881E-D11D-2245-ADEF168194B2}"/>
+                      <a16:creationId xmlns:a16="http://schemas.microsoft.com/office/drawing/2014/main" id="{86CFE3F1-FC3A-79C6-3E81-07452F0A56D4}"/>
                     </a:ext>
                   </a:extLst>
                 </p14:cNvPr>
@@ -8782,13 +10974,13 @@
               </p14:xfrm>
             </p:contentPart>
           </mc:Choice>
-          <mc:Fallback xmlns="">
+          <mc:Fallback>
             <p:pic>
               <p:nvPicPr>
                 <p:cNvPr id="41" name="Ink 40">
                   <a:extLst>
                     <a:ext uri="{FF2B5EF4-FFF2-40B4-BE49-F238E27FC236}">
-                      <a16:creationId xmlns:a16="http://schemas.microsoft.com/office/drawing/2014/main" id="{6951254D-881E-D11D-2245-ADEF168194B2}"/>
+                      <a16:creationId xmlns:a16="http://schemas.microsoft.com/office/drawing/2014/main" id="{86CFE3F1-FC3A-79C6-3E81-07452F0A56D4}"/>
                     </a:ext>
                   </a:extLst>
                 </p:cNvPr>
@@ -8803,8 +10995,8 @@
               </p:blipFill>
               <p:spPr>
                 <a:xfrm>
-                  <a:off x="10396944" y="2786616"/>
-                  <a:ext cx="117720" cy="123120"/>
+                  <a:off x="10396584" y="2786690"/>
+                  <a:ext cx="117720" cy="122974"/>
                 </a:xfrm>
                 <a:prstGeom prst="rect">
                   <a:avLst/>
@@ -8813,14 +11005,14 @@
             </p:pic>
           </mc:Fallback>
         </mc:AlternateContent>
-        <mc:AlternateContent xmlns:mc="http://schemas.openxmlformats.org/markup-compatibility/2006" xmlns:p14="http://schemas.microsoft.com/office/powerpoint/2010/main">
-          <mc:Choice Requires="p14">
+        <mc:AlternateContent xmlns:mc="http://schemas.openxmlformats.org/markup-compatibility/2006">
+          <mc:Choice xmlns:p14="http://schemas.microsoft.com/office/powerpoint/2010/main" Requires="p14">
             <p:contentPart p14:bwMode="auto" r:id="rId48">
               <p14:nvContentPartPr>
                 <p14:cNvPr id="43" name="Ink 42">
                   <a:extLst>
                     <a:ext uri="{FF2B5EF4-FFF2-40B4-BE49-F238E27FC236}">
-                      <a16:creationId xmlns:a16="http://schemas.microsoft.com/office/drawing/2014/main" id="{D87A8007-C872-ED75-9F29-A0D2D116C65B}"/>
+                      <a16:creationId xmlns:a16="http://schemas.microsoft.com/office/drawing/2014/main" id="{10A68E59-1A4D-96A9-9732-FE97783FFAB6}"/>
                     </a:ext>
                   </a:extLst>
                 </p14:cNvPr>
@@ -8833,13 +11025,13 @@
               </p14:xfrm>
             </p:contentPart>
           </mc:Choice>
-          <mc:Fallback xmlns="">
+          <mc:Fallback>
             <p:pic>
               <p:nvPicPr>
                 <p:cNvPr id="43" name="Ink 42">
                   <a:extLst>
                     <a:ext uri="{FF2B5EF4-FFF2-40B4-BE49-F238E27FC236}">
-                      <a16:creationId xmlns:a16="http://schemas.microsoft.com/office/drawing/2014/main" id="{D87A8007-C872-ED75-9F29-A0D2D116C65B}"/>
+                      <a16:creationId xmlns:a16="http://schemas.microsoft.com/office/drawing/2014/main" id="{10A68E59-1A4D-96A9-9732-FE97783FFAB6}"/>
                     </a:ext>
                   </a:extLst>
                 </p:cNvPr>
@@ -8864,14 +11056,14 @@
             </p:pic>
           </mc:Fallback>
         </mc:AlternateContent>
-        <mc:AlternateContent xmlns:mc="http://schemas.openxmlformats.org/markup-compatibility/2006" xmlns:p14="http://schemas.microsoft.com/office/powerpoint/2010/main">
-          <mc:Choice Requires="p14">
+        <mc:AlternateContent xmlns:mc="http://schemas.openxmlformats.org/markup-compatibility/2006">
+          <mc:Choice xmlns:p14="http://schemas.microsoft.com/office/powerpoint/2010/main" Requires="p14">
             <p:contentPart p14:bwMode="auto" r:id="rId50">
               <p14:nvContentPartPr>
                 <p14:cNvPr id="44" name="Ink 43">
                   <a:extLst>
                     <a:ext uri="{FF2B5EF4-FFF2-40B4-BE49-F238E27FC236}">
-                      <a16:creationId xmlns:a16="http://schemas.microsoft.com/office/drawing/2014/main" id="{D5E4451B-F3DC-6488-5BC9-7BE98F3548E0}"/>
+                      <a16:creationId xmlns:a16="http://schemas.microsoft.com/office/drawing/2014/main" id="{E9029D72-A41F-5237-C8A2-4165A7BADE2E}"/>
                     </a:ext>
                   </a:extLst>
                 </p14:cNvPr>
@@ -8884,13 +11076,13 @@
               </p14:xfrm>
             </p:contentPart>
           </mc:Choice>
-          <mc:Fallback xmlns="">
+          <mc:Fallback>
             <p:pic>
               <p:nvPicPr>
                 <p:cNvPr id="44" name="Ink 43">
                   <a:extLst>
                     <a:ext uri="{FF2B5EF4-FFF2-40B4-BE49-F238E27FC236}">
-                      <a16:creationId xmlns:a16="http://schemas.microsoft.com/office/drawing/2014/main" id="{D5E4451B-F3DC-6488-5BC9-7BE98F3548E0}"/>
+                      <a16:creationId xmlns:a16="http://schemas.microsoft.com/office/drawing/2014/main" id="{E9029D72-A41F-5237-C8A2-4165A7BADE2E}"/>
                     </a:ext>
                   </a:extLst>
                 </p:cNvPr>
@@ -8905,7 +11097,7 @@
               </p:blipFill>
               <p:spPr>
                 <a:xfrm>
-                  <a:off x="9584424" y="2743416"/>
+                  <a:off x="9584424" y="2743056"/>
                   <a:ext cx="217440" cy="141120"/>
                 </a:xfrm>
                 <a:prstGeom prst="rect">
@@ -8916,14 +11108,14 @@
           </mc:Fallback>
         </mc:AlternateContent>
       </p:grpSp>
-      <mc:AlternateContent xmlns:mc="http://schemas.openxmlformats.org/markup-compatibility/2006" xmlns:p14="http://schemas.microsoft.com/office/powerpoint/2010/main">
-        <mc:Choice Requires="p14">
+      <mc:AlternateContent xmlns:mc="http://schemas.openxmlformats.org/markup-compatibility/2006">
+        <mc:Choice xmlns:p14="http://schemas.microsoft.com/office/powerpoint/2010/main" Requires="p14">
           <p:contentPart p14:bwMode="auto" r:id="rId52">
             <p14:nvContentPartPr>
               <p14:cNvPr id="46" name="Ink 45">
                 <a:extLst>
                   <a:ext uri="{FF2B5EF4-FFF2-40B4-BE49-F238E27FC236}">
-                    <a16:creationId xmlns:a16="http://schemas.microsoft.com/office/drawing/2014/main" id="{FAE539F5-1814-F360-E50D-DDCA801CDAED}"/>
+                    <a16:creationId xmlns:a16="http://schemas.microsoft.com/office/drawing/2014/main" id="{757DB247-2CA8-B57C-DE74-7EF1045AB619}"/>
                   </a:ext>
                 </a:extLst>
               </p14:cNvPr>
@@ -8936,13 +11128,13 @@
             </p14:xfrm>
           </p:contentPart>
         </mc:Choice>
-        <mc:Fallback xmlns="">
+        <mc:Fallback>
           <p:pic>
             <p:nvPicPr>
               <p:cNvPr id="46" name="Ink 45">
                 <a:extLst>
                   <a:ext uri="{FF2B5EF4-FFF2-40B4-BE49-F238E27FC236}">
-                    <a16:creationId xmlns:a16="http://schemas.microsoft.com/office/drawing/2014/main" id="{FAE539F5-1814-F360-E50D-DDCA801CDAED}"/>
+                    <a16:creationId xmlns:a16="http://schemas.microsoft.com/office/drawing/2014/main" id="{757DB247-2CA8-B57C-DE74-7EF1045AB619}"/>
                   </a:ext>
                 </a:extLst>
               </p:cNvPr>
@@ -8957,7 +11149,7 @@
             </p:blipFill>
             <p:spPr>
               <a:xfrm>
-                <a:off x="9715104" y="2336256"/>
+                <a:off x="9714744" y="2336256"/>
                 <a:ext cx="132120" cy="114120"/>
               </a:xfrm>
               <a:prstGeom prst="rect">
@@ -8967,14 +11159,14 @@
           </p:pic>
         </mc:Fallback>
       </mc:AlternateContent>
-      <mc:AlternateContent xmlns:mc="http://schemas.openxmlformats.org/markup-compatibility/2006" xmlns:p14="http://schemas.microsoft.com/office/powerpoint/2010/main">
-        <mc:Choice Requires="p14">
+      <mc:AlternateContent xmlns:mc="http://schemas.openxmlformats.org/markup-compatibility/2006">
+        <mc:Choice xmlns:p14="http://schemas.microsoft.com/office/powerpoint/2010/main" Requires="p14">
           <p:contentPart p14:bwMode="auto" r:id="rId54">
             <p14:nvContentPartPr>
               <p14:cNvPr id="47" name="Ink 46">
                 <a:extLst>
                   <a:ext uri="{FF2B5EF4-FFF2-40B4-BE49-F238E27FC236}">
-                    <a16:creationId xmlns:a16="http://schemas.microsoft.com/office/drawing/2014/main" id="{2C841379-515F-EBF3-5CD8-636904F768F6}"/>
+                    <a16:creationId xmlns:a16="http://schemas.microsoft.com/office/drawing/2014/main" id="{1812AC28-CED7-2756-0B01-B5AE8B152FDA}"/>
                   </a:ext>
                 </a:extLst>
               </p14:cNvPr>
@@ -8987,13 +11179,13 @@
             </p14:xfrm>
           </p:contentPart>
         </mc:Choice>
-        <mc:Fallback xmlns="">
+        <mc:Fallback>
           <p:pic>
             <p:nvPicPr>
               <p:cNvPr id="47" name="Ink 46">
                 <a:extLst>
                   <a:ext uri="{FF2B5EF4-FFF2-40B4-BE49-F238E27FC236}">
-                    <a16:creationId xmlns:a16="http://schemas.microsoft.com/office/drawing/2014/main" id="{2C841379-515F-EBF3-5CD8-636904F768F6}"/>
+                    <a16:creationId xmlns:a16="http://schemas.microsoft.com/office/drawing/2014/main" id="{1812AC28-CED7-2756-0B01-B5AE8B152FDA}"/>
                   </a:ext>
                 </a:extLst>
               </p:cNvPr>
@@ -9008,7 +11200,7 @@
             </p:blipFill>
             <p:spPr>
               <a:xfrm>
-                <a:off x="10280664" y="2350296"/>
+                <a:off x="10280304" y="2350296"/>
                 <a:ext cx="133560" cy="128880"/>
               </a:xfrm>
               <a:prstGeom prst="rect">
@@ -9018,10 +11210,133 @@
           </p:pic>
         </mc:Fallback>
       </mc:AlternateContent>
+      <p:grpSp>
+        <p:nvGrpSpPr>
+          <p:cNvPr id="5" name="Group 4">
+            <a:extLst>
+              <a:ext uri="{FF2B5EF4-FFF2-40B4-BE49-F238E27FC236}">
+                <a16:creationId xmlns:a16="http://schemas.microsoft.com/office/drawing/2014/main" id="{11695EAC-C5FB-521C-FB01-36DC7A945901}"/>
+              </a:ext>
+            </a:extLst>
+          </p:cNvPr>
+          <p:cNvGrpSpPr/>
+          <p:nvPr/>
+        </p:nvGrpSpPr>
+        <p:grpSpPr>
+          <a:xfrm rot="10525051">
+            <a:off x="8332162" y="5140116"/>
+            <a:ext cx="551520" cy="126360"/>
+            <a:chOff x="8311824" y="4818096"/>
+            <a:chExt cx="551520" cy="126360"/>
+          </a:xfrm>
+        </p:grpSpPr>
+        <mc:AlternateContent xmlns:mc="http://schemas.openxmlformats.org/markup-compatibility/2006">
+          <mc:Choice xmlns:p14="http://schemas.microsoft.com/office/powerpoint/2010/main" Requires="p14">
+            <p:contentPart p14:bwMode="auto" r:id="rId56">
+              <p14:nvContentPartPr>
+                <p14:cNvPr id="6" name="Ink 5">
+                  <a:extLst>
+                    <a:ext uri="{FF2B5EF4-FFF2-40B4-BE49-F238E27FC236}">
+                      <a16:creationId xmlns:a16="http://schemas.microsoft.com/office/drawing/2014/main" id="{71470BBD-1991-3880-4A37-47F48C5440EA}"/>
+                    </a:ext>
+                  </a:extLst>
+                </p14:cNvPr>
+                <p14:cNvContentPartPr/>
+                <p14:nvPr/>
+              </p14:nvContentPartPr>
+              <p14:xfrm>
+                <a:off x="8311824" y="4866336"/>
+                <a:ext cx="507960" cy="25920"/>
+              </p14:xfrm>
+            </p:contentPart>
+          </mc:Choice>
+          <mc:Fallback>
+            <p:pic>
+              <p:nvPicPr>
+                <p:cNvPr id="6" name="Ink 5">
+                  <a:extLst>
+                    <a:ext uri="{FF2B5EF4-FFF2-40B4-BE49-F238E27FC236}">
+                      <a16:creationId xmlns:a16="http://schemas.microsoft.com/office/drawing/2014/main" id="{71470BBD-1991-3880-4A37-47F48C5440EA}"/>
+                    </a:ext>
+                  </a:extLst>
+                </p:cNvPr>
+                <p:cNvPicPr/>
+                <p:nvPr/>
+              </p:nvPicPr>
+              <p:blipFill>
+                <a:blip r:embed="rId23"/>
+                <a:stretch>
+                  <a:fillRect/>
+                </a:stretch>
+              </p:blipFill>
+              <p:spPr>
+                <a:xfrm>
+                  <a:off x="8293811" y="4848082"/>
+                  <a:ext cx="543625" cy="62062"/>
+                </a:xfrm>
+                <a:prstGeom prst="rect">
+                  <a:avLst/>
+                </a:prstGeom>
+              </p:spPr>
+            </p:pic>
+          </mc:Fallback>
+        </mc:AlternateContent>
+        <mc:AlternateContent xmlns:mc="http://schemas.openxmlformats.org/markup-compatibility/2006">
+          <mc:Choice xmlns:p14="http://schemas.microsoft.com/office/powerpoint/2010/main" Requires="p14">
+            <p:contentPart p14:bwMode="auto" r:id="rId57">
+              <p14:nvContentPartPr>
+                <p14:cNvPr id="7" name="Ink 6">
+                  <a:extLst>
+                    <a:ext uri="{FF2B5EF4-FFF2-40B4-BE49-F238E27FC236}">
+                      <a16:creationId xmlns:a16="http://schemas.microsoft.com/office/drawing/2014/main" id="{D150A12E-19DC-74C6-E728-B64B35B1FF93}"/>
+                    </a:ext>
+                  </a:extLst>
+                </p14:cNvPr>
+                <p14:cNvContentPartPr/>
+                <p14:nvPr/>
+              </p14:nvContentPartPr>
+              <p14:xfrm>
+                <a:off x="8685504" y="4818096"/>
+                <a:ext cx="177840" cy="126360"/>
+              </p14:xfrm>
+            </p:contentPart>
+          </mc:Choice>
+          <mc:Fallback>
+            <p:pic>
+              <p:nvPicPr>
+                <p:cNvPr id="7" name="Ink 6">
+                  <a:extLst>
+                    <a:ext uri="{FF2B5EF4-FFF2-40B4-BE49-F238E27FC236}">
+                      <a16:creationId xmlns:a16="http://schemas.microsoft.com/office/drawing/2014/main" id="{D150A12E-19DC-74C6-E728-B64B35B1FF93}"/>
+                    </a:ext>
+                  </a:extLst>
+                </p:cNvPr>
+                <p:cNvPicPr/>
+                <p:nvPr/>
+              </p:nvPicPr>
+              <p:blipFill>
+                <a:blip r:embed="rId25"/>
+                <a:stretch>
+                  <a:fillRect/>
+                </a:stretch>
+              </p:blipFill>
+              <p:spPr>
+                <a:xfrm>
+                  <a:off x="8667504" y="4800096"/>
+                  <a:ext cx="213480" cy="162000"/>
+                </a:xfrm>
+                <a:prstGeom prst="rect">
+                  <a:avLst/>
+                </a:prstGeom>
+              </p:spPr>
+            </p:pic>
+          </mc:Fallback>
+        </mc:AlternateContent>
+      </p:grpSp>
     </p:spTree>
     <p:extLst>
       <p:ext uri="{BB962C8B-B14F-4D97-AF65-F5344CB8AC3E}">
-        <p14:creationId xmlns:p14="http://schemas.microsoft.com/office/powerpoint/2010/main" val="545105049"/>
+        <p14:creationId xmlns:p14="http://schemas.microsoft.com/office/powerpoint/2010/main" val="2806154215"/>
       </p:ext>
     </p:extLst>
   </p:cSld>
@@ -9031,7 +11346,7 @@
 </p:sld>
 </file>
 
-<file path=ppt/slides/slide3.xml><?xml version="1.0" encoding="utf-8"?>
+<file path=ppt/slides/slide4.xml><?xml version="1.0" encoding="utf-8"?>
 <p:sld xmlns:a="http://schemas.openxmlformats.org/drawingml/2006/main" xmlns:r="http://schemas.openxmlformats.org/officeDocument/2006/relationships" xmlns:p="http://schemas.openxmlformats.org/presentationml/2006/main">
   <p:cSld>
     <p:spTree>
@@ -9069,7 +11384,7 @@
         <p:spPr>
           <a:xfrm>
             <a:off x="148336" y="199104"/>
-            <a:ext cx="10292080" cy="3785652"/>
+            <a:ext cx="10292080" cy="4154984"/>
           </a:xfrm>
           <a:prstGeom prst="rect">
             <a:avLst/>
@@ -9273,6 +11588,19 @@
               <a:t>Model answers using that info</a:t>
             </a:r>
           </a:p>
+          <a:p>
+            <a:r>
+              <a:rPr lang="en-US" sz="2400" dirty="0">
+                <a:solidFill>
+                  <a:schemeClr val="accent6">
+                    <a:lumMod val="60000"/>
+                    <a:lumOff val="40000"/>
+                  </a:schemeClr>
+                </a:solidFill>
+              </a:rPr>
+              <a:t>“The refund policy of Loxford Academy is 7 days.”</a:t>
+            </a:r>
+          </a:p>
         </p:txBody>
       </p:sp>
       <p:sp>
@@ -10905,8 +13233,8 @@
         </p:nvSpPr>
         <p:spPr>
           <a:xfrm>
-            <a:off x="6684264" y="4532376"/>
-            <a:ext cx="1499616" cy="798576"/>
+            <a:off x="5815584" y="4532376"/>
+            <a:ext cx="2447232" cy="969264"/>
           </a:xfrm>
           <a:prstGeom prst="rect">
             <a:avLst/>
@@ -10954,6 +13282,129 @@
           </a:p>
         </p:txBody>
       </p:sp>
+      <p:grpSp>
+        <p:nvGrpSpPr>
+          <p:cNvPr id="4" name="Group 3">
+            <a:extLst>
+              <a:ext uri="{FF2B5EF4-FFF2-40B4-BE49-F238E27FC236}">
+                <a16:creationId xmlns:a16="http://schemas.microsoft.com/office/drawing/2014/main" id="{5AAEF5E6-DC44-5990-A3C9-5D5AA052A73B}"/>
+              </a:ext>
+            </a:extLst>
+          </p:cNvPr>
+          <p:cNvGrpSpPr/>
+          <p:nvPr/>
+        </p:nvGrpSpPr>
+        <p:grpSpPr>
+          <a:xfrm rot="10525051">
+            <a:off x="8332162" y="5140116"/>
+            <a:ext cx="551520" cy="126360"/>
+            <a:chOff x="8311824" y="4818096"/>
+            <a:chExt cx="551520" cy="126360"/>
+          </a:xfrm>
+        </p:grpSpPr>
+        <mc:AlternateContent xmlns:mc="http://schemas.openxmlformats.org/markup-compatibility/2006">
+          <mc:Choice xmlns:p14="http://schemas.microsoft.com/office/powerpoint/2010/main" Requires="p14">
+            <p:contentPart p14:bwMode="auto" r:id="rId56">
+              <p14:nvContentPartPr>
+                <p14:cNvPr id="40" name="Ink 39">
+                  <a:extLst>
+                    <a:ext uri="{FF2B5EF4-FFF2-40B4-BE49-F238E27FC236}">
+                      <a16:creationId xmlns:a16="http://schemas.microsoft.com/office/drawing/2014/main" id="{3A24803C-A474-A6E9-DB54-8F956FD54394}"/>
+                    </a:ext>
+                  </a:extLst>
+                </p14:cNvPr>
+                <p14:cNvContentPartPr/>
+                <p14:nvPr/>
+              </p14:nvContentPartPr>
+              <p14:xfrm>
+                <a:off x="8311824" y="4866336"/>
+                <a:ext cx="507960" cy="25920"/>
+              </p14:xfrm>
+            </p:contentPart>
+          </mc:Choice>
+          <mc:Fallback>
+            <p:pic>
+              <p:nvPicPr>
+                <p:cNvPr id="40" name="Ink 39">
+                  <a:extLst>
+                    <a:ext uri="{FF2B5EF4-FFF2-40B4-BE49-F238E27FC236}">
+                      <a16:creationId xmlns:a16="http://schemas.microsoft.com/office/drawing/2014/main" id="{3A24803C-A474-A6E9-DB54-8F956FD54394}"/>
+                    </a:ext>
+                  </a:extLst>
+                </p:cNvPr>
+                <p:cNvPicPr/>
+                <p:nvPr/>
+              </p:nvPicPr>
+              <p:blipFill>
+                <a:blip r:embed="rId29"/>
+                <a:stretch>
+                  <a:fillRect/>
+                </a:stretch>
+              </p:blipFill>
+              <p:spPr>
+                <a:xfrm>
+                  <a:off x="8293811" y="4848082"/>
+                  <a:ext cx="543625" cy="62062"/>
+                </a:xfrm>
+                <a:prstGeom prst="rect">
+                  <a:avLst/>
+                </a:prstGeom>
+              </p:spPr>
+            </p:pic>
+          </mc:Fallback>
+        </mc:AlternateContent>
+        <mc:AlternateContent xmlns:mc="http://schemas.openxmlformats.org/markup-compatibility/2006">
+          <mc:Choice xmlns:p14="http://schemas.microsoft.com/office/powerpoint/2010/main" Requires="p14">
+            <p:contentPart p14:bwMode="auto" r:id="rId57">
+              <p14:nvContentPartPr>
+                <p14:cNvPr id="41" name="Ink 40">
+                  <a:extLst>
+                    <a:ext uri="{FF2B5EF4-FFF2-40B4-BE49-F238E27FC236}">
+                      <a16:creationId xmlns:a16="http://schemas.microsoft.com/office/drawing/2014/main" id="{2D843097-315C-5E5C-EE63-D0D558057635}"/>
+                    </a:ext>
+                  </a:extLst>
+                </p14:cNvPr>
+                <p14:cNvContentPartPr/>
+                <p14:nvPr/>
+              </p14:nvContentPartPr>
+              <p14:xfrm>
+                <a:off x="8685504" y="4818096"/>
+                <a:ext cx="177840" cy="126360"/>
+              </p14:xfrm>
+            </p:contentPart>
+          </mc:Choice>
+          <mc:Fallback>
+            <p:pic>
+              <p:nvPicPr>
+                <p:cNvPr id="41" name="Ink 40">
+                  <a:extLst>
+                    <a:ext uri="{FF2B5EF4-FFF2-40B4-BE49-F238E27FC236}">
+                      <a16:creationId xmlns:a16="http://schemas.microsoft.com/office/drawing/2014/main" id="{2D843097-315C-5E5C-EE63-D0D558057635}"/>
+                    </a:ext>
+                  </a:extLst>
+                </p:cNvPr>
+                <p:cNvPicPr/>
+                <p:nvPr/>
+              </p:nvPicPr>
+              <p:blipFill>
+                <a:blip r:embed="rId31"/>
+                <a:stretch>
+                  <a:fillRect/>
+                </a:stretch>
+              </p:blipFill>
+              <p:spPr>
+                <a:xfrm>
+                  <a:off x="8667504" y="4800096"/>
+                  <a:ext cx="213480" cy="162000"/>
+                </a:xfrm>
+                <a:prstGeom prst="rect">
+                  <a:avLst/>
+                </a:prstGeom>
+              </p:spPr>
+            </p:pic>
+          </mc:Fallback>
+        </mc:AlternateContent>
+      </p:grpSp>
     </p:spTree>
     <p:extLst>
       <p:ext uri="{BB962C8B-B14F-4D97-AF65-F5344CB8AC3E}">
@@ -10967,7 +13418,7 @@
 </p:sld>
 </file>
 
-<file path=ppt/slides/slide4.xml><?xml version="1.0" encoding="utf-8"?>
+<file path=ppt/slides/slide5.xml><?xml version="1.0" encoding="utf-8"?>
 <p:sld xmlns:a="http://schemas.openxmlformats.org/drawingml/2006/main" xmlns:r="http://schemas.openxmlformats.org/officeDocument/2006/relationships" xmlns:p="http://schemas.openxmlformats.org/presentationml/2006/main">
   <p:cSld>
     <p:spTree>
@@ -11005,7 +13456,7 @@
         <p:spPr>
           <a:xfrm>
             <a:off x="148336" y="199104"/>
-            <a:ext cx="10292080" cy="1569660"/>
+            <a:ext cx="7386320" cy="1569660"/>
           </a:xfrm>
           <a:prstGeom prst="rect">
             <a:avLst/>
@@ -11083,45 +13534,6 @@
                   </a:schemeClr>
                 </a:solidFill>
               </a:rPr>
-              <a:t>You want </a:t>
-            </a:r>
-            <a:r>
-              <a:rPr lang="en-US" sz="2400" b="1" dirty="0">
-                <a:solidFill>
-                  <a:schemeClr val="accent6">
-                    <a:lumMod val="60000"/>
-                    <a:lumOff val="40000"/>
-                  </a:schemeClr>
-                </a:solidFill>
-              </a:rPr>
-              <a:t>factual accuracy</a:t>
-            </a:r>
-            <a:r>
-              <a:rPr lang="en-US" sz="2400" dirty="0">
-                <a:solidFill>
-                  <a:schemeClr val="accent6">
-                    <a:lumMod val="60000"/>
-                    <a:lumOff val="40000"/>
-                  </a:schemeClr>
-                </a:solidFill>
-              </a:rPr>
-              <a:t> </a:t>
-            </a:r>
-          </a:p>
-          <a:p>
-            <a:pPr marL="342900" indent="-342900">
-              <a:buFont typeface="Arial" panose="020B0604020202020204" pitchFamily="34" charset="0"/>
-              <a:buChar char="•"/>
-            </a:pPr>
-            <a:r>
-              <a:rPr lang="en-US" sz="2400" dirty="0">
-                <a:solidFill>
-                  <a:schemeClr val="accent6">
-                    <a:lumMod val="60000"/>
-                    <a:lumOff val="40000"/>
-                  </a:schemeClr>
-                </a:solidFill>
-              </a:rPr>
               <a:t>You need </a:t>
             </a:r>
             <a:r>
@@ -11144,8 +13556,27 @@
                   </a:schemeClr>
                 </a:solidFill>
               </a:rPr>
-              <a:t> </a:t>
+              <a:t> or </a:t>
             </a:r>
+            <a:r>
+              <a:rPr lang="en-US" sz="2400" b="1" dirty="0">
+                <a:solidFill>
+                  <a:schemeClr val="accent6">
+                    <a:lumMod val="60000"/>
+                    <a:lumOff val="40000"/>
+                  </a:schemeClr>
+                </a:solidFill>
+              </a:rPr>
+              <a:t>answer that are relevant to your domain</a:t>
+            </a:r>
+            <a:endParaRPr lang="en-US" sz="2400" dirty="0">
+              <a:solidFill>
+                <a:schemeClr val="accent6">
+                  <a:lumMod val="60000"/>
+                  <a:lumOff val="40000"/>
+                </a:schemeClr>
+              </a:solidFill>
+            </a:endParaRPr>
           </a:p>
         </p:txBody>
       </p:sp>
@@ -12817,6 +15248,129 @@
           </a:p>
         </p:txBody>
       </p:sp>
+      <p:grpSp>
+        <p:nvGrpSpPr>
+          <p:cNvPr id="4" name="Group 3">
+            <a:extLst>
+              <a:ext uri="{FF2B5EF4-FFF2-40B4-BE49-F238E27FC236}">
+                <a16:creationId xmlns:a16="http://schemas.microsoft.com/office/drawing/2014/main" id="{03ED3768-C83A-C500-9029-8BDE671DAE2E}"/>
+              </a:ext>
+            </a:extLst>
+          </p:cNvPr>
+          <p:cNvGrpSpPr/>
+          <p:nvPr/>
+        </p:nvGrpSpPr>
+        <p:grpSpPr>
+          <a:xfrm rot="10525051">
+            <a:off x="8332162" y="5140116"/>
+            <a:ext cx="551520" cy="126360"/>
+            <a:chOff x="8311824" y="4818096"/>
+            <a:chExt cx="551520" cy="126360"/>
+          </a:xfrm>
+        </p:grpSpPr>
+        <mc:AlternateContent xmlns:mc="http://schemas.openxmlformats.org/markup-compatibility/2006">
+          <mc:Choice xmlns:p14="http://schemas.microsoft.com/office/powerpoint/2010/main" Requires="p14">
+            <p:contentPart p14:bwMode="auto" r:id="rId56">
+              <p14:nvContentPartPr>
+                <p14:cNvPr id="40" name="Ink 39">
+                  <a:extLst>
+                    <a:ext uri="{FF2B5EF4-FFF2-40B4-BE49-F238E27FC236}">
+                      <a16:creationId xmlns:a16="http://schemas.microsoft.com/office/drawing/2014/main" id="{17F7FCD6-1594-B896-7E67-B088A3328F2C}"/>
+                    </a:ext>
+                  </a:extLst>
+                </p14:cNvPr>
+                <p14:cNvContentPartPr/>
+                <p14:nvPr/>
+              </p14:nvContentPartPr>
+              <p14:xfrm>
+                <a:off x="8311824" y="4866336"/>
+                <a:ext cx="507960" cy="25920"/>
+              </p14:xfrm>
+            </p:contentPart>
+          </mc:Choice>
+          <mc:Fallback>
+            <p:pic>
+              <p:nvPicPr>
+                <p:cNvPr id="40" name="Ink 39">
+                  <a:extLst>
+                    <a:ext uri="{FF2B5EF4-FFF2-40B4-BE49-F238E27FC236}">
+                      <a16:creationId xmlns:a16="http://schemas.microsoft.com/office/drawing/2014/main" id="{17F7FCD6-1594-B896-7E67-B088A3328F2C}"/>
+                    </a:ext>
+                  </a:extLst>
+                </p:cNvPr>
+                <p:cNvPicPr/>
+                <p:nvPr/>
+              </p:nvPicPr>
+              <p:blipFill>
+                <a:blip r:embed="rId29"/>
+                <a:stretch>
+                  <a:fillRect/>
+                </a:stretch>
+              </p:blipFill>
+              <p:spPr>
+                <a:xfrm>
+                  <a:off x="8293811" y="4848082"/>
+                  <a:ext cx="543625" cy="62062"/>
+                </a:xfrm>
+                <a:prstGeom prst="rect">
+                  <a:avLst/>
+                </a:prstGeom>
+              </p:spPr>
+            </p:pic>
+          </mc:Fallback>
+        </mc:AlternateContent>
+        <mc:AlternateContent xmlns:mc="http://schemas.openxmlformats.org/markup-compatibility/2006">
+          <mc:Choice xmlns:p14="http://schemas.microsoft.com/office/powerpoint/2010/main" Requires="p14">
+            <p:contentPart p14:bwMode="auto" r:id="rId57">
+              <p14:nvContentPartPr>
+                <p14:cNvPr id="41" name="Ink 40">
+                  <a:extLst>
+                    <a:ext uri="{FF2B5EF4-FFF2-40B4-BE49-F238E27FC236}">
+                      <a16:creationId xmlns:a16="http://schemas.microsoft.com/office/drawing/2014/main" id="{E8819804-DA26-8BFA-B491-1C504F8B1A7B}"/>
+                    </a:ext>
+                  </a:extLst>
+                </p14:cNvPr>
+                <p14:cNvContentPartPr/>
+                <p14:nvPr/>
+              </p14:nvContentPartPr>
+              <p14:xfrm>
+                <a:off x="8685504" y="4818096"/>
+                <a:ext cx="177840" cy="126360"/>
+              </p14:xfrm>
+            </p:contentPart>
+          </mc:Choice>
+          <mc:Fallback>
+            <p:pic>
+              <p:nvPicPr>
+                <p:cNvPr id="41" name="Ink 40">
+                  <a:extLst>
+                    <a:ext uri="{FF2B5EF4-FFF2-40B4-BE49-F238E27FC236}">
+                      <a16:creationId xmlns:a16="http://schemas.microsoft.com/office/drawing/2014/main" id="{E8819804-DA26-8BFA-B491-1C504F8B1A7B}"/>
+                    </a:ext>
+                  </a:extLst>
+                </p:cNvPr>
+                <p:cNvPicPr/>
+                <p:nvPr/>
+              </p:nvPicPr>
+              <p:blipFill>
+                <a:blip r:embed="rId31"/>
+                <a:stretch>
+                  <a:fillRect/>
+                </a:stretch>
+              </p:blipFill>
+              <p:spPr>
+                <a:xfrm>
+                  <a:off x="8667504" y="4800096"/>
+                  <a:ext cx="213480" cy="162000"/>
+                </a:xfrm>
+                <a:prstGeom prst="rect">
+                  <a:avLst/>
+                </a:prstGeom>
+              </p:spPr>
+            </p:pic>
+          </mc:Fallback>
+        </mc:AlternateContent>
+      </p:grpSp>
     </p:spTree>
     <p:extLst>
       <p:ext uri="{BB962C8B-B14F-4D97-AF65-F5344CB8AC3E}">
@@ -12830,7 +15384,7 @@
 </p:sld>
 </file>
 
-<file path=ppt/slides/slide5.xml><?xml version="1.0" encoding="utf-8"?>
+<file path=ppt/slides/slide6.xml><?xml version="1.0" encoding="utf-8"?>
 <p:sld xmlns:a="http://schemas.openxmlformats.org/drawingml/2006/main" xmlns:r="http://schemas.openxmlformats.org/officeDocument/2006/relationships" xmlns:p="http://schemas.openxmlformats.org/presentationml/2006/main">
   <p:cSld>
     <p:spTree>
@@ -12907,7 +15461,7 @@
                   </a:schemeClr>
                 </a:solidFill>
               </a:rPr>
-              <a:t>Depends on retrieval quality </a:t>
+              <a:t>Depends on retrieval quality (step2 , 3) </a:t>
             </a:r>
           </a:p>
           <a:p>
@@ -14614,6 +17168,129 @@
           </a:p>
         </p:txBody>
       </p:sp>
+      <p:grpSp>
+        <p:nvGrpSpPr>
+          <p:cNvPr id="4" name="Group 3">
+            <a:extLst>
+              <a:ext uri="{FF2B5EF4-FFF2-40B4-BE49-F238E27FC236}">
+                <a16:creationId xmlns:a16="http://schemas.microsoft.com/office/drawing/2014/main" id="{C66FA6CC-99B2-E111-965F-089BFFC1D93D}"/>
+              </a:ext>
+            </a:extLst>
+          </p:cNvPr>
+          <p:cNvGrpSpPr/>
+          <p:nvPr/>
+        </p:nvGrpSpPr>
+        <p:grpSpPr>
+          <a:xfrm rot="10525051">
+            <a:off x="8332162" y="5140116"/>
+            <a:ext cx="551520" cy="126360"/>
+            <a:chOff x="8311824" y="4818096"/>
+            <a:chExt cx="551520" cy="126360"/>
+          </a:xfrm>
+        </p:grpSpPr>
+        <mc:AlternateContent xmlns:mc="http://schemas.openxmlformats.org/markup-compatibility/2006">
+          <mc:Choice xmlns:p14="http://schemas.microsoft.com/office/powerpoint/2010/main" Requires="p14">
+            <p:contentPart p14:bwMode="auto" r:id="rId56">
+              <p14:nvContentPartPr>
+                <p14:cNvPr id="40" name="Ink 39">
+                  <a:extLst>
+                    <a:ext uri="{FF2B5EF4-FFF2-40B4-BE49-F238E27FC236}">
+                      <a16:creationId xmlns:a16="http://schemas.microsoft.com/office/drawing/2014/main" id="{AF47DE95-0E24-A615-F073-D3EB9AC8833F}"/>
+                    </a:ext>
+                  </a:extLst>
+                </p14:cNvPr>
+                <p14:cNvContentPartPr/>
+                <p14:nvPr/>
+              </p14:nvContentPartPr>
+              <p14:xfrm>
+                <a:off x="8311824" y="4866336"/>
+                <a:ext cx="507960" cy="25920"/>
+              </p14:xfrm>
+            </p:contentPart>
+          </mc:Choice>
+          <mc:Fallback>
+            <p:pic>
+              <p:nvPicPr>
+                <p:cNvPr id="40" name="Ink 39">
+                  <a:extLst>
+                    <a:ext uri="{FF2B5EF4-FFF2-40B4-BE49-F238E27FC236}">
+                      <a16:creationId xmlns:a16="http://schemas.microsoft.com/office/drawing/2014/main" id="{AF47DE95-0E24-A615-F073-D3EB9AC8833F}"/>
+                    </a:ext>
+                  </a:extLst>
+                </p:cNvPr>
+                <p:cNvPicPr/>
+                <p:nvPr/>
+              </p:nvPicPr>
+              <p:blipFill>
+                <a:blip r:embed="rId29"/>
+                <a:stretch>
+                  <a:fillRect/>
+                </a:stretch>
+              </p:blipFill>
+              <p:spPr>
+                <a:xfrm>
+                  <a:off x="8293811" y="4848082"/>
+                  <a:ext cx="543625" cy="62062"/>
+                </a:xfrm>
+                <a:prstGeom prst="rect">
+                  <a:avLst/>
+                </a:prstGeom>
+              </p:spPr>
+            </p:pic>
+          </mc:Fallback>
+        </mc:AlternateContent>
+        <mc:AlternateContent xmlns:mc="http://schemas.openxmlformats.org/markup-compatibility/2006">
+          <mc:Choice xmlns:p14="http://schemas.microsoft.com/office/powerpoint/2010/main" Requires="p14">
+            <p:contentPart p14:bwMode="auto" r:id="rId57">
+              <p14:nvContentPartPr>
+                <p14:cNvPr id="41" name="Ink 40">
+                  <a:extLst>
+                    <a:ext uri="{FF2B5EF4-FFF2-40B4-BE49-F238E27FC236}">
+                      <a16:creationId xmlns:a16="http://schemas.microsoft.com/office/drawing/2014/main" id="{91F22CFE-D89B-EAEF-2F29-B5921C615D7E}"/>
+                    </a:ext>
+                  </a:extLst>
+                </p14:cNvPr>
+                <p14:cNvContentPartPr/>
+                <p14:nvPr/>
+              </p14:nvContentPartPr>
+              <p14:xfrm>
+                <a:off x="8685504" y="4818096"/>
+                <a:ext cx="177840" cy="126360"/>
+              </p14:xfrm>
+            </p:contentPart>
+          </mc:Choice>
+          <mc:Fallback>
+            <p:pic>
+              <p:nvPicPr>
+                <p:cNvPr id="41" name="Ink 40">
+                  <a:extLst>
+                    <a:ext uri="{FF2B5EF4-FFF2-40B4-BE49-F238E27FC236}">
+                      <a16:creationId xmlns:a16="http://schemas.microsoft.com/office/drawing/2014/main" id="{91F22CFE-D89B-EAEF-2F29-B5921C615D7E}"/>
+                    </a:ext>
+                  </a:extLst>
+                </p:cNvPr>
+                <p:cNvPicPr/>
+                <p:nvPr/>
+              </p:nvPicPr>
+              <p:blipFill>
+                <a:blip r:embed="rId31"/>
+                <a:stretch>
+                  <a:fillRect/>
+                </a:stretch>
+              </p:blipFill>
+              <p:spPr>
+                <a:xfrm>
+                  <a:off x="8667504" y="4800096"/>
+                  <a:ext cx="213480" cy="162000"/>
+                </a:xfrm>
+                <a:prstGeom prst="rect">
+                  <a:avLst/>
+                </a:prstGeom>
+              </p:spPr>
+            </p:pic>
+          </mc:Fallback>
+        </mc:AlternateContent>
+      </p:grpSp>
     </p:spTree>
     <p:extLst>
       <p:ext uri="{BB962C8B-B14F-4D97-AF65-F5344CB8AC3E}">
@@ -14627,7 +17304,7 @@
 </p:sld>
 </file>
 
-<file path=ppt/slides/slide6.xml><?xml version="1.0" encoding="utf-8"?>
+<file path=ppt/slides/slide7.xml><?xml version="1.0" encoding="utf-8"?>
 <p:sld xmlns:a="http://schemas.openxmlformats.org/drawingml/2006/main" xmlns:r="http://schemas.openxmlformats.org/officeDocument/2006/relationships" xmlns:p="http://schemas.openxmlformats.org/presentationml/2006/main">
   <p:cSld>
     <p:spTree>
@@ -14707,7 +17384,7 @@
           <p:nvPr>
             <p:extLst>
               <p:ext uri="{D42A27DB-BD31-4B8C-83A1-F6EECF244321}">
-                <p14:modId xmlns:p14="http://schemas.microsoft.com/office/powerpoint/2010/main" val="158420938"/>
+                <p14:modId xmlns:p14="http://schemas.microsoft.com/office/powerpoint/2010/main" val="1598454026"/>
               </p:ext>
             </p:extLst>
           </p:nvPr>
@@ -14749,11 +17426,11 @@
                     <a:bodyPr/>
                     <a:lstStyle/>
                     <a:p>
-                      <a:pPr>
+                      <a:pPr algn="ctr">
                         <a:buNone/>
                       </a:pPr>
                       <a:r>
-                        <a:rPr lang="en-US" sz="2400">
+                        <a:rPr lang="en-US" sz="2400" b="1" u="sng" dirty="0">
                           <a:solidFill>
                             <a:schemeClr val="accent6">
                               <a:lumMod val="60000"/>
@@ -14786,11 +17463,11 @@
                     <a:bodyPr/>
                     <a:lstStyle/>
                     <a:p>
-                      <a:pPr>
+                      <a:pPr algn="ctr">
                         <a:buNone/>
                       </a:pPr>
                       <a:r>
-                        <a:rPr lang="en-US" sz="2400">
+                        <a:rPr lang="en-US" sz="2400" b="1" u="sng" dirty="0">
                           <a:solidFill>
                             <a:schemeClr val="accent6">
                               <a:lumMod val="60000"/>
@@ -14823,11 +17500,11 @@
                     <a:bodyPr/>
                     <a:lstStyle/>
                     <a:p>
-                      <a:pPr>
+                      <a:pPr algn="ctr">
                         <a:buNone/>
                       </a:pPr>
                       <a:r>
-                        <a:rPr lang="en-US" sz="2400">
+                        <a:rPr lang="en-US" sz="2400" b="1" u="sng" dirty="0">
                           <a:solidFill>
                             <a:schemeClr val="accent6">
                               <a:lumMod val="60000"/>
@@ -14867,11 +17544,11 @@
                     <a:bodyPr/>
                     <a:lstStyle/>
                     <a:p>
-                      <a:pPr>
+                      <a:pPr algn="ctr">
                         <a:buNone/>
                       </a:pPr>
                       <a:r>
-                        <a:rPr lang="en-US" sz="2400">
+                        <a:rPr lang="en-US" sz="2400" dirty="0">
                           <a:solidFill>
                             <a:schemeClr val="accent6">
                               <a:lumMod val="60000"/>
@@ -14904,11 +17581,11 @@
                     <a:bodyPr/>
                     <a:lstStyle/>
                     <a:p>
-                      <a:pPr>
+                      <a:pPr algn="ctr">
                         <a:buNone/>
                       </a:pPr>
                       <a:r>
-                        <a:rPr lang="en-US" sz="2400">
+                        <a:rPr lang="en-US" sz="2400" dirty="0">
                           <a:solidFill>
                             <a:schemeClr val="accent6">
                               <a:lumMod val="60000"/>
@@ -14941,11 +17618,11 @@
                     <a:bodyPr/>
                     <a:lstStyle/>
                     <a:p>
-                      <a:pPr>
+                      <a:pPr algn="ctr">
                         <a:buNone/>
                       </a:pPr>
                       <a:r>
-                        <a:rPr lang="en-US" sz="2400">
+                        <a:rPr lang="en-US" sz="2400" dirty="0">
                           <a:solidFill>
                             <a:schemeClr val="accent6">
                               <a:lumMod val="60000"/>
@@ -14985,7 +17662,7 @@
                     <a:bodyPr/>
                     <a:lstStyle/>
                     <a:p>
-                      <a:pPr>
+                      <a:pPr algn="ctr">
                         <a:buNone/>
                       </a:pPr>
                       <a:r>
@@ -15022,7 +17699,7 @@
                     <a:bodyPr/>
                     <a:lstStyle/>
                     <a:p>
-                      <a:pPr>
+                      <a:pPr algn="ctr">
                         <a:buNone/>
                       </a:pPr>
                       <a:r>
@@ -15059,11 +17736,11 @@
                     <a:bodyPr/>
                     <a:lstStyle/>
                     <a:p>
-                      <a:pPr>
+                      <a:pPr algn="ctr">
                         <a:buNone/>
                       </a:pPr>
                       <a:r>
-                        <a:rPr lang="en-US" sz="2400">
+                        <a:rPr lang="en-US" sz="2400" dirty="0">
                           <a:solidFill>
                             <a:schemeClr val="accent6">
                               <a:lumMod val="60000"/>
@@ -15103,7 +17780,7 @@
                     <a:bodyPr/>
                     <a:lstStyle/>
                     <a:p>
-                      <a:pPr>
+                      <a:pPr algn="ctr">
                         <a:buNone/>
                       </a:pPr>
                       <a:r>
@@ -15140,11 +17817,11 @@
                     <a:bodyPr/>
                     <a:lstStyle/>
                     <a:p>
-                      <a:pPr>
+                      <a:pPr algn="ctr">
                         <a:buNone/>
                       </a:pPr>
                       <a:r>
-                        <a:rPr lang="en-US" sz="2400">
+                        <a:rPr lang="en-US" sz="2400" dirty="0">
                           <a:solidFill>
                             <a:schemeClr val="accent6">
                               <a:lumMod val="60000"/>
@@ -15177,11 +17854,11 @@
                     <a:bodyPr/>
                     <a:lstStyle/>
                     <a:p>
-                      <a:pPr>
+                      <a:pPr algn="ctr">
                         <a:buNone/>
                       </a:pPr>
                       <a:r>
-                        <a:rPr lang="en-US" sz="2400">
+                        <a:rPr lang="en-US" sz="2400" dirty="0">
                           <a:solidFill>
                             <a:schemeClr val="accent6">
                               <a:lumMod val="60000"/>
@@ -15221,7 +17898,7 @@
                     <a:bodyPr/>
                     <a:lstStyle/>
                     <a:p>
-                      <a:pPr>
+                      <a:pPr algn="ctr">
                         <a:buNone/>
                       </a:pPr>
                       <a:r>
@@ -15258,11 +17935,11 @@
                     <a:bodyPr/>
                     <a:lstStyle/>
                     <a:p>
-                      <a:pPr>
+                      <a:pPr algn="ctr">
                         <a:buNone/>
                       </a:pPr>
                       <a:r>
-                        <a:rPr lang="en-US" sz="2400">
+                        <a:rPr lang="en-US" sz="2400" dirty="0">
                           <a:solidFill>
                             <a:schemeClr val="accent6">
                               <a:lumMod val="60000"/>
@@ -15295,11 +17972,11 @@
                     <a:bodyPr/>
                     <a:lstStyle/>
                     <a:p>
-                      <a:pPr>
+                      <a:pPr algn="ctr">
                         <a:buNone/>
                       </a:pPr>
                       <a:r>
-                        <a:rPr lang="en-US" sz="2400">
+                        <a:rPr lang="en-US" sz="2400" dirty="0">
                           <a:solidFill>
                             <a:schemeClr val="accent6">
                               <a:lumMod val="60000"/>
@@ -15339,11 +18016,11 @@
                     <a:bodyPr/>
                     <a:lstStyle/>
                     <a:p>
-                      <a:pPr>
+                      <a:pPr algn="ctr">
                         <a:buNone/>
                       </a:pPr>
                       <a:r>
-                        <a:rPr lang="en-US" sz="2400">
+                        <a:rPr lang="en-US" sz="2400" dirty="0">
                           <a:solidFill>
                             <a:schemeClr val="accent6">
                               <a:lumMod val="60000"/>
@@ -15376,11 +18053,11 @@
                     <a:bodyPr/>
                     <a:lstStyle/>
                     <a:p>
-                      <a:pPr>
+                      <a:pPr algn="ctr">
                         <a:buNone/>
                       </a:pPr>
                       <a:r>
-                        <a:rPr lang="en-US" sz="2400">
+                        <a:rPr lang="en-US" sz="2400" dirty="0">
                           <a:solidFill>
                             <a:schemeClr val="accent6">
                               <a:lumMod val="60000"/>
@@ -15413,11 +18090,11 @@
                     <a:bodyPr/>
                     <a:lstStyle/>
                     <a:p>
-                      <a:pPr>
+                      <a:pPr algn="ctr">
                         <a:buNone/>
                       </a:pPr>
                       <a:r>
-                        <a:rPr lang="en-US" sz="2400">
+                        <a:rPr lang="en-US" sz="2400" dirty="0">
                           <a:solidFill>
                             <a:schemeClr val="accent6">
                               <a:lumMod val="60000"/>
@@ -15457,7 +18134,7 @@
                     <a:bodyPr/>
                     <a:lstStyle/>
                     <a:p>
-                      <a:pPr>
+                      <a:pPr algn="ctr">
                         <a:buNone/>
                       </a:pPr>
                       <a:r>
@@ -15494,11 +18171,11 @@
                     <a:bodyPr/>
                     <a:lstStyle/>
                     <a:p>
-                      <a:pPr>
+                      <a:pPr algn="ctr">
                         <a:buNone/>
                       </a:pPr>
                       <a:r>
-                        <a:rPr lang="en-US" sz="2400">
+                        <a:rPr lang="en-US" sz="2400" dirty="0">
                           <a:solidFill>
                             <a:schemeClr val="accent6">
                               <a:lumMod val="60000"/>
@@ -15531,7 +18208,7 @@
                     <a:bodyPr/>
                     <a:lstStyle/>
                     <a:p>
-                      <a:pPr>
+                      <a:pPr algn="ctr">
                         <a:buNone/>
                       </a:pPr>
                       <a:r>
@@ -15586,7 +18263,7 @@
 </p:sld>
 </file>
 
-<file path=ppt/slides/slide7.xml><?xml version="1.0" encoding="utf-8"?>
+<file path=ppt/slides/slide8.xml><?xml version="1.0" encoding="utf-8"?>
 <p:sld xmlns:a="http://schemas.openxmlformats.org/drawingml/2006/main" xmlns:r="http://schemas.openxmlformats.org/officeDocument/2006/relationships" xmlns:p="http://schemas.openxmlformats.org/presentationml/2006/main">
   <p:cSld>
     <p:spTree>
